--- a/docs/Bao_Cao_Giua_Ky_DT05_Final.pptx
+++ b/docs/Bao_Cao_Giua_Ky_DT05_Final.pptx
@@ -19,6 +19,7 @@
     <p:sldId id="267" r:id="rId18"/>
     <p:sldId id="268" r:id="rId19"/>
     <p:sldId id="269" r:id="rId20"/>
+    <p:sldId id="270" r:id="rId21"/>
   </p:sldIdLst>
   <p:sldSz cx="12191695" cy="6858000" type="screen4x3"/>
   <p:notesSz cx="6858000" cy="9144000"/>
@@ -5642,7 +5643,7 @@
             <a:avLst/>
           </a:prstGeom>
           <a:solidFill>
-            <a:srgbClr val="FFFFFF"/>
+            <a:srgbClr val="0F172A"/>
           </a:solidFill>
           <a:ln>
             <a:noFill/>
@@ -5672,183 +5673,14 @@
       </p:sp>
       <p:sp>
         <p:nvSpPr>
-          <p:cNvPr id="3" name="Rounded Rectangle 2"/>
-          <p:cNvSpPr/>
-          <p:nvPr/>
-        </p:nvSpPr>
-        <p:spPr>
-          <a:xfrm>
-            <a:off x="731520" y="365760"/>
-            <a:ext cx="4114800" cy="320040"/>
-          </a:xfrm>
-          <a:prstGeom prst="roundRect">
-            <a:avLst/>
-          </a:prstGeom>
-          <a:solidFill>
-            <a:srgbClr val="EFF6FF"/>
-          </a:solidFill>
-          <a:ln w="12700">
-            <a:solidFill>
-              <a:srgbClr val="BFDBFE"/>
-            </a:solidFill>
-          </a:ln>
-        </p:spPr>
-        <p:style>
-          <a:lnRef idx="1">
-            <a:schemeClr val="accent1"/>
-          </a:lnRef>
-          <a:fillRef idx="3">
-            <a:schemeClr val="accent1"/>
-          </a:fillRef>
-          <a:effectRef idx="2">
-            <a:schemeClr val="accent1"/>
-          </a:effectRef>
-          <a:fontRef idx="minor">
-            <a:schemeClr val="lt1"/>
-          </a:fontRef>
-        </p:style>
-        <p:txBody>
-          <a:bodyPr rtlCol="0" anchor="ctr" wrap="square"/>
-          <a:lstStyle/>
-          <a:p>
-            <a:pPr algn="ctr">
-              <a:defRPr sz="1000" b="1">
-                <a:solidFill>
-                  <a:srgbClr val="1D4ED8"/>
-                </a:solidFill>
-              </a:defRPr>
-            </a:pPr>
-            <a:r>
-              <a:t>THÍ NGHIỆM MINH HỌA ĐỘC LẬP DO SINH VIÊN THIẾT KẾ</a:t>
-            </a:r>
-          </a:p>
-        </p:txBody>
-      </p:sp>
-      <p:sp>
-        <p:nvSpPr>
-          <p:cNvPr id="4" name="TextBox 3"/>
+          <p:cNvPr id="3" name="TextBox 2"/>
           <p:cNvSpPr txBox="1"/>
           <p:nvPr/>
         </p:nvSpPr>
         <p:spPr>
           <a:xfrm>
-            <a:off x="731520" y="749808"/>
-            <a:ext cx="10698480" cy="502920"/>
-          </a:xfrm>
-          <a:prstGeom prst="rect">
-            <a:avLst/>
-          </a:prstGeom>
-          <a:noFill/>
-        </p:spPr>
-        <p:txBody>
-          <a:bodyPr wrap="square" lIns="0" rIns="0" tIns="0" bIns="0">
-            <a:spAutoFit/>
-          </a:bodyPr>
-          <a:lstStyle/>
-          <a:p>
-            <a:pPr>
-              <a:defRPr sz="2100" b="1">
-                <a:solidFill>
-                  <a:srgbClr val="0F172A"/>
-                </a:solidFill>
-              </a:defRPr>
-            </a:pPr>
-            <a:r>
-              <a:t>DEMO THỰC NGHIỆM ĐỐI KHÁNG: RED TEAM VS BLUE TEAM</a:t>
-            </a:r>
-          </a:p>
-        </p:txBody>
-      </p:sp>
-      <p:sp>
-        <p:nvSpPr>
-          <p:cNvPr id="5" name="TextBox 4"/>
-          <p:cNvSpPr txBox="1"/>
-          <p:nvPr/>
-        </p:nvSpPr>
-        <p:spPr>
-          <a:xfrm>
-            <a:off x="731520" y="1261872"/>
-            <a:ext cx="10698480" cy="320040"/>
-          </a:xfrm>
-          <a:prstGeom prst="rect">
-            <a:avLst/>
-          </a:prstGeom>
-          <a:noFill/>
-        </p:spPr>
-        <p:txBody>
-          <a:bodyPr wrap="square" lIns="0" rIns="0" tIns="0" bIns="0">
-            <a:spAutoFit/>
-          </a:bodyPr>
-          <a:lstStyle/>
-          <a:p>
-            <a:pPr>
-              <a:defRPr sz="1200">
-                <a:solidFill>
-                  <a:srgbClr val="475569"/>
-                </a:solidFill>
-              </a:defRPr>
-            </a:pPr>
-            <a:r>
-              <a:t>Diễn tập an ninh mạng trực quan minh họa các luận điểm đối thủ trên tập dữ liệu thực tế</a:t>
-            </a:r>
-          </a:p>
-        </p:txBody>
-      </p:sp>
-      <p:sp>
-        <p:nvSpPr>
-          <p:cNvPr id="6" name="Rounded Rectangle 5"/>
-          <p:cNvSpPr/>
-          <p:nvPr/>
-        </p:nvSpPr>
-        <p:spPr>
-          <a:xfrm>
-            <a:off x="731520" y="1691640"/>
-            <a:ext cx="5212080" cy="4389120"/>
-          </a:xfrm>
-          <a:prstGeom prst="roundRect">
-            <a:avLst/>
-          </a:prstGeom>
-          <a:solidFill>
-            <a:srgbClr val="F8FAFC"/>
-          </a:solidFill>
-          <a:ln w="12700">
-            <a:solidFill>
-              <a:srgbClr val="BFDBFE"/>
-            </a:solidFill>
-          </a:ln>
-        </p:spPr>
-        <p:style>
-          <a:lnRef idx="1">
-            <a:schemeClr val="accent1"/>
-          </a:lnRef>
-          <a:fillRef idx="3">
-            <a:schemeClr val="accent1"/>
-          </a:fillRef>
-          <a:effectRef idx="2">
-            <a:schemeClr val="accent1"/>
-          </a:effectRef>
-          <a:fontRef idx="minor">
-            <a:schemeClr val="lt1"/>
-          </a:fontRef>
-        </p:style>
-        <p:txBody>
-          <a:bodyPr rtlCol="0" anchor="ctr"/>
-          <a:lstStyle/>
-          <a:p>
-            <a:pPr algn="ctr"/>
-          </a:p>
-        </p:txBody>
-      </p:sp>
-      <p:sp>
-        <p:nvSpPr>
-          <p:cNvPr id="7" name="TextBox 6"/>
-          <p:cNvSpPr txBox="1"/>
-          <p:nvPr/>
-        </p:nvSpPr>
-        <p:spPr>
-          <a:xfrm>
-            <a:off x="914400" y="1828800"/>
-            <a:ext cx="4846320" cy="4114800"/>
+            <a:off x="1371600" y="2011680"/>
+            <a:ext cx="9448495" cy="2743200"/>
           </a:xfrm>
           <a:prstGeom prst="rect">
             <a:avLst/>
@@ -5861,359 +5693,60 @@
           </a:bodyPr>
           <a:lstStyle/>
           <a:p>
-            <a:pPr>
+            <a:pPr algn="ctr">
               <a:defRPr sz="1300" b="1">
                 <a:solidFill>
-                  <a:srgbClr val="1E40AF"/>
-                </a:solidFill>
-              </a:defRPr>
-            </a:pPr>
-            <a:r>
-              <a:t>1. Kiến Trúc Diễn Tập Đối Kháng Trực Quan</a:t>
-            </a:r>
-          </a:p>
-          <a:p>
-            <a:pPr>
+                  <a:srgbClr val="38BDF8"/>
+                </a:solidFill>
+              </a:defRPr>
+            </a:pPr>
+            <a:r>
+              <a:t>DIỄN TẬP AN NINH MẠNG TRỰC TIẾP</a:t>
+            </a:r>
+          </a:p>
+          <a:p>
+            <a:pPr algn="ctr">
               <a:spcBef>
-                <a:spcPts val="600"/>
+                <a:spcPts val="1600"/>
               </a:spcBef>
-              <a:defRPr sz="950">
-                <a:solidFill>
-                  <a:srgbClr val="1E293B"/>
-                </a:solidFill>
-                <a:latin typeface="Consolas"/>
-              </a:defRPr>
-            </a:pPr>
-            <a:r>
-              <a:t>[BLUE TEAM - Cổng 8080]        [RED TEAM - Cổng 8081]</a:t>
-            </a:r>
-            <a:br/>
-            <a:r>
-              <a:t>- Giám sát kaggle_dataset (2.483 tệp)  - 6 Vector tấn công đối kháng</a:t>
-            </a:r>
-            <a:br/>
-            <a:r>
-              <a:t>- Quét mốc tin cậy ban đầu H_0         - Sửa tệp, CRC32, Dolev-Yao</a:t>
-            </a:r>
-            <a:br/>
-            <a:r>
-              <a:t>- Phát hiện sai lệch &amp; Dirty Path     - Phục hồi an toàn (Rollback)</a:t>
-            </a:r>
-          </a:p>
-          <a:p>
-            <a:pPr>
+              <a:defRPr sz="6400" b="1">
+                <a:solidFill>
+                  <a:srgbClr val="FFFFFF"/>
+                </a:solidFill>
+              </a:defRPr>
+            </a:pPr>
+            <a:r>
+              <a:t>DEMO</a:t>
+            </a:r>
+          </a:p>
+          <a:p>
+            <a:pPr algn="ctr">
               <a:spcBef>
-                <a:spcPts val="500"/>
+                <a:spcPts val="1600"/>
               </a:spcBef>
-            </a:pPr>
-            <a:r>
-              <a:rPr b="1" sz="1050">
-                <a:solidFill>
-                  <a:srgbClr val="1E293B"/>
-                </a:solidFill>
-              </a:rPr>
-              <a:t>• Kịch bản 1 (CRC32 Forge): </a:t>
-            </a:r>
-            <a:r>
-              <a:rPr sz="1000">
-                <a:solidFill>
-                  <a:srgbClr val="475569"/>
-                </a:solidFill>
-              </a:rPr>
-              <a:t>Red Team sửa giao dịch, bù 4 byte GF(2) qua mặt CRC32; Blue Team dùng SHA-256 bắt quả tang tức thì.</a:t>
-            </a:r>
-          </a:p>
-          <a:p>
-            <a:pPr>
+              <a:defRPr sz="1500" b="1">
+                <a:solidFill>
+                  <a:srgbClr val="E2E8F0"/>
+                </a:solidFill>
+              </a:defRPr>
+            </a:pPr>
+            <a:r>
+              <a:t>HỆ THỐNG GIÁM SÁT TOÀN VẸN TỆP &amp; MÔ HÌNH ĐỐI KHÁNG RED TEAM VS BLUE TEAM</a:t>
+            </a:r>
+          </a:p>
+          <a:p>
+            <a:pPr algn="ctr">
               <a:spcBef>
-                <a:spcPts val="500"/>
+                <a:spcPts val="800"/>
               </a:spcBef>
-            </a:pPr>
-            <a:r>
-              <a:rPr b="1" sz="1050">
-                <a:solidFill>
-                  <a:srgbClr val="1E293B"/>
-                </a:solidFill>
-              </a:rPr>
-              <a:t>• Kịch bản 2 (In-place Tamper): </a:t>
-            </a:r>
-            <a:r>
-              <a:rPr sz="1000">
-                <a:solidFill>
-                  <a:srgbClr val="475569"/>
-                </a:solidFill>
-              </a:rPr>
-              <a:t>Sửa nội dung tệp; Blue Team phát hiện FILE_MODIFIED và định vị chính xác qua Dirty Path O(log N).</a:t>
-            </a:r>
-          </a:p>
-          <a:p>
-            <a:pPr>
-              <a:spcBef>
-                <a:spcPts val="500"/>
-              </a:spcBef>
-            </a:pPr>
-            <a:r>
-              <a:rPr b="1" sz="1050">
-                <a:solidFill>
-                  <a:srgbClr val="1E293B"/>
-                </a:solidFill>
-              </a:rPr>
-              <a:t>• Kịch bản 3 (Dolev-Yao MitM): </a:t>
-            </a:r>
-            <a:r>
-              <a:rPr sz="1000">
-                <a:solidFill>
-                  <a:srgbClr val="475569"/>
-                </a:solidFill>
-              </a:rPr>
-              <a:t>Đánh tráo Merkle Proof trên đường truyền mạng; bộ xác thực từ chối 100% chữ ký bằng chứng.</a:t>
-            </a:r>
-          </a:p>
-          <a:p>
-            <a:pPr>
-              <a:spcBef>
-                <a:spcPts val="500"/>
-              </a:spcBef>
-            </a:pPr>
-            <a:r>
-              <a:rPr b="1" sz="1050">
-                <a:solidFill>
-                  <a:srgbClr val="1E293B"/>
-                </a:solidFill>
-              </a:rPr>
-              <a:t>• Khôi phục an toàn (Rollback): </a:t>
-            </a:r>
-            <a:r>
-              <a:rPr sz="1000">
-                <a:solidFill>
-                  <a:srgbClr val="475569"/>
-                </a:solidFill>
-              </a:rPr>
-              <a:t>Nút 'ROLLBACK ALL' phục hồi 100% nguyên trạng từ thư mục an toàn .adversary_backups/.</a:t>
-            </a:r>
-          </a:p>
-        </p:txBody>
-      </p:sp>
-      <p:sp>
-        <p:nvSpPr>
-          <p:cNvPr id="8" name="Rounded Rectangle 7"/>
-          <p:cNvSpPr/>
-          <p:nvPr/>
-        </p:nvSpPr>
-        <p:spPr>
-          <a:xfrm>
-            <a:off x="6217920" y="1691640"/>
-            <a:ext cx="5212080" cy="4389120"/>
-          </a:xfrm>
-          <a:prstGeom prst="roundRect">
-            <a:avLst/>
-          </a:prstGeom>
-          <a:solidFill>
-            <a:srgbClr val="ECFDF5"/>
-          </a:solidFill>
-          <a:ln w="12700">
-            <a:solidFill>
-              <a:srgbClr val="A7F3D0"/>
-            </a:solidFill>
-          </a:ln>
-        </p:spPr>
-        <p:style>
-          <a:lnRef idx="1">
-            <a:schemeClr val="accent1"/>
-          </a:lnRef>
-          <a:fillRef idx="3">
-            <a:schemeClr val="accent1"/>
-          </a:fillRef>
-          <a:effectRef idx="2">
-            <a:schemeClr val="accent1"/>
-          </a:effectRef>
-          <a:fontRef idx="minor">
-            <a:schemeClr val="lt1"/>
-          </a:fontRef>
-        </p:style>
-        <p:txBody>
-          <a:bodyPr rtlCol="0" anchor="ctr"/>
-          <a:lstStyle/>
-          <a:p>
-            <a:pPr algn="ctr"/>
-          </a:p>
-        </p:txBody>
-      </p:sp>
-      <p:sp>
-        <p:nvSpPr>
-          <p:cNvPr id="9" name="TextBox 8"/>
-          <p:cNvSpPr txBox="1"/>
-          <p:nvPr/>
-        </p:nvSpPr>
-        <p:spPr>
-          <a:xfrm>
-            <a:off x="6400800" y="1828800"/>
-            <a:ext cx="4846320" cy="4114800"/>
-          </a:xfrm>
-          <a:prstGeom prst="rect">
-            <a:avLst/>
-          </a:prstGeom>
-          <a:noFill/>
-        </p:spPr>
-        <p:txBody>
-          <a:bodyPr wrap="square">
-            <a:spAutoFit/>
-          </a:bodyPr>
-          <a:lstStyle/>
-          <a:p>
-            <a:pPr>
-              <a:defRPr sz="1300" b="1">
-                <a:solidFill>
-                  <a:srgbClr val="059669"/>
-                </a:solidFill>
-              </a:defRPr>
-            </a:pPr>
-            <a:r>
-              <a:t>2. Bằng Chứng Chạy Thật &amp; Giới Hạn Thực Nghiệm</a:t>
-            </a:r>
-          </a:p>
-          <a:p>
-            <a:pPr>
-              <a:spcBef>
-                <a:spcPts val="600"/>
-              </a:spcBef>
-              <a:defRPr sz="900">
-                <a:solidFill>
-                  <a:srgbClr val="0F172A"/>
-                </a:solidFill>
-                <a:latin typeface="Consolas"/>
-              </a:defRPr>
-            </a:pPr>
-            <a:r>
-              <a:t>[LOG THỰC TẾ: python -m src.proposed_model.security_games]</a:t>
-            </a:r>
-            <a:br/>
-            <a:r>
-              <a:t>[*] Thư mục kiểm định : kaggle_dataset (2,483 tệp tin)</a:t>
-            </a:r>
-            <a:br/>
-            <a:r>
-              <a:t>[*] PPT Integrity Game: Phát hiện 100/100 phép thử (Tỷ lệ = 0.0)</a:t>
-            </a:r>
-            <a:br/>
-            <a:r>
-              <a:t>[*] Dolev-Yao Network : Chặn đứng 3/3 kịch bản (Swap, Tamper, Replay)</a:t>
-            </a:r>
-            <a:br/>
-            <a:r>
-              <a:t>[*] Consistency Proof : Xác thực nhất quán chỉ-thêm RFC 6962</a:t>
-            </a:r>
-            <a:br/>
-            <a:r>
-              <a:t>[*] Tuyết lở SAC Monte Carlo: 127.28/256 bit biến đổi (~49.72%)</a:t>
-            </a:r>
-            <a:br/>
-            <a:r>
-              <a:t>[*] Thời gian tổng cộng: 2,885.53 ms (Đạt chuẩn 7/7 thí nghiệm)</a:t>
-            </a:r>
-          </a:p>
-          <a:p>
-            <a:pPr>
-              <a:spcBef>
-                <a:spcPts val="500"/>
-              </a:spcBef>
-            </a:pPr>
-            <a:r>
-              <a:rPr b="1" sz="1050">
-                <a:solidFill>
-                  <a:srgbClr val="1E293B"/>
-                </a:solidFill>
-              </a:rPr>
-              <a:t>• Bản chất minh họa: </a:t>
-            </a:r>
-            <a:r>
-              <a:rPr sz="1000">
-                <a:solidFill>
-                  <a:srgbClr val="475569"/>
-                </a:solidFill>
-              </a:rPr>
-              <a:t>Thực nghiệm được thiết kế độc lập nhằm kiểm chứng tính đúng đắn logic của các khái niệm; không phải là việc chạy lại số liệu của tác giả.</a:t>
-            </a:r>
-          </a:p>
-          <a:p>
-            <a:pPr>
-              <a:spcBef>
-                <a:spcPts val="500"/>
-              </a:spcBef>
-            </a:pPr>
-            <a:r>
-              <a:rPr b="1" sz="1050">
-                <a:solidFill>
-                  <a:srgbClr val="1E293B"/>
-                </a:solidFill>
-              </a:rPr>
-              <a:t>• Môi trường kiểm thử: </a:t>
-            </a:r>
-            <a:r>
-              <a:rPr sz="1000">
-                <a:solidFill>
-                  <a:srgbClr val="475569"/>
-                </a:solidFill>
-              </a:rPr>
-              <a:t>Đo đạc trên máy tính cá nhân (Intel Core i7, Windows 11). Các phép đo thời gian vi mô chịu ảnh hưởng của jitter hệ điều hành.</a:t>
-            </a:r>
-          </a:p>
-          <a:p>
-            <a:pPr>
-              <a:spcBef>
-                <a:spcPts val="500"/>
-              </a:spcBef>
-            </a:pPr>
-            <a:r>
-              <a:rPr b="1" sz="1050">
-                <a:solidFill>
-                  <a:srgbClr val="1E293B"/>
-                </a:solidFill>
-              </a:rPr>
-              <a:t>• Hướng dẫn chạy: </a:t>
-            </a:r>
-            <a:r>
-              <a:rPr sz="1000">
-                <a:solidFill>
-                  <a:srgbClr val="475569"/>
-                </a:solidFill>
-              </a:rPr>
-              <a:t>Chi tiết lệnh chạy và các bước thao tác màn hình kép được hướng dẫn trong file MIDTERM_DEMO.md.</a:t>
-            </a:r>
-          </a:p>
-        </p:txBody>
-      </p:sp>
-      <p:sp>
-        <p:nvSpPr>
-          <p:cNvPr id="10" name="TextBox 9"/>
-          <p:cNvSpPr txBox="1"/>
-          <p:nvPr/>
-        </p:nvSpPr>
-        <p:spPr>
-          <a:xfrm>
-            <a:off x="731520" y="6217920"/>
-            <a:ext cx="10698480" cy="365760"/>
-          </a:xfrm>
-          <a:prstGeom prst="rect">
-            <a:avLst/>
-          </a:prstGeom>
-          <a:noFill/>
-        </p:spPr>
-        <p:txBody>
-          <a:bodyPr wrap="none">
-            <a:spAutoFit/>
-          </a:bodyPr>
-          <a:lstStyle/>
-          <a:p>
-            <a:pPr>
-              <a:defRPr sz="1000" i="1">
-                <a:solidFill>
-                  <a:srgbClr val="64748B"/>
-                </a:solidFill>
-              </a:defRPr>
-            </a:pPr>
-            <a:r>
-              <a:t>Số liệu thực tế đo đạc trực tiếp từ mã nguồn đề tài DT005; xem hướng dẫn chạy tại MIDTERM_DEMO.md.</a:t>
+              <a:defRPr sz="1100" i="1">
+                <a:solidFill>
+                  <a:srgbClr val="94A3B8"/>
+                </a:solidFill>
+              </a:defRPr>
+            </a:pPr>
+            <a:r>
+              <a:t>Minh họa thực nghiệm các luận điểm lý thuyết: Can thiệp dữ liệu, Nhập nhằng nút lá RFC 6962, và So sánh chuỗi thời gian hằng số</a:t>
             </a:r>
           </a:p>
         </p:txBody>
@@ -6328,7 +5861,7 @@
               </a:defRPr>
             </a:pPr>
             <a:r>
-              <a:t>SECTION 7 — KẾT LUẬN &amp; NGUỒN THAM CHIẾU HỌC THUẬT</a:t>
+              <a:t>THÍ NGHIỆM MINH HỌA ĐỘC LẬP DO SINH VIÊN THIẾT KẾ</a:t>
             </a:r>
           </a:p>
         </p:txBody>
@@ -6363,7 +5896,7 @@
               </a:defRPr>
             </a:pPr>
             <a:r>
-              <a:t>TỔNG KẾT BÁO CÁO GIỮA KỲ &amp; TÀI LIỆU THAM KHẢO</a:t>
+              <a:t>KẾT QUẢ THỰC NGHIỆM MINH HỌA ĐỘC LẬP: RED TEAM VS BLUE TEAM</a:t>
             </a:r>
           </a:p>
         </p:txBody>
@@ -6398,7 +5931,7 @@
               </a:defRPr>
             </a:pPr>
             <a:r>
-              <a:t>Tổng kết các luận điểm chính của Halpin, bài học thiết kế an ninh và danh mục tài liệu</a:t>
+              <a:t>Diễn tập an ninh mạng trực quan minh họa các luận điểm đối thủ trên tập dữ liệu thực tế</a:t>
             </a:r>
           </a:p>
         </p:txBody>
@@ -6478,76 +6011,127 @@
               </a:defRPr>
             </a:pPr>
             <a:r>
-              <a:t>1. Tổng Kết Thông Điệp Học Thuật Của Bài Báo</a:t>
+              <a:t>1. Kiến Trúc Diễn Tập Đối Kháng Trực Quan</a:t>
             </a:r>
           </a:p>
           <a:p>
             <a:pPr>
               <a:spcBef>
-                <a:spcPts val="800"/>
+                <a:spcPts val="600"/>
               </a:spcBef>
-            </a:pPr>
-            <a:r>
-              <a:rPr b="1" sz="1100">
+              <a:defRPr sz="950">
                 <a:solidFill>
                   <a:srgbClr val="1E293B"/>
                 </a:solidFill>
-              </a:rPr>
-              <a:t>• Bài học từ Halpin: </a:t>
-            </a:r>
-            <a:r>
-              <a:rPr sz="1050">
+                <a:latin typeface="Consolas"/>
+              </a:defRPr>
+            </a:pPr>
+            <a:r>
+              <a:t>[BLUE TEAM - Cổng 8080]        [RED TEAM - Cổng 8081]</a:t>
+            </a:r>
+            <a:br/>
+            <a:r>
+              <a:t>- Giám sát kaggle_dataset (2.483 tệp)  - 6 Vector tấn công đối kháng</a:t>
+            </a:r>
+            <a:br/>
+            <a:r>
+              <a:t>- Quét mốc tin cậy ban đầu H_0         - Sửa tệp, CRC32, Dolev-Yao</a:t>
+            </a:r>
+            <a:br/>
+            <a:r>
+              <a:t>- Phát hiện sai lệch &amp; Dirty Path     - Phục hồi an toàn (Rollback)</a:t>
+            </a:r>
+          </a:p>
+          <a:p>
+            <a:pPr>
+              <a:spcBef>
+                <a:spcPts val="500"/>
+              </a:spcBef>
+            </a:pPr>
+            <a:r>
+              <a:rPr b="1" sz="1050">
+                <a:solidFill>
+                  <a:srgbClr val="1E293B"/>
+                </a:solidFill>
+              </a:rPr>
+              <a:t>• Kịch bản 1 (CRC32 Forge): </a:t>
+            </a:r>
+            <a:r>
+              <a:rPr sz="1000">
                 <a:solidFill>
                   <a:srgbClr val="475569"/>
                 </a:solidFill>
               </a:rPr>
-              <a:t>Mật mã học không chỉ là toán học thuần túy trên giấy tờ. Các hệ thống an toàn trong thế giới thực phải nhận thức rõ khoảng cách giữa mô hình trừu tượng và thực tế triển khai (kênh kề, siêu dữ liệu, chuỗi cung ứng, thể chế).</a:t>
+              <a:t>Red Team sửa giao dịch, bù 4 byte GF(2) qua mặt CRC32; Blue Team dùng SHA-256 bắt quả tang tức thì.</a:t>
             </a:r>
           </a:p>
           <a:p>
             <a:pPr>
               <a:spcBef>
-                <a:spcPts val="800"/>
+                <a:spcPts val="500"/>
               </a:spcBef>
             </a:pPr>
             <a:r>
-              <a:rPr b="1" sz="1100">
+              <a:rPr b="1" sz="1050">
                 <a:solidFill>
                   <a:srgbClr val="1E293B"/>
                 </a:solidFill>
               </a:rPr>
-              <a:t>• Đóng góp của Halpin: </a:t>
-            </a:r>
-            <a:r>
-              <a:rPr sz="1050">
+              <a:t>• Kịch bản 2 (In-place Tamper): </a:t>
+            </a:r>
+            <a:r>
+              <a:rPr sz="1000">
                 <a:solidFill>
                   <a:srgbClr val="475569"/>
                 </a:solidFill>
               </a:rPr>
-              <a:t>Đặt nền móng triết học cho mật mã học, phân tích nhận thức luận về kẻ thù và vạch ra 4 hướng nghiên cứu mở nhằm mở rộng mật mã thành một khoa học an ninh hoàn chỉnh.</a:t>
+              <a:t>Sửa nội dung tệp; Blue Team phát hiện FILE_MODIFIED và định vị chính xác qua Dirty Path O(log N).</a:t>
             </a:r>
           </a:p>
           <a:p>
             <a:pPr>
               <a:spcBef>
-                <a:spcPts val="800"/>
+                <a:spcPts val="500"/>
               </a:spcBef>
             </a:pPr>
             <a:r>
-              <a:rPr b="1" sz="1100">
+              <a:rPr b="1" sz="1050">
                 <a:solidFill>
                   <a:srgbClr val="1E293B"/>
                 </a:solidFill>
               </a:rPr>
-              <a:t>• Hoàn thành mục tiêu giữa kỳ: </a:t>
-            </a:r>
-            <a:r>
-              <a:rPr sz="1050">
+              <a:t>• Kịch bản 3 (Dolev-Yao MitM): </a:t>
+            </a:r>
+            <a:r>
+              <a:rPr sz="1000">
                 <a:solidFill>
                   <a:srgbClr val="475569"/>
                 </a:solidFill>
               </a:rPr>
-              <a:t>Nhóm sinh viên DT005 đã thẩm định học thuật sâu sắc toàn văn bài báo gốc (17 trang PDF) và xây dựng thành công bộ thí nghiệm minh họa thực nghiệm sống động phục vụ báo cáo hội đồng.</a:t>
+              <a:t>Đánh tráo Merkle Proof trên đường truyền mạng; bộ xác thực từ chối 100% chữ ký bằng chứng.</a:t>
+            </a:r>
+          </a:p>
+          <a:p>
+            <a:pPr>
+              <a:spcBef>
+                <a:spcPts val="500"/>
+              </a:spcBef>
+            </a:pPr>
+            <a:r>
+              <a:rPr b="1" sz="1050">
+                <a:solidFill>
+                  <a:srgbClr val="1E293B"/>
+                </a:solidFill>
+              </a:rPr>
+              <a:t>• Khôi phục an toàn (Rollback): </a:t>
+            </a:r>
+            <a:r>
+              <a:rPr sz="1000">
+                <a:solidFill>
+                  <a:srgbClr val="475569"/>
+                </a:solidFill>
+              </a:rPr>
+              <a:t>Nút 'ROLLBACK ALL' phục hồi 100% nguyên trạng từ thư mục an toàn .adversary_backups/.</a:t>
             </a:r>
           </a:p>
         </p:txBody>
@@ -6562,6 +6146,415 @@
           <a:xfrm>
             <a:off x="6217920" y="1691640"/>
             <a:ext cx="5212080" cy="4389120"/>
+          </a:xfrm>
+          <a:prstGeom prst="roundRect">
+            <a:avLst/>
+          </a:prstGeom>
+          <a:solidFill>
+            <a:srgbClr val="ECFDF5"/>
+          </a:solidFill>
+          <a:ln w="12700">
+            <a:solidFill>
+              <a:srgbClr val="A7F3D0"/>
+            </a:solidFill>
+          </a:ln>
+        </p:spPr>
+        <p:style>
+          <a:lnRef idx="1">
+            <a:schemeClr val="accent1"/>
+          </a:lnRef>
+          <a:fillRef idx="3">
+            <a:schemeClr val="accent1"/>
+          </a:fillRef>
+          <a:effectRef idx="2">
+            <a:schemeClr val="accent1"/>
+          </a:effectRef>
+          <a:fontRef idx="minor">
+            <a:schemeClr val="lt1"/>
+          </a:fontRef>
+        </p:style>
+        <p:txBody>
+          <a:bodyPr rtlCol="0" anchor="ctr"/>
+          <a:lstStyle/>
+          <a:p>
+            <a:pPr algn="ctr"/>
+          </a:p>
+        </p:txBody>
+      </p:sp>
+      <p:sp>
+        <p:nvSpPr>
+          <p:cNvPr id="9" name="TextBox 8"/>
+          <p:cNvSpPr txBox="1"/>
+          <p:nvPr/>
+        </p:nvSpPr>
+        <p:spPr>
+          <a:xfrm>
+            <a:off x="6400800" y="1828800"/>
+            <a:ext cx="4846320" cy="4114800"/>
+          </a:xfrm>
+          <a:prstGeom prst="rect">
+            <a:avLst/>
+          </a:prstGeom>
+          <a:noFill/>
+        </p:spPr>
+        <p:txBody>
+          <a:bodyPr wrap="square">
+            <a:spAutoFit/>
+          </a:bodyPr>
+          <a:lstStyle/>
+          <a:p>
+            <a:pPr>
+              <a:defRPr sz="1300" b="1">
+                <a:solidFill>
+                  <a:srgbClr val="059669"/>
+                </a:solidFill>
+              </a:defRPr>
+            </a:pPr>
+            <a:r>
+              <a:t>2. Bằng Chứng Chạy Thật &amp; Giới Hạn Thực Nghiệm</a:t>
+            </a:r>
+          </a:p>
+          <a:p>
+            <a:pPr>
+              <a:spcBef>
+                <a:spcPts val="600"/>
+              </a:spcBef>
+              <a:defRPr sz="900">
+                <a:solidFill>
+                  <a:srgbClr val="0F172A"/>
+                </a:solidFill>
+                <a:latin typeface="Consolas"/>
+              </a:defRPr>
+            </a:pPr>
+            <a:r>
+              <a:t>[LOG THỰC TẾ: python -m src.proposed_model.security_games]</a:t>
+            </a:r>
+            <a:br/>
+            <a:r>
+              <a:t>[*] Thư mục kiểm định : kaggle_dataset (2,483 tệp tin)</a:t>
+            </a:r>
+            <a:br/>
+            <a:r>
+              <a:t>[*] PPT Integrity Game: Phát hiện 100/100 phép thử (Tỷ lệ = 0.0)</a:t>
+            </a:r>
+            <a:br/>
+            <a:r>
+              <a:t>[*] Dolev-Yao Network : Chặn đứng 3/3 kịch bản (Swap, Tamper, Replay)</a:t>
+            </a:r>
+            <a:br/>
+            <a:r>
+              <a:t>[*] Consistency Proof : Xác thực nhất quán chỉ-thêm RFC 6962</a:t>
+            </a:r>
+            <a:br/>
+            <a:r>
+              <a:t>[*] Tuyết lở SAC Monte Carlo: 128.00/256 bit biến đổi (~50.00%)</a:t>
+            </a:r>
+            <a:br/>
+            <a:r>
+              <a:t>[*] Thời gian tổng cộng: 2,885.05 ms (Đạt chuẩn 7/7 thí nghiệm)</a:t>
+            </a:r>
+          </a:p>
+          <a:p>
+            <a:pPr>
+              <a:spcBef>
+                <a:spcPts val="500"/>
+              </a:spcBef>
+            </a:pPr>
+            <a:r>
+              <a:rPr b="1" sz="1050">
+                <a:solidFill>
+                  <a:srgbClr val="1E293B"/>
+                </a:solidFill>
+              </a:rPr>
+              <a:t>• Bản chất minh họa: </a:t>
+            </a:r>
+            <a:r>
+              <a:rPr sz="1000">
+                <a:solidFill>
+                  <a:srgbClr val="475569"/>
+                </a:solidFill>
+              </a:rPr>
+              <a:t>Thực nghiệm được thiết kế độc lập nhằm kiểm chứng tính đúng đắn logic của các khái niệm; không phải là việc chạy lại số liệu của tác giả.</a:t>
+            </a:r>
+          </a:p>
+          <a:p>
+            <a:pPr>
+              <a:spcBef>
+                <a:spcPts val="500"/>
+              </a:spcBef>
+            </a:pPr>
+            <a:r>
+              <a:rPr b="1" sz="1050">
+                <a:solidFill>
+                  <a:srgbClr val="1E293B"/>
+                </a:solidFill>
+              </a:rPr>
+              <a:t>• Môi trường kiểm thử: </a:t>
+            </a:r>
+            <a:r>
+              <a:rPr sz="1000">
+                <a:solidFill>
+                  <a:srgbClr val="475569"/>
+                </a:solidFill>
+              </a:rPr>
+              <a:t>Đo đạc trên máy tính cá nhân (Intel Core i7, Windows 11). Các phép đo thời gian vi mô chịu ảnh hưởng của jitter hệ điều hành.</a:t>
+            </a:r>
+          </a:p>
+          <a:p>
+            <a:pPr>
+              <a:spcBef>
+                <a:spcPts val="500"/>
+              </a:spcBef>
+            </a:pPr>
+            <a:r>
+              <a:rPr b="1" sz="1050">
+                <a:solidFill>
+                  <a:srgbClr val="1E293B"/>
+                </a:solidFill>
+              </a:rPr>
+              <a:t>• Hướng dẫn chạy: </a:t>
+            </a:r>
+            <a:r>
+              <a:rPr sz="1000">
+                <a:solidFill>
+                  <a:srgbClr val="475569"/>
+                </a:solidFill>
+              </a:rPr>
+              <a:t>Chi tiết lệnh chạy và các bước thao tác màn hình kép được hướng dẫn trong file MIDTERM_DEMO.md.</a:t>
+            </a:r>
+          </a:p>
+        </p:txBody>
+      </p:sp>
+      <p:sp>
+        <p:nvSpPr>
+          <p:cNvPr id="10" name="TextBox 9"/>
+          <p:cNvSpPr txBox="1"/>
+          <p:nvPr/>
+        </p:nvSpPr>
+        <p:spPr>
+          <a:xfrm>
+            <a:off x="731520" y="6217920"/>
+            <a:ext cx="10698480" cy="365760"/>
+          </a:xfrm>
+          <a:prstGeom prst="rect">
+            <a:avLst/>
+          </a:prstGeom>
+          <a:noFill/>
+        </p:spPr>
+        <p:txBody>
+          <a:bodyPr wrap="none">
+            <a:spAutoFit/>
+          </a:bodyPr>
+          <a:lstStyle/>
+          <a:p>
+            <a:pPr>
+              <a:defRPr sz="1000" i="1">
+                <a:solidFill>
+                  <a:srgbClr val="64748B"/>
+                </a:solidFill>
+              </a:defRPr>
+            </a:pPr>
+            <a:r>
+              <a:t>Số liệu thực tế đo đạc trực tiếp từ mã nguồn đề tài DT005; xem hướng dẫn chạy tại MIDTERM_DEMO.md.</a:t>
+            </a:r>
+          </a:p>
+        </p:txBody>
+      </p:sp>
+    </p:spTree>
+  </p:cSld>
+  <p:clrMapOvr>
+    <a:masterClrMapping/>
+  </p:clrMapOvr>
+</p:sld>
+</file>
+
+<file path=ppt/slides/slide15.xml><?xml version="1.0" encoding="utf-8"?>
+<p:sld xmlns:a="http://schemas.openxmlformats.org/drawingml/2006/main" xmlns:p="http://schemas.openxmlformats.org/presentationml/2006/main" xmlns:r="http://schemas.openxmlformats.org/officeDocument/2006/relationships">
+  <p:cSld>
+    <p:spTree>
+      <p:nvGrpSpPr>
+        <p:cNvPr id="1" name=""/>
+        <p:cNvGrpSpPr/>
+        <p:nvPr/>
+      </p:nvGrpSpPr>
+      <p:grpSpPr/>
+      <p:sp>
+        <p:nvSpPr>
+          <p:cNvPr id="2" name="Rectangle 1"/>
+          <p:cNvSpPr/>
+          <p:nvPr/>
+        </p:nvSpPr>
+        <p:spPr>
+          <a:xfrm>
+            <a:off x="0" y="0"/>
+            <a:ext cx="12191695" cy="6858000"/>
+          </a:xfrm>
+          <a:prstGeom prst="rect">
+            <a:avLst/>
+          </a:prstGeom>
+          <a:solidFill>
+            <a:srgbClr val="FFFFFF"/>
+          </a:solidFill>
+          <a:ln>
+            <a:noFill/>
+          </a:ln>
+        </p:spPr>
+        <p:style>
+          <a:lnRef idx="1">
+            <a:schemeClr val="accent1"/>
+          </a:lnRef>
+          <a:fillRef idx="3">
+            <a:schemeClr val="accent1"/>
+          </a:fillRef>
+          <a:effectRef idx="2">
+            <a:schemeClr val="accent1"/>
+          </a:effectRef>
+          <a:fontRef idx="minor">
+            <a:schemeClr val="lt1"/>
+          </a:fontRef>
+        </p:style>
+        <p:txBody>
+          <a:bodyPr rtlCol="0" anchor="ctr"/>
+          <a:lstStyle/>
+          <a:p>
+            <a:pPr algn="ctr"/>
+          </a:p>
+        </p:txBody>
+      </p:sp>
+      <p:sp>
+        <p:nvSpPr>
+          <p:cNvPr id="3" name="Rounded Rectangle 2"/>
+          <p:cNvSpPr/>
+          <p:nvPr/>
+        </p:nvSpPr>
+        <p:spPr>
+          <a:xfrm>
+            <a:off x="731520" y="365760"/>
+            <a:ext cx="4114800" cy="320040"/>
+          </a:xfrm>
+          <a:prstGeom prst="roundRect">
+            <a:avLst/>
+          </a:prstGeom>
+          <a:solidFill>
+            <a:srgbClr val="EFF6FF"/>
+          </a:solidFill>
+          <a:ln w="12700">
+            <a:solidFill>
+              <a:srgbClr val="BFDBFE"/>
+            </a:solidFill>
+          </a:ln>
+        </p:spPr>
+        <p:style>
+          <a:lnRef idx="1">
+            <a:schemeClr val="accent1"/>
+          </a:lnRef>
+          <a:fillRef idx="3">
+            <a:schemeClr val="accent1"/>
+          </a:fillRef>
+          <a:effectRef idx="2">
+            <a:schemeClr val="accent1"/>
+          </a:effectRef>
+          <a:fontRef idx="minor">
+            <a:schemeClr val="lt1"/>
+          </a:fontRef>
+        </p:style>
+        <p:txBody>
+          <a:bodyPr rtlCol="0" anchor="ctr" wrap="square"/>
+          <a:lstStyle/>
+          <a:p>
+            <a:pPr algn="ctr">
+              <a:defRPr sz="1000" b="1">
+                <a:solidFill>
+                  <a:srgbClr val="1D4ED8"/>
+                </a:solidFill>
+              </a:defRPr>
+            </a:pPr>
+            <a:r>
+              <a:t>SECTION 7 — KẾT LUẬN &amp; THÔNG ĐIỆP HỌC THUẬT</a:t>
+            </a:r>
+          </a:p>
+        </p:txBody>
+      </p:sp>
+      <p:sp>
+        <p:nvSpPr>
+          <p:cNvPr id="4" name="TextBox 3"/>
+          <p:cNvSpPr txBox="1"/>
+          <p:nvPr/>
+        </p:nvSpPr>
+        <p:spPr>
+          <a:xfrm>
+            <a:off x="731520" y="749808"/>
+            <a:ext cx="10698480" cy="502920"/>
+          </a:xfrm>
+          <a:prstGeom prst="rect">
+            <a:avLst/>
+          </a:prstGeom>
+          <a:noFill/>
+        </p:spPr>
+        <p:txBody>
+          <a:bodyPr wrap="square" lIns="0" rIns="0" tIns="0" bIns="0">
+            <a:spAutoFit/>
+          </a:bodyPr>
+          <a:lstStyle/>
+          <a:p>
+            <a:pPr>
+              <a:defRPr sz="2100" b="1">
+                <a:solidFill>
+                  <a:srgbClr val="0F172A"/>
+                </a:solidFill>
+              </a:defRPr>
+            </a:pPr>
+            <a:r>
+              <a:t>TỔNG KẾT BÁO CÁO GIỮA KỲ &amp; ĐỊNH HƯỚNG NGHIÊN CỨU</a:t>
+            </a:r>
+          </a:p>
+        </p:txBody>
+      </p:sp>
+      <p:sp>
+        <p:nvSpPr>
+          <p:cNvPr id="5" name="TextBox 4"/>
+          <p:cNvSpPr txBox="1"/>
+          <p:nvPr/>
+        </p:nvSpPr>
+        <p:spPr>
+          <a:xfrm>
+            <a:off x="731520" y="1261872"/>
+            <a:ext cx="10698480" cy="320040"/>
+          </a:xfrm>
+          <a:prstGeom prst="rect">
+            <a:avLst/>
+          </a:prstGeom>
+          <a:noFill/>
+        </p:spPr>
+        <p:txBody>
+          <a:bodyPr wrap="square" lIns="0" rIns="0" tIns="0" bIns="0">
+            <a:spAutoFit/>
+          </a:bodyPr>
+          <a:lstStyle/>
+          <a:p>
+            <a:pPr>
+              <a:defRPr sz="1200">
+                <a:solidFill>
+                  <a:srgbClr val="475569"/>
+                </a:solidFill>
+              </a:defRPr>
+            </a:pPr>
+            <a:r>
+              <a:t>Tổng kết các đóng góp lý thuyết của Halpin và lộ trình kỹ thuật cho giai đoạn cuối kỳ</a:t>
+            </a:r>
+          </a:p>
+        </p:txBody>
+      </p:sp>
+      <p:sp>
+        <p:nvSpPr>
+          <p:cNvPr id="6" name="Rounded Rectangle 5"/>
+          <p:cNvSpPr/>
+          <p:nvPr/>
+        </p:nvSpPr>
+        <p:spPr>
+          <a:xfrm>
+            <a:off x="731520" y="1691640"/>
+            <a:ext cx="5212080" cy="4206240"/>
           </a:xfrm>
           <a:prstGeom prst="roundRect">
             <a:avLst/>
@@ -6571,7 +6564,7 @@
           </a:solidFill>
           <a:ln w="12700">
             <a:solidFill>
-              <a:srgbClr val="E2E8F0"/>
+              <a:srgbClr val="BFDBFE"/>
             </a:solidFill>
           </a:ln>
         </p:spPr>
@@ -6599,14 +6592,14 @@
       </p:sp>
       <p:sp>
         <p:nvSpPr>
-          <p:cNvPr id="9" name="TextBox 8"/>
+          <p:cNvPr id="7" name="TextBox 6"/>
           <p:cNvSpPr txBox="1"/>
           <p:nvPr/>
         </p:nvSpPr>
         <p:spPr>
           <a:xfrm>
-            <a:off x="6400800" y="1828800"/>
-            <a:ext cx="4846320" cy="4114800"/>
+            <a:off x="914400" y="1828800"/>
+            <a:ext cx="4846320" cy="3931920"/>
           </a:xfrm>
           <a:prstGeom prst="rect">
             <a:avLst/>
@@ -6622,196 +6615,230 @@
             <a:pPr>
               <a:defRPr sz="1300" b="1">
                 <a:solidFill>
-                  <a:srgbClr val="0F172A"/>
-                </a:solidFill>
-              </a:defRPr>
-            </a:pPr>
-            <a:r>
-              <a:t>2. Tài Liệu Tham Khảo Chọn Lọc (Key References)</a:t>
+                  <a:srgbClr val="1E40AF"/>
+                </a:solidFill>
+              </a:defRPr>
+            </a:pPr>
+            <a:r>
+              <a:t>1. Thông Điệp Học Thuật Cốt Lõi (Harry Halpin 2025)</a:t>
             </a:r>
           </a:p>
           <a:p>
             <a:pPr>
               <a:spcBef>
-                <a:spcPts val="400"/>
+                <a:spcPts val="800"/>
               </a:spcBef>
             </a:pPr>
             <a:r>
-              <a:rPr b="1" sz="950">
-                <a:solidFill>
-                  <a:srgbClr val="1E40AF"/>
-                </a:solidFill>
-              </a:rPr>
-              <a:t>[1] H. Halpin, </a:t>
-            </a:r>
-            <a:r>
-              <a:rPr sz="900">
+              <a:rPr b="1" sz="1100">
+                <a:solidFill>
+                  <a:srgbClr val="1E293B"/>
+                </a:solidFill>
+              </a:rPr>
+              <a:t>• Vượt qua sự trừu tượng hóa: </a:t>
+            </a:r>
+            <a:r>
+              <a:rPr sz="1050">
                 <a:solidFill>
                   <a:srgbClr val="475569"/>
                 </a:solidFill>
               </a:rPr>
-              <a:t>The adversary: the philosophy of cryptography, Journal of Cybersecurity, Oxford Academic, Vol. 11, No. 1, tyaf006, 2025.</a:t>
+              <a:t>Mật mã học không chỉ là toán học thuần túy trên giấy tờ. Các hệ thống an toàn trong thế giới thực phải nhận thức rõ khoảng cách giữa mô hình lý tưởng và thực tế vật lý (kênh kề, siêu dữ liệu, chuỗi cung ứng, áp lực thể chế).</a:t>
             </a:r>
           </a:p>
           <a:p>
             <a:pPr>
               <a:spcBef>
-                <a:spcPts val="400"/>
+                <a:spcPts val="800"/>
               </a:spcBef>
             </a:pPr>
             <a:r>
-              <a:rPr b="1" sz="950">
-                <a:solidFill>
-                  <a:srgbClr val="1E40AF"/>
-                </a:solidFill>
-              </a:rPr>
-              <a:t>[2] C. E. Shannon, </a:t>
-            </a:r>
-            <a:r>
-              <a:rPr sz="900">
+              <a:rPr b="1" sz="1100">
+                <a:solidFill>
+                  <a:srgbClr val="1E293B"/>
+                </a:solidFill>
+              </a:rPr>
+              <a:t>• Bản chất của đối thủ: </a:t>
+            </a:r>
+            <a:r>
+              <a:rPr sz="1050">
                 <a:solidFill>
                   <a:srgbClr val="475569"/>
                 </a:solidFill>
               </a:rPr>
-              <a:t>A mathematical theory of communication, Bell Syst. Tech. J., 1948.</a:t>
+              <a:t>Đối thủ không phải là 'nhiễu ngẫu nhiên' mà là tác nhân có chủ đích, liên tục tìm kiếm các kênh rò rỉ bị mô hình toán học bỏ qua.</a:t>
             </a:r>
           </a:p>
           <a:p>
             <a:pPr>
               <a:spcBef>
-                <a:spcPts val="400"/>
+                <a:spcPts val="800"/>
               </a:spcBef>
             </a:pPr>
             <a:r>
-              <a:rPr b="1" sz="950">
-                <a:solidFill>
-                  <a:srgbClr val="1E40AF"/>
-                </a:solidFill>
-              </a:rPr>
-              <a:t>[3] C. E. Shannon, </a:t>
-            </a:r>
-            <a:r>
-              <a:rPr sz="900">
+              <a:rPr b="1" sz="1100">
+                <a:solidFill>
+                  <a:srgbClr val="1E293B"/>
+                </a:solidFill>
+              </a:rPr>
+              <a:t>• Chương trình nghiên cứu mở: </a:t>
+            </a:r>
+            <a:r>
+              <a:rPr sz="1050">
                 <a:solidFill>
                   <a:srgbClr val="475569"/>
                 </a:solidFill>
               </a:rPr>
-              <a:t>Communication theory of secrecy systems, Bell Syst. Tech. J., 1949.</a:t>
+              <a:t>Halpin đặt nền móng triết học và vạch ra 4 câu hỏi nghiên cứu liên ngành nhằm mở rộng mật mã học thành một khoa học an ninh hoàn chỉnh.</a:t>
+            </a:r>
+          </a:p>
+        </p:txBody>
+      </p:sp>
+      <p:sp>
+        <p:nvSpPr>
+          <p:cNvPr id="8" name="Rounded Rectangle 7"/>
+          <p:cNvSpPr/>
+          <p:nvPr/>
+        </p:nvSpPr>
+        <p:spPr>
+          <a:xfrm>
+            <a:off x="6217920" y="1691640"/>
+            <a:ext cx="5212080" cy="4206240"/>
+          </a:xfrm>
+          <a:prstGeom prst="roundRect">
+            <a:avLst/>
+          </a:prstGeom>
+          <a:solidFill>
+            <a:srgbClr val="ECFDF5"/>
+          </a:solidFill>
+          <a:ln w="12700">
+            <a:solidFill>
+              <a:srgbClr val="A7F3D0"/>
+            </a:solidFill>
+          </a:ln>
+        </p:spPr>
+        <p:style>
+          <a:lnRef idx="1">
+            <a:schemeClr val="accent1"/>
+          </a:lnRef>
+          <a:fillRef idx="3">
+            <a:schemeClr val="accent1"/>
+          </a:fillRef>
+          <a:effectRef idx="2">
+            <a:schemeClr val="accent1"/>
+          </a:effectRef>
+          <a:fontRef idx="minor">
+            <a:schemeClr val="lt1"/>
+          </a:fontRef>
+        </p:style>
+        <p:txBody>
+          <a:bodyPr rtlCol="0" anchor="ctr"/>
+          <a:lstStyle/>
+          <a:p>
+            <a:pPr algn="ctr"/>
+          </a:p>
+        </p:txBody>
+      </p:sp>
+      <p:sp>
+        <p:nvSpPr>
+          <p:cNvPr id="9" name="TextBox 8"/>
+          <p:cNvSpPr txBox="1"/>
+          <p:nvPr/>
+        </p:nvSpPr>
+        <p:spPr>
+          <a:xfrm>
+            <a:off x="6400800" y="1828800"/>
+            <a:ext cx="4846320" cy="3931920"/>
+          </a:xfrm>
+          <a:prstGeom prst="rect">
+            <a:avLst/>
+          </a:prstGeom>
+          <a:noFill/>
+        </p:spPr>
+        <p:txBody>
+          <a:bodyPr wrap="square">
+            <a:spAutoFit/>
+          </a:bodyPr>
+          <a:lstStyle/>
+          <a:p>
+            <a:pPr>
+              <a:defRPr sz="1300" b="1">
+                <a:solidFill>
+                  <a:srgbClr val="059669"/>
+                </a:solidFill>
+              </a:defRPr>
+            </a:pPr>
+            <a:r>
+              <a:t>2. Hoàn Thành Giữa Kỳ &amp; Lộ Trình Cuối Kỳ (Nhóm DT005)</a:t>
             </a:r>
           </a:p>
           <a:p>
             <a:pPr>
               <a:spcBef>
-                <a:spcPts val="400"/>
+                <a:spcPts val="800"/>
               </a:spcBef>
             </a:pPr>
             <a:r>
-              <a:rPr b="1" sz="950">
-                <a:solidFill>
-                  <a:srgbClr val="1E40AF"/>
-                </a:solidFill>
-              </a:rPr>
-              <a:t>[4] S. Goldwasser &amp; S. Micali, </a:t>
-            </a:r>
-            <a:r>
-              <a:rPr sz="900">
+              <a:rPr b="1" sz="1100">
+                <a:solidFill>
+                  <a:srgbClr val="1E293B"/>
+                </a:solidFill>
+              </a:rPr>
+              <a:t>• Nghiệm thu tiến độ giữa kỳ: </a:t>
+            </a:r>
+            <a:r>
+              <a:rPr sz="1050">
                 <a:solidFill>
                   <a:srgbClr val="475569"/>
                 </a:solidFill>
               </a:rPr>
-              <a:t>Probabilistic encryption, JCSS, 1984.</a:t>
+              <a:t>Hoàn thành thẩm định học thuật sâu sắc toàn văn bài báo gốc (17 trang PDF), phân tích đầy đủ 7 mục nội dung và xây dựng bộ diễn tập minh họa thực nghiệm sống động phục vụ báo cáo.</a:t>
             </a:r>
           </a:p>
           <a:p>
             <a:pPr>
               <a:spcBef>
-                <a:spcPts val="400"/>
+                <a:spcPts val="800"/>
               </a:spcBef>
             </a:pPr>
             <a:r>
-              <a:rPr b="1" sz="950">
-                <a:solidFill>
-                  <a:srgbClr val="1E40AF"/>
-                </a:solidFill>
-              </a:rPr>
-              <a:t>[5] D. Dolev &amp; A. Yao, </a:t>
-            </a:r>
-            <a:r>
-              <a:rPr sz="900">
+              <a:rPr b="1" sz="1100">
+                <a:solidFill>
+                  <a:srgbClr val="1E293B"/>
+                </a:solidFill>
+              </a:rPr>
+              <a:t>• Minh bạch phương pháp luận: </a:t>
+            </a:r>
+            <a:r>
+              <a:rPr sz="1050">
                 <a:solidFill>
                   <a:srgbClr val="475569"/>
                 </a:solidFill>
               </a:rPr>
-              <a:t>On the security of public key protocols, IEEE TIT, 1983.</a:t>
+              <a:t>Không ngụy tạo số liệu tác giả; phân định rạch ròi giữa công trình triết học của Halpin và các thử nghiệm độc lập của sinh viên.</a:t>
             </a:r>
           </a:p>
           <a:p>
             <a:pPr>
               <a:spcBef>
-                <a:spcPts val="400"/>
+                <a:spcPts val="800"/>
               </a:spcBef>
             </a:pPr>
             <a:r>
-              <a:rPr b="1" sz="950">
-                <a:solidFill>
-                  <a:srgbClr val="1E40AF"/>
-                </a:solidFill>
-              </a:rPr>
-              <a:t>[6] M. Bellare &amp; P. Rogaway, </a:t>
-            </a:r>
-            <a:r>
-              <a:rPr sz="900">
+              <a:rPr b="1" sz="1100">
+                <a:solidFill>
+                  <a:srgbClr val="1E293B"/>
+                </a:solidFill>
+              </a:rPr>
+              <a:t>• Lộ trình nghiên cứu cuối kỳ: </a:t>
+            </a:r>
+            <a:r>
+              <a:rPr sz="1050">
                 <a:solidFill>
                   <a:srgbClr val="475569"/>
                 </a:solidFill>
               </a:rPr>
-              <a:t>Random oracles are practical, ACM CCS, 1993.</a:t>
-            </a:r>
-          </a:p>
-          <a:p>
-            <a:pPr>
-              <a:spcBef>
-                <a:spcPts val="400"/>
-              </a:spcBef>
-            </a:pPr>
-            <a:r>
-              <a:rPr b="1" sz="950">
-                <a:solidFill>
-                  <a:srgbClr val="1E40AF"/>
-                </a:solidFill>
-              </a:rPr>
-              <a:t>[7] P. Kocher, </a:t>
-            </a:r>
-            <a:r>
-              <a:rPr sz="900">
-                <a:solidFill>
-                  <a:srgbClr val="475569"/>
-                </a:solidFill>
-              </a:rPr>
-              <a:t>Timing attacks on implementations of Diffie-Hellman, RSA, DSS, Crypto, 1996.</a:t>
-            </a:r>
-          </a:p>
-          <a:p>
-            <a:pPr>
-              <a:spcBef>
-                <a:spcPts val="400"/>
-              </a:spcBef>
-            </a:pPr>
-            <a:r>
-              <a:rPr b="1" sz="950">
-                <a:solidFill>
-                  <a:srgbClr val="1E40AF"/>
-                </a:solidFill>
-              </a:rPr>
-              <a:t>[8] B. Laurie et al., </a:t>
-            </a:r>
-            <a:r>
-              <a:rPr sz="900">
-                <a:solidFill>
-                  <a:srgbClr val="475569"/>
-                </a:solidFill>
-              </a:rPr>
-              <a:t>Certificate Transparency, IETF RFC 6962, 2013.</a:t>
+              <a:t>Đề xuất phát triển chuyên sâu giải pháp tối ưu hóa cấu trúc cây Merkle phân cấp (HD-Merkle Dirty-Path Caching, nén CompactProof O(1)) làm đóng góp kỹ thuật trọng tâm cho đồ án cuối kỳ.</a:t>
             </a:r>
           </a:p>
         </p:txBody>
@@ -6824,8 +6851,8 @@
         </p:nvSpPr>
         <p:spPr>
           <a:xfrm>
-            <a:off x="731520" y="6217920"/>
-            <a:ext cx="10698480" cy="365760"/>
+            <a:off x="731520" y="6035040"/>
+            <a:ext cx="10698480" cy="502920"/>
           </a:xfrm>
           <a:prstGeom prst="rect">
             <a:avLst/>
@@ -6839,14 +6866,14 @@
           <a:lstStyle/>
           <a:p>
             <a:pPr>
-              <a:defRPr sz="1000" i="1">
+              <a:defRPr sz="950" i="1">
                 <a:solidFill>
                   <a:srgbClr val="64748B"/>
                 </a:solidFill>
               </a:defRPr>
             </a:pPr>
             <a:r>
-              <a:t>Đề tài DT005 — An Toàn và Bảo Mật Hệ Thống Thông Tin — Báo cáo Tiến độ Giữa kỳ.</a:t>
+              <a:t>Tài liệu tham khảo chính: [1] H. Halpin, Oxford J. Cybersec., 2025 (DOI: 10.1093/cybsec/tyaf006); [2] Shannon (1949); [3] Goldwasser-Micali (1984); [4] Dolev-Yao (1983); [5] Kocher (1996); [6] RFC 6962 (2013).</a:t>
             </a:r>
           </a:p>
         </p:txBody>

--- a/docs/Bao_Cao_Giua_Ky_DT05_Final.pptx
+++ b/docs/Bao_Cao_Giua_Ky_DT05_Final.pptx
@@ -3153,14 +3153,14 @@
         </p:nvSpPr>
         <p:spPr>
           <a:xfrm>
-            <a:off x="0" y="0"/>
-            <a:ext cx="12191695" cy="109728"/>
+            <a:off x="365760" y="731520"/>
+            <a:ext cx="164592" cy="5394960"/>
           </a:xfrm>
           <a:prstGeom prst="rect">
             <a:avLst/>
           </a:prstGeom>
           <a:solidFill>
-            <a:srgbClr val="1E40AF"/>
+            <a:srgbClr val="2563EB"/>
           </a:solidFill>
           <a:ln>
             <a:noFill/>
@@ -3190,68 +3190,14 @@
       </p:sp>
       <p:sp>
         <p:nvSpPr>
-          <p:cNvPr id="4" name="Rounded Rectangle 3"/>
-          <p:cNvSpPr/>
-          <p:nvPr/>
-        </p:nvSpPr>
-        <p:spPr>
-          <a:xfrm>
-            <a:off x="914400" y="640080"/>
-            <a:ext cx="4389120" cy="365760"/>
-          </a:xfrm>
-          <a:prstGeom prst="roundRect">
-            <a:avLst/>
-          </a:prstGeom>
-          <a:solidFill>
-            <a:srgbClr val="EFF6FF"/>
-          </a:solidFill>
-          <a:ln w="12700">
-            <a:solidFill>
-              <a:srgbClr val="BFDBFE"/>
-            </a:solidFill>
-          </a:ln>
-        </p:spPr>
-        <p:style>
-          <a:lnRef idx="1">
-            <a:schemeClr val="accent1"/>
-          </a:lnRef>
-          <a:fillRef idx="3">
-            <a:schemeClr val="accent1"/>
-          </a:fillRef>
-          <a:effectRef idx="2">
-            <a:schemeClr val="accent1"/>
-          </a:effectRef>
-          <a:fontRef idx="minor">
-            <a:schemeClr val="lt1"/>
-          </a:fontRef>
-        </p:style>
-        <p:txBody>
-          <a:bodyPr rtlCol="0" anchor="ctr"/>
-          <a:lstStyle/>
-          <a:p>
-            <a:pPr algn="ctr">
-              <a:defRPr sz="1100" b="1">
-                <a:solidFill>
-                  <a:srgbClr val="1D4ED8"/>
-                </a:solidFill>
-              </a:defRPr>
-            </a:pPr>
-            <a:r>
-              <a:t>BÁO CÁO TIẾN ĐỘ GIỮA KỲ — ĐỀ TÀI DT005</a:t>
-            </a:r>
-          </a:p>
-        </p:txBody>
-      </p:sp>
-      <p:sp>
-        <p:nvSpPr>
-          <p:cNvPr id="5" name="TextBox 4"/>
+          <p:cNvPr id="4" name="TextBox 3"/>
           <p:cNvSpPr txBox="1"/>
           <p:nvPr/>
         </p:nvSpPr>
         <p:spPr>
           <a:xfrm>
-            <a:off x="914400" y="1143000"/>
-            <a:ext cx="10362895" cy="1188720"/>
+            <a:off x="1097280" y="1097280"/>
+            <a:ext cx="10058400" cy="822960"/>
           </a:xfrm>
           <a:prstGeom prst="rect">
             <a:avLst/>
@@ -3264,33 +3210,44 @@
           </a:bodyPr>
           <a:lstStyle/>
           <a:p>
-            <a:pPr>
-              <a:defRPr sz="2500" b="1">
-                <a:solidFill>
-                  <a:srgbClr val="0F172A"/>
-                </a:solidFill>
-              </a:defRPr>
-            </a:pPr>
-            <a:r>
-              <a:t>NGHIÊN CỨU BÀI BÁO:</a:t>
-            </a:r>
-            <a:br/>
-            <a:r>
-              <a:t>THE ADVERSARY — THE PHILOSOPHY OF CRYPTOGRAPHY</a:t>
-            </a:r>
-          </a:p>
-        </p:txBody>
-      </p:sp>
-      <p:sp>
-        <p:nvSpPr>
-          <p:cNvPr id="6" name="TextBox 5"/>
+            <a:pPr algn="ctr">
+              <a:defRPr sz="1500" b="1">
+                <a:solidFill>
+                  <a:srgbClr val="1E293B"/>
+                </a:solidFill>
+              </a:defRPr>
+            </a:pPr>
+            <a:r>
+              <a:t>Trường Đại học Tài nguyên và Môi trường TP. Hồ Chí Minh</a:t>
+            </a:r>
+          </a:p>
+          <a:p>
+            <a:pPr algn="ctr">
+              <a:spcBef>
+                <a:spcPts val="400"/>
+              </a:spcBef>
+              <a:defRPr sz="1400" b="1">
+                <a:solidFill>
+                  <a:srgbClr val="475569"/>
+                </a:solidFill>
+              </a:defRPr>
+            </a:pPr>
+            <a:r>
+              <a:t>Khoa Công nghệ thông tin</a:t>
+            </a:r>
+          </a:p>
+        </p:txBody>
+      </p:sp>
+      <p:sp>
+        <p:nvSpPr>
+          <p:cNvPr id="5" name="TextBox 4"/>
           <p:cNvSpPr txBox="1"/>
           <p:nvPr/>
         </p:nvSpPr>
         <p:spPr>
           <a:xfrm>
-            <a:off x="914400" y="2468880"/>
-            <a:ext cx="10362895" cy="548640"/>
+            <a:off x="1097280" y="2286000"/>
+            <a:ext cx="10058400" cy="2011680"/>
           </a:xfrm>
           <a:prstGeom prst="rect">
             <a:avLst/>
@@ -3303,74 +3260,63 @@
           </a:bodyPr>
           <a:lstStyle/>
           <a:p>
-            <a:pPr>
-              <a:defRPr sz="1400">
+            <a:pPr algn="ctr">
+              <a:defRPr sz="2800" b="1">
+                <a:solidFill>
+                  <a:srgbClr val="2563EB"/>
+                </a:solidFill>
+              </a:defRPr>
+            </a:pPr>
+            <a:r>
+              <a:t>Báo cáo thuyết trình đồ án giữa kỳ</a:t>
+            </a:r>
+          </a:p>
+          <a:p>
+            <a:pPr algn="ctr">
+              <a:spcBef>
+                <a:spcPts val="1200"/>
+              </a:spcBef>
+              <a:defRPr sz="1600" b="1">
+                <a:solidFill>
+                  <a:srgbClr val="0F172A"/>
+                </a:solidFill>
+              </a:defRPr>
+            </a:pPr>
+            <a:r>
+              <a:t>Đề tài DT005: Hệ thống kiểm tra toàn vẹn tệp bằng SHA-256, HMAC và cây Merkle phân cấp động</a:t>
+            </a:r>
+          </a:p>
+          <a:p>
+            <a:pPr algn="ctr">
+              <a:spcBef>
+                <a:spcPts val="800"/>
+              </a:spcBef>
+              <a:defRPr sz="1100" i="1">
                 <a:solidFill>
                   <a:srgbClr val="1E40AF"/>
                 </a:solidFill>
               </a:defRPr>
             </a:pPr>
             <a:r>
-              <a:t>Khảo cứu Triết học về Kẻ thù trong Mật mã học, Phê phán Giới hạn Hình thức hóa và Thí nghiệm Minh họa Độc lập</a:t>
-            </a:r>
-          </a:p>
-        </p:txBody>
-      </p:sp>
-      <p:sp>
-        <p:nvSpPr>
-          <p:cNvPr id="7" name="Rounded Rectangle 6"/>
-          <p:cNvSpPr/>
-          <p:nvPr/>
-        </p:nvSpPr>
-        <p:spPr>
-          <a:xfrm>
-            <a:off x="914400" y="3154680"/>
-            <a:ext cx="5029200" cy="3017520"/>
-          </a:xfrm>
-          <a:prstGeom prst="roundRect">
-            <a:avLst/>
-          </a:prstGeom>
-          <a:solidFill>
-            <a:srgbClr val="F8FAFC"/>
-          </a:solidFill>
-          <a:ln w="12700">
-            <a:solidFill>
-              <a:srgbClr val="BFDBFE"/>
-            </a:solidFill>
-          </a:ln>
-        </p:spPr>
-        <p:style>
-          <a:lnRef idx="1">
-            <a:schemeClr val="accent1"/>
-          </a:lnRef>
-          <a:fillRef idx="3">
-            <a:schemeClr val="accent1"/>
-          </a:fillRef>
-          <a:effectRef idx="2">
-            <a:schemeClr val="accent1"/>
-          </a:effectRef>
-          <a:fontRef idx="minor">
-            <a:schemeClr val="lt1"/>
-          </a:fontRef>
-        </p:style>
-        <p:txBody>
-          <a:bodyPr rtlCol="0" anchor="ctr"/>
-          <a:lstStyle/>
-          <a:p>
-            <a:pPr algn="ctr"/>
-          </a:p>
-        </p:txBody>
-      </p:sp>
-      <p:sp>
-        <p:nvSpPr>
-          <p:cNvPr id="8" name="TextBox 7"/>
+              <a:t>Khảo sát và Thẩm định học thuật bài báo: "The adversary: the philosophy of cryptography"</a:t>
+            </a:r>
+            <a:br/>
+            <a:r>
+              <a:t>TS. Harry Halpin — Oxford Academic, Journal of Cybersecurity, Vol. 11, No. 1, 2025 (DOI: 10.1093/cybsec/tyaf006)</a:t>
+            </a:r>
+          </a:p>
+        </p:txBody>
+      </p:sp>
+      <p:sp>
+        <p:nvSpPr>
+          <p:cNvPr id="6" name="TextBox 5"/>
           <p:cNvSpPr txBox="1"/>
           <p:nvPr/>
         </p:nvSpPr>
         <p:spPr>
           <a:xfrm>
-            <a:off x="1097280" y="3291840"/>
-            <a:ext cx="4663440" cy="2743200"/>
+            <a:off x="1280160" y="4663440"/>
+            <a:ext cx="9144000" cy="1463040"/>
           </a:xfrm>
           <a:prstGeom prst="rect">
             <a:avLst/>
@@ -3384,370 +3330,60 @@
           <a:lstStyle/>
           <a:p>
             <a:pPr>
-              <a:defRPr sz="1300" b="1">
+              <a:defRPr sz="1300">
+                <a:solidFill>
+                  <a:srgbClr val="1E293B"/>
+                </a:solidFill>
+              </a:defRPr>
+            </a:pPr>
+            <a:r>
+              <a:t>Học phần: An toàn và bảo mật hệ thống thông tin</a:t>
+            </a:r>
+          </a:p>
+          <a:p>
+            <a:pPr>
+              <a:spcBef>
+                <a:spcPts val="400"/>
+              </a:spcBef>
+              <a:defRPr sz="1300">
+                <a:solidFill>
+                  <a:srgbClr val="1E293B"/>
+                </a:solidFill>
+              </a:defRPr>
+            </a:pPr>
+            <a:r>
+              <a:t>Giảng viên hướng dẫn: ThS. Phạm Trọng Huynh</a:t>
+            </a:r>
+          </a:p>
+          <a:p>
+            <a:pPr>
+              <a:spcBef>
+                <a:spcPts val="400"/>
+              </a:spcBef>
+            </a:pPr>
+            <a:r>
+              <a:rPr sz="1300">
+                <a:solidFill>
+                  <a:srgbClr val="1E293B"/>
+                </a:solidFill>
+              </a:rPr>
+              <a:t>Sinh viên thực hiện: </a:t>
+            </a:r>
+            <a:r>
+              <a:rPr b="1" sz="1300">
                 <a:solidFill>
                   <a:srgbClr val="1E40AF"/>
                 </a:solidFill>
-              </a:defRPr>
-            </a:pPr>
-            <a:r>
-              <a:t>THÔNG TIN BÀI BÁO THAM CHIẾU</a:t>
-            </a:r>
-          </a:p>
-          <a:p>
-            <a:pPr>
-              <a:spcBef>
-                <a:spcPts val="500"/>
-              </a:spcBef>
-            </a:pPr>
-            <a:r>
-              <a:rPr b="1" sz="1100">
+              </a:rPr>
+              <a:t>Võ Anh Kiệt</a:t>
+            </a:r>
+            <a:r>
+              <a:rPr sz="1300">
                 <a:solidFill>
                   <a:srgbClr val="1E293B"/>
                 </a:solidFill>
               </a:rPr>
-              <a:t>• Tạp chí: </a:t>
-            </a:r>
-            <a:r>
-              <a:rPr sz="1100">
-                <a:solidFill>
-                  <a:srgbClr val="475569"/>
-                </a:solidFill>
-              </a:rPr>
-              <a:t>Journal of Cybersecurity, Oxford Academic (2025)</a:t>
-            </a:r>
-          </a:p>
-          <a:p>
-            <a:pPr>
-              <a:spcBef>
-                <a:spcPts val="500"/>
-              </a:spcBef>
-            </a:pPr>
-            <a:r>
-              <a:rPr b="1" sz="1100">
-                <a:solidFill>
-                  <a:srgbClr val="1E293B"/>
-                </a:solidFill>
-              </a:rPr>
-              <a:t>• Tác giả: </a:t>
-            </a:r>
-            <a:r>
-              <a:rPr sz="1100">
-                <a:solidFill>
-                  <a:srgbClr val="475569"/>
-                </a:solidFill>
-              </a:rPr>
-              <a:t>TS. Harry Halpin (Nym Technologies, Thụy Sĩ)</a:t>
-            </a:r>
-          </a:p>
-          <a:p>
-            <a:pPr>
-              <a:spcBef>
-                <a:spcPts val="500"/>
-              </a:spcBef>
-            </a:pPr>
-            <a:r>
-              <a:rPr b="1" sz="1100">
-                <a:solidFill>
-                  <a:srgbClr val="1E293B"/>
-                </a:solidFill>
-              </a:rPr>
-              <a:t>• DOI: </a:t>
-            </a:r>
-            <a:r>
-              <a:rPr sz="1100">
-                <a:solidFill>
-                  <a:srgbClr val="475569"/>
-                </a:solidFill>
-              </a:rPr>
-              <a:t>10.1093/cybsec/tyaf006 (Volume 11, Issue 1)</a:t>
-            </a:r>
-          </a:p>
-          <a:p>
-            <a:pPr>
-              <a:spcBef>
-                <a:spcPts val="500"/>
-              </a:spcBef>
-            </a:pPr>
-            <a:r>
-              <a:rPr b="1" sz="1100">
-                <a:solidFill>
-                  <a:srgbClr val="1E293B"/>
-                </a:solidFill>
-              </a:rPr>
-              <a:t>• Bản chất: </a:t>
-            </a:r>
-            <a:r>
-              <a:rPr sz="1100">
-                <a:solidFill>
-                  <a:srgbClr val="475569"/>
-                </a:solidFill>
-              </a:rPr>
-              <a:t>Nghiên cứu triết học, lịch sử &amp; nhận thức luận mật mã</a:t>
-            </a:r>
-          </a:p>
-          <a:p>
-            <a:pPr>
-              <a:spcBef>
-                <a:spcPts val="500"/>
-              </a:spcBef>
-            </a:pPr>
-            <a:r>
-              <a:rPr b="1" sz="1100">
-                <a:solidFill>
-                  <a:srgbClr val="1E293B"/>
-                </a:solidFill>
-              </a:rPr>
-              <a:t>• Tài nguyên: </a:t>
-            </a:r>
-            <a:r>
-              <a:rPr sz="1100">
-                <a:solidFill>
-                  <a:srgbClr val="475569"/>
-                </a:solidFill>
-              </a:rPr>
-              <a:t>Bài báo thuần lý thuyết; 0% code, 0% benchmark thực nghiệm</a:t>
-            </a:r>
-          </a:p>
-          <a:p>
-            <a:pPr>
-              <a:spcBef>
-                <a:spcPts val="500"/>
-              </a:spcBef>
-            </a:pPr>
-            <a:r>
-              <a:rPr b="1" sz="1100">
-                <a:solidFill>
-                  <a:srgbClr val="1E293B"/>
-                </a:solidFill>
-              </a:rPr>
-              <a:t>• Định hướng: </a:t>
-            </a:r>
-            <a:r>
-              <a:rPr sz="1100">
-                <a:solidFill>
-                  <a:srgbClr val="475569"/>
-                </a:solidFill>
-              </a:rPr>
-              <a:t>Phê phán trừu tượng hóa &amp; đề xuất 4 câu hỏi nghiên cứu mở</a:t>
-            </a:r>
-          </a:p>
-        </p:txBody>
-      </p:sp>
-      <p:sp>
-        <p:nvSpPr>
-          <p:cNvPr id="9" name="Rounded Rectangle 8"/>
-          <p:cNvSpPr/>
-          <p:nvPr/>
-        </p:nvSpPr>
-        <p:spPr>
-          <a:xfrm>
-            <a:off x="6217920" y="3154680"/>
-            <a:ext cx="5029200" cy="3017520"/>
-          </a:xfrm>
-          <a:prstGeom prst="roundRect">
-            <a:avLst/>
-          </a:prstGeom>
-          <a:solidFill>
-            <a:srgbClr val="ECFDF5"/>
-          </a:solidFill>
-          <a:ln w="12700">
-            <a:solidFill>
-              <a:srgbClr val="A7F3D0"/>
-            </a:solidFill>
-          </a:ln>
-        </p:spPr>
-        <p:style>
-          <a:lnRef idx="1">
-            <a:schemeClr val="accent1"/>
-          </a:lnRef>
-          <a:fillRef idx="3">
-            <a:schemeClr val="accent1"/>
-          </a:fillRef>
-          <a:effectRef idx="2">
-            <a:schemeClr val="accent1"/>
-          </a:effectRef>
-          <a:fontRef idx="minor">
-            <a:schemeClr val="lt1"/>
-          </a:fontRef>
-        </p:style>
-        <p:txBody>
-          <a:bodyPr rtlCol="0" anchor="ctr"/>
-          <a:lstStyle/>
-          <a:p>
-            <a:pPr algn="ctr"/>
-          </a:p>
-        </p:txBody>
-      </p:sp>
-      <p:sp>
-        <p:nvSpPr>
-          <p:cNvPr id="10" name="TextBox 9"/>
-          <p:cNvSpPr txBox="1"/>
-          <p:nvPr/>
-        </p:nvSpPr>
-        <p:spPr>
-          <a:xfrm>
-            <a:off x="6400800" y="3291840"/>
-            <a:ext cx="4663440" cy="2743200"/>
-          </a:xfrm>
-          <a:prstGeom prst="rect">
-            <a:avLst/>
-          </a:prstGeom>
-          <a:noFill/>
-        </p:spPr>
-        <p:txBody>
-          <a:bodyPr wrap="square">
-            <a:spAutoFit/>
-          </a:bodyPr>
-          <a:lstStyle/>
-          <a:p>
-            <a:pPr>
-              <a:defRPr sz="1300" b="1">
-                <a:solidFill>
-                  <a:srgbClr val="059669"/>
-                </a:solidFill>
-              </a:defRPr>
-            </a:pPr>
-            <a:r>
-              <a:t>THÔNG TIN HỌC PHẦN &amp; ĐỀ TÀI DT005</a:t>
-            </a:r>
-          </a:p>
-          <a:p>
-            <a:pPr>
-              <a:spcBef>
-                <a:spcPts val="500"/>
-              </a:spcBef>
-            </a:pPr>
-            <a:r>
-              <a:rPr b="1" sz="1100">
-                <a:solidFill>
-                  <a:srgbClr val="1E293B"/>
-                </a:solidFill>
-              </a:rPr>
-              <a:t>• Trường: </a:t>
-            </a:r>
-            <a:r>
-              <a:rPr sz="1100">
-                <a:solidFill>
-                  <a:srgbClr val="475569"/>
-                </a:solidFill>
-              </a:rPr>
-              <a:t>Đại học Tài nguyên và Môi trường TP. Hồ Chí Minh</a:t>
-            </a:r>
-          </a:p>
-          <a:p>
-            <a:pPr>
-              <a:spcBef>
-                <a:spcPts val="500"/>
-              </a:spcBef>
-            </a:pPr>
-            <a:r>
-              <a:rPr b="1" sz="1100">
-                <a:solidFill>
-                  <a:srgbClr val="1E293B"/>
-                </a:solidFill>
-              </a:rPr>
-              <a:t>• Khoa / Ngành: </a:t>
-            </a:r>
-            <a:r>
-              <a:rPr sz="1100">
-                <a:solidFill>
-                  <a:srgbClr val="475569"/>
-                </a:solidFill>
-              </a:rPr>
-              <a:t>Khoa Công nghệ Thông tin</a:t>
-            </a:r>
-          </a:p>
-          <a:p>
-            <a:pPr>
-              <a:spcBef>
-                <a:spcPts val="500"/>
-              </a:spcBef>
-            </a:pPr>
-            <a:r>
-              <a:rPr b="1" sz="1100">
-                <a:solidFill>
-                  <a:srgbClr val="1E293B"/>
-                </a:solidFill>
-              </a:rPr>
-              <a:t>• Học phần: </a:t>
-            </a:r>
-            <a:r>
-              <a:rPr sz="1100">
-                <a:solidFill>
-                  <a:srgbClr val="475569"/>
-                </a:solidFill>
-              </a:rPr>
-              <a:t>An toàn và Bảo mật Hệ thống Thông tin</a:t>
-            </a:r>
-          </a:p>
-          <a:p>
-            <a:pPr>
-              <a:spcBef>
-                <a:spcPts val="500"/>
-              </a:spcBef>
-            </a:pPr>
-            <a:r>
-              <a:rPr b="1" sz="1100">
-                <a:solidFill>
-                  <a:srgbClr val="1E293B"/>
-                </a:solidFill>
-              </a:rPr>
-              <a:t>• Đề tài DT005: </a:t>
-            </a:r>
-            <a:r>
-              <a:rPr sz="1100">
-                <a:solidFill>
-                  <a:srgbClr val="475569"/>
-                </a:solidFill>
-              </a:rPr>
-              <a:t>Hệ thống kiểm tra toàn vẹn tệp bằng SHA-256, HMAC, Merkle Tree</a:t>
-            </a:r>
-          </a:p>
-          <a:p>
-            <a:pPr>
-              <a:spcBef>
-                <a:spcPts val="500"/>
-              </a:spcBef>
-            </a:pPr>
-            <a:r>
-              <a:rPr b="1" sz="1100">
-                <a:solidFill>
-                  <a:srgbClr val="1E293B"/>
-                </a:solidFill>
-              </a:rPr>
-              <a:t>• Đóng góp nhóm: </a:t>
-            </a:r>
-            <a:r>
-              <a:rPr sz="1100">
-                <a:solidFill>
-                  <a:srgbClr val="475569"/>
-                </a:solidFill>
-              </a:rPr>
-              <a:t>Kiểm toán học thuật toàn văn bài báo &amp; Xây dựng bộ thí nghiệm minh họa thực nghiệm độc lập (Red Team vs Blue Team)</a:t>
-            </a:r>
-          </a:p>
-          <a:p>
-            <a:pPr>
-              <a:spcBef>
-                <a:spcPts val="500"/>
-              </a:spcBef>
-            </a:pPr>
-            <a:r>
-              <a:rPr b="1" sz="1100">
-                <a:solidFill>
-                  <a:srgbClr val="1E293B"/>
-                </a:solidFill>
-              </a:rPr>
-              <a:t>• Phạm vi giữa kỳ: </a:t>
-            </a:r>
-            <a:r>
-              <a:rPr sz="1100">
-                <a:solidFill>
-                  <a:srgbClr val="475569"/>
-                </a:solidFill>
-              </a:rPr>
-              <a:t>Báo cáo lý thuyết bài báo + Demo đối kháng minh họa</a:t>
+              <a:t> — MSSV: 1150080143 — Lớp: 11_CNPM2</a:t>
             </a:r>
           </a:p>
         </p:txBody>
@@ -3862,7 +3498,7 @@
               </a:defRPr>
             </a:pPr>
             <a:r>
-              <a:t>SECTION 7 — KẾT LUẬN &amp; CHƯƠNG TRÌNH NGHIÊN CỨU (TRANG 12–14)</a:t>
+              <a:t>ĐÁNH GIÁ PHƯƠNG PHÁP LUẬN &amp; HƯỚNG TIẾP CẬN THỰC NGHIỆM</a:t>
             </a:r>
           </a:p>
         </p:txBody>
@@ -3897,7 +3533,7 @@
               </a:defRPr>
             </a:pPr>
             <a:r>
-              <a:t>CHƯƠNG TRÌNH NGHIÊN CỨU TƯƠNG LAI: BỐN CÂU HỎI MỞ</a:t>
+              <a:t>PHƯƠNG PHÁP LUẬN &amp; KHẢ NĂNG TÁI LẬP BÀI BÁO</a:t>
             </a:r>
           </a:p>
         </p:txBody>
@@ -3932,7 +3568,7 @@
               </a:defRPr>
             </a:pPr>
             <a:r>
-              <a:t>Đề xuất hòa giải giữa trừu tượng hóa toán học và dữ liệu thực nghiệm thế giới thực</a:t>
+              <a:t>Làm rõ tính khả thi tái lập đối với một công trình triết học và định hướng thí nghiệm độc lập</a:t>
             </a:r>
           </a:p>
         </p:txBody>
@@ -3946,17 +3582,17 @@
         <p:spPr>
           <a:xfrm>
             <a:off x="731520" y="1691640"/>
-            <a:ext cx="10728655" cy="960120"/>
+            <a:ext cx="5212080" cy="4389120"/>
           </a:xfrm>
           <a:prstGeom prst="roundRect">
             <a:avLst/>
           </a:prstGeom>
           <a:solidFill>
-            <a:srgbClr val="F8FAFC"/>
+            <a:srgbClr val="FFFBEB"/>
           </a:solidFill>
-          <a:ln w="12700">
+          <a:ln>
             <a:solidFill>
-              <a:srgbClr val="BFDBFE"/>
+              <a:srgbClr val="FDE68A"/>
             </a:solidFill>
           </a:ln>
         </p:spPr>
@@ -3990,8 +3626,8 @@
         </p:nvSpPr>
         <p:spPr>
           <a:xfrm>
-            <a:off x="914400" y="1746504"/>
-            <a:ext cx="10362895" cy="841248"/>
+            <a:off x="914400" y="1828800"/>
+            <a:ext cx="4846320" cy="4114800"/>
           </a:xfrm>
           <a:prstGeom prst="rect">
             <a:avLst/>
@@ -4005,41 +3641,106 @@
           <a:lstStyle/>
           <a:p>
             <a:pPr>
-              <a:defRPr sz="1150" b="1">
-                <a:solidFill>
-                  <a:srgbClr val="1E40AF"/>
-                </a:solidFill>
-              </a:defRPr>
-            </a:pPr>
-            <a:r>
-              <a:t>Câu hỏi 1: Mạng Xã Hội Động của Truyền Thông Bí Mật</a:t>
-            </a:r>
-          </a:p>
-          <a:p>
-            <a:pPr>
-              <a:defRPr sz="950" i="1">
-                <a:solidFill>
-                  <a:srgbClr val="64748B"/>
-                </a:solidFill>
-              </a:defRPr>
-            </a:pPr>
-            <a:r>
-              <a:t>"Can we study dynamic social networks of secret communication modeled on the empirical behavior of secret keepers?"</a:t>
+              <a:defRPr sz="1300" b="1">
+                <a:solidFill>
+                  <a:srgbClr val="D97706"/>
+                </a:solidFill>
+              </a:defRPr>
+            </a:pPr>
+            <a:r>
+              <a:t>1. Đánh Giá Khả Năng Tái Lập (Replication Feasibility)</a:t>
             </a:r>
           </a:p>
           <a:p>
             <a:pPr>
               <a:spcBef>
-                <a:spcPts val="200"/>
+                <a:spcPts val="800"/>
               </a:spcBef>
-              <a:defRPr sz="1000">
+            </a:pPr>
+            <a:r>
+              <a:rPr b="1" sz="1100">
                 <a:solidFill>
                   <a:srgbClr val="1E293B"/>
                 </a:solidFill>
-              </a:defRPr>
-            </a:pPr>
-            <a:r>
-              <a:t>Nghiên cứu tổ chức thông tin dưới dạng mạng xã hội động giữa những người giữ bí mật. Kiểm tra xem các bất biến chính sách bảo vệ bí mật có được duy trì qua các biến động cấu trúc mạng và các sự cố Byzantine hay không.</a:t>
+              </a:rPr>
+              <a:t>• Bản chất công trình: </a:t>
+            </a:r>
+            <a:r>
+              <a:rPr sz="1050">
+                <a:solidFill>
+                  <a:srgbClr val="475569"/>
+                </a:solidFill>
+              </a:rPr>
+              <a:t>Bài báo của TS. Harry Halpin là một luận văn tổng quan triết học và phân tích nhận thức luận, không phải là một công trình kỹ thuật phần mềm.</a:t>
+            </a:r>
+          </a:p>
+          <a:p>
+            <a:pPr>
+              <a:spcBef>
+                <a:spcPts val="800"/>
+              </a:spcBef>
+            </a:pPr>
+            <a:r>
+              <a:rPr b="1" sz="1100">
+                <a:solidFill>
+                  <a:srgbClr val="1E293B"/>
+                </a:solidFill>
+              </a:rPr>
+              <a:t>• Không có tài nguyên phần mềm: </a:t>
+            </a:r>
+            <a:r>
+              <a:rPr sz="1050">
+                <a:solidFill>
+                  <a:srgbClr val="475569"/>
+                </a:solidFill>
+              </a:rPr>
+              <a:t>Bài báo HOÀN TOÀN KHÔNG có mã nguồn triển khai, không có tập dữ liệu thực nghiệm, không có các bảng đo thời gian (ms) hay dung lượng benchmark.</a:t>
+            </a:r>
+          </a:p>
+          <a:p>
+            <a:pPr>
+              <a:spcBef>
+                <a:spcPts val="800"/>
+              </a:spcBef>
+            </a:pPr>
+            <a:r>
+              <a:rPr b="1" sz="1100">
+                <a:solidFill>
+                  <a:srgbClr val="1E293B"/>
+                </a:solidFill>
+              </a:rPr>
+              <a:t>• Phương pháp thẩm định: </a:t>
+            </a:r>
+            <a:r>
+              <a:rPr sz="1050">
+                <a:solidFill>
+                  <a:srgbClr val="475569"/>
+                </a:solidFill>
+              </a:rPr>
+              <a:t>Nhóm sinh viên thực hiện thẩm định học thuật (Scholarly Audit) đối chiếu toàn bộ 17 trang bản in PDF, 7 mục nội dung và 134 tài liệu tham khảo.</a:t>
+            </a:r>
+          </a:p>
+          <a:p>
+            <a:pPr>
+              <a:spcBef>
+                <a:spcPts val="800"/>
+              </a:spcBef>
+            </a:pPr>
+            <a:r>
+              <a:rPr b="1" sz="1100">
+                <a:solidFill>
+                  <a:srgbClr val="1E293B"/>
+                </a:solidFill>
+              </a:rPr>
+              <a:t>• Tính trung thực học thuật: </a:t>
+            </a:r>
+            <a:r>
+              <a:rPr sz="1050">
+                <a:solidFill>
+                  <a:srgbClr val="475569"/>
+                </a:solidFill>
+              </a:rPr>
+              <a:t>Không bịa đặt số liệu gốc của tác giả; không tuyên bố 'tái lập 100% benchmark bài báo' khi tác giả không công bố benchmark.</a:t>
             </a:r>
           </a:p>
         </p:txBody>
@@ -4052,18 +3753,18 @@
         </p:nvSpPr>
         <p:spPr>
           <a:xfrm>
-            <a:off x="731520" y="2770632"/>
-            <a:ext cx="10728655" cy="960120"/>
+            <a:off x="6217920" y="1691640"/>
+            <a:ext cx="5212080" cy="4389120"/>
           </a:xfrm>
           <a:prstGeom prst="roundRect">
             <a:avLst/>
           </a:prstGeom>
           <a:solidFill>
-            <a:srgbClr val="F8FAFC"/>
+            <a:srgbClr val="ECFDF5"/>
           </a:solidFill>
-          <a:ln w="12700">
+          <a:ln>
             <a:solidFill>
-              <a:srgbClr val="BFDBFE"/>
+              <a:srgbClr val="A7F3D0"/>
             </a:solidFill>
           </a:ln>
         </p:spPr>
@@ -4097,8 +3798,8 @@
         </p:nvSpPr>
         <p:spPr>
           <a:xfrm>
-            <a:off x="914400" y="2825496"/>
-            <a:ext cx="10362895" cy="841248"/>
+            <a:off x="6400800" y="1828800"/>
+            <a:ext cx="4846320" cy="4114800"/>
           </a:xfrm>
           <a:prstGeom prst="rect">
             <a:avLst/>
@@ -4112,262 +3813,113 @@
           <a:lstStyle/>
           <a:p>
             <a:pPr>
-              <a:defRPr sz="1150" b="1">
-                <a:solidFill>
-                  <a:srgbClr val="1E40AF"/>
-                </a:solidFill>
-              </a:defRPr>
-            </a:pPr>
-            <a:r>
-              <a:t>Câu hỏi 2: Mô Hình Hóa Năng Lực và Liên Minh Đối Thủ Bằng Thống Kê</a:t>
-            </a:r>
-          </a:p>
-          <a:p>
-            <a:pPr>
-              <a:defRPr sz="950" i="1">
-                <a:solidFill>
-                  <a:srgbClr val="64748B"/>
-                </a:solidFill>
-              </a:defRPr>
-            </a:pPr>
-            <a:r>
-              <a:t>"By incorporating statistics, can new models of the adversary take into account more accurate data about their capabilities?"</a:t>
+              <a:defRPr sz="1300" b="1">
+                <a:solidFill>
+                  <a:srgbClr val="059669"/>
+                </a:solidFill>
+              </a:defRPr>
+            </a:pPr>
+            <a:r>
+              <a:t>2. Định Hướng Thí Nghiệm Minh Họa Độc Lập</a:t>
             </a:r>
           </a:p>
           <a:p>
             <a:pPr>
               <a:spcBef>
-                <a:spcPts val="200"/>
+                <a:spcPts val="800"/>
               </a:spcBef>
-              <a:defRPr sz="1000">
+            </a:pPr>
+            <a:r>
+              <a:rPr b="1" sz="1100">
                 <a:solidFill>
                   <a:srgbClr val="1E293B"/>
                 </a:solidFill>
-              </a:defRPr>
-            </a:pPr>
-            <a:r>
-              <a:t>Sử dụng thống kê thực nghiệm và mô phỏng Monte Carlo để mô hình hóa chính xác hơn năng lực đối thủ; phân tích kinh tế chính trị của các liên minh giám sát (liên minh Five Eyes, Anonymous, quan hệ nhà nước - cá nhân).</a:t>
-            </a:r>
-          </a:p>
-        </p:txBody>
-      </p:sp>
-      <p:sp>
-        <p:nvSpPr>
-          <p:cNvPr id="10" name="Rounded Rectangle 9"/>
-          <p:cNvSpPr/>
-          <p:nvPr/>
-        </p:nvSpPr>
-        <p:spPr>
-          <a:xfrm>
-            <a:off x="731520" y="3849624"/>
-            <a:ext cx="10728655" cy="960120"/>
-          </a:xfrm>
-          <a:prstGeom prst="roundRect">
-            <a:avLst/>
-          </a:prstGeom>
-          <a:solidFill>
-            <a:srgbClr val="F8FAFC"/>
-          </a:solidFill>
-          <a:ln w="12700">
-            <a:solidFill>
-              <a:srgbClr val="BFDBFE"/>
-            </a:solidFill>
-          </a:ln>
-        </p:spPr>
-        <p:style>
-          <a:lnRef idx="1">
-            <a:schemeClr val="accent1"/>
-          </a:lnRef>
-          <a:fillRef idx="3">
-            <a:schemeClr val="accent1"/>
-          </a:fillRef>
-          <a:effectRef idx="2">
-            <a:schemeClr val="accent1"/>
-          </a:effectRef>
-          <a:fontRef idx="minor">
-            <a:schemeClr val="lt1"/>
-          </a:fontRef>
-        </p:style>
-        <p:txBody>
-          <a:bodyPr rtlCol="0" anchor="ctr"/>
-          <a:lstStyle/>
-          <a:p>
-            <a:pPr algn="ctr"/>
-          </a:p>
-        </p:txBody>
-      </p:sp>
-      <p:sp>
-        <p:nvSpPr>
-          <p:cNvPr id="11" name="TextBox 10"/>
-          <p:cNvSpPr txBox="1"/>
-          <p:nvPr/>
-        </p:nvSpPr>
-        <p:spPr>
-          <a:xfrm>
-            <a:off x="914400" y="3904488"/>
-            <a:ext cx="10362895" cy="841248"/>
-          </a:xfrm>
-          <a:prstGeom prst="rect">
-            <a:avLst/>
-          </a:prstGeom>
-          <a:noFill/>
-        </p:spPr>
-        <p:txBody>
-          <a:bodyPr wrap="square">
-            <a:spAutoFit/>
-          </a:bodyPr>
-          <a:lstStyle/>
-          <a:p>
-            <a:pPr>
-              <a:defRPr sz="1150" b="1">
-                <a:solidFill>
-                  <a:srgbClr val="1E40AF"/>
-                </a:solidFill>
-              </a:defRPr>
-            </a:pPr>
-            <a:r>
-              <a:t>Câu hỏi 3: Ứng Dụng Phương Pháp Liên Ngành &amp; Hệ Thống Phức Hợp</a:t>
-            </a:r>
-          </a:p>
-          <a:p>
-            <a:pPr>
-              <a:defRPr sz="950" i="1">
-                <a:solidFill>
-                  <a:srgbClr val="64748B"/>
-                </a:solidFill>
-              </a:defRPr>
-            </a:pPr>
-            <a:r>
-              <a:t>"Can cryptography incorporate interdisciplinary methods and insights that can capture the complexity of secure communication?"</a:t>
+              </a:rPr>
+              <a:t>• Mục tiêu thực nghiệm: </a:t>
+            </a:r>
+            <a:r>
+              <a:rPr sz="1050">
+                <a:solidFill>
+                  <a:srgbClr val="475569"/>
+                </a:solidFill>
+              </a:rPr>
+              <a:t>Sinh viên tự xây dựng hệ thống kiểm tra toàn vẹn tệp nhằm chuyển hóa các luận điểm lý thuyết trừu tượng của Halpin thành các kịch bản quan sát được.</a:t>
             </a:r>
           </a:p>
           <a:p>
             <a:pPr>
               <a:spcBef>
-                <a:spcPts val="200"/>
+                <a:spcPts val="800"/>
               </a:spcBef>
-              <a:defRPr sz="1000">
+            </a:pPr>
+            <a:r>
+              <a:rPr b="1" sz="1100">
                 <a:solidFill>
                   <a:srgbClr val="1E293B"/>
                 </a:solidFill>
-              </a:defRPr>
-            </a:pPr>
-            <a:r>
-              <a:t>Áp dụng các công cụ từ lý thuyết hệ thống phức hợp, động lực học mạng và dịch tễ học để mô hình hóa sự lan truyền thông tin, nhận diện các điểm chuyển pha (phase shifts) khi bị tấn công.</a:t>
-            </a:r>
-          </a:p>
-        </p:txBody>
-      </p:sp>
-      <p:sp>
-        <p:nvSpPr>
-          <p:cNvPr id="12" name="Rounded Rectangle 11"/>
-          <p:cNvSpPr/>
-          <p:nvPr/>
-        </p:nvSpPr>
-        <p:spPr>
-          <a:xfrm>
-            <a:off x="731520" y="4928616"/>
-            <a:ext cx="10728655" cy="960120"/>
-          </a:xfrm>
-          <a:prstGeom prst="roundRect">
-            <a:avLst/>
-          </a:prstGeom>
-          <a:solidFill>
-            <a:srgbClr val="F8FAFC"/>
-          </a:solidFill>
-          <a:ln w="12700">
-            <a:solidFill>
-              <a:srgbClr val="BFDBFE"/>
-            </a:solidFill>
-          </a:ln>
-        </p:spPr>
-        <p:style>
-          <a:lnRef idx="1">
-            <a:schemeClr val="accent1"/>
-          </a:lnRef>
-          <a:fillRef idx="3">
-            <a:schemeClr val="accent1"/>
-          </a:fillRef>
-          <a:effectRef idx="2">
-            <a:schemeClr val="accent1"/>
-          </a:effectRef>
-          <a:fontRef idx="minor">
-            <a:schemeClr val="lt1"/>
-          </a:fontRef>
-        </p:style>
-        <p:txBody>
-          <a:bodyPr rtlCol="0" anchor="ctr"/>
-          <a:lstStyle/>
-          <a:p>
-            <a:pPr algn="ctr"/>
-          </a:p>
-        </p:txBody>
-      </p:sp>
-      <p:sp>
-        <p:nvSpPr>
-          <p:cNvPr id="13" name="TextBox 12"/>
-          <p:cNvSpPr txBox="1"/>
-          <p:nvPr/>
-        </p:nvSpPr>
-        <p:spPr>
-          <a:xfrm>
-            <a:off x="914400" y="4983480"/>
-            <a:ext cx="10362895" cy="841248"/>
-          </a:xfrm>
-          <a:prstGeom prst="rect">
-            <a:avLst/>
-          </a:prstGeom>
-          <a:noFill/>
-        </p:spPr>
-        <p:txBody>
-          <a:bodyPr wrap="square">
-            <a:spAutoFit/>
-          </a:bodyPr>
-          <a:lstStyle/>
-          <a:p>
-            <a:pPr>
-              <a:defRPr sz="1150" b="1">
-                <a:solidFill>
-                  <a:srgbClr val="1E40AF"/>
-                </a:solidFill>
-              </a:defRPr>
-            </a:pPr>
-            <a:r>
-              <a:t>Câu hỏi 4: Triết Học Giúp Tái Cấu Trúc Các Giả Định Ngầm Định</a:t>
-            </a:r>
-          </a:p>
-          <a:p>
-            <a:pPr>
-              <a:defRPr sz="950" i="1">
-                <a:solidFill>
-                  <a:srgbClr val="64748B"/>
-                </a:solidFill>
-              </a:defRPr>
-            </a:pPr>
-            <a:r>
-              <a:t>"Will philosophy let us make explicit and then reformulate the hidden assumptions of cryptographic communication, and vice versa?"</a:t>
+              </a:rPr>
+              <a:t>• Minh họa trực quan: </a:t>
+            </a:r>
+            <a:r>
+              <a:rPr sz="1050">
+                <a:solidFill>
+                  <a:srgbClr val="475569"/>
+                </a:solidFill>
+              </a:rPr>
+              <a:t>Thiết kế các thí nghiệm minh họa: sự bất lực của mã tuyến tính CRC32 trước kẻ thù toán học; can thiệp đường truyền Dolev-Yao; rò rỉ siêu dữ liệu kênh truyền.</a:t>
             </a:r>
           </a:p>
           <a:p>
             <a:pPr>
               <a:spcBef>
-                <a:spcPts val="200"/>
+                <a:spcPts val="800"/>
               </a:spcBef>
-              <a:defRPr sz="1000">
+            </a:pPr>
+            <a:r>
+              <a:rPr b="1" sz="1100">
                 <a:solidFill>
                   <a:srgbClr val="1E293B"/>
                 </a:solidFill>
-              </a:defRPr>
-            </a:pPr>
-            <a:r>
-              <a:t>Vận dụng triết học để chất vấn các giả định nền tảng của Shannon; xem xét ranh giới động giữa con người và môi trường kỹ thuật số theo Giả thuyết Tâm trí Mở rộng (Extended Mind Hypothesis).</a:t>
-            </a:r>
-          </a:p>
-        </p:txBody>
-      </p:sp>
-      <p:sp>
-        <p:nvSpPr>
-          <p:cNvPr id="14" name="TextBox 13"/>
+              </a:rPr>
+              <a:t>• Phân định ranh giới rõ ràng: </a:t>
+            </a:r>
+            <a:r>
+              <a:rPr sz="1050">
+                <a:solidFill>
+                  <a:srgbClr val="475569"/>
+                </a:solidFill>
+              </a:rPr>
+              <a:t>Mã nguồn và hệ thống kiểm tra toàn vẹn là đóng góp kỹ thuật độc lập của sinh viên; không được nhầm lẫn là thuật toán do Halpin đề xuất.</a:t>
+            </a:r>
+          </a:p>
+          <a:p>
+            <a:pPr>
+              <a:spcBef>
+                <a:spcPts val="800"/>
+              </a:spcBef>
+            </a:pPr>
+            <a:r>
+              <a:rPr b="1" sz="1100">
+                <a:solidFill>
+                  <a:srgbClr val="1E293B"/>
+                </a:solidFill>
+              </a:rPr>
+              <a:t>• Báo cáo khoa học nghiêm túc: </a:t>
+            </a:r>
+            <a:r>
+              <a:rPr sz="1050">
+                <a:solidFill>
+                  <a:srgbClr val="475569"/>
+                </a:solidFill>
+              </a:rPr>
+              <a:t>Tất cả kết quả đo đạc được lưu vết kiểm toán tại file MIDTERM_CODE_AUDIT.md.</a:t>
+            </a:r>
+          </a:p>
+        </p:txBody>
+      </p:sp>
+      <p:sp>
+        <p:nvSpPr>
+          <p:cNvPr id="10" name="TextBox 9"/>
           <p:cNvSpPr txBox="1"/>
           <p:nvPr/>
         </p:nvSpPr>
@@ -4395,7 +3947,7 @@
               </a:defRPr>
             </a:pPr>
             <a:r>
-              <a:t>Trích dẫn nguyên văn 4 câu hỏi nghiên cứu mở: Harry Halpin (2025), Section 7, tr. 12–14.</a:t>
+              <a:t>Báo cáo phân định phương pháp luận của nhóm nghiên cứu đề tài DT005.</a:t>
             </a:r>
           </a:p>
         </p:txBody>
@@ -4510,7 +4062,7 @@
               </a:defRPr>
             </a:pPr>
             <a:r>
-              <a:t>ĐÁNH GIÁ PHƯƠNG PHÁP LUẬN &amp; HƯỚNG TIẾP CẬN THỰC NGHIỆM</a:t>
+              <a:t>SƠ ĐỒ 4: PHÂN ĐỊNH LÝ THUYẾT &amp; THÍ NGHIỆM ĐỘC LẬP</a:t>
             </a:r>
           </a:p>
         </p:txBody>
@@ -4545,7 +4097,7 @@
               </a:defRPr>
             </a:pPr>
             <a:r>
-              <a:t>PHƯƠNG PHÁP LUẬN &amp; KHẢ NĂNG TÁI LẬP BÀI BÁO</a:t>
+              <a:t>MINH HỌA PAPER-TO-CODE ĐỘC LẬP &amp; GIỚI HẠN DIỄN GIẢI</a:t>
             </a:r>
           </a:p>
         </p:txBody>
@@ -4580,7 +4132,7 @@
               </a:defRPr>
             </a:pPr>
             <a:r>
-              <a:t>Làm rõ tính khả thi tái lập đối với một công trình triết học và định hướng thí nghiệm độc lập</a:t>
+              <a:t>Đối sánh minh bạch giữa các luận điểm bài báo và thí nghiệm minh họa do sinh viên xây dựng</a:t>
             </a:r>
           </a:p>
         </p:txBody>
@@ -4594,17 +4146,17 @@
         <p:spPr>
           <a:xfrm>
             <a:off x="731520" y="1691640"/>
-            <a:ext cx="5212080" cy="4389120"/>
+            <a:ext cx="5212080" cy="777240"/>
           </a:xfrm>
           <a:prstGeom prst="roundRect">
             <a:avLst/>
           </a:prstGeom>
           <a:solidFill>
-            <a:srgbClr val="FFFBEB"/>
+            <a:srgbClr val="F8FAFC"/>
           </a:solidFill>
-          <a:ln w="12700">
+          <a:ln>
             <a:solidFill>
-              <a:srgbClr val="FDE68A"/>
+              <a:srgbClr val="BFDBFE"/>
             </a:solidFill>
           </a:ln>
         </p:spPr>
@@ -4638,8 +4190,8 @@
         </p:nvSpPr>
         <p:spPr>
           <a:xfrm>
-            <a:off x="914400" y="1828800"/>
-            <a:ext cx="4846320" cy="4114800"/>
+            <a:off x="822960" y="1737360"/>
+            <a:ext cx="5029200" cy="685800"/>
           </a:xfrm>
           <a:prstGeom prst="rect">
             <a:avLst/>
@@ -4647,112 +4199,32 @@
           <a:noFill/>
         </p:spPr>
         <p:txBody>
-          <a:bodyPr wrap="square">
+          <a:bodyPr wrap="none">
             <a:spAutoFit/>
           </a:bodyPr>
           <a:lstStyle/>
           <a:p>
             <a:pPr>
-              <a:defRPr sz="1300" b="1">
-                <a:solidFill>
-                  <a:srgbClr val="D97706"/>
-                </a:solidFill>
-              </a:defRPr>
-            </a:pPr>
-            <a:r>
-              <a:t>1. Đánh Giá Khả Năng Tái Lập (Replication Feasibility)</a:t>
-            </a:r>
-          </a:p>
-          <a:p>
-            <a:pPr>
-              <a:spcBef>
-                <a:spcPts val="800"/>
-              </a:spcBef>
-            </a:pPr>
-            <a:r>
-              <a:rPr b="1" sz="1100">
-                <a:solidFill>
-                  <a:srgbClr val="1E293B"/>
-                </a:solidFill>
-              </a:rPr>
-              <a:t>• Bản chất công trình: </a:t>
-            </a:r>
-            <a:r>
-              <a:rPr sz="1050">
-                <a:solidFill>
-                  <a:srgbClr val="475569"/>
-                </a:solidFill>
-              </a:rPr>
-              <a:t>Bài báo của TS. Harry Halpin là một luận văn tổng quan triết học và phân tích nhận thức luận, không phải là một công trình kỹ thuật phần mềm.</a:t>
-            </a:r>
-          </a:p>
-          <a:p>
-            <a:pPr>
-              <a:spcBef>
-                <a:spcPts val="800"/>
-              </a:spcBef>
-            </a:pPr>
-            <a:r>
-              <a:rPr b="1" sz="1100">
-                <a:solidFill>
-                  <a:srgbClr val="1E293B"/>
-                </a:solidFill>
-              </a:rPr>
-              <a:t>• Không có tài nguyên phần mềm: </a:t>
-            </a:r>
-            <a:r>
-              <a:rPr sz="1050">
-                <a:solidFill>
-                  <a:srgbClr val="475569"/>
-                </a:solidFill>
-              </a:rPr>
-              <a:t>Bài báo HOÀN TOÀN KHÔNG có mã nguồn triển khai, không có tập dữ liệu thực nghiệm, không có các bảng đo thời gian (ms) hay dung lượng benchmark.</a:t>
-            </a:r>
-          </a:p>
-          <a:p>
-            <a:pPr>
-              <a:spcBef>
-                <a:spcPts val="800"/>
-              </a:spcBef>
-            </a:pPr>
-            <a:r>
-              <a:rPr b="1" sz="1100">
-                <a:solidFill>
-                  <a:srgbClr val="1E293B"/>
-                </a:solidFill>
-              </a:rPr>
-              <a:t>• Phương pháp thẩm định: </a:t>
-            </a:r>
-            <a:r>
-              <a:rPr sz="1050">
-                <a:solidFill>
-                  <a:srgbClr val="475569"/>
-                </a:solidFill>
-              </a:rPr>
-              <a:t>Nhóm sinh viên thực hiện thẩm định học thuật (Scholarly Audit) đối chiếu toàn bộ 17 trang bản in PDF, 7 mục nội dung và 134 tài liệu tham khảo.</a:t>
-            </a:r>
-          </a:p>
-          <a:p>
-            <a:pPr>
-              <a:spcBef>
-                <a:spcPts val="800"/>
-              </a:spcBef>
-            </a:pPr>
-            <a:r>
-              <a:rPr b="1" sz="1100">
-                <a:solidFill>
-                  <a:srgbClr val="1E293B"/>
-                </a:solidFill>
-              </a:rPr>
-              <a:t>• Tính trung thực học thuật: </a:t>
-            </a:r>
-            <a:r>
-              <a:rPr sz="1050">
-                <a:solidFill>
-                  <a:srgbClr val="475569"/>
-                </a:solidFill>
-              </a:rPr>
-              <a:t>Không bịa đặt số liệu gốc của tác giả; không tuyên bố 'tái lập 100% benchmark bài báo' khi tác giả không công bố benchmark.</a:t>
+              <a:defRPr sz="1100" b="1">
+                <a:solidFill>
+                  <a:srgbClr val="1E40AF"/>
+                </a:solidFill>
+              </a:defRPr>
+            </a:pPr>
+            <a:r>
+              <a:t>LUỒNG LÝ THUYẾT BÀI BÁO (HARRY HALPIN 2025)</a:t>
+            </a:r>
+          </a:p>
+          <a:p>
+            <a:pPr>
+              <a:defRPr sz="950">
+                <a:solidFill>
+                  <a:srgbClr val="64748B"/>
+                </a:solidFill>
+              </a:defRPr>
+            </a:pPr>
+            <a:r>
+              <a:t>Khảo sát triết học, phê phán trừu tượng hóa, phân tích Dolev-Yao &amp; NSA</a:t>
             </a:r>
           </a:p>
         </p:txBody>
@@ -4766,7 +4238,7 @@
         <p:spPr>
           <a:xfrm>
             <a:off x="6217920" y="1691640"/>
-            <a:ext cx="5212080" cy="4389120"/>
+            <a:ext cx="5212080" cy="777240"/>
           </a:xfrm>
           <a:prstGeom prst="roundRect">
             <a:avLst/>
@@ -4774,7 +4246,7 @@
           <a:solidFill>
             <a:srgbClr val="ECFDF5"/>
           </a:solidFill>
-          <a:ln w="12700">
+          <a:ln>
             <a:solidFill>
               <a:srgbClr val="A7F3D0"/>
             </a:solidFill>
@@ -4810,8 +4282,100 @@
         </p:nvSpPr>
         <p:spPr>
           <a:xfrm>
-            <a:off x="6400800" y="1828800"/>
-            <a:ext cx="4846320" cy="4114800"/>
+            <a:off x="6309360" y="1737360"/>
+            <a:ext cx="5029200" cy="685800"/>
+          </a:xfrm>
+          <a:prstGeom prst="rect">
+            <a:avLst/>
+          </a:prstGeom>
+          <a:noFill/>
+        </p:spPr>
+        <p:txBody>
+          <a:bodyPr wrap="none">
+            <a:spAutoFit/>
+          </a:bodyPr>
+          <a:lstStyle/>
+          <a:p>
+            <a:pPr>
+              <a:defRPr sz="1100" b="1">
+                <a:solidFill>
+                  <a:srgbClr val="059669"/>
+                </a:solidFill>
+              </a:defRPr>
+            </a:pPr>
+            <a:r>
+              <a:t>LUỒNG THỰC NGHIỆM ĐỘC LẬP (SINH VIÊN DT005)</a:t>
+            </a:r>
+          </a:p>
+          <a:p>
+            <a:pPr>
+              <a:defRPr sz="950">
+                <a:solidFill>
+                  <a:srgbClr val="64748B"/>
+                </a:solidFill>
+              </a:defRPr>
+            </a:pPr>
+            <a:r>
+              <a:t>Hệ thống kiểm tra toàn vẹn tệp, 7 thí nghiệm minh họa, đối kháng Red/Blue</a:t>
+            </a:r>
+          </a:p>
+        </p:txBody>
+      </p:sp>
+      <p:sp>
+        <p:nvSpPr>
+          <p:cNvPr id="10" name="Rounded Rectangle 9"/>
+          <p:cNvSpPr/>
+          <p:nvPr/>
+        </p:nvSpPr>
+        <p:spPr>
+          <a:xfrm>
+            <a:off x="731520" y="2606040"/>
+            <a:ext cx="10728655" cy="3520440"/>
+          </a:xfrm>
+          <a:prstGeom prst="roundRect">
+            <a:avLst/>
+          </a:prstGeom>
+          <a:solidFill>
+            <a:srgbClr val="F8FAFC"/>
+          </a:solidFill>
+          <a:ln>
+            <a:solidFill>
+              <a:srgbClr val="E2E8F0"/>
+            </a:solidFill>
+          </a:ln>
+        </p:spPr>
+        <p:style>
+          <a:lnRef idx="1">
+            <a:schemeClr val="accent1"/>
+          </a:lnRef>
+          <a:fillRef idx="3">
+            <a:schemeClr val="accent1"/>
+          </a:fillRef>
+          <a:effectRef idx="2">
+            <a:schemeClr val="accent1"/>
+          </a:effectRef>
+          <a:fontRef idx="minor">
+            <a:schemeClr val="lt1"/>
+          </a:fontRef>
+        </p:style>
+        <p:txBody>
+          <a:bodyPr rtlCol="0" anchor="ctr"/>
+          <a:lstStyle/>
+          <a:p>
+            <a:pPr algn="ctr"/>
+          </a:p>
+        </p:txBody>
+      </p:sp>
+      <p:sp>
+        <p:nvSpPr>
+          <p:cNvPr id="11" name="TextBox 10"/>
+          <p:cNvSpPr txBox="1"/>
+          <p:nvPr/>
+        </p:nvSpPr>
+        <p:spPr>
+          <a:xfrm>
+            <a:off x="914400" y="2697480"/>
+            <a:ext cx="10362895" cy="3337560"/>
           </a:xfrm>
           <a:prstGeom prst="rect">
             <a:avLst/>
@@ -4825,113 +4389,183 @@
           <a:lstStyle/>
           <a:p>
             <a:pPr>
-              <a:defRPr sz="1300" b="1">
+              <a:defRPr sz="1200" b="1">
+                <a:solidFill>
+                  <a:srgbClr val="0F172A"/>
+                </a:solidFill>
+              </a:defRPr>
+            </a:pPr>
+            <a:r>
+              <a:t>BẢNG ĐỐI CHIẾU BA MINH HỌA THỰC NGHIỆM TIÊU BIỂU VÀ GIỚI HẠN DIỄN GIẢI</a:t>
+            </a:r>
+          </a:p>
+          <a:p>
+            <a:pPr>
+              <a:spcBef>
+                <a:spcPts val="600"/>
+              </a:spcBef>
+            </a:pPr>
+            <a:r>
+              <a:rPr b="1" sz="1050">
+                <a:solidFill>
+                  <a:srgbClr val="1E40AF"/>
+                </a:solidFill>
+              </a:rPr>
+              <a:t>1. Noise vs Adversary (Sec. 1 &amp; 2) — </a:t>
+            </a:r>
+            <a:r>
+              <a:rPr sz="1000">
+                <a:solidFill>
+                  <a:srgbClr val="1E293B"/>
+                </a:solidFill>
+              </a:rPr>
+              <a:t>Luận điểm Halpin: Kẻ thù có chủ đích khác với nhiễu ngẫu nhiên; mã tuyến tính CRC32 bất lực. | </a:t>
+            </a:r>
+            <a:r>
+              <a:rPr sz="1000">
+                <a:solidFill>
+                  <a:srgbClr val="475569"/>
+                </a:solidFill>
+              </a:rPr>
+              <a:t>Code DT005: Code giải mã bù đại số trên trường nhị phân GF(2), tìm 4 byte bù qua mặt CRC32 100%; SHA-256 phát hiện tức thì. </a:t>
+            </a:r>
+          </a:p>
+          <a:p>
+            <a:pPr>
+              <a:spcBef>
+                <a:spcPts val="200"/>
+              </a:spcBef>
+            </a:pPr>
+            <a:r>
+              <a:rPr b="1" sz="950">
                 <a:solidFill>
                   <a:srgbClr val="059669"/>
                 </a:solidFill>
-              </a:defRPr>
-            </a:pPr>
-            <a:r>
-              <a:t>2. Định Hướng Thí Nghiệm Minh Họa Độc Lập</a:t>
+              </a:rPr>
+              <a:t>   ► Bằng chứng đã chạy: orig_crc == forged_crc (Trùng 100%), SHA-256 lệch hoàn toàn.  |  </a:t>
+            </a:r>
+            <a:r>
+              <a:rPr sz="950">
+                <a:solidFill>
+                  <a:srgbClr val="D97706"/>
+                </a:solidFill>
+              </a:rPr>
+              <a:t>▲ Giới hạn diễn giải: Minh họa tính phi tuyến của hàm băm; không chứng minh an toàn toàn diện cho toàn hệ thống.</a:t>
             </a:r>
           </a:p>
           <a:p>
             <a:pPr>
               <a:spcBef>
-                <a:spcPts val="800"/>
+                <a:spcPts val="600"/>
               </a:spcBef>
             </a:pPr>
             <a:r>
-              <a:rPr b="1" sz="1100">
+              <a:rPr b="1" sz="1050">
+                <a:solidFill>
+                  <a:srgbClr val="1E40AF"/>
+                </a:solidFill>
+              </a:rPr>
+              <a:t>2. Node-Leaf Confusion (Sec. 5) — </a:t>
+            </a:r>
+            <a:r>
+              <a:rPr sz="1000">
                 <a:solidFill>
                   <a:srgbClr val="1E293B"/>
                 </a:solidFill>
               </a:rPr>
-              <a:t>• Mục tiêu thực nghiệm: </a:t>
-            </a:r>
-            <a:r>
-              <a:rPr sz="1050">
+              <a:t>Luận điểm Halpin: Ghép chuỗi thô H(L||R) gây va chạm tiền ảnh cấp hai cấu trúc (nút cha bị nhầm với nút lá). | </a:t>
+            </a:r>
+            <a:r>
+              <a:rPr sz="1000">
                 <a:solidFill>
                   <a:srgbClr val="475569"/>
                 </a:solidFill>
               </a:rPr>
-              <a:t>Sinh viên tự xây dựng hệ thống kiểm tra toàn vẹn tệp nhằm chuyển hóa các luận điểm lý thuyết trừu tượng của Halpin thành các kịch bản quan sát được.</a:t>
+              <a:t>Code DT005: Triển khai phân tách miền chuẩn RFC 6962: Tiền tố 0x00 cho lá, 0x01 cho nhánh nội bộ. </a:t>
             </a:r>
           </a:p>
           <a:p>
             <a:pPr>
               <a:spcBef>
-                <a:spcPts val="800"/>
+                <a:spcPts val="200"/>
               </a:spcBef>
             </a:pPr>
             <a:r>
-              <a:rPr b="1" sz="1100">
+              <a:rPr b="1" sz="950">
+                <a:solidFill>
+                  <a:srgbClr val="059669"/>
+                </a:solidFill>
+              </a:rPr>
+              <a:t>   ► Bằng chứng đã chạy: Standard Merkle Tree ghép thô bị va chạm; HD-Merkle phân tách miền chặn đứng hoàn toàn.  |  </a:t>
+            </a:r>
+            <a:r>
+              <a:rPr sz="950">
+                <a:solidFill>
+                  <a:srgbClr val="D97706"/>
+                </a:solidFill>
+              </a:rPr>
+              <a:t>▲ Giới hạn diễn giải: Chỉ giải quyết va chạm cấu trúc tầng cây; không loại trừ va chạm ngẫu nhiên 2^256 của SHA-256.</a:t>
+            </a:r>
+          </a:p>
+          <a:p>
+            <a:pPr>
+              <a:spcBef>
+                <a:spcPts val="600"/>
+              </a:spcBef>
+            </a:pPr>
+            <a:r>
+              <a:rPr b="1" sz="1050">
+                <a:solidFill>
+                  <a:srgbClr val="1E40AF"/>
+                </a:solidFill>
+              </a:rPr>
+              <a:t>3. Timing Side-Channel (Sec. 5) — </a:t>
+            </a:r>
+            <a:r>
+              <a:rPr sz="1000">
                 <a:solidFill>
                   <a:srgbClr val="1E293B"/>
                 </a:solidFill>
               </a:rPr>
-              <a:t>• Minh họa trực quan: </a:t>
-            </a:r>
-            <a:r>
-              <a:rPr sz="1050">
+              <a:t>Luận điểm Halpin: Rò rỉ thông tin qua thời gian so sánh chuỗi (Early-return comparison leak - Kocher 1996). | </a:t>
+            </a:r>
+            <a:r>
+              <a:rPr sz="1000">
                 <a:solidFill>
                   <a:srgbClr val="475569"/>
                 </a:solidFill>
               </a:rPr>
-              <a:t>Thiết kế các thí nghiệm minh họa: sự bất lực của mã tuyến tính CRC32 trước kẻ thù toán học; can thiệp đường truyền Dolev-Yao; rò rỉ siêu dữ liệu kênh truyền.</a:t>
+              <a:t>Code DT005: Khảo sát đo lường 5 vòng so sánh chuỗi naive vs hàm thời gian hằng số hmac.compare_digest. </a:t>
             </a:r>
           </a:p>
           <a:p>
             <a:pPr>
               <a:spcBef>
-                <a:spcPts val="800"/>
+                <a:spcPts val="200"/>
               </a:spcBef>
             </a:pPr>
             <a:r>
-              <a:rPr b="1" sz="1100">
-                <a:solidFill>
-                  <a:srgbClr val="1E293B"/>
-                </a:solidFill>
-              </a:rPr>
-              <a:t>• Phân định ranh giới rõ ràng: </a:t>
-            </a:r>
-            <a:r>
-              <a:rPr sz="1050">
-                <a:solidFill>
-                  <a:srgbClr val="475569"/>
-                </a:solidFill>
-              </a:rPr>
-              <a:t>Mã nguồn và hệ thống kiểm tra toàn vẹn là đóng góp kỹ thuật độc lập của sinh viên; không được nhầm lẫn là thuật toán do Halpin đề xuất.</a:t>
-            </a:r>
-          </a:p>
-          <a:p>
-            <a:pPr>
-              <a:spcBef>
-                <a:spcPts val="800"/>
-              </a:spcBef>
-            </a:pPr>
-            <a:r>
-              <a:rPr b="1" sz="1100">
-                <a:solidFill>
-                  <a:srgbClr val="1E293B"/>
-                </a:solidFill>
-              </a:rPr>
-              <a:t>• Báo cáo khoa học nghiêm túc: </a:t>
-            </a:r>
-            <a:r>
-              <a:rPr sz="1050">
-                <a:solidFill>
-                  <a:srgbClr val="475569"/>
-                </a:solidFill>
-              </a:rPr>
-              <a:t>Tất cả kết quả đo đạc được lưu vết kiểm toán tại file MIDTERM_CODE_AUDIT.md.</a:t>
-            </a:r>
-          </a:p>
-        </p:txBody>
-      </p:sp>
-      <p:sp>
-        <p:nvSpPr>
-          <p:cNvPr id="10" name="TextBox 9"/>
+              <a:rPr b="1" sz="950">
+                <a:solidFill>
+                  <a:srgbClr val="059669"/>
+                </a:solidFill>
+              </a:rPr>
+              <a:t>   ► Bằng chứng đã chạy: Naive so sánh tuần tự lộ độ lệch trung vị ~0.08 µs; hmac.compare_digest triệt tiêu độ lệch.  |  </a:t>
+            </a:r>
+            <a:r>
+              <a:rPr sz="950">
+                <a:solidFill>
+                  <a:srgbClr val="D97706"/>
+                </a:solidFill>
+              </a:rPr>
+              <a:t>▲ Giới hạn diễn giải: Phép đo trên Python máy đơn có jitter; chỉ minh họa mức thư viện C, không chứng minh miễn nhiễm kênh kề phần cứng.</a:t>
+            </a:r>
+          </a:p>
+        </p:txBody>
+      </p:sp>
+      <p:sp>
+        <p:nvSpPr>
+          <p:cNvPr id="12" name="TextBox 11"/>
           <p:cNvSpPr txBox="1"/>
           <p:nvPr/>
         </p:nvSpPr>
@@ -4959,7 +4593,7 @@
               </a:defRPr>
             </a:pPr>
             <a:r>
-              <a:t>Báo cáo phân định phương pháp luận của nhóm nghiên cứu đề tài DT005.</a:t>
+              <a:t>Sơ đồ và bảng đối chiếu do sinh viên tự xây dựng; chi tiết mã nguồn lưu tại MIDTERM_CODE_AUDIT.md.</a:t>
             </a:r>
           </a:p>
         </p:txBody>
@@ -4997,7 +4631,7 @@
             <a:avLst/>
           </a:prstGeom>
           <a:solidFill>
-            <a:srgbClr val="FFFFFF"/>
+            <a:srgbClr val="0F172A"/>
           </a:solidFill>
           <a:ln>
             <a:noFill/>
@@ -5027,367 +4661,14 @@
       </p:sp>
       <p:sp>
         <p:nvSpPr>
-          <p:cNvPr id="3" name="Rounded Rectangle 2"/>
-          <p:cNvSpPr/>
-          <p:nvPr/>
-        </p:nvSpPr>
-        <p:spPr>
-          <a:xfrm>
-            <a:off x="731520" y="365760"/>
-            <a:ext cx="4114800" cy="320040"/>
-          </a:xfrm>
-          <a:prstGeom prst="roundRect">
-            <a:avLst/>
-          </a:prstGeom>
-          <a:solidFill>
-            <a:srgbClr val="EFF6FF"/>
-          </a:solidFill>
-          <a:ln w="12700">
-            <a:solidFill>
-              <a:srgbClr val="BFDBFE"/>
-            </a:solidFill>
-          </a:ln>
-        </p:spPr>
-        <p:style>
-          <a:lnRef idx="1">
-            <a:schemeClr val="accent1"/>
-          </a:lnRef>
-          <a:fillRef idx="3">
-            <a:schemeClr val="accent1"/>
-          </a:fillRef>
-          <a:effectRef idx="2">
-            <a:schemeClr val="accent1"/>
-          </a:effectRef>
-          <a:fontRef idx="minor">
-            <a:schemeClr val="lt1"/>
-          </a:fontRef>
-        </p:style>
-        <p:txBody>
-          <a:bodyPr rtlCol="0" anchor="ctr" wrap="square"/>
-          <a:lstStyle/>
-          <a:p>
-            <a:pPr algn="ctr">
-              <a:defRPr sz="1000" b="1">
-                <a:solidFill>
-                  <a:srgbClr val="1D4ED8"/>
-                </a:solidFill>
-              </a:defRPr>
-            </a:pPr>
-            <a:r>
-              <a:t>SƠ ĐỒ 4: PHÂN ĐỊNH LÝ THUYẾT &amp; THÍ NGHIỆM ĐỘC LẬP</a:t>
-            </a:r>
-          </a:p>
-        </p:txBody>
-      </p:sp>
-      <p:sp>
-        <p:nvSpPr>
-          <p:cNvPr id="4" name="TextBox 3"/>
+          <p:cNvPr id="3" name="TextBox 2"/>
           <p:cNvSpPr txBox="1"/>
           <p:nvPr/>
         </p:nvSpPr>
         <p:spPr>
           <a:xfrm>
-            <a:off x="731520" y="749808"/>
-            <a:ext cx="10698480" cy="502920"/>
-          </a:xfrm>
-          <a:prstGeom prst="rect">
-            <a:avLst/>
-          </a:prstGeom>
-          <a:noFill/>
-        </p:spPr>
-        <p:txBody>
-          <a:bodyPr wrap="square" lIns="0" rIns="0" tIns="0" bIns="0">
-            <a:spAutoFit/>
-          </a:bodyPr>
-          <a:lstStyle/>
-          <a:p>
-            <a:pPr>
-              <a:defRPr sz="2100" b="1">
-                <a:solidFill>
-                  <a:srgbClr val="0F172A"/>
-                </a:solidFill>
-              </a:defRPr>
-            </a:pPr>
-            <a:r>
-              <a:t>MINH HỌA PAPER-TO-CODE ĐỘC LẬP &amp; GIỚI HẠN DIỄN GIẢI</a:t>
-            </a:r>
-          </a:p>
-        </p:txBody>
-      </p:sp>
-      <p:sp>
-        <p:nvSpPr>
-          <p:cNvPr id="5" name="TextBox 4"/>
-          <p:cNvSpPr txBox="1"/>
-          <p:nvPr/>
-        </p:nvSpPr>
-        <p:spPr>
-          <a:xfrm>
-            <a:off x="731520" y="1261872"/>
-            <a:ext cx="10698480" cy="320040"/>
-          </a:xfrm>
-          <a:prstGeom prst="rect">
-            <a:avLst/>
-          </a:prstGeom>
-          <a:noFill/>
-        </p:spPr>
-        <p:txBody>
-          <a:bodyPr wrap="square" lIns="0" rIns="0" tIns="0" bIns="0">
-            <a:spAutoFit/>
-          </a:bodyPr>
-          <a:lstStyle/>
-          <a:p>
-            <a:pPr>
-              <a:defRPr sz="1200">
-                <a:solidFill>
-                  <a:srgbClr val="475569"/>
-                </a:solidFill>
-              </a:defRPr>
-            </a:pPr>
-            <a:r>
-              <a:t>Đối sánh minh bạch giữa các luận điểm bài báo và thí nghiệm minh họa do sinh viên xây dựng</a:t>
-            </a:r>
-          </a:p>
-        </p:txBody>
-      </p:sp>
-      <p:sp>
-        <p:nvSpPr>
-          <p:cNvPr id="6" name="Rounded Rectangle 5"/>
-          <p:cNvSpPr/>
-          <p:nvPr/>
-        </p:nvSpPr>
-        <p:spPr>
-          <a:xfrm>
-            <a:off x="731520" y="1691640"/>
-            <a:ext cx="5212080" cy="777240"/>
-          </a:xfrm>
-          <a:prstGeom prst="roundRect">
-            <a:avLst/>
-          </a:prstGeom>
-          <a:solidFill>
-            <a:srgbClr val="F8FAFC"/>
-          </a:solidFill>
-          <a:ln w="12700">
-            <a:solidFill>
-              <a:srgbClr val="BFDBFE"/>
-            </a:solidFill>
-          </a:ln>
-        </p:spPr>
-        <p:style>
-          <a:lnRef idx="1">
-            <a:schemeClr val="accent1"/>
-          </a:lnRef>
-          <a:fillRef idx="3">
-            <a:schemeClr val="accent1"/>
-          </a:fillRef>
-          <a:effectRef idx="2">
-            <a:schemeClr val="accent1"/>
-          </a:effectRef>
-          <a:fontRef idx="minor">
-            <a:schemeClr val="lt1"/>
-          </a:fontRef>
-        </p:style>
-        <p:txBody>
-          <a:bodyPr rtlCol="0" anchor="ctr"/>
-          <a:lstStyle/>
-          <a:p>
-            <a:pPr algn="ctr"/>
-          </a:p>
-        </p:txBody>
-      </p:sp>
-      <p:sp>
-        <p:nvSpPr>
-          <p:cNvPr id="7" name="TextBox 6"/>
-          <p:cNvSpPr txBox="1"/>
-          <p:nvPr/>
-        </p:nvSpPr>
-        <p:spPr>
-          <a:xfrm>
-            <a:off x="822960" y="1737360"/>
-            <a:ext cx="5029200" cy="685800"/>
-          </a:xfrm>
-          <a:prstGeom prst="rect">
-            <a:avLst/>
-          </a:prstGeom>
-          <a:noFill/>
-        </p:spPr>
-        <p:txBody>
-          <a:bodyPr wrap="none">
-            <a:spAutoFit/>
-          </a:bodyPr>
-          <a:lstStyle/>
-          <a:p>
-            <a:pPr>
-              <a:defRPr sz="1100" b="1">
-                <a:solidFill>
-                  <a:srgbClr val="1E40AF"/>
-                </a:solidFill>
-              </a:defRPr>
-            </a:pPr>
-            <a:r>
-              <a:t>LUỒNG LÝ THUYẾT BÀI BÁO (HARRY HALPIN 2025)</a:t>
-            </a:r>
-          </a:p>
-          <a:p>
-            <a:pPr>
-              <a:defRPr sz="950">
-                <a:solidFill>
-                  <a:srgbClr val="64748B"/>
-                </a:solidFill>
-              </a:defRPr>
-            </a:pPr>
-            <a:r>
-              <a:t>Khảo sát triết học, phê phán trừu tượng hóa, phân tích Dolev-Yao &amp; NSA</a:t>
-            </a:r>
-          </a:p>
-        </p:txBody>
-      </p:sp>
-      <p:sp>
-        <p:nvSpPr>
-          <p:cNvPr id="8" name="Rounded Rectangle 7"/>
-          <p:cNvSpPr/>
-          <p:nvPr/>
-        </p:nvSpPr>
-        <p:spPr>
-          <a:xfrm>
-            <a:off x="6217920" y="1691640"/>
-            <a:ext cx="5212080" cy="777240"/>
-          </a:xfrm>
-          <a:prstGeom prst="roundRect">
-            <a:avLst/>
-          </a:prstGeom>
-          <a:solidFill>
-            <a:srgbClr val="ECFDF5"/>
-          </a:solidFill>
-          <a:ln w="12700">
-            <a:solidFill>
-              <a:srgbClr val="A7F3D0"/>
-            </a:solidFill>
-          </a:ln>
-        </p:spPr>
-        <p:style>
-          <a:lnRef idx="1">
-            <a:schemeClr val="accent1"/>
-          </a:lnRef>
-          <a:fillRef idx="3">
-            <a:schemeClr val="accent1"/>
-          </a:fillRef>
-          <a:effectRef idx="2">
-            <a:schemeClr val="accent1"/>
-          </a:effectRef>
-          <a:fontRef idx="minor">
-            <a:schemeClr val="lt1"/>
-          </a:fontRef>
-        </p:style>
-        <p:txBody>
-          <a:bodyPr rtlCol="0" anchor="ctr"/>
-          <a:lstStyle/>
-          <a:p>
-            <a:pPr algn="ctr"/>
-          </a:p>
-        </p:txBody>
-      </p:sp>
-      <p:sp>
-        <p:nvSpPr>
-          <p:cNvPr id="9" name="TextBox 8"/>
-          <p:cNvSpPr txBox="1"/>
-          <p:nvPr/>
-        </p:nvSpPr>
-        <p:spPr>
-          <a:xfrm>
-            <a:off x="6309360" y="1737360"/>
-            <a:ext cx="5029200" cy="685800"/>
-          </a:xfrm>
-          <a:prstGeom prst="rect">
-            <a:avLst/>
-          </a:prstGeom>
-          <a:noFill/>
-        </p:spPr>
-        <p:txBody>
-          <a:bodyPr wrap="none">
-            <a:spAutoFit/>
-          </a:bodyPr>
-          <a:lstStyle/>
-          <a:p>
-            <a:pPr>
-              <a:defRPr sz="1100" b="1">
-                <a:solidFill>
-                  <a:srgbClr val="059669"/>
-                </a:solidFill>
-              </a:defRPr>
-            </a:pPr>
-            <a:r>
-              <a:t>LUỒNG THỰC NGHIỆM ĐỘC LẬP (SINH VIÊN DT005)</a:t>
-            </a:r>
-          </a:p>
-          <a:p>
-            <a:pPr>
-              <a:defRPr sz="950">
-                <a:solidFill>
-                  <a:srgbClr val="64748B"/>
-                </a:solidFill>
-              </a:defRPr>
-            </a:pPr>
-            <a:r>
-              <a:t>Hệ thống kiểm tra toàn vẹn tệp, 7 thí nghiệm minh họa, đối kháng Red/Blue</a:t>
-            </a:r>
-          </a:p>
-        </p:txBody>
-      </p:sp>
-      <p:sp>
-        <p:nvSpPr>
-          <p:cNvPr id="10" name="Rounded Rectangle 9"/>
-          <p:cNvSpPr/>
-          <p:nvPr/>
-        </p:nvSpPr>
-        <p:spPr>
-          <a:xfrm>
-            <a:off x="731520" y="2606040"/>
-            <a:ext cx="10728655" cy="3520440"/>
-          </a:xfrm>
-          <a:prstGeom prst="roundRect">
-            <a:avLst/>
-          </a:prstGeom>
-          <a:solidFill>
-            <a:srgbClr val="F8FAFC"/>
-          </a:solidFill>
-          <a:ln w="12700">
-            <a:solidFill>
-              <a:srgbClr val="E2E8F0"/>
-            </a:solidFill>
-          </a:ln>
-        </p:spPr>
-        <p:style>
-          <a:lnRef idx="1">
-            <a:schemeClr val="accent1"/>
-          </a:lnRef>
-          <a:fillRef idx="3">
-            <a:schemeClr val="accent1"/>
-          </a:fillRef>
-          <a:effectRef idx="2">
-            <a:schemeClr val="accent1"/>
-          </a:effectRef>
-          <a:fontRef idx="minor">
-            <a:schemeClr val="lt1"/>
-          </a:fontRef>
-        </p:style>
-        <p:txBody>
-          <a:bodyPr rtlCol="0" anchor="ctr"/>
-          <a:lstStyle/>
-          <a:p>
-            <a:pPr algn="ctr"/>
-          </a:p>
-        </p:txBody>
-      </p:sp>
-      <p:sp>
-        <p:nvSpPr>
-          <p:cNvPr id="11" name="TextBox 10"/>
-          <p:cNvSpPr txBox="1"/>
-          <p:nvPr/>
-        </p:nvSpPr>
-        <p:spPr>
-          <a:xfrm>
-            <a:off x="914400" y="2697480"/>
-            <a:ext cx="10362895" cy="3337560"/>
+            <a:off x="1371600" y="2011680"/>
+            <a:ext cx="9448495" cy="2743200"/>
           </a:xfrm>
           <a:prstGeom prst="rect">
             <a:avLst/>
@@ -5400,212 +4681,60 @@
           </a:bodyPr>
           <a:lstStyle/>
           <a:p>
-            <a:pPr>
-              <a:defRPr sz="1200" b="1">
-                <a:solidFill>
-                  <a:srgbClr val="0F172A"/>
-                </a:solidFill>
-              </a:defRPr>
-            </a:pPr>
-            <a:r>
-              <a:t>BẢNG ĐỐI CHIẾU BA MINH HỌA THỰC NGHIỆM TIÊU BIỂU VÀ GIỚI HẠN DIỄN GIẢI</a:t>
-            </a:r>
-          </a:p>
-          <a:p>
-            <a:pPr>
+            <a:pPr algn="ctr">
+              <a:defRPr sz="1300" b="1">
+                <a:solidFill>
+                  <a:srgbClr val="38BDF8"/>
+                </a:solidFill>
+              </a:defRPr>
+            </a:pPr>
+            <a:r>
+              <a:t>DIỄN TẬP AN NINH MẠNG TRỰC TIẾP</a:t>
+            </a:r>
+          </a:p>
+          <a:p>
+            <a:pPr algn="ctr">
               <a:spcBef>
-                <a:spcPts val="600"/>
+                <a:spcPts val="1600"/>
               </a:spcBef>
-            </a:pPr>
-            <a:r>
-              <a:rPr b="1" sz="1050">
-                <a:solidFill>
-                  <a:srgbClr val="1E40AF"/>
-                </a:solidFill>
-              </a:rPr>
-              <a:t>1. Noise vs Adversary (Sec. 1 &amp; 2) — </a:t>
-            </a:r>
-            <a:r>
-              <a:rPr sz="1000">
-                <a:solidFill>
-                  <a:srgbClr val="1E293B"/>
-                </a:solidFill>
-              </a:rPr>
-              <a:t>Luận điểm Halpin: Kẻ thù có chủ đích khác với nhiễu ngẫu nhiên; mã tuyến tính CRC32 bất lực. | </a:t>
-            </a:r>
-            <a:r>
-              <a:rPr sz="1000">
-                <a:solidFill>
-                  <a:srgbClr val="475569"/>
-                </a:solidFill>
-              </a:rPr>
-              <a:t>Code DT005: Code giải mã bù đại số trên trường nhị phân GF(2), tìm 4 byte bù qua mặt CRC32 100%; SHA-256 phát hiện tức thì. </a:t>
-            </a:r>
-          </a:p>
-          <a:p>
-            <a:pPr>
+              <a:defRPr sz="6400" b="1">
+                <a:solidFill>
+                  <a:srgbClr val="FFFFFF"/>
+                </a:solidFill>
+              </a:defRPr>
+            </a:pPr>
+            <a:r>
+              <a:t>DEMO</a:t>
+            </a:r>
+          </a:p>
+          <a:p>
+            <a:pPr algn="ctr">
               <a:spcBef>
-                <a:spcPts val="200"/>
+                <a:spcPts val="1600"/>
               </a:spcBef>
-            </a:pPr>
-            <a:r>
-              <a:rPr b="1" sz="950">
-                <a:solidFill>
-                  <a:srgbClr val="059669"/>
-                </a:solidFill>
-              </a:rPr>
-              <a:t>   ► Bằng chứng đã chạy: orig_crc == forged_crc (Trùng 100%), SHA-256 lệch hoàn toàn.  |  </a:t>
-            </a:r>
-            <a:r>
-              <a:rPr sz="950">
-                <a:solidFill>
-                  <a:srgbClr val="D97706"/>
-                </a:solidFill>
-              </a:rPr>
-              <a:t>▲ Giới hạn diễn giải: Minh họa tính phi tuyến của hàm băm; không chứng minh an toàn toàn diện cho toàn hệ thống.</a:t>
-            </a:r>
-          </a:p>
-          <a:p>
-            <a:pPr>
+              <a:defRPr sz="1500" b="1">
+                <a:solidFill>
+                  <a:srgbClr val="E2E8F0"/>
+                </a:solidFill>
+              </a:defRPr>
+            </a:pPr>
+            <a:r>
+              <a:t>HỆ THỐNG GIÁM SÁT TOÀN VẸN TỆP &amp; MÔ HÌNH ĐỐI KHÁNG RED TEAM VS BLUE TEAM</a:t>
+            </a:r>
+          </a:p>
+          <a:p>
+            <a:pPr algn="ctr">
               <a:spcBef>
-                <a:spcPts val="600"/>
+                <a:spcPts val="800"/>
               </a:spcBef>
-            </a:pPr>
-            <a:r>
-              <a:rPr b="1" sz="1050">
-                <a:solidFill>
-                  <a:srgbClr val="1E40AF"/>
-                </a:solidFill>
-              </a:rPr>
-              <a:t>2. Node-Leaf Confusion (Sec. 5) — </a:t>
-            </a:r>
-            <a:r>
-              <a:rPr sz="1000">
-                <a:solidFill>
-                  <a:srgbClr val="1E293B"/>
-                </a:solidFill>
-              </a:rPr>
-              <a:t>Luận điểm Halpin: Ghép chuỗi thô H(L||R) gây va chạm tiền ảnh cấp hai cấu trúc (nút cha bị nhầm với nút lá). | </a:t>
-            </a:r>
-            <a:r>
-              <a:rPr sz="1000">
-                <a:solidFill>
-                  <a:srgbClr val="475569"/>
-                </a:solidFill>
-              </a:rPr>
-              <a:t>Code DT005: Triển khai phân tách miền chuẩn RFC 6962: Tiền tố 0x00 cho lá, 0x01 cho nhánh nội bộ. </a:t>
-            </a:r>
-          </a:p>
-          <a:p>
-            <a:pPr>
-              <a:spcBef>
-                <a:spcPts val="200"/>
-              </a:spcBef>
-            </a:pPr>
-            <a:r>
-              <a:rPr b="1" sz="950">
-                <a:solidFill>
-                  <a:srgbClr val="059669"/>
-                </a:solidFill>
-              </a:rPr>
-              <a:t>   ► Bằng chứng đã chạy: Standard Merkle Tree ghép thô bị va chạm; HD-Merkle phân tách miền chặn đứng hoàn toàn.  |  </a:t>
-            </a:r>
-            <a:r>
-              <a:rPr sz="950">
-                <a:solidFill>
-                  <a:srgbClr val="D97706"/>
-                </a:solidFill>
-              </a:rPr>
-              <a:t>▲ Giới hạn diễn giải: Chỉ giải quyết va chạm cấu trúc tầng cây; không loại trừ va chạm ngẫu nhiên 2^256 của SHA-256.</a:t>
-            </a:r>
-          </a:p>
-          <a:p>
-            <a:pPr>
-              <a:spcBef>
-                <a:spcPts val="600"/>
-              </a:spcBef>
-            </a:pPr>
-            <a:r>
-              <a:rPr b="1" sz="1050">
-                <a:solidFill>
-                  <a:srgbClr val="1E40AF"/>
-                </a:solidFill>
-              </a:rPr>
-              <a:t>3. Timing Side-Channel (Sec. 5) — </a:t>
-            </a:r>
-            <a:r>
-              <a:rPr sz="1000">
-                <a:solidFill>
-                  <a:srgbClr val="1E293B"/>
-                </a:solidFill>
-              </a:rPr>
-              <a:t>Luận điểm Halpin: Rò rỉ thông tin qua thời gian so sánh chuỗi (Early-return comparison leak - Kocher 1996). | </a:t>
-            </a:r>
-            <a:r>
-              <a:rPr sz="1000">
-                <a:solidFill>
-                  <a:srgbClr val="475569"/>
-                </a:solidFill>
-              </a:rPr>
-              <a:t>Code DT005: Khảo sát đo lường 5 vòng so sánh chuỗi naive vs hàm thời gian hằng số hmac.compare_digest. </a:t>
-            </a:r>
-          </a:p>
-          <a:p>
-            <a:pPr>
-              <a:spcBef>
-                <a:spcPts val="200"/>
-              </a:spcBef>
-            </a:pPr>
-            <a:r>
-              <a:rPr b="1" sz="950">
-                <a:solidFill>
-                  <a:srgbClr val="059669"/>
-                </a:solidFill>
-              </a:rPr>
-              <a:t>   ► Bằng chứng đã chạy: Naive so sánh tuần tự lộ độ lệch trung vị ~0.08 µs; hmac.compare_digest triệt tiêu độ lệch.  |  </a:t>
-            </a:r>
-            <a:r>
-              <a:rPr sz="950">
-                <a:solidFill>
-                  <a:srgbClr val="D97706"/>
-                </a:solidFill>
-              </a:rPr>
-              <a:t>▲ Giới hạn diễn giải: Phép đo trên Python máy đơn có jitter; chỉ minh họa mức thư viện C, không chứng minh miễn nhiễm kênh kề phần cứng.</a:t>
-            </a:r>
-          </a:p>
-        </p:txBody>
-      </p:sp>
-      <p:sp>
-        <p:nvSpPr>
-          <p:cNvPr id="12" name="TextBox 11"/>
-          <p:cNvSpPr txBox="1"/>
-          <p:nvPr/>
-        </p:nvSpPr>
-        <p:spPr>
-          <a:xfrm>
-            <a:off x="731520" y="6217920"/>
-            <a:ext cx="10698480" cy="365760"/>
-          </a:xfrm>
-          <a:prstGeom prst="rect">
-            <a:avLst/>
-          </a:prstGeom>
-          <a:noFill/>
-        </p:spPr>
-        <p:txBody>
-          <a:bodyPr wrap="none">
-            <a:spAutoFit/>
-          </a:bodyPr>
-          <a:lstStyle/>
-          <a:p>
-            <a:pPr>
-              <a:defRPr sz="1000" i="1">
-                <a:solidFill>
-                  <a:srgbClr val="64748B"/>
-                </a:solidFill>
-              </a:defRPr>
-            </a:pPr>
-            <a:r>
-              <a:t>Sơ đồ và bảng đối chiếu do sinh viên tự xây dựng; chi tiết mã nguồn và kiểm toán lưu tại MIDTERM_CODE_AUDIT.md.</a:t>
+              <a:defRPr sz="1100" i="1">
+                <a:solidFill>
+                  <a:srgbClr val="94A3B8"/>
+                </a:solidFill>
+              </a:defRPr>
+            </a:pPr>
+            <a:r>
+              <a:t>Minh họa thực nghiệm các luận điểm lý thuyết: Can thiệp dữ liệu, Nhập nhằng nút lá RFC 6962, và So sánh chuỗi thời gian hằng số</a:t>
             </a:r>
           </a:p>
         </p:txBody>
@@ -5643,7 +4772,7 @@
             <a:avLst/>
           </a:prstGeom>
           <a:solidFill>
-            <a:srgbClr val="0F172A"/>
+            <a:srgbClr val="FFFFFF"/>
           </a:solidFill>
           <a:ln>
             <a:noFill/>
@@ -5673,14 +4802,416 @@
       </p:sp>
       <p:sp>
         <p:nvSpPr>
-          <p:cNvPr id="3" name="TextBox 2"/>
+          <p:cNvPr id="3" name="Rounded Rectangle 2"/>
+          <p:cNvSpPr/>
+          <p:nvPr/>
+        </p:nvSpPr>
+        <p:spPr>
+          <a:xfrm>
+            <a:off x="731520" y="365760"/>
+            <a:ext cx="4114800" cy="320040"/>
+          </a:xfrm>
+          <a:prstGeom prst="roundRect">
+            <a:avLst/>
+          </a:prstGeom>
+          <a:solidFill>
+            <a:srgbClr val="EFF6FF"/>
+          </a:solidFill>
+          <a:ln w="12700">
+            <a:solidFill>
+              <a:srgbClr val="BFDBFE"/>
+            </a:solidFill>
+          </a:ln>
+        </p:spPr>
+        <p:style>
+          <a:lnRef idx="1">
+            <a:schemeClr val="accent1"/>
+          </a:lnRef>
+          <a:fillRef idx="3">
+            <a:schemeClr val="accent1"/>
+          </a:fillRef>
+          <a:effectRef idx="2">
+            <a:schemeClr val="accent1"/>
+          </a:effectRef>
+          <a:fontRef idx="minor">
+            <a:schemeClr val="lt1"/>
+          </a:fontRef>
+        </p:style>
+        <p:txBody>
+          <a:bodyPr rtlCol="0" anchor="ctr" wrap="square"/>
+          <a:lstStyle/>
+          <a:p>
+            <a:pPr algn="ctr">
+              <a:defRPr sz="1000" b="1">
+                <a:solidFill>
+                  <a:srgbClr val="1D4ED8"/>
+                </a:solidFill>
+              </a:defRPr>
+            </a:pPr>
+            <a:r>
+              <a:t>SƠ ĐỒ 5: KIẾN TRÚC ĐỐI KHÁNG THỰC TẾ &amp; BẰNG CHỨNG KIỂM ĐỊNH</a:t>
+            </a:r>
+          </a:p>
+        </p:txBody>
+      </p:sp>
+      <p:sp>
+        <p:nvSpPr>
+          <p:cNvPr id="4" name="TextBox 3"/>
           <p:cNvSpPr txBox="1"/>
           <p:nvPr/>
         </p:nvSpPr>
         <p:spPr>
           <a:xfrm>
-            <a:off x="1371600" y="2011680"/>
-            <a:ext cx="9448495" cy="2743200"/>
+            <a:off x="731520" y="749808"/>
+            <a:ext cx="10698480" cy="502920"/>
+          </a:xfrm>
+          <a:prstGeom prst="rect">
+            <a:avLst/>
+          </a:prstGeom>
+          <a:noFill/>
+        </p:spPr>
+        <p:txBody>
+          <a:bodyPr wrap="square" lIns="0" rIns="0" tIns="0" bIns="0">
+            <a:spAutoFit/>
+          </a:bodyPr>
+          <a:lstStyle/>
+          <a:p>
+            <a:pPr>
+              <a:defRPr sz="2100" b="1">
+                <a:solidFill>
+                  <a:srgbClr val="0F172A"/>
+                </a:solidFill>
+              </a:defRPr>
+            </a:pPr>
+            <a:r>
+              <a:t>KIẾN TRÚC DIỄN TẬP ĐỐI KHÁNG: RED TEAM VS BLUE TEAM</a:t>
+            </a:r>
+          </a:p>
+        </p:txBody>
+      </p:sp>
+      <p:sp>
+        <p:nvSpPr>
+          <p:cNvPr id="5" name="TextBox 4"/>
+          <p:cNvSpPr txBox="1"/>
+          <p:nvPr/>
+        </p:nvSpPr>
+        <p:spPr>
+          <a:xfrm>
+            <a:off x="731520" y="1261872"/>
+            <a:ext cx="10698480" cy="320040"/>
+          </a:xfrm>
+          <a:prstGeom prst="rect">
+            <a:avLst/>
+          </a:prstGeom>
+          <a:noFill/>
+        </p:spPr>
+        <p:txBody>
+          <a:bodyPr wrap="square" lIns="0" rIns="0" tIns="0" bIns="0">
+            <a:spAutoFit/>
+          </a:bodyPr>
+          <a:lstStyle/>
+          <a:p>
+            <a:pPr>
+              <a:defRPr sz="1200">
+                <a:solidFill>
+                  <a:srgbClr val="475569"/>
+                </a:solidFill>
+              </a:defRPr>
+            </a:pPr>
+            <a:r>
+              <a:t>Mô hình đối kháng thực tế 2 màn hình trên tập dữ liệu kaggle_dataset (2.483 tệp tin)</a:t>
+            </a:r>
+          </a:p>
+        </p:txBody>
+      </p:sp>
+      <p:sp>
+        <p:nvSpPr>
+          <p:cNvPr id="6" name="Rounded Rectangle 5"/>
+          <p:cNvSpPr/>
+          <p:nvPr/>
+        </p:nvSpPr>
+        <p:spPr>
+          <a:xfrm>
+            <a:off x="731520" y="1691640"/>
+            <a:ext cx="5212080" cy="4343400"/>
+          </a:xfrm>
+          <a:prstGeom prst="roundRect">
+            <a:avLst/>
+          </a:prstGeom>
+          <a:solidFill>
+            <a:srgbClr val="F8FAFC"/>
+          </a:solidFill>
+          <a:ln>
+            <a:solidFill>
+              <a:srgbClr val="BFDBFE"/>
+            </a:solidFill>
+          </a:ln>
+        </p:spPr>
+        <p:style>
+          <a:lnRef idx="1">
+            <a:schemeClr val="accent1"/>
+          </a:lnRef>
+          <a:fillRef idx="3">
+            <a:schemeClr val="accent1"/>
+          </a:fillRef>
+          <a:effectRef idx="2">
+            <a:schemeClr val="accent1"/>
+          </a:effectRef>
+          <a:fontRef idx="minor">
+            <a:schemeClr val="lt1"/>
+          </a:fontRef>
+        </p:style>
+        <p:txBody>
+          <a:bodyPr rtlCol="0" anchor="ctr"/>
+          <a:lstStyle/>
+          <a:p>
+            <a:pPr algn="ctr"/>
+          </a:p>
+        </p:txBody>
+      </p:sp>
+      <p:sp>
+        <p:nvSpPr>
+          <p:cNvPr id="7" name="TextBox 6"/>
+          <p:cNvSpPr txBox="1"/>
+          <p:nvPr/>
+        </p:nvSpPr>
+        <p:spPr>
+          <a:xfrm>
+            <a:off x="914400" y="1783080"/>
+            <a:ext cx="4846320" cy="365760"/>
+          </a:xfrm>
+          <a:prstGeom prst="rect">
+            <a:avLst/>
+          </a:prstGeom>
+          <a:noFill/>
+        </p:spPr>
+        <p:txBody>
+          <a:bodyPr wrap="none">
+            <a:spAutoFit/>
+          </a:bodyPr>
+          <a:lstStyle/>
+          <a:p>
+            <a:pPr>
+              <a:defRPr sz="1200" b="1">
+                <a:solidFill>
+                  <a:srgbClr val="1E40AF"/>
+                </a:solidFill>
+              </a:defRPr>
+            </a:pPr>
+            <a:r>
+              <a:t>BLUE TEAM — HỆ THỐNG PHÒNG THỦ (PORT 8080)</a:t>
+            </a:r>
+          </a:p>
+        </p:txBody>
+      </p:sp>
+      <p:sp>
+        <p:nvSpPr>
+          <p:cNvPr id="8" name="Rounded Rectangle 7"/>
+          <p:cNvSpPr/>
+          <p:nvPr/>
+        </p:nvSpPr>
+        <p:spPr>
+          <a:xfrm>
+            <a:off x="1005840" y="2240280"/>
+            <a:ext cx="2194560" cy="594360"/>
+          </a:xfrm>
+          <a:prstGeom prst="roundRect">
+            <a:avLst/>
+          </a:prstGeom>
+          <a:solidFill>
+            <a:srgbClr val="FFFFFF"/>
+          </a:solidFill>
+          <a:ln>
+            <a:solidFill>
+              <a:srgbClr val="2563EB"/>
+            </a:solidFill>
+          </a:ln>
+        </p:spPr>
+        <p:style>
+          <a:lnRef idx="1">
+            <a:schemeClr val="accent1"/>
+          </a:lnRef>
+          <a:fillRef idx="3">
+            <a:schemeClr val="accent1"/>
+          </a:fillRef>
+          <a:effectRef idx="2">
+            <a:schemeClr val="accent1"/>
+          </a:effectRef>
+          <a:fontRef idx="minor">
+            <a:schemeClr val="lt1"/>
+          </a:fontRef>
+        </p:style>
+        <p:txBody>
+          <a:bodyPr rtlCol="0" anchor="ctr" wrap="square" lIns="36576" rIns="36576" tIns="36576" bIns="36576"/>
+          <a:lstStyle/>
+          <a:p>
+            <a:pPr algn="ctr">
+              <a:defRPr sz="950" b="1">
+                <a:solidFill>
+                  <a:srgbClr val="1E40AF"/>
+                </a:solidFill>
+              </a:defRPr>
+            </a:pPr>
+            <a:r>
+              <a:t>Tập Dữ Liệu Giám Sát</a:t>
+            </a:r>
+          </a:p>
+          <a:p>
+            <a:pPr algn="ctr">
+              <a:defRPr sz="950" b="0">
+                <a:solidFill>
+                  <a:srgbClr val="1E40AF"/>
+                </a:solidFill>
+              </a:defRPr>
+            </a:pPr>
+            <a:r>
+              <a:t>(2.483 tệp / 112.81 MB)</a:t>
+            </a:r>
+          </a:p>
+        </p:txBody>
+      </p:sp>
+      <p:sp>
+        <p:nvSpPr>
+          <p:cNvPr id="9" name="Rounded Rectangle 8"/>
+          <p:cNvSpPr/>
+          <p:nvPr/>
+        </p:nvSpPr>
+        <p:spPr>
+          <a:xfrm>
+            <a:off x="3474720" y="2240280"/>
+            <a:ext cx="2194560" cy="594360"/>
+          </a:xfrm>
+          <a:prstGeom prst="roundRect">
+            <a:avLst/>
+          </a:prstGeom>
+          <a:solidFill>
+            <a:srgbClr val="FFFFFF"/>
+          </a:solidFill>
+          <a:ln>
+            <a:solidFill>
+              <a:srgbClr val="1E40AF"/>
+            </a:solidFill>
+          </a:ln>
+        </p:spPr>
+        <p:style>
+          <a:lnRef idx="1">
+            <a:schemeClr val="accent1"/>
+          </a:lnRef>
+          <a:fillRef idx="3">
+            <a:schemeClr val="accent1"/>
+          </a:fillRef>
+          <a:effectRef idx="2">
+            <a:schemeClr val="accent1"/>
+          </a:effectRef>
+          <a:fontRef idx="minor">
+            <a:schemeClr val="lt1"/>
+          </a:fontRef>
+        </p:style>
+        <p:txBody>
+          <a:bodyPr rtlCol="0" anchor="ctr" wrap="square" lIns="36576" rIns="36576" tIns="36576" bIns="36576"/>
+          <a:lstStyle/>
+          <a:p>
+            <a:pPr algn="ctr">
+              <a:defRPr sz="950" b="1">
+                <a:solidFill>
+                  <a:srgbClr val="1E40AF"/>
+                </a:solidFill>
+              </a:defRPr>
+            </a:pPr>
+            <a:r>
+              <a:t>Động Cơ Xác Thực</a:t>
+            </a:r>
+          </a:p>
+          <a:p>
+            <a:pPr algn="ctr">
+              <a:defRPr sz="950" b="0">
+                <a:solidFill>
+                  <a:srgbClr val="1E40AF"/>
+                </a:solidFill>
+              </a:defRPr>
+            </a:pPr>
+            <a:r>
+              <a:t>(SHA-256 / HMAC / Merkle)</a:t>
+            </a:r>
+          </a:p>
+        </p:txBody>
+      </p:sp>
+      <p:sp>
+        <p:nvSpPr>
+          <p:cNvPr id="10" name="Rounded Rectangle 9"/>
+          <p:cNvSpPr/>
+          <p:nvPr/>
+        </p:nvSpPr>
+        <p:spPr>
+          <a:xfrm>
+            <a:off x="1005840" y="2971800"/>
+            <a:ext cx="4663440" cy="502920"/>
+          </a:xfrm>
+          <a:prstGeom prst="roundRect">
+            <a:avLst/>
+          </a:prstGeom>
+          <a:solidFill>
+            <a:srgbClr val="ECFDF5"/>
+          </a:solidFill>
+          <a:ln>
+            <a:solidFill>
+              <a:srgbClr val="059669"/>
+            </a:solidFill>
+          </a:ln>
+        </p:spPr>
+        <p:style>
+          <a:lnRef idx="1">
+            <a:schemeClr val="accent1"/>
+          </a:lnRef>
+          <a:fillRef idx="3">
+            <a:schemeClr val="accent1"/>
+          </a:fillRef>
+          <a:effectRef idx="2">
+            <a:schemeClr val="accent1"/>
+          </a:effectRef>
+          <a:fontRef idx="minor">
+            <a:schemeClr val="lt1"/>
+          </a:fontRef>
+        </p:style>
+        <p:txBody>
+          <a:bodyPr rtlCol="0" anchor="ctr" wrap="square" lIns="36576" rIns="36576" tIns="36576" bIns="36576"/>
+          <a:lstStyle/>
+          <a:p>
+            <a:pPr algn="ctr">
+              <a:defRPr sz="900" b="1">
+                <a:solidFill>
+                  <a:srgbClr val="047857"/>
+                </a:solidFill>
+              </a:defRPr>
+            </a:pPr>
+            <a:r>
+              <a:t>Mốc Tin Cậy Ban Đầu: Root Hash H_0 (Trạng thái: 100% NGUYÊN VẸN)</a:t>
+            </a:r>
+          </a:p>
+          <a:p>
+            <a:pPr algn="ctr">
+              <a:defRPr sz="900" b="0">
+                <a:solidFill>
+                  <a:srgbClr val="047857"/>
+                </a:solidFill>
+              </a:defRPr>
+            </a:pPr>
+            <a:r>
+              <a:t>Định vị sai lệch O(log N) qua Dirty Path trong ~1.06 ms (2.325 tệp/giây)</a:t>
+            </a:r>
+          </a:p>
+        </p:txBody>
+      </p:sp>
+      <p:sp>
+        <p:nvSpPr>
+          <p:cNvPr id="11" name="TextBox 10"/>
+          <p:cNvSpPr txBox="1"/>
+          <p:nvPr/>
+        </p:nvSpPr>
+        <p:spPr>
+          <a:xfrm>
+            <a:off x="914400" y="3611880"/>
+            <a:ext cx="4846320" cy="2286000"/>
           </a:xfrm>
           <a:prstGeom prst="rect">
             <a:avLst/>
@@ -5692,61 +5223,480 @@
             <a:spAutoFit/>
           </a:bodyPr>
           <a:lstStyle/>
+          <a:p/>
+          <a:p>
+            <a:pPr>
+              <a:spcBef>
+                <a:spcPts val="400"/>
+              </a:spcBef>
+            </a:pPr>
+            <a:r>
+              <a:rPr b="1" sz="1000">
+                <a:solidFill>
+                  <a:srgbClr val="1E293B"/>
+                </a:solidFill>
+              </a:rPr>
+              <a:t>• Kịch bản 1 (CRC32 Forge): </a:t>
+            </a:r>
+            <a:r>
+              <a:rPr sz="950">
+                <a:solidFill>
+                  <a:srgbClr val="475569"/>
+                </a:solidFill>
+              </a:rPr>
+              <a:t>Red Team bù 4 byte GF(2) qua mặt CRC32; Blue Team dùng SHA-256 bắt quả tang tức thì.</a:t>
+            </a:r>
+          </a:p>
+          <a:p>
+            <a:pPr>
+              <a:spcBef>
+                <a:spcPts val="400"/>
+              </a:spcBef>
+            </a:pPr>
+            <a:r>
+              <a:rPr b="1" sz="1000">
+                <a:solidFill>
+                  <a:srgbClr val="1E293B"/>
+                </a:solidFill>
+              </a:rPr>
+              <a:t>• Kịch bản 2 (In-place Tamper): </a:t>
+            </a:r>
+            <a:r>
+              <a:rPr sz="950">
+                <a:solidFill>
+                  <a:srgbClr val="475569"/>
+                </a:solidFill>
+              </a:rPr>
+              <a:t>Sửa nội dung tệp; Blue Team phát hiện FILE_MODIFIED và vẽ Dirty Path O(log N).</a:t>
+            </a:r>
+          </a:p>
+          <a:p>
+            <a:pPr>
+              <a:spcBef>
+                <a:spcPts val="400"/>
+              </a:spcBef>
+            </a:pPr>
+            <a:r>
+              <a:rPr b="1" sz="1000">
+                <a:solidFill>
+                  <a:srgbClr val="1E293B"/>
+                </a:solidFill>
+              </a:rPr>
+              <a:t>• Kịch bản 3 (Dolev-Yao MitM): </a:t>
+            </a:r>
+            <a:r>
+              <a:rPr sz="950">
+                <a:solidFill>
+                  <a:srgbClr val="475569"/>
+                </a:solidFill>
+              </a:rPr>
+              <a:t>Đánh tráo Merkle Proof trên đường truyền mạng; bộ xác thực từ chối 100% chữ ký bằng chứng.</a:t>
+            </a:r>
+          </a:p>
+        </p:txBody>
+      </p:sp>
+      <p:sp>
+        <p:nvSpPr>
+          <p:cNvPr id="12" name="Rounded Rectangle 11"/>
+          <p:cNvSpPr/>
+          <p:nvPr/>
+        </p:nvSpPr>
+        <p:spPr>
+          <a:xfrm>
+            <a:off x="6217920" y="1691640"/>
+            <a:ext cx="5212080" cy="4343400"/>
+          </a:xfrm>
+          <a:prstGeom prst="roundRect">
+            <a:avLst/>
+          </a:prstGeom>
+          <a:solidFill>
+            <a:srgbClr val="ECFDF5"/>
+          </a:solidFill>
+          <a:ln>
+            <a:solidFill>
+              <a:srgbClr val="A7F3D0"/>
+            </a:solidFill>
+          </a:ln>
+        </p:spPr>
+        <p:style>
+          <a:lnRef idx="1">
+            <a:schemeClr val="accent1"/>
+          </a:lnRef>
+          <a:fillRef idx="3">
+            <a:schemeClr val="accent1"/>
+          </a:fillRef>
+          <a:effectRef idx="2">
+            <a:schemeClr val="accent1"/>
+          </a:effectRef>
+          <a:fontRef idx="minor">
+            <a:schemeClr val="lt1"/>
+          </a:fontRef>
+        </p:style>
+        <p:txBody>
+          <a:bodyPr rtlCol="0" anchor="ctr"/>
+          <a:lstStyle/>
+          <a:p>
+            <a:pPr algn="ctr"/>
+          </a:p>
+        </p:txBody>
+      </p:sp>
+      <p:sp>
+        <p:nvSpPr>
+          <p:cNvPr id="13" name="TextBox 12"/>
+          <p:cNvSpPr txBox="1"/>
+          <p:nvPr/>
+        </p:nvSpPr>
+        <p:spPr>
+          <a:xfrm>
+            <a:off x="6400800" y="1783080"/>
+            <a:ext cx="4846320" cy="365760"/>
+          </a:xfrm>
+          <a:prstGeom prst="rect">
+            <a:avLst/>
+          </a:prstGeom>
+          <a:noFill/>
+        </p:spPr>
+        <p:txBody>
+          <a:bodyPr wrap="none">
+            <a:spAutoFit/>
+          </a:bodyPr>
+          <a:lstStyle/>
+          <a:p>
+            <a:pPr>
+              <a:defRPr sz="1200" b="1">
+                <a:solidFill>
+                  <a:srgbClr val="059669"/>
+                </a:solidFill>
+              </a:defRPr>
+            </a:pPr>
+            <a:r>
+              <a:t>RED TEAM — ĐỘNG CƠ TẤN CÔNG ĐỐI KHÁNG (PORT 8081)</a:t>
+            </a:r>
+          </a:p>
+        </p:txBody>
+      </p:sp>
+      <p:sp>
+        <p:nvSpPr>
+          <p:cNvPr id="14" name="Rounded Rectangle 13"/>
+          <p:cNvSpPr/>
+          <p:nvPr/>
+        </p:nvSpPr>
+        <p:spPr>
+          <a:xfrm>
+            <a:off x="6492240" y="2240280"/>
+            <a:ext cx="2194560" cy="594360"/>
+          </a:xfrm>
+          <a:prstGeom prst="roundRect">
+            <a:avLst/>
+          </a:prstGeom>
+          <a:solidFill>
+            <a:srgbClr val="FEF2F2"/>
+          </a:solidFill>
+          <a:ln>
+            <a:solidFill>
+              <a:srgbClr val="DC2626"/>
+            </a:solidFill>
+          </a:ln>
+        </p:spPr>
+        <p:style>
+          <a:lnRef idx="1">
+            <a:schemeClr val="accent1"/>
+          </a:lnRef>
+          <a:fillRef idx="3">
+            <a:schemeClr val="accent1"/>
+          </a:fillRef>
+          <a:effectRef idx="2">
+            <a:schemeClr val="accent1"/>
+          </a:effectRef>
+          <a:fontRef idx="minor">
+            <a:schemeClr val="lt1"/>
+          </a:fontRef>
+        </p:style>
+        <p:txBody>
+          <a:bodyPr rtlCol="0" anchor="ctr" wrap="square" lIns="36576" rIns="36576" tIns="36576" bIns="36576"/>
+          <a:lstStyle/>
           <a:p>
             <a:pPr algn="ctr">
-              <a:defRPr sz="1300" b="1">
-                <a:solidFill>
-                  <a:srgbClr val="38BDF8"/>
-                </a:solidFill>
-              </a:defRPr>
-            </a:pPr>
-            <a:r>
-              <a:t>DIỄN TẬP AN NINH MẠNG TRỰC TIẾP</a:t>
+              <a:defRPr sz="950" b="1">
+                <a:solidFill>
+                  <a:srgbClr val="B91C1C"/>
+                </a:solidFill>
+              </a:defRPr>
+            </a:pPr>
+            <a:r>
+              <a:t>Adversary Engine</a:t>
             </a:r>
           </a:p>
           <a:p>
             <a:pPr algn="ctr">
+              <a:defRPr sz="950" b="0">
+                <a:solidFill>
+                  <a:srgbClr val="B91C1C"/>
+                </a:solidFill>
+              </a:defRPr>
+            </a:pPr>
+            <a:r>
+              <a:t>(6 Vector tấn công đối kháng)</a:t>
+            </a:r>
+          </a:p>
+        </p:txBody>
+      </p:sp>
+      <p:sp>
+        <p:nvSpPr>
+          <p:cNvPr id="15" name="Rounded Rectangle 14"/>
+          <p:cNvSpPr/>
+          <p:nvPr/>
+        </p:nvSpPr>
+        <p:spPr>
+          <a:xfrm>
+            <a:off x="8961120" y="2240280"/>
+            <a:ext cx="2194560" cy="594360"/>
+          </a:xfrm>
+          <a:prstGeom prst="roundRect">
+            <a:avLst/>
+          </a:prstGeom>
+          <a:solidFill>
+            <a:srgbClr val="ECFDF5"/>
+          </a:solidFill>
+          <a:ln>
+            <a:solidFill>
+              <a:srgbClr val="059669"/>
+            </a:solidFill>
+          </a:ln>
+        </p:spPr>
+        <p:style>
+          <a:lnRef idx="1">
+            <a:schemeClr val="accent1"/>
+          </a:lnRef>
+          <a:fillRef idx="3">
+            <a:schemeClr val="accent1"/>
+          </a:fillRef>
+          <a:effectRef idx="2">
+            <a:schemeClr val="accent1"/>
+          </a:effectRef>
+          <a:fontRef idx="minor">
+            <a:schemeClr val="lt1"/>
+          </a:fontRef>
+        </p:style>
+        <p:txBody>
+          <a:bodyPr rtlCol="0" anchor="ctr" wrap="square" lIns="36576" rIns="36576" tIns="36576" bIns="36576"/>
+          <a:lstStyle/>
+          <a:p>
+            <a:pPr algn="ctr">
+              <a:defRPr sz="950" b="1">
+                <a:solidFill>
+                  <a:srgbClr val="047857"/>
+                </a:solidFill>
+              </a:defRPr>
+            </a:pPr>
+            <a:r>
+              <a:t>Cơ Chế Phục Hồi An Toàn</a:t>
+            </a:r>
+          </a:p>
+          <a:p>
+            <a:pPr algn="ctr">
+              <a:defRPr sz="950" b="0">
+                <a:solidFill>
+                  <a:srgbClr val="047857"/>
+                </a:solidFill>
+              </a:defRPr>
+            </a:pPr>
+            <a:r>
+              <a:t>(Nút ROLLBACK ALL 100%)</a:t>
+            </a:r>
+          </a:p>
+        </p:txBody>
+      </p:sp>
+      <p:sp>
+        <p:nvSpPr>
+          <p:cNvPr id="16" name="Rounded Rectangle 15"/>
+          <p:cNvSpPr/>
+          <p:nvPr/>
+        </p:nvSpPr>
+        <p:spPr>
+          <a:xfrm>
+            <a:off x="6492240" y="2971800"/>
+            <a:ext cx="4663440" cy="502920"/>
+          </a:xfrm>
+          <a:prstGeom prst="roundRect">
+            <a:avLst/>
+          </a:prstGeom>
+          <a:solidFill>
+            <a:srgbClr val="FFFFFF"/>
+          </a:solidFill>
+          <a:ln>
+            <a:solidFill>
+              <a:srgbClr val="E2E8F0"/>
+            </a:solidFill>
+          </a:ln>
+        </p:spPr>
+        <p:style>
+          <a:lnRef idx="1">
+            <a:schemeClr val="accent1"/>
+          </a:lnRef>
+          <a:fillRef idx="3">
+            <a:schemeClr val="accent1"/>
+          </a:fillRef>
+          <a:effectRef idx="2">
+            <a:schemeClr val="accent1"/>
+          </a:effectRef>
+          <a:fontRef idx="minor">
+            <a:schemeClr val="lt1"/>
+          </a:fontRef>
+        </p:style>
+        <p:txBody>
+          <a:bodyPr rtlCol="0" anchor="ctr" wrap="square" lIns="36576" rIns="36576" tIns="36576" bIns="36576"/>
+          <a:lstStyle/>
+          <a:p>
+            <a:pPr algn="ctr">
+              <a:defRPr sz="900" b="1">
+                <a:solidFill>
+                  <a:srgbClr val="0F172A"/>
+                </a:solidFill>
+              </a:defRPr>
+            </a:pPr>
+            <a:r>
+              <a:t>[LOG KIỂM ĐỊNH TOÁN HỌC: 7/7 THÍ NGHIỆM ĐẠT CHUẨN]</a:t>
+            </a:r>
+          </a:p>
+          <a:p>
+            <a:pPr algn="ctr">
+              <a:defRPr sz="900" b="0">
+                <a:solidFill>
+                  <a:srgbClr val="0F172A"/>
+                </a:solidFill>
+              </a:defRPr>
+            </a:pPr>
+            <a:r>
+              <a:t>PPT Integrity: 100% phát hiện | RFC 6962: Chặn Node-Leaf | SAC: 50.00% | Time: 2,885 ms</a:t>
+            </a:r>
+          </a:p>
+        </p:txBody>
+      </p:sp>
+      <p:sp>
+        <p:nvSpPr>
+          <p:cNvPr id="17" name="TextBox 16"/>
+          <p:cNvSpPr txBox="1"/>
+          <p:nvPr/>
+        </p:nvSpPr>
+        <p:spPr>
+          <a:xfrm>
+            <a:off x="6400800" y="3611880"/>
+            <a:ext cx="4846320" cy="2286000"/>
+          </a:xfrm>
+          <a:prstGeom prst="rect">
+            <a:avLst/>
+          </a:prstGeom>
+          <a:noFill/>
+        </p:spPr>
+        <p:txBody>
+          <a:bodyPr wrap="square">
+            <a:spAutoFit/>
+          </a:bodyPr>
+          <a:lstStyle/>
+          <a:p/>
+          <a:p>
+            <a:pPr>
               <a:spcBef>
-                <a:spcPts val="1600"/>
+                <a:spcPts val="400"/>
               </a:spcBef>
-              <a:defRPr sz="6400" b="1">
-                <a:solidFill>
-                  <a:srgbClr val="FFFFFF"/>
-                </a:solidFill>
-              </a:defRPr>
-            </a:pPr>
-            <a:r>
-              <a:t>DEMO</a:t>
-            </a:r>
-          </a:p>
-          <a:p>
-            <a:pPr algn="ctr">
+            </a:pPr>
+            <a:r>
+              <a:rPr b="1" sz="1000">
+                <a:solidFill>
+                  <a:srgbClr val="1E293B"/>
+                </a:solidFill>
+              </a:rPr>
+              <a:t>• Mục đích minh họa: </a:t>
+            </a:r>
+            <a:r>
+              <a:rPr sz="950">
+                <a:solidFill>
+                  <a:srgbClr val="475569"/>
+                </a:solidFill>
+              </a:rPr>
+              <a:t>Thực nghiệm được thiết kế độc lập nhằm kiểm chứng tính đúng đắn logic của các khái niệm; không phải là chạy lại số liệu của tác giả.</a:t>
+            </a:r>
+          </a:p>
+          <a:p>
+            <a:pPr>
               <a:spcBef>
-                <a:spcPts val="1600"/>
+                <a:spcPts val="400"/>
               </a:spcBef>
-              <a:defRPr sz="1500" b="1">
-                <a:solidFill>
-                  <a:srgbClr val="E2E8F0"/>
-                </a:solidFill>
-              </a:defRPr>
-            </a:pPr>
-            <a:r>
-              <a:t>HỆ THỐNG GIÁM SÁT TOÀN VẸN TỆP &amp; MÔ HÌNH ĐỐI KHÁNG RED TEAM VS BLUE TEAM</a:t>
-            </a:r>
-          </a:p>
-          <a:p>
-            <a:pPr algn="ctr">
+            </a:pPr>
+            <a:r>
+              <a:rPr b="1" sz="1000">
+                <a:solidFill>
+                  <a:srgbClr val="1E293B"/>
+                </a:solidFill>
+              </a:rPr>
+              <a:t>• Môi trường kiểm thử: </a:t>
+            </a:r>
+            <a:r>
+              <a:rPr sz="950">
+                <a:solidFill>
+                  <a:srgbClr val="475569"/>
+                </a:solidFill>
+              </a:rPr>
+              <a:t>Đo đạc trên máy tính cá nhân (Intel Core i7, Windows 11). Các phép đo thời gian vi mô chịu ảnh hưởng của jitter hệ điều hành.</a:t>
+            </a:r>
+          </a:p>
+          <a:p>
+            <a:pPr>
               <a:spcBef>
-                <a:spcPts val="800"/>
+                <a:spcPts val="400"/>
               </a:spcBef>
-              <a:defRPr sz="1100" i="1">
-                <a:solidFill>
-                  <a:srgbClr val="94A3B8"/>
-                </a:solidFill>
-              </a:defRPr>
-            </a:pPr>
-            <a:r>
-              <a:t>Minh họa thực nghiệm các luận điểm lý thuyết: Can thiệp dữ liệu, Nhập nhằng nút lá RFC 6962, và So sánh chuỗi thời gian hằng số</a:t>
+            </a:pPr>
+            <a:r>
+              <a:rPr b="1" sz="1000">
+                <a:solidFill>
+                  <a:srgbClr val="1E293B"/>
+                </a:solidFill>
+              </a:rPr>
+              <a:t>• Kịch bản tương tác: </a:t>
+            </a:r>
+            <a:r>
+              <a:rPr sz="950">
+                <a:solidFill>
+                  <a:srgbClr val="475569"/>
+                </a:solidFill>
+              </a:rPr>
+              <a:t>Toàn bộ mã nguồn và kịch bản demo 2 màn hình được hướng dẫn chi tiết tại file MIDTERM_DEMO.md.</a:t>
+            </a:r>
+          </a:p>
+        </p:txBody>
+      </p:sp>
+      <p:sp>
+        <p:nvSpPr>
+          <p:cNvPr id="18" name="TextBox 17"/>
+          <p:cNvSpPr txBox="1"/>
+          <p:nvPr/>
+        </p:nvSpPr>
+        <p:spPr>
+          <a:xfrm>
+            <a:off x="731520" y="6217920"/>
+            <a:ext cx="10698480" cy="365760"/>
+          </a:xfrm>
+          <a:prstGeom prst="rect">
+            <a:avLst/>
+          </a:prstGeom>
+          <a:noFill/>
+        </p:spPr>
+        <p:txBody>
+          <a:bodyPr wrap="none">
+            <a:spAutoFit/>
+          </a:bodyPr>
+          <a:lstStyle/>
+          <a:p>
+            <a:pPr>
+              <a:defRPr sz="1000" i="1">
+                <a:solidFill>
+                  <a:srgbClr val="64748B"/>
+                </a:solidFill>
+              </a:defRPr>
+            </a:pPr>
+            <a:r>
+              <a:t>Số liệu thực tế đo đạc trực tiếp từ mã nguồn DT005. [Mã nguồn sơ đồ draw.io lưu tại docs/diagram_slide_14_adversary_architecture.drawio]</a:t>
             </a:r>
           </a:p>
         </p:txBody>
@@ -5861,7 +5811,7 @@
               </a:defRPr>
             </a:pPr>
             <a:r>
-              <a:t>THÍ NGHIỆM MINH HỌA ĐỘC LẬP DO SINH VIÊN THIẾT KẾ</a:t>
+              <a:t>SECTION 7 — KẾT LUẬN &amp; THÔNG ĐIỆP HỌC THUẬT</a:t>
             </a:r>
           </a:p>
         </p:txBody>
@@ -5896,7 +5846,7 @@
               </a:defRPr>
             </a:pPr>
             <a:r>
-              <a:t>KẾT QUẢ THỰC NGHIỆM MINH HỌA ĐỘC LẬP: RED TEAM VS BLUE TEAM</a:t>
+              <a:t>TỔNG KẾT BÁO CÁO GIỮA KỲ &amp; ĐỊNH HƯỚNG NGHIÊN CỨU</a:t>
             </a:r>
           </a:p>
         </p:txBody>
@@ -5931,7 +5881,7 @@
               </a:defRPr>
             </a:pPr>
             <a:r>
-              <a:t>Diễn tập an ninh mạng trực quan minh họa các luận điểm đối thủ trên tập dữ liệu thực tế</a:t>
+              <a:t>Tổng kết các đóng góp lý thuyết của Halpin và lộ trình kỹ thuật cho giai đoạn cuối kỳ</a:t>
             </a:r>
           </a:p>
         </p:txBody>
@@ -5945,7 +5895,7 @@
         <p:spPr>
           <a:xfrm>
             <a:off x="731520" y="1691640"/>
-            <a:ext cx="5212080" cy="4389120"/>
+            <a:ext cx="5212080" cy="4206240"/>
           </a:xfrm>
           <a:prstGeom prst="roundRect">
             <a:avLst/>
@@ -5953,7 +5903,7 @@
           <a:solidFill>
             <a:srgbClr val="F8FAFC"/>
           </a:solidFill>
-          <a:ln w="12700">
+          <a:ln>
             <a:solidFill>
               <a:srgbClr val="BFDBFE"/>
             </a:solidFill>
@@ -5990,7 +5940,7 @@
         <p:spPr>
           <a:xfrm>
             <a:off x="914400" y="1828800"/>
-            <a:ext cx="4846320" cy="4114800"/>
+            <a:ext cx="4846320" cy="3931920"/>
           </a:xfrm>
           <a:prstGeom prst="rect">
             <a:avLst/>
@@ -6011,127 +5961,76 @@
               </a:defRPr>
             </a:pPr>
             <a:r>
-              <a:t>1. Kiến Trúc Diễn Tập Đối Kháng Trực Quan</a:t>
+              <a:t>1. Thông Điệp Học Thuật Cốt Lõi (Harry Halpin 2025)</a:t>
             </a:r>
           </a:p>
           <a:p>
             <a:pPr>
               <a:spcBef>
-                <a:spcPts val="600"/>
+                <a:spcPts val="800"/>
               </a:spcBef>
-              <a:defRPr sz="950">
+            </a:pPr>
+            <a:r>
+              <a:rPr b="1" sz="1100">
                 <a:solidFill>
                   <a:srgbClr val="1E293B"/>
                 </a:solidFill>
-                <a:latin typeface="Consolas"/>
-              </a:defRPr>
-            </a:pPr>
-            <a:r>
-              <a:t>[BLUE TEAM - Cổng 8080]        [RED TEAM - Cổng 8081]</a:t>
-            </a:r>
-            <a:br/>
-            <a:r>
-              <a:t>- Giám sát kaggle_dataset (2.483 tệp)  - 6 Vector tấn công đối kháng</a:t>
-            </a:r>
-            <a:br/>
-            <a:r>
-              <a:t>- Quét mốc tin cậy ban đầu H_0         - Sửa tệp, CRC32, Dolev-Yao</a:t>
-            </a:r>
-            <a:br/>
-            <a:r>
-              <a:t>- Phát hiện sai lệch &amp; Dirty Path     - Phục hồi an toàn (Rollback)</a:t>
+              </a:rPr>
+              <a:t>• Vượt qua sự trừu tượng hóa: </a:t>
+            </a:r>
+            <a:r>
+              <a:rPr sz="1050">
+                <a:solidFill>
+                  <a:srgbClr val="475569"/>
+                </a:solidFill>
+              </a:rPr>
+              <a:t>Mật mã học không chỉ là toán học thuần túy trên giấy tờ. Các hệ thống an toàn trong thế giới thực phải nhận thức rõ khoảng cách giữa mô hình lý tưởng và thực tế vật lý (kênh kề, siêu dữ liệu, chuỗi cung ứng, áp lực thể chế).</a:t>
             </a:r>
           </a:p>
           <a:p>
             <a:pPr>
               <a:spcBef>
-                <a:spcPts val="500"/>
+                <a:spcPts val="800"/>
               </a:spcBef>
             </a:pPr>
             <a:r>
-              <a:rPr b="1" sz="1050">
+              <a:rPr b="1" sz="1100">
                 <a:solidFill>
                   <a:srgbClr val="1E293B"/>
                 </a:solidFill>
               </a:rPr>
-              <a:t>• Kịch bản 1 (CRC32 Forge): </a:t>
-            </a:r>
-            <a:r>
-              <a:rPr sz="1000">
+              <a:t>• Bản chất của đối thủ: </a:t>
+            </a:r>
+            <a:r>
+              <a:rPr sz="1050">
                 <a:solidFill>
                   <a:srgbClr val="475569"/>
                 </a:solidFill>
               </a:rPr>
-              <a:t>Red Team sửa giao dịch, bù 4 byte GF(2) qua mặt CRC32; Blue Team dùng SHA-256 bắt quả tang tức thì.</a:t>
+              <a:t>Đối thủ không phải là 'nhiễu ngẫu nhiên' mà là tác nhân có chủ đích, liên tục tìm kiếm các kênh rò rỉ bị mô hình toán học bỏ qua.</a:t>
             </a:r>
           </a:p>
           <a:p>
             <a:pPr>
               <a:spcBef>
-                <a:spcPts val="500"/>
+                <a:spcPts val="800"/>
               </a:spcBef>
             </a:pPr>
             <a:r>
-              <a:rPr b="1" sz="1050">
+              <a:rPr b="1" sz="1100">
                 <a:solidFill>
                   <a:srgbClr val="1E293B"/>
                 </a:solidFill>
               </a:rPr>
-              <a:t>• Kịch bản 2 (In-place Tamper): </a:t>
-            </a:r>
-            <a:r>
-              <a:rPr sz="1000">
+              <a:t>• Chương trình nghiên cứu mở: </a:t>
+            </a:r>
+            <a:r>
+              <a:rPr sz="1050">
                 <a:solidFill>
                   <a:srgbClr val="475569"/>
                 </a:solidFill>
               </a:rPr>
-              <a:t>Sửa nội dung tệp; Blue Team phát hiện FILE_MODIFIED và định vị chính xác qua Dirty Path O(log N).</a:t>
-            </a:r>
-          </a:p>
-          <a:p>
-            <a:pPr>
-              <a:spcBef>
-                <a:spcPts val="500"/>
-              </a:spcBef>
-            </a:pPr>
-            <a:r>
-              <a:rPr b="1" sz="1050">
-                <a:solidFill>
-                  <a:srgbClr val="1E293B"/>
-                </a:solidFill>
-              </a:rPr>
-              <a:t>• Kịch bản 3 (Dolev-Yao MitM): </a:t>
-            </a:r>
-            <a:r>
-              <a:rPr sz="1000">
-                <a:solidFill>
-                  <a:srgbClr val="475569"/>
-                </a:solidFill>
-              </a:rPr>
-              <a:t>Đánh tráo Merkle Proof trên đường truyền mạng; bộ xác thực từ chối 100% chữ ký bằng chứng.</a:t>
-            </a:r>
-          </a:p>
-          <a:p>
-            <a:pPr>
-              <a:spcBef>
-                <a:spcPts val="500"/>
-              </a:spcBef>
-            </a:pPr>
-            <a:r>
-              <a:rPr b="1" sz="1050">
-                <a:solidFill>
-                  <a:srgbClr val="1E293B"/>
-                </a:solidFill>
-              </a:rPr>
-              <a:t>• Khôi phục an toàn (Rollback): </a:t>
-            </a:r>
-            <a:r>
-              <a:rPr sz="1000">
-                <a:solidFill>
-                  <a:srgbClr val="475569"/>
-                </a:solidFill>
-              </a:rPr>
-              <a:t>Nút 'ROLLBACK ALL' phục hồi 100% nguyên trạng từ thư mục an toàn .adversary_backups/.</a:t>
+              <a:t>Halpin đặt nền móng triết học và vạch ra 4 câu hỏi nghiên cứu liên ngành nhằm mở rộng mật mã học thành một khoa học an ninh hoàn chỉnh.</a:t>
             </a:r>
           </a:p>
         </p:txBody>
@@ -6145,7 +6044,7 @@
         <p:spPr>
           <a:xfrm>
             <a:off x="6217920" y="1691640"/>
-            <a:ext cx="5212080" cy="4389120"/>
+            <a:ext cx="5212080" cy="4206240"/>
           </a:xfrm>
           <a:prstGeom prst="roundRect">
             <a:avLst/>
@@ -6153,7 +6052,7 @@
           <a:solidFill>
             <a:srgbClr val="ECFDF5"/>
           </a:solidFill>
-          <a:ln w="12700">
+          <a:ln>
             <a:solidFill>
               <a:srgbClr val="A7F3D0"/>
             </a:solidFill>
@@ -6190,7 +6089,7 @@
         <p:spPr>
           <a:xfrm>
             <a:off x="6400800" y="1828800"/>
-            <a:ext cx="4846320" cy="4114800"/>
+            <a:ext cx="4846320" cy="3931920"/>
           </a:xfrm>
           <a:prstGeom prst="rect">
             <a:avLst/>
@@ -6211,116 +6110,76 @@
               </a:defRPr>
             </a:pPr>
             <a:r>
-              <a:t>2. Bằng Chứng Chạy Thật &amp; Giới Hạn Thực Nghiệm</a:t>
+              <a:t>2. Hoàn Thành Giữa Kỳ &amp; Lộ Trình Cuối Kỳ (Nhóm DT005)</a:t>
             </a:r>
           </a:p>
           <a:p>
             <a:pPr>
               <a:spcBef>
-                <a:spcPts val="600"/>
+                <a:spcPts val="800"/>
               </a:spcBef>
-              <a:defRPr sz="900">
-                <a:solidFill>
-                  <a:srgbClr val="0F172A"/>
-                </a:solidFill>
-                <a:latin typeface="Consolas"/>
-              </a:defRPr>
-            </a:pPr>
-            <a:r>
-              <a:t>[LOG THỰC TẾ: python -m src.proposed_model.security_games]</a:t>
-            </a:r>
-            <a:br/>
-            <a:r>
-              <a:t>[*] Thư mục kiểm định : kaggle_dataset (2,483 tệp tin)</a:t>
-            </a:r>
-            <a:br/>
-            <a:r>
-              <a:t>[*] PPT Integrity Game: Phát hiện 100/100 phép thử (Tỷ lệ = 0.0)</a:t>
-            </a:r>
-            <a:br/>
-            <a:r>
-              <a:t>[*] Dolev-Yao Network : Chặn đứng 3/3 kịch bản (Swap, Tamper, Replay)</a:t>
-            </a:r>
-            <a:br/>
-            <a:r>
-              <a:t>[*] Consistency Proof : Xác thực nhất quán chỉ-thêm RFC 6962</a:t>
-            </a:r>
-            <a:br/>
-            <a:r>
-              <a:t>[*] Tuyết lở SAC Monte Carlo: 128.00/256 bit biến đổi (~50.00%)</a:t>
-            </a:r>
-            <a:br/>
-            <a:r>
-              <a:t>[*] Thời gian tổng cộng: 2,885.05 ms (Đạt chuẩn 7/7 thí nghiệm)</a:t>
+            </a:pPr>
+            <a:r>
+              <a:rPr b="1" sz="1100">
+                <a:solidFill>
+                  <a:srgbClr val="1E293B"/>
+                </a:solidFill>
+              </a:rPr>
+              <a:t>• Nghiệm thu tiến độ giữa kỳ: </a:t>
+            </a:r>
+            <a:r>
+              <a:rPr sz="1050">
+                <a:solidFill>
+                  <a:srgbClr val="475569"/>
+                </a:solidFill>
+              </a:rPr>
+              <a:t>Hoàn thành thẩm định học thuật sâu sắc toàn văn bài báo gốc (17 trang PDF), phân tích đầy đủ 7 mục nội dung và xây dựng bộ diễn tập minh họa thực nghiệm sống động phục vụ báo cáo.</a:t>
             </a:r>
           </a:p>
           <a:p>
             <a:pPr>
               <a:spcBef>
-                <a:spcPts val="500"/>
+                <a:spcPts val="800"/>
               </a:spcBef>
             </a:pPr>
             <a:r>
-              <a:rPr b="1" sz="1050">
+              <a:rPr b="1" sz="1100">
                 <a:solidFill>
                   <a:srgbClr val="1E293B"/>
                 </a:solidFill>
               </a:rPr>
-              <a:t>• Bản chất minh họa: </a:t>
-            </a:r>
-            <a:r>
-              <a:rPr sz="1000">
+              <a:t>• Minh bạch phương pháp luận: </a:t>
+            </a:r>
+            <a:r>
+              <a:rPr sz="1050">
                 <a:solidFill>
                   <a:srgbClr val="475569"/>
                 </a:solidFill>
               </a:rPr>
-              <a:t>Thực nghiệm được thiết kế độc lập nhằm kiểm chứng tính đúng đắn logic của các khái niệm; không phải là việc chạy lại số liệu của tác giả.</a:t>
+              <a:t>Không ngụy tạo số liệu tác giả; phân định rạch ròi giữa công trình triết học của Halpin và các thử nghiệm độc lập của sinh viên.</a:t>
             </a:r>
           </a:p>
           <a:p>
             <a:pPr>
               <a:spcBef>
-                <a:spcPts val="500"/>
+                <a:spcPts val="800"/>
               </a:spcBef>
             </a:pPr>
             <a:r>
-              <a:rPr b="1" sz="1050">
+              <a:rPr b="1" sz="1100">
                 <a:solidFill>
                   <a:srgbClr val="1E293B"/>
                 </a:solidFill>
               </a:rPr>
-              <a:t>• Môi trường kiểm thử: </a:t>
-            </a:r>
-            <a:r>
-              <a:rPr sz="1000">
+              <a:t>• Lộ trình nghiên cứu cuối kỳ: </a:t>
+            </a:r>
+            <a:r>
+              <a:rPr sz="1050">
                 <a:solidFill>
                   <a:srgbClr val="475569"/>
                 </a:solidFill>
               </a:rPr>
-              <a:t>Đo đạc trên máy tính cá nhân (Intel Core i7, Windows 11). Các phép đo thời gian vi mô chịu ảnh hưởng của jitter hệ điều hành.</a:t>
-            </a:r>
-          </a:p>
-          <a:p>
-            <a:pPr>
-              <a:spcBef>
-                <a:spcPts val="500"/>
-              </a:spcBef>
-            </a:pPr>
-            <a:r>
-              <a:rPr b="1" sz="1050">
-                <a:solidFill>
-                  <a:srgbClr val="1E293B"/>
-                </a:solidFill>
-              </a:rPr>
-              <a:t>• Hướng dẫn chạy: </a:t>
-            </a:r>
-            <a:r>
-              <a:rPr sz="1000">
-                <a:solidFill>
-                  <a:srgbClr val="475569"/>
-                </a:solidFill>
-              </a:rPr>
-              <a:t>Chi tiết lệnh chạy và các bước thao tác màn hình kép được hướng dẫn trong file MIDTERM_DEMO.md.</a:t>
+              <a:t>Đề xuất phát triển chuyên sâu giải pháp tối ưu hóa cấu trúc cây Merkle phân cấp (HD-Merkle Dirty-Path Caching, nén CompactProof O(1)) làm đóng góp kỹ thuật trọng tâm cho đồ án cuối kỳ.</a:t>
             </a:r>
           </a:p>
         </p:txBody>
@@ -6333,8 +6192,8 @@
         </p:nvSpPr>
         <p:spPr>
           <a:xfrm>
-            <a:off x="731520" y="6217920"/>
-            <a:ext cx="10698480" cy="365760"/>
+            <a:off x="731520" y="6035040"/>
+            <a:ext cx="10698480" cy="502920"/>
           </a:xfrm>
           <a:prstGeom prst="rect">
             <a:avLst/>
@@ -6348,14 +6207,14 @@
           <a:lstStyle/>
           <a:p>
             <a:pPr>
-              <a:defRPr sz="1000" i="1">
+              <a:defRPr sz="950" i="1">
                 <a:solidFill>
                   <a:srgbClr val="64748B"/>
                 </a:solidFill>
               </a:defRPr>
             </a:pPr>
             <a:r>
-              <a:t>Số liệu thực tế đo đạc trực tiếp từ mã nguồn đề tài DT005; xem hướng dẫn chạy tại MIDTERM_DEMO.md.</a:t>
+              <a:t>Tài liệu tham khảo chính: [1] H. Halpin, Oxford J. Cybersec., 2025 (DOI: 10.1093/cybsec/tyaf006); [2] Shannon (1949); [3] Goldwasser-Micali (1984); [4] Dolev-Yao (1983); [5] Kocher (1996); [6] RFC 6962 (2013).</a:t>
             </a:r>
           </a:p>
         </p:txBody>
@@ -6423,25 +6282,23 @@
       </p:sp>
       <p:sp>
         <p:nvSpPr>
-          <p:cNvPr id="3" name="Rounded Rectangle 2"/>
+          <p:cNvPr id="3" name="Rectangle 2"/>
           <p:cNvSpPr/>
           <p:nvPr/>
         </p:nvSpPr>
         <p:spPr>
           <a:xfrm>
-            <a:off x="731520" y="365760"/>
-            <a:ext cx="4114800" cy="320040"/>
-          </a:xfrm>
-          <a:prstGeom prst="roundRect">
+            <a:off x="365760" y="731520"/>
+            <a:ext cx="164592" cy="5394960"/>
+          </a:xfrm>
+          <a:prstGeom prst="rect">
             <a:avLst/>
           </a:prstGeom>
           <a:solidFill>
-            <a:srgbClr val="EFF6FF"/>
+            <a:srgbClr val="2563EB"/>
           </a:solidFill>
-          <a:ln w="12700">
-            <a:solidFill>
-              <a:srgbClr val="BFDBFE"/>
-            </a:solidFill>
+          <a:ln>
+            <a:noFill/>
           </a:ln>
         </p:spPr>
         <p:style>
@@ -6459,19 +6316,10 @@
           </a:fontRef>
         </p:style>
         <p:txBody>
-          <a:bodyPr rtlCol="0" anchor="ctr" wrap="square"/>
-          <a:lstStyle/>
-          <a:p>
-            <a:pPr algn="ctr">
-              <a:defRPr sz="1000" b="1">
-                <a:solidFill>
-                  <a:srgbClr val="1D4ED8"/>
-                </a:solidFill>
-              </a:defRPr>
-            </a:pPr>
-            <a:r>
-              <a:t>SECTION 7 — KẾT LUẬN &amp; THÔNG ĐIỆP HỌC THUẬT</a:t>
-            </a:r>
+          <a:bodyPr rtlCol="0" anchor="ctr"/>
+          <a:lstStyle/>
+          <a:p>
+            <a:pPr algn="ctr"/>
           </a:p>
         </p:txBody>
       </p:sp>
@@ -6483,123 +6331,8 @@
         </p:nvSpPr>
         <p:spPr>
           <a:xfrm>
-            <a:off x="731520" y="749808"/>
-            <a:ext cx="10698480" cy="502920"/>
-          </a:xfrm>
-          <a:prstGeom prst="rect">
-            <a:avLst/>
-          </a:prstGeom>
-          <a:noFill/>
-        </p:spPr>
-        <p:txBody>
-          <a:bodyPr wrap="square" lIns="0" rIns="0" tIns="0" bIns="0">
-            <a:spAutoFit/>
-          </a:bodyPr>
-          <a:lstStyle/>
-          <a:p>
-            <a:pPr>
-              <a:defRPr sz="2100" b="1">
-                <a:solidFill>
-                  <a:srgbClr val="0F172A"/>
-                </a:solidFill>
-              </a:defRPr>
-            </a:pPr>
-            <a:r>
-              <a:t>TỔNG KẾT BÁO CÁO GIỮA KỲ &amp; ĐỊNH HƯỚNG NGHIÊN CỨU</a:t>
-            </a:r>
-          </a:p>
-        </p:txBody>
-      </p:sp>
-      <p:sp>
-        <p:nvSpPr>
-          <p:cNvPr id="5" name="TextBox 4"/>
-          <p:cNvSpPr txBox="1"/>
-          <p:nvPr/>
-        </p:nvSpPr>
-        <p:spPr>
-          <a:xfrm>
-            <a:off x="731520" y="1261872"/>
-            <a:ext cx="10698480" cy="320040"/>
-          </a:xfrm>
-          <a:prstGeom prst="rect">
-            <a:avLst/>
-          </a:prstGeom>
-          <a:noFill/>
-        </p:spPr>
-        <p:txBody>
-          <a:bodyPr wrap="square" lIns="0" rIns="0" tIns="0" bIns="0">
-            <a:spAutoFit/>
-          </a:bodyPr>
-          <a:lstStyle/>
-          <a:p>
-            <a:pPr>
-              <a:defRPr sz="1200">
-                <a:solidFill>
-                  <a:srgbClr val="475569"/>
-                </a:solidFill>
-              </a:defRPr>
-            </a:pPr>
-            <a:r>
-              <a:t>Tổng kết các đóng góp lý thuyết của Halpin và lộ trình kỹ thuật cho giai đoạn cuối kỳ</a:t>
-            </a:r>
-          </a:p>
-        </p:txBody>
-      </p:sp>
-      <p:sp>
-        <p:nvSpPr>
-          <p:cNvPr id="6" name="Rounded Rectangle 5"/>
-          <p:cNvSpPr/>
-          <p:nvPr/>
-        </p:nvSpPr>
-        <p:spPr>
-          <a:xfrm>
-            <a:off x="731520" y="1691640"/>
-            <a:ext cx="5212080" cy="4206240"/>
-          </a:xfrm>
-          <a:prstGeom prst="roundRect">
-            <a:avLst/>
-          </a:prstGeom>
-          <a:solidFill>
-            <a:srgbClr val="F8FAFC"/>
-          </a:solidFill>
-          <a:ln w="12700">
-            <a:solidFill>
-              <a:srgbClr val="BFDBFE"/>
-            </a:solidFill>
-          </a:ln>
-        </p:spPr>
-        <p:style>
-          <a:lnRef idx="1">
-            <a:schemeClr val="accent1"/>
-          </a:lnRef>
-          <a:fillRef idx="3">
-            <a:schemeClr val="accent1"/>
-          </a:fillRef>
-          <a:effectRef idx="2">
-            <a:schemeClr val="accent1"/>
-          </a:effectRef>
-          <a:fontRef idx="minor">
-            <a:schemeClr val="lt1"/>
-          </a:fontRef>
-        </p:style>
-        <p:txBody>
-          <a:bodyPr rtlCol="0" anchor="ctr"/>
-          <a:lstStyle/>
-          <a:p>
-            <a:pPr algn="ctr"/>
-          </a:p>
-        </p:txBody>
-      </p:sp>
-      <p:sp>
-        <p:nvSpPr>
-          <p:cNvPr id="7" name="TextBox 6"/>
-          <p:cNvSpPr txBox="1"/>
-          <p:nvPr/>
-        </p:nvSpPr>
-        <p:spPr>
-          <a:xfrm>
-            <a:off x="914400" y="1828800"/>
-            <a:ext cx="4846320" cy="3931920"/>
+            <a:off x="1097280" y="1097280"/>
+            <a:ext cx="10058400" cy="822960"/>
           </a:xfrm>
           <a:prstGeom prst="rect">
             <a:avLst/>
@@ -6612,143 +6345,44 @@
           </a:bodyPr>
           <a:lstStyle/>
           <a:p>
-            <a:pPr>
-              <a:defRPr sz="1300" b="1">
-                <a:solidFill>
-                  <a:srgbClr val="1E40AF"/>
-                </a:solidFill>
-              </a:defRPr>
-            </a:pPr>
-            <a:r>
-              <a:t>1. Thông Điệp Học Thuật Cốt Lõi (Harry Halpin 2025)</a:t>
-            </a:r>
-          </a:p>
-          <a:p>
-            <a:pPr>
+            <a:pPr algn="ctr">
+              <a:defRPr sz="1500" b="1">
+                <a:solidFill>
+                  <a:srgbClr val="1E293B"/>
+                </a:solidFill>
+              </a:defRPr>
+            </a:pPr>
+            <a:r>
+              <a:t>Trường Đại học Tài nguyên và Môi trường TP. Hồ Chí Minh</a:t>
+            </a:r>
+          </a:p>
+          <a:p>
+            <a:pPr algn="ctr">
               <a:spcBef>
-                <a:spcPts val="800"/>
+                <a:spcPts val="400"/>
               </a:spcBef>
-            </a:pPr>
-            <a:r>
-              <a:rPr b="1" sz="1100">
-                <a:solidFill>
-                  <a:srgbClr val="1E293B"/>
-                </a:solidFill>
-              </a:rPr>
-              <a:t>• Vượt qua sự trừu tượng hóa: </a:t>
-            </a:r>
-            <a:r>
-              <a:rPr sz="1050">
+              <a:defRPr sz="1400" b="1">
                 <a:solidFill>
                   <a:srgbClr val="475569"/>
                 </a:solidFill>
-              </a:rPr>
-              <a:t>Mật mã học không chỉ là toán học thuần túy trên giấy tờ. Các hệ thống an toàn trong thế giới thực phải nhận thức rõ khoảng cách giữa mô hình lý tưởng và thực tế vật lý (kênh kề, siêu dữ liệu, chuỗi cung ứng, áp lực thể chế).</a:t>
-            </a:r>
-          </a:p>
-          <a:p>
-            <a:pPr>
-              <a:spcBef>
-                <a:spcPts val="800"/>
-              </a:spcBef>
-            </a:pPr>
-            <a:r>
-              <a:rPr b="1" sz="1100">
-                <a:solidFill>
-                  <a:srgbClr val="1E293B"/>
-                </a:solidFill>
-              </a:rPr>
-              <a:t>• Bản chất của đối thủ: </a:t>
-            </a:r>
-            <a:r>
-              <a:rPr sz="1050">
-                <a:solidFill>
-                  <a:srgbClr val="475569"/>
-                </a:solidFill>
-              </a:rPr>
-              <a:t>Đối thủ không phải là 'nhiễu ngẫu nhiên' mà là tác nhân có chủ đích, liên tục tìm kiếm các kênh rò rỉ bị mô hình toán học bỏ qua.</a:t>
-            </a:r>
-          </a:p>
-          <a:p>
-            <a:pPr>
-              <a:spcBef>
-                <a:spcPts val="800"/>
-              </a:spcBef>
-            </a:pPr>
-            <a:r>
-              <a:rPr b="1" sz="1100">
-                <a:solidFill>
-                  <a:srgbClr val="1E293B"/>
-                </a:solidFill>
-              </a:rPr>
-              <a:t>• Chương trình nghiên cứu mở: </a:t>
-            </a:r>
-            <a:r>
-              <a:rPr sz="1050">
-                <a:solidFill>
-                  <a:srgbClr val="475569"/>
-                </a:solidFill>
-              </a:rPr>
-              <a:t>Halpin đặt nền móng triết học và vạch ra 4 câu hỏi nghiên cứu liên ngành nhằm mở rộng mật mã học thành một khoa học an ninh hoàn chỉnh.</a:t>
-            </a:r>
-          </a:p>
-        </p:txBody>
-      </p:sp>
-      <p:sp>
-        <p:nvSpPr>
-          <p:cNvPr id="8" name="Rounded Rectangle 7"/>
-          <p:cNvSpPr/>
-          <p:nvPr/>
-        </p:nvSpPr>
-        <p:spPr>
-          <a:xfrm>
-            <a:off x="6217920" y="1691640"/>
-            <a:ext cx="5212080" cy="4206240"/>
-          </a:xfrm>
-          <a:prstGeom prst="roundRect">
-            <a:avLst/>
-          </a:prstGeom>
-          <a:solidFill>
-            <a:srgbClr val="ECFDF5"/>
-          </a:solidFill>
-          <a:ln w="12700">
-            <a:solidFill>
-              <a:srgbClr val="A7F3D0"/>
-            </a:solidFill>
-          </a:ln>
-        </p:spPr>
-        <p:style>
-          <a:lnRef idx="1">
-            <a:schemeClr val="accent1"/>
-          </a:lnRef>
-          <a:fillRef idx="3">
-            <a:schemeClr val="accent1"/>
-          </a:fillRef>
-          <a:effectRef idx="2">
-            <a:schemeClr val="accent1"/>
-          </a:effectRef>
-          <a:fontRef idx="minor">
-            <a:schemeClr val="lt1"/>
-          </a:fontRef>
-        </p:style>
-        <p:txBody>
-          <a:bodyPr rtlCol="0" anchor="ctr"/>
-          <a:lstStyle/>
-          <a:p>
-            <a:pPr algn="ctr"/>
-          </a:p>
-        </p:txBody>
-      </p:sp>
-      <p:sp>
-        <p:nvSpPr>
-          <p:cNvPr id="9" name="TextBox 8"/>
+              </a:defRPr>
+            </a:pPr>
+            <a:r>
+              <a:t>Khoa Công nghệ thông tin</a:t>
+            </a:r>
+          </a:p>
+        </p:txBody>
+      </p:sp>
+      <p:sp>
+        <p:nvSpPr>
+          <p:cNvPr id="5" name="TextBox 4"/>
           <p:cNvSpPr txBox="1"/>
           <p:nvPr/>
         </p:nvSpPr>
         <p:spPr>
           <a:xfrm>
-            <a:off x="6400800" y="1828800"/>
-            <a:ext cx="4846320" cy="3931920"/>
+            <a:off x="1097280" y="2377440"/>
+            <a:ext cx="10058400" cy="1828800"/>
           </a:xfrm>
           <a:prstGeom prst="rect">
             <a:avLst/>
@@ -6761,98 +6395,44 @@
           </a:bodyPr>
           <a:lstStyle/>
           <a:p>
-            <a:pPr>
-              <a:defRPr sz="1300" b="1">
-                <a:solidFill>
-                  <a:srgbClr val="059669"/>
-                </a:solidFill>
-              </a:defRPr>
-            </a:pPr>
-            <a:r>
-              <a:t>2. Hoàn Thành Giữa Kỳ &amp; Lộ Trình Cuối Kỳ (Nhóm DT005)</a:t>
-            </a:r>
-          </a:p>
-          <a:p>
-            <a:pPr>
+            <a:pPr algn="ctr">
+              <a:defRPr sz="3200" b="1">
+                <a:solidFill>
+                  <a:srgbClr val="2563EB"/>
+                </a:solidFill>
+              </a:defRPr>
+            </a:pPr>
+            <a:r>
+              <a:t>CẢM ƠN THẦY VÀ CÁC BẠN ĐÃ LẮNG NGHE!</a:t>
+            </a:r>
+          </a:p>
+          <a:p>
+            <a:pPr algn="ctr">
               <a:spcBef>
-                <a:spcPts val="800"/>
+                <a:spcPts val="1400"/>
               </a:spcBef>
-            </a:pPr>
-            <a:r>
-              <a:rPr b="1" sz="1100">
-                <a:solidFill>
-                  <a:srgbClr val="1E293B"/>
-                </a:solidFill>
-              </a:rPr>
-              <a:t>• Nghiệm thu tiến độ giữa kỳ: </a:t>
-            </a:r>
-            <a:r>
-              <a:rPr sz="1050">
+              <a:defRPr sz="1600" i="1">
                 <a:solidFill>
                   <a:srgbClr val="475569"/>
                 </a:solidFill>
-              </a:rPr>
-              <a:t>Hoàn thành thẩm định học thuật sâu sắc toàn văn bài báo gốc (17 trang PDF), phân tích đầy đủ 7 mục nội dung và xây dựng bộ diễn tập minh họa thực nghiệm sống động phục vụ báo cáo.</a:t>
-            </a:r>
-          </a:p>
-          <a:p>
-            <a:pPr>
-              <a:spcBef>
-                <a:spcPts val="800"/>
-              </a:spcBef>
-            </a:pPr>
-            <a:r>
-              <a:rPr b="1" sz="1100">
-                <a:solidFill>
-                  <a:srgbClr val="1E293B"/>
-                </a:solidFill>
-              </a:rPr>
-              <a:t>• Minh bạch phương pháp luận: </a:t>
-            </a:r>
-            <a:r>
-              <a:rPr sz="1050">
-                <a:solidFill>
-                  <a:srgbClr val="475569"/>
-                </a:solidFill>
-              </a:rPr>
-              <a:t>Không ngụy tạo số liệu tác giả; phân định rạch ròi giữa công trình triết học của Halpin và các thử nghiệm độc lập của sinh viên.</a:t>
-            </a:r>
-          </a:p>
-          <a:p>
-            <a:pPr>
-              <a:spcBef>
-                <a:spcPts val="800"/>
-              </a:spcBef>
-            </a:pPr>
-            <a:r>
-              <a:rPr b="1" sz="1100">
-                <a:solidFill>
-                  <a:srgbClr val="1E293B"/>
-                </a:solidFill>
-              </a:rPr>
-              <a:t>• Lộ trình nghiên cứu cuối kỳ: </a:t>
-            </a:r>
-            <a:r>
-              <a:rPr sz="1050">
-                <a:solidFill>
-                  <a:srgbClr val="475569"/>
-                </a:solidFill>
-              </a:rPr>
-              <a:t>Đề xuất phát triển chuyên sâu giải pháp tối ưu hóa cấu trúc cây Merkle phân cấp (HD-Merkle Dirty-Path Caching, nén CompactProof O(1)) làm đóng góp kỹ thuật trọng tâm cho đồ án cuối kỳ.</a:t>
-            </a:r>
-          </a:p>
-        </p:txBody>
-      </p:sp>
-      <p:sp>
-        <p:nvSpPr>
-          <p:cNvPr id="10" name="TextBox 9"/>
+              </a:defRPr>
+            </a:pPr>
+            <a:r>
+              <a:t>Q &amp; A — Xin đón nhận các câu hỏi và ý kiến đóng góp của Thầy và Hội đồng</a:t>
+            </a:r>
+          </a:p>
+        </p:txBody>
+      </p:sp>
+      <p:sp>
+        <p:nvSpPr>
+          <p:cNvPr id="6" name="TextBox 5"/>
           <p:cNvSpPr txBox="1"/>
           <p:nvPr/>
         </p:nvSpPr>
         <p:spPr>
           <a:xfrm>
-            <a:off x="731520" y="6035040"/>
-            <a:ext cx="10698480" cy="502920"/>
+            <a:off x="1280160" y="4480560"/>
+            <a:ext cx="9144000" cy="1645920"/>
           </a:xfrm>
           <a:prstGeom prst="rect">
             <a:avLst/>
@@ -6860,20 +6440,81 @@
           <a:noFill/>
         </p:spPr>
         <p:txBody>
-          <a:bodyPr wrap="none">
+          <a:bodyPr wrap="square">
             <a:spAutoFit/>
           </a:bodyPr>
           <a:lstStyle/>
           <a:p>
             <a:pPr>
-              <a:defRPr sz="950" i="1">
-                <a:solidFill>
-                  <a:srgbClr val="64748B"/>
-                </a:solidFill>
-              </a:defRPr>
-            </a:pPr>
-            <a:r>
-              <a:t>Tài liệu tham khảo chính: [1] H. Halpin, Oxford J. Cybersec., 2025 (DOI: 10.1093/cybsec/tyaf006); [2] Shannon (1949); [3] Goldwasser-Micali (1984); [4] Dolev-Yao (1983); [5] Kocher (1996); [6] RFC 6962 (2013).</a:t>
+              <a:defRPr sz="1300" b="1">
+                <a:solidFill>
+                  <a:srgbClr val="0F172A"/>
+                </a:solidFill>
+              </a:defRPr>
+            </a:pPr>
+            <a:r>
+              <a:t>Đề tài DT005: Hệ thống kiểm tra toàn vẹn tệp bằng SHA-256, HMAC và cây Merkle phân cấp động</a:t>
+            </a:r>
+          </a:p>
+          <a:p>
+            <a:pPr>
+              <a:spcBef>
+                <a:spcPts val="400"/>
+              </a:spcBef>
+              <a:defRPr sz="1250">
+                <a:solidFill>
+                  <a:srgbClr val="1E293B"/>
+                </a:solidFill>
+              </a:defRPr>
+            </a:pPr>
+            <a:r>
+              <a:t>Học phần: An toàn và bảo mật hệ thống thông tin</a:t>
+            </a:r>
+          </a:p>
+          <a:p>
+            <a:pPr>
+              <a:spcBef>
+                <a:spcPts val="400"/>
+              </a:spcBef>
+              <a:defRPr sz="1250">
+                <a:solidFill>
+                  <a:srgbClr val="1E293B"/>
+                </a:solidFill>
+              </a:defRPr>
+            </a:pPr>
+            <a:r>
+              <a:t>Giảng viên hướng dẫn: ThS. Phạm Trọng Huynh</a:t>
+            </a:r>
+          </a:p>
+          <a:p>
+            <a:pPr>
+              <a:spcBef>
+                <a:spcPts val="400"/>
+              </a:spcBef>
+            </a:pPr>
+            <a:r>
+              <a:rPr sz="1250">
+                <a:solidFill>
+                  <a:srgbClr val="1E293B"/>
+                </a:solidFill>
+              </a:rPr>
+              <a:t>Sinh viên thực hiện: </a:t>
+            </a:r>
+            <a:r>
+              <a:rPr b="1" sz="1250">
+                <a:solidFill>
+                  <a:srgbClr val="1E40AF"/>
+                </a:solidFill>
+              </a:rPr>
+              <a:t>Võ Anh Kiệt</a:t>
+            </a:r>
+            <a:r>
+              <a:rPr sz="1250">
+                <a:solidFill>
+                  <a:srgbClr val="1E293B"/>
+                </a:solidFill>
+              </a:rPr>
+              <a:t> — MSSV: 1150080143 — Lớp: 11_CNPM2</a:t>
             </a:r>
           </a:p>
         </p:txBody>
@@ -6988,7 +6629,7 @@
               </a:defRPr>
             </a:pPr>
             <a:r>
-              <a:t>SECTION 1 — GIỚI THIỆU (TRANG 1–2)</a:t>
+              <a:t>SECTION 1 — GIỚI THIỆU &amp; MỤC TIÊU BÀI BÁO (TRANG 1–2)</a:t>
             </a:r>
           </a:p>
         </p:txBody>
@@ -7023,7 +6664,7 @@
               </a:defRPr>
             </a:pPr>
             <a:r>
-              <a:t>BỐI CẢNH BÀI BÁO &amp; VẤN ĐỀ NGHIÊN CỨU</a:t>
+              <a:t>BỐI CẢNH, MỤC TIÊU &amp; BA ĐÓNG GÓP CỦA BÀI BÁO</a:t>
             </a:r>
           </a:p>
         </p:txBody>
@@ -7058,7 +6699,7 @@
               </a:defRPr>
             </a:pPr>
             <a:r>
-              <a:t>Khảo sát mối quan hệ giữa Mật mã học, Kẻ thù và Triết học về Thông tin</a:t>
+              <a:t>Khảo cứu nhận thức luận về Kẻ thù trong Mật mã học và Chương trình nghiên cứu tương lai</a:t>
             </a:r>
           </a:p>
         </p:txBody>
@@ -7080,7 +6721,7 @@
           <a:solidFill>
             <a:srgbClr val="F8FAFC"/>
           </a:solidFill>
-          <a:ln w="12700">
+          <a:ln>
             <a:solidFill>
               <a:srgbClr val="E2E8F0"/>
             </a:solidFill>
@@ -7131,83 +6772,83 @@
           <a:lstStyle/>
           <a:p>
             <a:pPr>
-              <a:defRPr sz="1400" b="1">
+              <a:defRPr sz="1350" b="1">
                 <a:solidFill>
                   <a:srgbClr val="1E40AF"/>
                 </a:solidFill>
               </a:defRPr>
             </a:pPr>
             <a:r>
-              <a:t>1. Mật Mã Học Trong Kỷ Nguyên Số</a:t>
+              <a:t>1. Bối Cảnh Mật Mã Học &amp; Nghịch Lý Nhận Thức Luận</a:t>
             </a:r>
           </a:p>
           <a:p>
             <a:pPr>
               <a:spcBef>
-                <a:spcPts val="1000"/>
+                <a:spcPts val="800"/>
               </a:spcBef>
             </a:pPr>
             <a:r>
-              <a:rPr b="1" sz="1200">
+              <a:rPr b="1" sz="1100">
                 <a:solidFill>
                   <a:srgbClr val="1E293B"/>
                 </a:solidFill>
               </a:rPr>
-              <a:t>Bản chất cốt lõi: </a:t>
-            </a:r>
-            <a:r>
-              <a:rPr sz="1150">
+              <a:t>• Mật mã học trong kỷ nguyên số: </a:t>
+            </a:r>
+            <a:r>
+              <a:rPr sz="1050">
                 <a:solidFill>
                   <a:srgbClr val="475569"/>
                 </a:solidFill>
               </a:rPr>
-              <a:t>Mật mã học là ngành khoa học về kỹ thuật truyền thông an toàn trong sự hiện diện của các đối thủ có chủ đích (adversaries).</a:t>
+              <a:t>Khoa học về truyền thông bí mật khi có sự hiện diện của đối thủ có chủ đích. Internet biến không gian mạng thành nơi tương tác với vô vàn đối thủ tiềm tàng, xa lạ.</a:t>
             </a:r>
           </a:p>
           <a:p>
             <a:pPr>
               <a:spcBef>
-                <a:spcPts val="1000"/>
+                <a:spcPts val="800"/>
               </a:spcBef>
             </a:pPr>
             <a:r>
-              <a:rPr b="1" sz="1200">
+              <a:rPr b="1" sz="1100">
                 <a:solidFill>
                   <a:srgbClr val="1E293B"/>
                 </a:solidFill>
               </a:rPr>
-              <a:t>Không gian vô tận: </a:t>
-            </a:r>
-            <a:r>
-              <a:rPr sz="1150">
+              <a:t>• Nghịch lý nhận thức luận: </a:t>
+            </a:r>
+            <a:r>
+              <a:rPr sz="1050">
                 <a:solidFill>
                   <a:srgbClr val="475569"/>
                 </a:solidFill>
               </a:rPr>
-              <a:t>Sự bùng nổ của Internet toàn cầu đã biến không gian số thành môi trường tương tác với vô vàn đối thủ tiềm tàng, xa lạ và phân tán (distal agents).</a:t>
+              <a:t>Lý thuyết thông tin của Shannon (1948) được triết học khảo cứu sâu sắc, nhưng chính mật mã học — cái nôi khai sinh lý thuyết thông tin — lại bị triết học bỏ quên suốt nhiều thập kỷ.</a:t>
             </a:r>
           </a:p>
           <a:p>
             <a:pPr>
               <a:spcBef>
-                <a:spcPts val="1000"/>
+                <a:spcPts val="800"/>
               </a:spcBef>
             </a:pPr>
             <a:r>
-              <a:rPr b="1" sz="1200">
+              <a:rPr b="1" sz="1100">
                 <a:solidFill>
                   <a:srgbClr val="1E293B"/>
                 </a:solidFill>
               </a:rPr>
-              <a:t>Niềm tin và Bí mật: </a:t>
-            </a:r>
-            <a:r>
-              <a:rPr sz="1150">
+              <a:t>• Cái giá của sự trừu tượng hóa: </a:t>
+            </a:r>
+            <a:r>
+              <a:rPr sz="1050">
                 <a:solidFill>
                   <a:srgbClr val="475569"/>
                 </a:solidFill>
               </a:rPr>
-              <a:t>Trong xã hội hiện đại, niềm tin giữa các bên không quen biết không còn dựa trên gia tộc hay bộ lạc nhỏ, mà phải dựa trên các thủ tục quan liêu, hệ thống giám sát và các công cụ toán học mật mã bảo vệ bí mật.</a:t>
+              <a:t>Khi mật mã học biến thành các bài toán toán học thuần túy trên giấy, nó tạo ra điểm mù nguy hiểm trước các đòn tấn công vật lý trong thế giới thực.</a:t>
             </a:r>
           </a:p>
         </p:txBody>
@@ -7227,11 +6868,11 @@
             <a:avLst/>
           </a:prstGeom>
           <a:solidFill>
-            <a:srgbClr val="FFFBEB"/>
+            <a:srgbClr val="ECFDF5"/>
           </a:solidFill>
-          <a:ln w="12700">
+          <a:ln>
             <a:solidFill>
-              <a:srgbClr val="FDE68A"/>
+              <a:srgbClr val="A7F3D0"/>
             </a:solidFill>
           </a:ln>
         </p:spPr>
@@ -7280,83 +6921,83 @@
           <a:lstStyle/>
           <a:p>
             <a:pPr>
-              <a:defRPr sz="1400" b="1">
-                <a:solidFill>
-                  <a:srgbClr val="D97706"/>
-                </a:solidFill>
-              </a:defRPr>
-            </a:pPr>
-            <a:r>
-              <a:t>2. Nghịch Lý Thiếu Vắng Khảo Sát Triết Học</a:t>
+              <a:defRPr sz="1350" b="1">
+                <a:solidFill>
+                  <a:srgbClr val="059669"/>
+                </a:solidFill>
+              </a:defRPr>
+            </a:pPr>
+            <a:r>
+              <a:t>2. Ba Đóng Góp Học Thuật Chính Của Harry Halpin</a:t>
             </a:r>
           </a:p>
           <a:p>
             <a:pPr>
               <a:spcBef>
-                <a:spcPts val="1000"/>
+                <a:spcPts val="800"/>
               </a:spcBef>
             </a:pPr>
             <a:r>
-              <a:rPr b="1" sz="1200">
+              <a:rPr b="1" sz="1100">
                 <a:solidFill>
                   <a:srgbClr val="1E293B"/>
                 </a:solidFill>
               </a:rPr>
-              <a:t>Nghịch lý nhận thức: </a:t>
-            </a:r>
-            <a:r>
-              <a:rPr sz="1150">
+              <a:t>• Khảo sát Lịch sử &amp; Triết học: </a:t>
+            </a:r>
+            <a:r>
+              <a:rPr sz="1050">
                 <a:solidFill>
                   <a:srgbClr val="475569"/>
                 </a:solidFill>
               </a:rPr>
-              <a:t>Lý thuyết thông tin của Claude Shannon (1948) đã được triết học phân tích sâu sắc (Bar-Hillel, Dretske, Floridi), nhưng chính mật mã học — cái nôi khai sinh lý thuyết thông tin — lại bị triết học bỏ quên.</a:t>
+              <a:t>Hệ thống hóa toàn diện quá trình tiến hóa mô hình đối thủ: từ Shannon (1949), PPT Adversary (1984), Dolev-Yao (1983) đến Random Oracle Model (1993).</a:t>
             </a:r>
           </a:p>
           <a:p>
             <a:pPr>
               <a:spcBef>
-                <a:spcPts val="1000"/>
+                <a:spcPts val="800"/>
               </a:spcBef>
             </a:pPr>
             <a:r>
-              <a:rPr b="1" sz="1200">
+              <a:rPr b="1" sz="1100">
                 <a:solidFill>
                   <a:srgbClr val="1E293B"/>
                 </a:solidFill>
               </a:rPr>
-              <a:t>Tuyên bố cách mạng: </a:t>
-            </a:r>
-            <a:r>
-              <a:rPr sz="1150">
+              <a:t>• Phê phán Giới hạn Hình thức hóa: </a:t>
+            </a:r>
+            <a:r>
+              <a:rPr sz="1050">
                 <a:solidFill>
                   <a:srgbClr val="475569"/>
                 </a:solidFill>
               </a:rPr>
-              <a:t>Mật mã học đưa ra một tuyên bố mang tính triết học cách mạng: 'Bí mật có thể được truyền đưa an toàn trong thế giới kỹ thuật số thông qua việc ứng dụng toán học'.</a:t>
+              <a:t>Chỉ rõ sự sụp đổ của các mô hình toán học trước thực tiễn: rò rỉ kênh kề (Kocher 1996), độ dài bản mã, rò rỉ siêu dữ liệu và giám sát hàng loạt của NSA (Snowden 2013).</a:t>
             </a:r>
           </a:p>
           <a:p>
             <a:pPr>
               <a:spcBef>
-                <a:spcPts val="1000"/>
+                <a:spcPts val="800"/>
               </a:spcBef>
             </a:pPr>
             <a:r>
-              <a:rPr b="1" sz="1200">
+              <a:rPr b="1" sz="1100">
                 <a:solidFill>
                   <a:srgbClr val="1E293B"/>
                 </a:solidFill>
               </a:rPr>
-              <a:t>Lỗ hổng thực tiễn: </a:t>
-            </a:r>
-            <a:r>
-              <a:rPr sz="1150">
+              <a:t>• Đề xuất Chương trình Mới: </a:t>
+            </a:r>
+            <a:r>
+              <a:rPr sz="1050">
                 <a:solidFill>
                   <a:srgbClr val="475569"/>
                 </a:solidFill>
               </a:rPr>
-              <a:t>Khi mật mã học chuyển mình thành khoa học toán thuần túy thông qua sự trừu tượng hóa, nó tạo ra một điểm mù nguy hiểm trước các đối thủ trong thế giới thực.</a:t>
+              <a:t>Thiết lập 4 câu hỏi nghiên cứu mở (Section 7) nhằm mở rộng mật mã học từ một nhánh toán học biệt lập thành một khoa học an ninh hoàn chỉnh kết hợp thực nghiệm.</a:t>
             </a:r>
           </a:p>
         </p:txBody>
@@ -7391,7 +7032,7 @@
               </a:defRPr>
             </a:pPr>
             <a:r>
-              <a:t>Trích dẫn khoa học: Harry Halpin (2025), Section 1: Introduction, Journal of Cybersecurity, tr. 1–2.</a:t>
+              <a:t>Trích dẫn: Harry Halpin (2025), Section 1: Introduction, Journal of Cybersecurity, tr. 1–2.</a:t>
             </a:r>
           </a:p>
         </p:txBody>
@@ -7506,7 +7147,7 @@
               </a:defRPr>
             </a:pPr>
             <a:r>
-              <a:t>SECTION 1 &amp; 2 (TRANG 1–3)</a:t>
+              <a:t>SECTION 2 &amp; 3 — CƠ SỞ TRIẾT HỌC VỀ THÔNG TIN (TRANG 2–5)</a:t>
             </a:r>
           </a:p>
         </p:txBody>
@@ -7541,7 +7182,7 @@
               </a:defRPr>
             </a:pPr>
             <a:r>
-              <a:t>MỤC TIÊU &amp; BA ĐÓNG GÓP HỌC THUẬT CỦA BÀI BÁO</a:t>
+              <a:t>CƠ SỞ TRIẾT HỌC: THÔNG TIN, BÍ MẬT VÀ TÁC NHÂN</a:t>
             </a:r>
           </a:p>
         </p:txBody>
@@ -7576,7 +7217,7 @@
               </a:defRPr>
             </a:pPr>
             <a:r>
-              <a:t>Ba trụ cột đóng góp chính của công trình Harry Halpin đối với mật mã học và an ninh mạng</a:t>
+              <a:t>Khung nhận thức luận của Fred Dretske và Brian Cantwell Smith ứng dụng trong Mật mã học</a:t>
             </a:r>
           </a:p>
         </p:txBody>
@@ -7598,7 +7239,7 @@
           <a:solidFill>
             <a:srgbClr val="F8FAFC"/>
           </a:solidFill>
-          <a:ln w="12700">
+          <a:ln>
             <a:solidFill>
               <a:srgbClr val="BFDBFE"/>
             </a:solidFill>
@@ -7656,7 +7297,7 @@
               </a:defRPr>
             </a:pPr>
             <a:r>
-              <a:t>Trụ Cột 1: Cầu Nối Hai Chiều</a:t>
+              <a:t>1. Bản Thể Học Thông Tin</a:t>
             </a:r>
           </a:p>
           <a:p>
@@ -7664,14 +7305,14 @@
               <a:spcAft>
                 <a:spcPts val="800"/>
               </a:spcAft>
-              <a:defRPr sz="1000" b="1">
+              <a:defRPr sz="950" b="1">
                 <a:solidFill>
                   <a:srgbClr val="64748B"/>
                 </a:solidFill>
               </a:defRPr>
             </a:pPr>
             <a:r>
-              <a:t>KẾT NỐI TRIẾT HỌC &amp; MẬT MÃ</a:t>
+              <a:t>BRIAN CANTWELL SMITH (1996)</a:t>
             </a:r>
           </a:p>
           <a:p>
@@ -7686,15 +7327,15 @@
                   <a:srgbClr val="1E293B"/>
                 </a:solidFill>
               </a:rPr>
-              <a:t>• Mục tiêu 1: </a:t>
-            </a:r>
-            <a:r>
-              <a:rPr sz="1050">
+              <a:t>• Dòng chảy nguyên thủy: </a:t>
+            </a:r>
+            <a:r>
+              <a:rPr sz="1000">
                 <a:solidFill>
                   <a:srgbClr val="475569"/>
                 </a:solidFill>
               </a:rPr>
-              <a:t>Làm cho các hiểu biết triết học trở nên sáng tỏ và hữu ích đối với các nhà mật mã học.</a:t>
+              <a:t>Thế giới khởi đầu từ dòng chảy siêu hình không biên giới (primordial metaphysical flux).</a:t>
             </a:r>
           </a:p>
           <a:p>
@@ -7709,15 +7350,15 @@
                   <a:srgbClr val="1E293B"/>
                 </a:solidFill>
               </a:rPr>
-              <a:t>• Mục tiêu 2: </a:t>
-            </a:r>
-            <a:r>
-              <a:rPr sz="1050">
+              <a:t>• Phân ranh giới: </a:t>
+            </a:r>
+            <a:r>
+              <a:rPr sz="1000">
                 <a:solidFill>
                   <a:srgbClr val="475569"/>
                 </a:solidFill>
               </a:rPr>
-              <a:t>Kêu gọi các triết gia áp dụng công cụ triết học vào mật mã học thay vì chỉ dừng lại ở lý thuyết thông tin thuần túy.</a:t>
+              <a:t>Con người và hệ thống định hình thực tại bằng cách đăng ký đối tượng (registration of objects).</a:t>
             </a:r>
           </a:p>
           <a:p>
@@ -7732,15 +7373,15 @@
                   <a:srgbClr val="1E293B"/>
                 </a:solidFill>
               </a:rPr>
-              <a:t>• Ý nghĩa: </a:t>
-            </a:r>
-            <a:r>
-              <a:rPr sz="1050">
+              <a:t>• Tác nhân xa (Distal): </a:t>
+            </a:r>
+            <a:r>
+              <a:rPr sz="1000">
                 <a:solidFill>
                   <a:srgbClr val="475569"/>
                 </a:solidFill>
               </a:rPr>
-              <a:t>Mở rộng mật mã học từ một nhánh toán học thuần túy thành một 'khoa học an ninh tổng quát' (general science of security).</a:t>
+              <a:t>Thông tin mật mã ra đời để truyền đạt trạng thái giữa các thực thể ở xa nhau mà không thể tương tác trực tiếp.</a:t>
             </a:r>
           </a:p>
         </p:txBody>
@@ -7760,11 +7401,11 @@
             <a:avLst/>
           </a:prstGeom>
           <a:solidFill>
-            <a:srgbClr val="F8FAFC"/>
+            <a:srgbClr val="FFFBEB"/>
           </a:solidFill>
-          <a:ln w="12700">
+          <a:ln>
             <a:solidFill>
-              <a:srgbClr val="E2E8F0"/>
+              <a:srgbClr val="FDE68A"/>
             </a:solidFill>
           </a:ln>
         </p:spPr>
@@ -7815,12 +7456,12 @@
             <a:pPr>
               <a:defRPr sz="1300" b="1">
                 <a:solidFill>
-                  <a:srgbClr val="0F172A"/>
-                </a:solidFill>
-              </a:defRPr>
-            </a:pPr>
-            <a:r>
-              <a:t>Trụ Cột 2: Lịch Sử Hình Thức Hóa</a:t>
+                  <a:srgbClr val="D97706"/>
+                </a:solidFill>
+              </a:defRPr>
+            </a:pPr>
+            <a:r>
+              <a:t>2. Thuyết Thông Tin Khách Quan</a:t>
             </a:r>
           </a:p>
           <a:p>
@@ -7828,14 +7469,14 @@
               <a:spcAft>
                 <a:spcPts val="800"/>
               </a:spcAft>
-              <a:defRPr sz="1000" b="1">
+              <a:defRPr sz="950" b="1">
                 <a:solidFill>
                   <a:srgbClr val="64748B"/>
                 </a:solidFill>
               </a:defRPr>
             </a:pPr>
             <a:r>
-              <a:t>TỪ NGHỆ THUẬT SANG KHOA HỌC</a:t>
+              <a:t>FRED DRETSKE (1981)</a:t>
             </a:r>
           </a:p>
           <a:p>
@@ -7850,15 +7491,15 @@
                   <a:srgbClr val="1E293B"/>
                 </a:solidFill>
               </a:rPr>
-              <a:t>• Tiến trình lịch sử: </a:t>
-            </a:r>
-            <a:r>
-              <a:rPr sz="1050">
+              <a:t>• Thông tin khách quan: </a:t>
+            </a:r>
+            <a:r>
+              <a:rPr sz="1000">
                 <a:solidFill>
                   <a:srgbClr val="475569"/>
                 </a:solidFill>
               </a:rPr>
-              <a:t>Khảo cứu quá trình mật mã học chuyển mình từ một môn 'nghệ thuật bí truyền' thành một ngành 'khoa học chính xác'.</a:t>
+              <a:t>Thông tin là tính quy luật của trạng thái sự vật (state of affairs), hoàn toàn độc lập với việc có ai đọc hay không.</a:t>
             </a:r>
           </a:p>
           <a:p>
@@ -7873,15 +7514,15 @@
                   <a:srgbClr val="1E293B"/>
                 </a:solidFill>
               </a:rPr>
-              <a:t>• Toán học hóa đối thủ: </a:t>
-            </a:r>
-            <a:r>
-              <a:rPr sz="1050">
+              <a:t>• Thông tin và Bí mật: </a:t>
+            </a:r>
+            <a:r>
+              <a:rPr sz="1000">
                 <a:solidFill>
                   <a:srgbClr val="475569"/>
                 </a:solidFill>
               </a:rPr>
-              <a:t>Quá trình này đạt được chủ yếu nhờ việc mô hình hóa và hình thức hóa đối thủ (Shannon, PPT Game, Dolev-Yao, Random Oracle).</a:t>
+              <a:t>Bản rõ chứa đựng thông tin về nguồn; bản mã khi được mã hóa hoàn hảo sẽ không làm rò rỉ bất kỳ thông tin nào về nguồn.</a:t>
             </a:r>
           </a:p>
           <a:p>
@@ -7896,15 +7537,15 @@
                   <a:srgbClr val="1E293B"/>
                 </a:solidFill>
               </a:rPr>
-              <a:t>• Phân tích nhận thức luận: </a:t>
-            </a:r>
-            <a:r>
-              <a:rPr sz="1050">
+              <a:t>• Dòng chảy thông tin: </a:t>
+            </a:r>
+            <a:r>
+              <a:rPr sz="1000">
                 <a:solidFill>
                   <a:srgbClr val="475569"/>
                 </a:solidFill>
               </a:rPr>
-              <a:t>Làm rõ các giả định triết học ngầm định đằng sau từng bước hình thức hóa.</a:t>
+              <a:t>Nhiệm vụ của mật mã là kiểm soát dòng chảy thông tin chỉ đi đến người nhận được ủy quyền.</a:t>
             </a:r>
           </a:p>
         </p:txBody>
@@ -7924,11 +7565,11 @@
             <a:avLst/>
           </a:prstGeom>
           <a:solidFill>
-            <a:srgbClr val="FFFBEB"/>
+            <a:srgbClr val="ECFDF5"/>
           </a:solidFill>
-          <a:ln w="12700">
+          <a:ln>
             <a:solidFill>
-              <a:srgbClr val="FDE68A"/>
+              <a:srgbClr val="A7F3D0"/>
             </a:solidFill>
           </a:ln>
         </p:spPr>
@@ -7979,12 +7620,12 @@
             <a:pPr>
               <a:defRPr sz="1300" b="1">
                 <a:solidFill>
-                  <a:srgbClr val="D97706"/>
-                </a:solidFill>
-              </a:defRPr>
-            </a:pPr>
-            <a:r>
-              <a:t>Trụ Cột 3: Phê Phán Trừu Tượng Hóa</a:t>
+                  <a:srgbClr val="059669"/>
+                </a:solidFill>
+              </a:defRPr>
+            </a:pPr>
+            <a:r>
+              <a:t>3. Tác Nhân Có Chủ Đích</a:t>
             </a:r>
           </a:p>
           <a:p>
@@ -7992,14 +7633,14 @@
               <a:spcAft>
                 <a:spcPts val="800"/>
               </a:spcAft>
-              <a:defRPr sz="1000" b="1">
+              <a:defRPr sz="950" b="1">
                 <a:solidFill>
                   <a:srgbClr val="64748B"/>
                 </a:solidFill>
               </a:defRPr>
             </a:pPr>
             <a:r>
-              <a:t>PHÊ PHÁN GIỚI HẠN MÔ HÌNH</a:t>
+              <a:t>BẢN CHẤT CỦA ĐỐI THỦ</a:t>
             </a:r>
           </a:p>
           <a:p>
@@ -8014,15 +7655,15 @@
                   <a:srgbClr val="1E293B"/>
                 </a:solidFill>
               </a:rPr>
-              <a:t>• Bản đồ vs Lãnh thổ: </a:t>
-            </a:r>
-            <a:r>
-              <a:rPr sz="1050">
+              <a:t>• Tính chủ đích (Intentionality): </a:t>
+            </a:r>
+            <a:r>
+              <a:rPr sz="1000">
                 <a:solidFill>
                   <a:srgbClr val="475569"/>
                 </a:solidFill>
               </a:rPr>
-              <a:t>Vận dụng luận điểm của Korzybski và Cantwell Smith: Sự trừu tượng hóa luôn đi kèm cái giá là lược bỏ chi tiết thực tế.</a:t>
+              <a:t>Đối thủ không phải là 'nhiễu ngẫu nhiên' mà là thực thể có niềm tin, mục tiêu và ý chí khai thác lỗ hổng.</a:t>
             </a:r>
           </a:p>
           <a:p>
@@ -8037,15 +7678,15 @@
                   <a:srgbClr val="1E293B"/>
                 </a:solidFill>
               </a:rPr>
-              <a:t>• Khủng hoảng Snowden: </a:t>
-            </a:r>
-            <a:r>
-              <a:rPr sz="1050">
+              <a:t>• Tính tương đối của bí mật: </a:t>
+            </a:r>
+            <a:r>
+              <a:rPr sz="1000">
                 <a:solidFill>
                   <a:srgbClr val="475569"/>
                 </a:solidFill>
               </a:rPr>
-              <a:t>Vụ rò rỉ Snowden (2013) là bằng chứng thực tế cho thấy các mô hình hình thức thất bại trước đối thủ thể chế (NSA).</a:t>
+              <a:t>Bí mật không vĩnh cửu. Không có hệ thống nào tuyệt đối; bí mật phụ thuộc vào năng lực tính toán và thời gian của đối thủ.</a:t>
             </a:r>
           </a:p>
           <a:p>
@@ -8060,15 +7701,15 @@
                   <a:srgbClr val="1E293B"/>
                 </a:solidFill>
               </a:rPr>
-              <a:t>• Lời giải: </a:t>
-            </a:r>
-            <a:r>
-              <a:rPr sz="1050">
+              <a:t>• Public vs Common Knowledge: </a:t>
+            </a:r>
+            <a:r>
+              <a:rPr sz="1000">
                 <a:solidFill>
                   <a:srgbClr val="475569"/>
                 </a:solidFill>
               </a:rPr>
-              <a:t>Đề xuất chương trình nghiên cứu 'hòa giải' (reconciliation) với dữ liệu thực tế và mạng xã hội-kỹ thuật phức hợp.</a:t>
+              <a:t>Bản mã là tri thức công cộng (public); nhưng ý nghĩa bản rõ chỉ có thể thành tri thức phổ thông nếu có khóa.</a:t>
             </a:r>
           </a:p>
         </p:txBody>
@@ -8103,7 +7744,7 @@
               </a:defRPr>
             </a:pPr>
             <a:r>
-              <a:t>Trích dẫn khoa học: Harry Halpin (2025), Section 1–2, Journal of Cybersecurity, tr. 1–3.</a:t>
+              <a:t>Trích dẫn khoa học: Dretske (1981, Ref [1]); Cantwell Smith (1996, Ref [5]); Halpin (2025), tr. 2–5.</a:t>
             </a:r>
           </a:p>
         </p:txBody>
@@ -8218,7 +7859,7 @@
               </a:defRPr>
             </a:pPr>
             <a:r>
-              <a:t>SECTION 2 — TIỀN ĐỀ TRIẾT HỌC (TRANG 2–3)</a:t>
+              <a:t>SƠ ĐỒ 1: DÒNG THỜI GIAN TIẾN HÓA MÔ HÌNH ĐỐI THỦ</a:t>
             </a:r>
           </a:p>
         </p:txBody>
@@ -8253,7 +7894,7 @@
               </a:defRPr>
             </a:pPr>
             <a:r>
-              <a:t>CƠ SỞ TRIẾT HỌC: DRETSKE, CANTWELL SMITH &amp; BẢN CHẤT BÍ MẬT</a:t>
+              <a:t>TIẾN TRÌNH LỊCH SỬ MÔ HÌNH HÓA ĐỐI THỦ TRONG MẬT MÃ</a:t>
             </a:r>
           </a:p>
         </p:txBody>
@@ -8288,7 +7929,7 @@
               </a:defRPr>
             </a:pPr>
             <a:r>
-              <a:t>Xây dựng khung nhận thức luận về tác nhân có chủ đích, sự phân ranh thế giới và khái niệm bí mật</a:t>
+              <a:t>Sự dịch chuyển từ Lý thuyết thông tin sang Giả định độ phức tạp tính toán và Phê phán hậu Snowden</a:t>
             </a:r>
           </a:p>
         </p:txBody>
@@ -8302,7 +7943,7 @@
         <p:spPr>
           <a:xfrm>
             <a:off x="731520" y="1691640"/>
-            <a:ext cx="10728655" cy="1298448"/>
+            <a:ext cx="10728655" cy="777240"/>
           </a:xfrm>
           <a:prstGeom prst="roundRect">
             <a:avLst/>
@@ -8310,7 +7951,7 @@
           <a:solidFill>
             <a:srgbClr val="F8FAFC"/>
           </a:solidFill>
-          <a:ln w="12700">
+          <a:ln>
             <a:solidFill>
               <a:srgbClr val="BFDBFE"/>
             </a:solidFill>
@@ -8346,8 +7987,8 @@
         </p:nvSpPr>
         <p:spPr>
           <a:xfrm>
-            <a:off x="914400" y="1801368"/>
-            <a:ext cx="10362895" cy="1078992"/>
+            <a:off x="914400" y="1737360"/>
+            <a:ext cx="10362895" cy="685800"/>
           </a:xfrm>
           <a:prstGeom prst="rect">
             <a:avLst/>
@@ -8360,30 +8001,29 @@
           </a:bodyPr>
           <a:lstStyle/>
           <a:p>
-            <a:pPr>
-              <a:defRPr sz="1300" b="1">
+            <a:r>
+              <a:rPr b="1" sz="1150">
                 <a:solidFill>
                   <a:srgbClr val="1E40AF"/>
                 </a:solidFill>
-              </a:defRPr>
-            </a:pPr>
-            <a:r>
-              <a:t>1. Fred Dretske (1981) — Dòng Chảy Thông Tin và Tác Nhân Có Chủ Đích</a:t>
-            </a:r>
-          </a:p>
-          <a:p>
-            <a:pPr>
-              <a:spcBef>
-                <a:spcPts val="400"/>
-              </a:spcBef>
-              <a:defRPr sz="1100">
+              </a:rPr>
+              <a:t>Giai đoạn 1 (1948–1949) — </a:t>
+            </a:r>
+            <a:r>
+              <a:rPr b="1" sz="1100">
+                <a:solidFill>
+                  <a:srgbClr val="1E293B"/>
+                </a:solidFill>
+              </a:rPr>
+              <a:t>[MÔ HÌNH SHANNON]: </a:t>
+            </a:r>
+            <a:r>
+              <a:rPr sz="1050">
                 <a:solidFill>
                   <a:srgbClr val="475569"/>
                 </a:solidFill>
-              </a:defRPr>
-            </a:pPr>
-            <a:r>
-              <a:t>Thông tin là các quy luật (regularities) trong các trạng thái sự vật. Tác nhân có chủ đích (như con người) khác biệt hoàn toàn với các vật mang tin vô tri (nhiệt kế, DNA): tác nhân sở hữu cấu trúc ý niệm, niềm tin, kế hoạch hành động và có khả năng tích hợp thông tin vào trạng thái cục bộ để ra quyết định.</a:t>
+              </a:rPr>
+              <a:t>Claude Shannon hình thức hóa mật mã học bằng xác suất; định nghĩa Bí mật hoàn hảo (OTP). Giả định sai lệch do 'Nhiễu ngẫu nhiên'.</a:t>
             </a:r>
           </a:p>
         </p:txBody>
@@ -8396,18 +8036,18 @@
         </p:nvSpPr>
         <p:spPr>
           <a:xfrm>
-            <a:off x="731520" y="3136392"/>
-            <a:ext cx="10728655" cy="1298448"/>
+            <a:off x="731520" y="2560320"/>
+            <a:ext cx="10728655" cy="777240"/>
           </a:xfrm>
           <a:prstGeom prst="roundRect">
             <a:avLst/>
           </a:prstGeom>
           <a:solidFill>
-            <a:srgbClr val="F8FAFC"/>
+            <a:srgbClr val="FFFBEB"/>
           </a:solidFill>
-          <a:ln w="12700">
+          <a:ln>
             <a:solidFill>
-              <a:srgbClr val="E2E8F0"/>
+              <a:srgbClr val="FDE68A"/>
             </a:solidFill>
           </a:ln>
         </p:spPr>
@@ -8441,8 +8081,8 @@
         </p:nvSpPr>
         <p:spPr>
           <a:xfrm>
-            <a:off x="914400" y="3246120"/>
-            <a:ext cx="10362895" cy="1078992"/>
+            <a:off x="914400" y="2606040"/>
+            <a:ext cx="10362895" cy="685800"/>
           </a:xfrm>
           <a:prstGeom prst="rect">
             <a:avLst/>
@@ -8455,30 +8095,29 @@
           </a:bodyPr>
           <a:lstStyle/>
           <a:p>
-            <a:pPr>
-              <a:defRPr sz="1300" b="1">
-                <a:solidFill>
-                  <a:srgbClr val="0F172A"/>
-                </a:solidFill>
-              </a:defRPr>
-            </a:pPr>
-            <a:r>
-              <a:t>2. Brian Cantwell Smith (1996) — Siêu Hình Học Dòng Chảy &amp; Sự Phân Ranh (Cutting at the Joints)</a:t>
-            </a:r>
-          </a:p>
-          <a:p>
-            <a:pPr>
-              <a:spcBef>
-                <a:spcPts val="400"/>
-              </a:spcBef>
-              <a:defRPr sz="1100">
+            <a:r>
+              <a:rPr b="1" sz="1150">
+                <a:solidFill>
+                  <a:srgbClr val="D97706"/>
+                </a:solidFill>
+              </a:rPr>
+              <a:t>Giai đoạn 2 (1976) — </a:t>
+            </a:r>
+            <a:r>
+              <a:rPr b="1" sz="1100">
+                <a:solidFill>
+                  <a:srgbClr val="1E293B"/>
+                </a:solidFill>
+              </a:rPr>
+              <a:t>[CÁCH MẠNG KHÓA CÔNG KHAI]: </a:t>
+            </a:r>
+            <a:r>
+              <a:rPr sz="1050">
                 <a:solidFill>
                   <a:srgbClr val="475569"/>
                 </a:solidFill>
-              </a:defRPr>
-            </a:pPr>
-            <a:r>
-              <a:t>Thế giới là dòng chảy siêu hình nguyên thủy (primordial metaphysical flux). Con người phân tích thế giới bằng cách 'cắt' nó thành các hệ thống riêng biệt (proximal vs distal agents). Mọi mô hình trừu tượng đều là phép xấp xỉ; ranh giới giữa các tác nhân luôn mang tính động và tương đối.</a:t>
+              </a:rPr>
+              <a:t>Diffie-Hellman và Merkle giải quyết bài toán phân phối khóa; chuyển gánh nặng bảo mật sang độ phức tạp tính toán một chiều.</a:t>
             </a:r>
           </a:p>
         </p:txBody>
@@ -8491,18 +8130,18 @@
         </p:nvSpPr>
         <p:spPr>
           <a:xfrm>
-            <a:off x="731520" y="4581144"/>
-            <a:ext cx="10728655" cy="1298448"/>
+            <a:off x="731520" y="3429000"/>
+            <a:ext cx="10728655" cy="777240"/>
           </a:xfrm>
           <a:prstGeom prst="roundRect">
             <a:avLst/>
           </a:prstGeom>
           <a:solidFill>
-            <a:srgbClr val="ECFDF5"/>
+            <a:srgbClr val="F8FAFC"/>
           </a:solidFill>
-          <a:ln w="12700">
+          <a:ln>
             <a:solidFill>
-              <a:srgbClr val="A7F3D0"/>
+              <a:srgbClr val="E2E8F0"/>
             </a:solidFill>
           </a:ln>
         </p:spPr>
@@ -8536,8 +8175,8 @@
         </p:nvSpPr>
         <p:spPr>
           <a:xfrm>
-            <a:off x="914400" y="4690872"/>
-            <a:ext cx="10362895" cy="1078992"/>
+            <a:off x="914400" y="3474720"/>
+            <a:ext cx="10362895" cy="685800"/>
           </a:xfrm>
           <a:prstGeom prst="rect">
             <a:avLst/>
@@ -8550,37 +8189,224 @@
           </a:bodyPr>
           <a:lstStyle/>
           <a:p>
-            <a:pPr>
-              <a:defRPr sz="1300" b="1">
+            <a:r>
+              <a:rPr b="1" sz="1150">
+                <a:solidFill>
+                  <a:srgbClr val="0F172A"/>
+                </a:solidFill>
+              </a:rPr>
+              <a:t>Giai đoạn 3 (1982–1984) — </a:t>
+            </a:r>
+            <a:r>
+              <a:rPr b="1" sz="1100">
+                <a:solidFill>
+                  <a:srgbClr val="1E293B"/>
+                </a:solidFill>
+              </a:rPr>
+              <a:t>[PPT ADVERSARY &amp; SECURITY GAMES]: </a:t>
+            </a:r>
+            <a:r>
+              <a:rPr sz="1050">
+                <a:solidFill>
+                  <a:srgbClr val="475569"/>
+                </a:solidFill>
+              </a:rPr>
+              <a:t>Goldwasser-Micali định nghĩa an toàn ngữ nghĩa và đối thủ thời gian đa thức xác suất (PPT). Chứng minh an toàn bằng quy dẫn toán học.</a:t>
+            </a:r>
+          </a:p>
+        </p:txBody>
+      </p:sp>
+      <p:sp>
+        <p:nvSpPr>
+          <p:cNvPr id="12" name="Rounded Rectangle 11"/>
+          <p:cNvSpPr/>
+          <p:nvPr/>
+        </p:nvSpPr>
+        <p:spPr>
+          <a:xfrm>
+            <a:off x="731520" y="4297680"/>
+            <a:ext cx="10728655" cy="777240"/>
+          </a:xfrm>
+          <a:prstGeom prst="roundRect">
+            <a:avLst/>
+          </a:prstGeom>
+          <a:solidFill>
+            <a:srgbClr val="ECFDF5"/>
+          </a:solidFill>
+          <a:ln>
+            <a:solidFill>
+              <a:srgbClr val="A7F3D0"/>
+            </a:solidFill>
+          </a:ln>
+        </p:spPr>
+        <p:style>
+          <a:lnRef idx="1">
+            <a:schemeClr val="accent1"/>
+          </a:lnRef>
+          <a:fillRef idx="3">
+            <a:schemeClr val="accent1"/>
+          </a:fillRef>
+          <a:effectRef idx="2">
+            <a:schemeClr val="accent1"/>
+          </a:effectRef>
+          <a:fontRef idx="minor">
+            <a:schemeClr val="lt1"/>
+          </a:fontRef>
+        </p:style>
+        <p:txBody>
+          <a:bodyPr rtlCol="0" anchor="ctr"/>
+          <a:lstStyle/>
+          <a:p>
+            <a:pPr algn="ctr"/>
+          </a:p>
+        </p:txBody>
+      </p:sp>
+      <p:sp>
+        <p:nvSpPr>
+          <p:cNvPr id="13" name="TextBox 12"/>
+          <p:cNvSpPr txBox="1"/>
+          <p:nvPr/>
+        </p:nvSpPr>
+        <p:spPr>
+          <a:xfrm>
+            <a:off x="914400" y="4343400"/>
+            <a:ext cx="10362895" cy="685800"/>
+          </a:xfrm>
+          <a:prstGeom prst="rect">
+            <a:avLst/>
+          </a:prstGeom>
+          <a:noFill/>
+        </p:spPr>
+        <p:txBody>
+          <a:bodyPr wrap="square">
+            <a:spAutoFit/>
+          </a:bodyPr>
+          <a:lstStyle/>
+          <a:p>
+            <a:r>
+              <a:rPr b="1" sz="1150">
                 <a:solidFill>
                   <a:srgbClr val="059669"/>
                 </a:solidFill>
-              </a:defRPr>
-            </a:pPr>
-            <a:r>
-              <a:t>3. Bản Chất Của Bí Mật: Bí Mật Là Gì Dưới Góc Nhìn Triết Học?</a:t>
-            </a:r>
-          </a:p>
-          <a:p>
-            <a:pPr>
-              <a:spcBef>
-                <a:spcPts val="400"/>
-              </a:spcBef>
-              <a:defRPr sz="1100">
+              </a:rPr>
+              <a:t>Giai đoạn 4 (1981–1993) — </a:t>
+            </a:r>
+            <a:r>
+              <a:rPr b="1" sz="1100">
+                <a:solidFill>
+                  <a:srgbClr val="1E293B"/>
+                </a:solidFill>
+              </a:rPr>
+              <a:t>[DOLEV-YAO &amp; RANDOM ORACLE]: </a:t>
+            </a:r>
+            <a:r>
+              <a:rPr sz="1050">
                 <a:solidFill>
                   <a:srgbClr val="475569"/>
                 </a:solidFill>
-              </a:defRPr>
-            </a:pPr>
-            <a:r>
-              <a:t>Bí mật KHÔNG tồn tại tự thân và không có bí mật vĩnh cửu. Bí mật là mối quan hệ xã hội tương đối giữa thông tin và nhóm người giữ bí mật (secret keepers) qua một khoảng thời gian nhất định, trong đó nhóm người này chủ đích loại trừ những kẻ khác (adversaries) khỏi quyền tiếp cận thông tin đó.</a:t>
-            </a:r>
-          </a:p>
-        </p:txBody>
-      </p:sp>
-      <p:sp>
-        <p:nvSpPr>
-          <p:cNvPr id="12" name="TextBox 11"/>
+              </a:rPr>
+              <a:t>Dolev-Yao mô hình hóa đối thủ mạng kiểm soát hoàn toàn kênh truyền. Bellare-Rogaway đề xuất Random Oracle Model (ROM) ứng dụng thực hành.</a:t>
+            </a:r>
+          </a:p>
+        </p:txBody>
+      </p:sp>
+      <p:sp>
+        <p:nvSpPr>
+          <p:cNvPr id="14" name="Rounded Rectangle 13"/>
+          <p:cNvSpPr/>
+          <p:nvPr/>
+        </p:nvSpPr>
+        <p:spPr>
+          <a:xfrm>
+            <a:off x="731520" y="5166360"/>
+            <a:ext cx="10728655" cy="777240"/>
+          </a:xfrm>
+          <a:prstGeom prst="roundRect">
+            <a:avLst/>
+          </a:prstGeom>
+          <a:solidFill>
+            <a:srgbClr val="FEF2F2"/>
+          </a:solidFill>
+          <a:ln>
+            <a:solidFill>
+              <a:srgbClr val="FECACA"/>
+            </a:solidFill>
+          </a:ln>
+        </p:spPr>
+        <p:style>
+          <a:lnRef idx="1">
+            <a:schemeClr val="accent1"/>
+          </a:lnRef>
+          <a:fillRef idx="3">
+            <a:schemeClr val="accent1"/>
+          </a:fillRef>
+          <a:effectRef idx="2">
+            <a:schemeClr val="accent1"/>
+          </a:effectRef>
+          <a:fontRef idx="minor">
+            <a:schemeClr val="lt1"/>
+          </a:fontRef>
+        </p:style>
+        <p:txBody>
+          <a:bodyPr rtlCol="0" anchor="ctr"/>
+          <a:lstStyle/>
+          <a:p>
+            <a:pPr algn="ctr"/>
+          </a:p>
+        </p:txBody>
+      </p:sp>
+      <p:sp>
+        <p:nvSpPr>
+          <p:cNvPr id="15" name="TextBox 14"/>
+          <p:cNvSpPr txBox="1"/>
+          <p:nvPr/>
+        </p:nvSpPr>
+        <p:spPr>
+          <a:xfrm>
+            <a:off x="914400" y="5212080"/>
+            <a:ext cx="10362895" cy="685800"/>
+          </a:xfrm>
+          <a:prstGeom prst="rect">
+            <a:avLst/>
+          </a:prstGeom>
+          <a:noFill/>
+        </p:spPr>
+        <p:txBody>
+          <a:bodyPr wrap="square">
+            <a:spAutoFit/>
+          </a:bodyPr>
+          <a:lstStyle/>
+          <a:p>
+            <a:r>
+              <a:rPr b="1" sz="1150">
+                <a:solidFill>
+                  <a:srgbClr val="DC2626"/>
+                </a:solidFill>
+              </a:rPr>
+              <a:t>Giai đoạn 5 (2013–2025) — </a:t>
+            </a:r>
+            <a:r>
+              <a:rPr b="1" sz="1100">
+                <a:solidFill>
+                  <a:srgbClr val="1E293B"/>
+                </a:solidFill>
+              </a:rPr>
+              <a:t>[PHÊ PHÁN HẬU SNOWDEN]: </a:t>
+            </a:r>
+            <a:r>
+              <a:rPr sz="1050">
+                <a:solidFill>
+                  <a:srgbClr val="475569"/>
+                </a:solidFill>
+              </a:rPr>
+              <a:t>Tiết lộ của Snowden phơi bày năng lực thực tế của NSA: Kênh kề, cửa sau chuẩn mật mã, tấn công chuỗi cung ứng và giám sát siêu dữ liệu.</a:t>
+            </a:r>
+          </a:p>
+        </p:txBody>
+      </p:sp>
+      <p:sp>
+        <p:nvSpPr>
+          <p:cNvPr id="16" name="TextBox 15"/>
           <p:cNvSpPr txBox="1"/>
           <p:nvPr/>
         </p:nvSpPr>
@@ -8608,7 +8434,7 @@
               </a:defRPr>
             </a:pPr>
             <a:r>
-              <a:t>Trích dẫn: Dretske (1981, Ref [1]); Cantwell Smith (1996, Ref [5]); Halpin (2025), tr. 2–3.</a:t>
+              <a:t>Sơ đồ tổng hợp dựa trên Section 3–6, Harry Halpin (2025), Journal of Cybersecurity, tr. 3–12.</a:t>
             </a:r>
           </a:p>
         </p:txBody>
@@ -8723,7 +8549,7 @@
               </a:defRPr>
             </a:pPr>
             <a:r>
-              <a:t>SECTIONS 3–6 (TRANG 3–12)</a:t>
+              <a:t>SƠ ĐỒ 2: ĐỐI SÁNH MÔ HÌNH TRUYỀN THÔNG ĐIỂM-ĐIỂM VÀ MẠNG XÃ HỘI-KỸ THUẬT</a:t>
             </a:r>
           </a:p>
         </p:txBody>
@@ -8758,7 +8584,7 @@
               </a:defRPr>
             </a:pPr>
             <a:r>
-              <a:t>SƠ ĐỒ 1: DÒNG THỜI GIAN 7 THẬP KỶ TIẾN HÓA MÔ HÌNH ĐỐI THỦ</a:t>
+              <a:t>MÔ HÌNH TRUYỀN THÔNG CỦA SHANNON VÀ MẠNG THỰC TẾ</a:t>
             </a:r>
           </a:p>
         </p:txBody>
@@ -8793,30 +8619,32 @@
               </a:defRPr>
             </a:pPr>
             <a:r>
-              <a:t>Tiến trình lịch sử từ mô hình truyền thông Shannon đến các đối thủ hình thức và khủng hoảng Snowden</a:t>
-            </a:r>
-          </a:p>
-        </p:txBody>
-      </p:sp>
-      <p:sp>
-        <p:nvSpPr>
-          <p:cNvPr id="6" name="Rectangle 5"/>
+              <a:t>Khoảng cách giữa mô hình điểm-điểm đóng kín của Shannon và mạng phức hợp không đồng nhất</a:t>
+            </a:r>
+          </a:p>
+        </p:txBody>
+      </p:sp>
+      <p:sp>
+        <p:nvSpPr>
+          <p:cNvPr id="6" name="Rounded Rectangle 5"/>
           <p:cNvSpPr/>
           <p:nvPr/>
         </p:nvSpPr>
         <p:spPr>
           <a:xfrm>
-            <a:off x="914400" y="3749039"/>
-            <a:ext cx="10362895" cy="73152"/>
-          </a:xfrm>
-          <a:prstGeom prst="rect">
+            <a:off x="731520" y="1691640"/>
+            <a:ext cx="5212080" cy="4343400"/>
+          </a:xfrm>
+          <a:prstGeom prst="roundRect">
             <a:avLst/>
           </a:prstGeom>
           <a:solidFill>
-            <a:srgbClr val="BFDBFE"/>
+            <a:srgbClr val="F8FAFC"/>
           </a:solidFill>
           <a:ln>
-            <a:noFill/>
+            <a:solidFill>
+              <a:srgbClr val="BFDBFE"/>
+            </a:solidFill>
           </a:ln>
         </p:spPr>
         <p:style>
@@ -8843,24 +8671,59 @@
       </p:sp>
       <p:sp>
         <p:nvSpPr>
-          <p:cNvPr id="7" name="Oval 6"/>
+          <p:cNvPr id="7" name="TextBox 6"/>
+          <p:cNvSpPr txBox="1"/>
+          <p:nvPr/>
+        </p:nvSpPr>
+        <p:spPr>
+          <a:xfrm>
+            <a:off x="914400" y="1783080"/>
+            <a:ext cx="4846320" cy="365760"/>
+          </a:xfrm>
+          <a:prstGeom prst="rect">
+            <a:avLst/>
+          </a:prstGeom>
+          <a:noFill/>
+        </p:spPr>
+        <p:txBody>
+          <a:bodyPr wrap="none">
+            <a:spAutoFit/>
+          </a:bodyPr>
+          <a:lstStyle/>
+          <a:p>
+            <a:pPr>
+              <a:defRPr sz="1200" b="1">
+                <a:solidFill>
+                  <a:srgbClr val="1E40AF"/>
+                </a:solidFill>
+              </a:defRPr>
+            </a:pPr>
+            <a:r>
+              <a:t>1. Mô Hình Điểm - Điểm Cổ Điển Shannon (1949)</a:t>
+            </a:r>
+          </a:p>
+        </p:txBody>
+      </p:sp>
+      <p:sp>
+        <p:nvSpPr>
+          <p:cNvPr id="8" name="Rounded Rectangle 7"/>
           <p:cNvSpPr/>
           <p:nvPr/>
         </p:nvSpPr>
         <p:spPr>
           <a:xfrm>
-            <a:off x="1453896" y="3648456"/>
-            <a:ext cx="274320" cy="274320"/>
-          </a:xfrm>
-          <a:prstGeom prst="ellipse">
+            <a:off x="1005840" y="2240280"/>
+            <a:ext cx="1280160" cy="594360"/>
+          </a:xfrm>
+          <a:prstGeom prst="roundRect">
             <a:avLst/>
           </a:prstGeom>
           <a:solidFill>
-            <a:srgbClr val="1E40AF"/>
+            <a:srgbClr val="EFF6FF"/>
           </a:solidFill>
-          <a:ln w="25400">
+          <a:ln>
             <a:solidFill>
-              <a:srgbClr val="FFFFFF"/>
+              <a:srgbClr val="2563EB"/>
             </a:solidFill>
           </a:ln>
         </p:spPr>
@@ -8879,33 +8742,54 @@
           </a:fontRef>
         </p:style>
         <p:txBody>
-          <a:bodyPr rtlCol="0" anchor="ctr"/>
-          <a:lstStyle/>
-          <a:p>
-            <a:pPr algn="ctr"/>
-          </a:p>
-        </p:txBody>
-      </p:sp>
-      <p:sp>
-        <p:nvSpPr>
-          <p:cNvPr id="8" name="Rounded Rectangle 7"/>
+          <a:bodyPr rtlCol="0" anchor="ctr" wrap="square" lIns="36576" rIns="36576" tIns="36576" bIns="36576"/>
+          <a:lstStyle/>
+          <a:p>
+            <a:pPr algn="ctr">
+              <a:defRPr sz="950" b="1">
+                <a:solidFill>
+                  <a:srgbClr val="1E40AF"/>
+                </a:solidFill>
+              </a:defRPr>
+            </a:pPr>
+            <a:r>
+              <a:t>Người gửi Alice</a:t>
+            </a:r>
+          </a:p>
+          <a:p>
+            <a:pPr algn="ctr">
+              <a:defRPr sz="950" b="0">
+                <a:solidFill>
+                  <a:srgbClr val="1E40AF"/>
+                </a:solidFill>
+              </a:defRPr>
+            </a:pPr>
+            <a:r>
+              <a:t>(Bản rõ M)</a:t>
+            </a:r>
+          </a:p>
+        </p:txBody>
+      </p:sp>
+      <p:sp>
+        <p:nvSpPr>
+          <p:cNvPr id="9" name="Rounded Rectangle 8"/>
           <p:cNvSpPr/>
           <p:nvPr/>
         </p:nvSpPr>
         <p:spPr>
           <a:xfrm>
-            <a:off x="914400" y="1737360"/>
-            <a:ext cx="1353312" cy="1691640"/>
+            <a:off x="2651760" y="2240280"/>
+            <a:ext cx="1463040" cy="594360"/>
           </a:xfrm>
           <a:prstGeom prst="roundRect">
             <a:avLst/>
           </a:prstGeom>
           <a:solidFill>
-            <a:srgbClr val="F8FAFC"/>
+            <a:srgbClr val="FEF2F2"/>
           </a:solidFill>
-          <a:ln w="12700">
+          <a:ln>
             <a:solidFill>
-              <a:srgbClr val="E2E8F0"/>
+              <a:srgbClr val="DC2626"/>
             </a:solidFill>
           </a:ln>
         </p:spPr>
@@ -8924,95 +8808,54 @@
           </a:fontRef>
         </p:style>
         <p:txBody>
-          <a:bodyPr rtlCol="0" anchor="ctr"/>
-          <a:lstStyle/>
-          <a:p>
-            <a:pPr algn="ctr"/>
-          </a:p>
-        </p:txBody>
-      </p:sp>
-      <p:sp>
-        <p:nvSpPr>
-          <p:cNvPr id="9" name="TextBox 8"/>
-          <p:cNvSpPr txBox="1"/>
-          <p:nvPr/>
-        </p:nvSpPr>
-        <p:spPr>
-          <a:xfrm>
-            <a:off x="987552" y="1810512"/>
-            <a:ext cx="1207008" cy="1545336"/>
-          </a:xfrm>
-          <a:prstGeom prst="rect">
-            <a:avLst/>
-          </a:prstGeom>
-          <a:noFill/>
-        </p:spPr>
-        <p:txBody>
-          <a:bodyPr wrap="square">
-            <a:spAutoFit/>
-          </a:bodyPr>
-          <a:lstStyle/>
-          <a:p>
-            <a:pPr>
-              <a:defRPr sz="1300" b="1">
-                <a:solidFill>
-                  <a:srgbClr val="1E40AF"/>
-                </a:solidFill>
-              </a:defRPr>
-            </a:pPr>
-            <a:r>
-              <a:t>1948</a:t>
-            </a:r>
-          </a:p>
-          <a:p>
-            <a:pPr>
-              <a:defRPr sz="1000" b="1">
-                <a:solidFill>
-                  <a:srgbClr val="0F172A"/>
-                </a:solidFill>
-              </a:defRPr>
-            </a:pPr>
-            <a:r>
-              <a:t>Shannon</a:t>
-            </a:r>
-          </a:p>
-          <a:p>
-            <a:pPr>
-              <a:spcBef>
-                <a:spcPts val="300"/>
-              </a:spcBef>
-              <a:defRPr sz="850">
-                <a:solidFill>
-                  <a:srgbClr val="475569"/>
-                </a:solidFill>
-              </a:defRPr>
-            </a:pPr>
-            <a:r>
-              <a:t>Nhiễu ngẫu nhiên, One-Time Pad, Bí mật hoàn hảo</a:t>
-            </a:r>
-          </a:p>
-        </p:txBody>
-      </p:sp>
-      <p:sp>
-        <p:nvSpPr>
-          <p:cNvPr id="10" name="Oval 9"/>
+          <a:bodyPr rtlCol="0" anchor="ctr" wrap="square" lIns="36576" rIns="36576" tIns="36576" bIns="36576"/>
+          <a:lstStyle/>
+          <a:p>
+            <a:pPr algn="ctr">
+              <a:defRPr sz="950" b="1">
+                <a:solidFill>
+                  <a:srgbClr val="B91C1C"/>
+                </a:solidFill>
+              </a:defRPr>
+            </a:pPr>
+            <a:r>
+              <a:t>Kênh truyền</a:t>
+            </a:r>
+          </a:p>
+          <a:p>
+            <a:pPr algn="ctr">
+              <a:defRPr sz="950" b="0">
+                <a:solidFill>
+                  <a:srgbClr val="B91C1C"/>
+                </a:solidFill>
+              </a:defRPr>
+            </a:pPr>
+            <a:r>
+              <a:t>C = Enc(K, M)</a:t>
+            </a:r>
+          </a:p>
+        </p:txBody>
+      </p:sp>
+      <p:sp>
+        <p:nvSpPr>
+          <p:cNvPr id="10" name="Rounded Rectangle 9"/>
           <p:cNvSpPr/>
           <p:nvPr/>
         </p:nvSpPr>
         <p:spPr>
           <a:xfrm>
-            <a:off x="2971800" y="3648456"/>
-            <a:ext cx="274320" cy="274320"/>
-          </a:xfrm>
-          <a:prstGeom prst="ellipse">
+            <a:off x="4480560" y="2240280"/>
+            <a:ext cx="1188720" cy="594360"/>
+          </a:xfrm>
+          <a:prstGeom prst="roundRect">
             <a:avLst/>
           </a:prstGeom>
           <a:solidFill>
-            <a:srgbClr val="1E40AF"/>
+            <a:srgbClr val="ECFDF5"/>
           </a:solidFill>
-          <a:ln w="25400">
+          <a:ln>
             <a:solidFill>
-              <a:srgbClr val="FFFFFF"/>
+              <a:srgbClr val="059669"/>
             </a:solidFill>
           </a:ln>
         </p:spPr>
@@ -9031,10 +8874,31 @@
           </a:fontRef>
         </p:style>
         <p:txBody>
-          <a:bodyPr rtlCol="0" anchor="ctr"/>
-          <a:lstStyle/>
-          <a:p>
-            <a:pPr algn="ctr"/>
+          <a:bodyPr rtlCol="0" anchor="ctr" wrap="square" lIns="36576" rIns="36576" tIns="36576" bIns="36576"/>
+          <a:lstStyle/>
+          <a:p>
+            <a:pPr algn="ctr">
+              <a:defRPr sz="950" b="1">
+                <a:solidFill>
+                  <a:srgbClr val="059669"/>
+                </a:solidFill>
+              </a:defRPr>
+            </a:pPr>
+            <a:r>
+              <a:t>Người nhận Bob</a:t>
+            </a:r>
+          </a:p>
+          <a:p>
+            <a:pPr algn="ctr">
+              <a:defRPr sz="950" b="0">
+                <a:solidFill>
+                  <a:srgbClr val="059669"/>
+                </a:solidFill>
+              </a:defRPr>
+            </a:pPr>
+            <a:r>
+              <a:t>(Dec(K, C))</a:t>
+            </a:r>
           </a:p>
         </p:txBody>
       </p:sp>
@@ -9046,18 +8910,18 @@
         </p:nvSpPr>
         <p:spPr>
           <a:xfrm>
-            <a:off x="2432304" y="4114800"/>
-            <a:ext cx="1353312" cy="1691640"/>
+            <a:off x="2468880" y="2971800"/>
+            <a:ext cx="1828800" cy="502920"/>
           </a:xfrm>
           <a:prstGeom prst="roundRect">
             <a:avLst/>
           </a:prstGeom>
           <a:solidFill>
-            <a:srgbClr val="F8FAFC"/>
+            <a:srgbClr val="FEE2E2"/>
           </a:solidFill>
-          <a:ln w="12700">
+          <a:ln>
             <a:solidFill>
-              <a:srgbClr val="E2E8F0"/>
+              <a:srgbClr val="B91C1C"/>
             </a:solidFill>
           </a:ln>
         </p:spPr>
@@ -9076,10 +8940,31 @@
           </a:fontRef>
         </p:style>
         <p:txBody>
-          <a:bodyPr rtlCol="0" anchor="ctr"/>
-          <a:lstStyle/>
-          <a:p>
-            <a:pPr algn="ctr"/>
+          <a:bodyPr rtlCol="0" anchor="ctr" wrap="square" lIns="36576" rIns="36576" tIns="36576" bIns="36576"/>
+          <a:lstStyle/>
+          <a:p>
+            <a:pPr algn="ctr">
+              <a:defRPr sz="900" b="1">
+                <a:solidFill>
+                  <a:srgbClr val="991B1B"/>
+                </a:solidFill>
+              </a:defRPr>
+            </a:pPr>
+            <a:r>
+              <a:t>Đối thủ Eve (Passive)</a:t>
+            </a:r>
+          </a:p>
+          <a:p>
+            <a:pPr algn="ctr">
+              <a:defRPr sz="900" b="0">
+                <a:solidFill>
+                  <a:srgbClr val="991B1B"/>
+                </a:solidFill>
+              </a:defRPr>
+            </a:pPr>
+            <a:r>
+              <a:t>Chỉ nghe lén đường truyền</a:t>
+            </a:r>
           </a:p>
         </p:txBody>
       </p:sp>
@@ -9091,8 +8976,8 @@
         </p:nvSpPr>
         <p:spPr>
           <a:xfrm>
-            <a:off x="2505456" y="4187952"/>
-            <a:ext cx="1207008" cy="1545336"/>
+            <a:off x="914400" y="3611880"/>
+            <a:ext cx="4846320" cy="2194560"/>
           </a:xfrm>
           <a:prstGeom prst="rect">
             <a:avLst/>
@@ -9104,67 +8989,98 @@
             <a:spAutoFit/>
           </a:bodyPr>
           <a:lstStyle/>
-          <a:p>
-            <a:pPr>
-              <a:defRPr sz="1300" b="1">
-                <a:solidFill>
-                  <a:srgbClr val="1E40AF"/>
-                </a:solidFill>
-              </a:defRPr>
-            </a:pPr>
-            <a:r>
-              <a:t>1976</a:t>
-            </a:r>
-          </a:p>
-          <a:p>
-            <a:pPr>
-              <a:defRPr sz="1000" b="1">
-                <a:solidFill>
-                  <a:srgbClr val="0F172A"/>
-                </a:solidFill>
-              </a:defRPr>
-            </a:pPr>
-            <a:r>
-              <a:t>Diffie-Hellman</a:t>
-            </a:r>
-          </a:p>
+          <a:p/>
           <a:p>
             <a:pPr>
               <a:spcBef>
-                <a:spcPts val="300"/>
+                <a:spcPts val="400"/>
               </a:spcBef>
-              <a:defRPr sz="850">
+            </a:pPr>
+            <a:r>
+              <a:rPr b="1" sz="1000">
+                <a:solidFill>
+                  <a:srgbClr val="1E293B"/>
+                </a:solidFill>
+              </a:rPr>
+              <a:t>• Nguồn gốc tối mật: </a:t>
+            </a:r>
+            <a:r>
+              <a:rPr sz="950">
                 <a:solidFill>
                   <a:srgbClr val="475569"/>
                 </a:solidFill>
-              </a:defRPr>
-            </a:pPr>
-            <a:r>
-              <a:t>Mật mã khóa công khai, Kênh truyền mở</a:t>
-            </a:r>
-          </a:p>
-        </p:txBody>
-      </p:sp>
-      <p:sp>
-        <p:nvSpPr>
-          <p:cNvPr id="13" name="Oval 12"/>
+              </a:rPr>
+              <a:t>Lý thuyết thông tin Shannon (1948) bắt nguồn từ báo cáo mật mã tối mật năm 1945 ('A Mathematical Theory of Cryptography').</a:t>
+            </a:r>
+          </a:p>
+          <a:p>
+            <a:pPr>
+              <a:spcBef>
+                <a:spcPts val="400"/>
+              </a:spcBef>
+            </a:pPr>
+            <a:r>
+              <a:rPr b="1" sz="1000">
+                <a:solidFill>
+                  <a:srgbClr val="1E293B"/>
+                </a:solidFill>
+              </a:rPr>
+              <a:t>• Bí mật hoàn hảo: </a:t>
+            </a:r>
+            <a:r>
+              <a:rPr sz="950">
+                <a:solidFill>
+                  <a:srgbClr val="475569"/>
+                </a:solidFill>
+              </a:rPr>
+              <a:t>Shannon chứng minh OTP là hệ mật hoàn hảo duy nhất, nhưng đòi hỏi khóa ngẫu nhiên dài bằng thông điệp ($H(K) &gt;= H(M)$).</a:t>
+            </a:r>
+          </a:p>
+          <a:p>
+            <a:pPr>
+              <a:spcBef>
+                <a:spcPts val="400"/>
+              </a:spcBef>
+            </a:pPr>
+            <a:r>
+              <a:rPr b="1" sz="1000">
+                <a:solidFill>
+                  <a:srgbClr val="1E293B"/>
+                </a:solidFill>
+              </a:rPr>
+              <a:t>• Giả định giới hạn: </a:t>
+            </a:r>
+            <a:r>
+              <a:rPr sz="950">
+                <a:solidFill>
+                  <a:srgbClr val="475569"/>
+                </a:solidFill>
+              </a:rPr>
+              <a:t>Shannon xem sự sai lệch là 'nhiễu ngẫu nhiên' (noise). Tuy nhiên, kẻ thù là tác nhân có chủ đích (intentional agent), không phải nhiễu!</a:t>
+            </a:r>
+          </a:p>
+        </p:txBody>
+      </p:sp>
+      <p:sp>
+        <p:nvSpPr>
+          <p:cNvPr id="13" name="Rounded Rectangle 12"/>
           <p:cNvSpPr/>
           <p:nvPr/>
         </p:nvSpPr>
         <p:spPr>
           <a:xfrm>
-            <a:off x="4489704" y="3648456"/>
-            <a:ext cx="274320" cy="274320"/>
-          </a:xfrm>
-          <a:prstGeom prst="ellipse">
+            <a:off x="6217920" y="1691640"/>
+            <a:ext cx="5212080" cy="4343400"/>
+          </a:xfrm>
+          <a:prstGeom prst="roundRect">
             <a:avLst/>
           </a:prstGeom>
           <a:solidFill>
-            <a:srgbClr val="1E40AF"/>
+            <a:srgbClr val="ECFDF5"/>
           </a:solidFill>
-          <a:ln w="25400">
+          <a:ln>
             <a:solidFill>
-              <a:srgbClr val="FFFFFF"/>
+              <a:srgbClr val="A7F3D0"/>
             </a:solidFill>
           </a:ln>
         </p:spPr>
@@ -9192,24 +9108,59 @@
       </p:sp>
       <p:sp>
         <p:nvSpPr>
-          <p:cNvPr id="14" name="Rounded Rectangle 13"/>
+          <p:cNvPr id="14" name="TextBox 13"/>
+          <p:cNvSpPr txBox="1"/>
+          <p:nvPr/>
+        </p:nvSpPr>
+        <p:spPr>
+          <a:xfrm>
+            <a:off x="6400800" y="1783080"/>
+            <a:ext cx="4846320" cy="365760"/>
+          </a:xfrm>
+          <a:prstGeom prst="rect">
+            <a:avLst/>
+          </a:prstGeom>
+          <a:noFill/>
+        </p:spPr>
+        <p:txBody>
+          <a:bodyPr wrap="none">
+            <a:spAutoFit/>
+          </a:bodyPr>
+          <a:lstStyle/>
+          <a:p>
+            <a:pPr>
+              <a:defRPr sz="1200" b="1">
+                <a:solidFill>
+                  <a:srgbClr val="059669"/>
+                </a:solidFill>
+              </a:defRPr>
+            </a:pPr>
+            <a:r>
+              <a:t>2. Thực Tế: Mạng Xã Hội - Kỹ Thuật Không Đồng Nhất</a:t>
+            </a:r>
+          </a:p>
+        </p:txBody>
+      </p:sp>
+      <p:sp>
+        <p:nvSpPr>
+          <p:cNvPr id="15" name="Rounded Rectangle 14"/>
           <p:cNvSpPr/>
           <p:nvPr/>
         </p:nvSpPr>
         <p:spPr>
           <a:xfrm>
-            <a:off x="3950208" y="1737360"/>
-            <a:ext cx="1353312" cy="1691640"/>
+            <a:off x="6492240" y="2240280"/>
+            <a:ext cx="2194560" cy="594360"/>
           </a:xfrm>
           <a:prstGeom prst="roundRect">
             <a:avLst/>
           </a:prstGeom>
           <a:solidFill>
-            <a:srgbClr val="F8FAFC"/>
+            <a:srgbClr val="FFFFFF"/>
           </a:solidFill>
-          <a:ln w="12700">
+          <a:ln>
             <a:solidFill>
-              <a:srgbClr val="E2E8F0"/>
+              <a:srgbClr val="059669"/>
             </a:solidFill>
           </a:ln>
         </p:spPr>
@@ -9228,95 +9179,54 @@
           </a:fontRef>
         </p:style>
         <p:txBody>
-          <a:bodyPr rtlCol="0" anchor="ctr"/>
-          <a:lstStyle/>
-          <a:p>
-            <a:pPr algn="ctr"/>
-          </a:p>
-        </p:txBody>
-      </p:sp>
-      <p:sp>
-        <p:nvSpPr>
-          <p:cNvPr id="15" name="TextBox 14"/>
-          <p:cNvSpPr txBox="1"/>
-          <p:nvPr/>
-        </p:nvSpPr>
-        <p:spPr>
-          <a:xfrm>
-            <a:off x="4023360" y="1810512"/>
-            <a:ext cx="1207008" cy="1545336"/>
-          </a:xfrm>
-          <a:prstGeom prst="rect">
-            <a:avLst/>
-          </a:prstGeom>
-          <a:noFill/>
-        </p:spPr>
-        <p:txBody>
-          <a:bodyPr wrap="square">
-            <a:spAutoFit/>
-          </a:bodyPr>
-          <a:lstStyle/>
-          <a:p>
-            <a:pPr>
-              <a:defRPr sz="1300" b="1">
-                <a:solidFill>
-                  <a:srgbClr val="1E40AF"/>
-                </a:solidFill>
-              </a:defRPr>
-            </a:pPr>
-            <a:r>
-              <a:t>1984</a:t>
-            </a:r>
-          </a:p>
-          <a:p>
-            <a:pPr>
-              <a:defRPr sz="1000" b="1">
-                <a:solidFill>
-                  <a:srgbClr val="0F172A"/>
-                </a:solidFill>
-              </a:defRPr>
-            </a:pPr>
-            <a:r>
-              <a:t>Goldwasser-Micali</a:t>
-            </a:r>
-          </a:p>
-          <a:p>
-            <a:pPr>
-              <a:spcBef>
-                <a:spcPts val="300"/>
-              </a:spcBef>
-              <a:defRPr sz="850">
-                <a:solidFill>
-                  <a:srgbClr val="475569"/>
-                </a:solidFill>
-              </a:defRPr>
-            </a:pPr>
-            <a:r>
-              <a:t>Mô hình PPT Adversary, Security Games</a:t>
-            </a:r>
-          </a:p>
-        </p:txBody>
-      </p:sp>
-      <p:sp>
-        <p:nvSpPr>
-          <p:cNvPr id="16" name="Oval 15"/>
+          <a:bodyPr rtlCol="0" anchor="ctr" wrap="square" lIns="36576" rIns="36576" tIns="36576" bIns="36576"/>
+          <a:lstStyle/>
+          <a:p>
+            <a:pPr algn="ctr">
+              <a:defRPr sz="950" b="1">
+                <a:solidFill>
+                  <a:srgbClr val="059669"/>
+                </a:solidFill>
+              </a:defRPr>
+            </a:pPr>
+            <a:r>
+              <a:t>Nhóm Người Giữ Bí Mật</a:t>
+            </a:r>
+          </a:p>
+          <a:p>
+            <a:pPr algn="ctr">
+              <a:defRPr sz="950" b="0">
+                <a:solidFill>
+                  <a:srgbClr val="059669"/>
+                </a:solidFill>
+              </a:defRPr>
+            </a:pPr>
+            <a:r>
+              <a:t>(Duy trì chính sách Policy)</a:t>
+            </a:r>
+          </a:p>
+        </p:txBody>
+      </p:sp>
+      <p:sp>
+        <p:nvSpPr>
+          <p:cNvPr id="16" name="Rounded Rectangle 15"/>
           <p:cNvSpPr/>
           <p:nvPr/>
         </p:nvSpPr>
         <p:spPr>
           <a:xfrm>
-            <a:off x="6007608" y="3648456"/>
-            <a:ext cx="274320" cy="274320"/>
-          </a:xfrm>
-          <a:prstGeom prst="ellipse">
+            <a:off x="8961120" y="2240280"/>
+            <a:ext cx="2194560" cy="594360"/>
+          </a:xfrm>
+          <a:prstGeom prst="roundRect">
             <a:avLst/>
           </a:prstGeom>
           <a:solidFill>
-            <a:srgbClr val="1E40AF"/>
+            <a:srgbClr val="FFFFFF"/>
           </a:solidFill>
-          <a:ln w="25400">
+          <a:ln>
             <a:solidFill>
-              <a:srgbClr val="FFFFFF"/>
+              <a:srgbClr val="2563EB"/>
             </a:solidFill>
           </a:ln>
         </p:spPr>
@@ -9335,10 +9245,31 @@
           </a:fontRef>
         </p:style>
         <p:txBody>
-          <a:bodyPr rtlCol="0" anchor="ctr"/>
-          <a:lstStyle/>
-          <a:p>
-            <a:pPr algn="ctr"/>
+          <a:bodyPr rtlCol="0" anchor="ctr" wrap="square" lIns="36576" rIns="36576" tIns="36576" bIns="36576"/>
+          <a:lstStyle/>
+          <a:p>
+            <a:pPr algn="ctr">
+              <a:defRPr sz="950" b="1">
+                <a:solidFill>
+                  <a:srgbClr val="1E40AF"/>
+                </a:solidFill>
+              </a:defRPr>
+            </a:pPr>
+            <a:r>
+              <a:t>Hạ Tầng / ISP / Đám Mây</a:t>
+            </a:r>
+          </a:p>
+          <a:p>
+            <a:pPr algn="ctr">
+              <a:defRPr sz="950" b="0">
+                <a:solidFill>
+                  <a:srgbClr val="1E40AF"/>
+                </a:solidFill>
+              </a:defRPr>
+            </a:pPr>
+            <a:r>
+              <a:t>(Môi trường mở không tin cậy)</a:t>
+            </a:r>
           </a:p>
         </p:txBody>
       </p:sp>
@@ -9350,18 +9281,18 @@
         </p:nvSpPr>
         <p:spPr>
           <a:xfrm>
-            <a:off x="5468112" y="4114800"/>
-            <a:ext cx="1353312" cy="1691640"/>
+            <a:off x="6492240" y="2971800"/>
+            <a:ext cx="4663440" cy="502920"/>
           </a:xfrm>
           <a:prstGeom prst="roundRect">
             <a:avLst/>
           </a:prstGeom>
           <a:solidFill>
-            <a:srgbClr val="F8FAFC"/>
+            <a:srgbClr val="FEE2E2"/>
           </a:solidFill>
-          <a:ln w="12700">
+          <a:ln>
             <a:solidFill>
-              <a:srgbClr val="E2E8F0"/>
+              <a:srgbClr val="DC2626"/>
             </a:solidFill>
           </a:ln>
         </p:spPr>
@@ -9380,10 +9311,31 @@
           </a:fontRef>
         </p:style>
         <p:txBody>
-          <a:bodyPr rtlCol="0" anchor="ctr"/>
-          <a:lstStyle/>
-          <a:p>
-            <a:pPr algn="ctr"/>
+          <a:bodyPr rtlCol="0" anchor="ctr" wrap="square" lIns="36576" rIns="36576" tIns="36576" bIns="36576"/>
+          <a:lstStyle/>
+          <a:p>
+            <a:pPr algn="ctr">
+              <a:defRPr sz="900" b="1">
+                <a:solidFill>
+                  <a:srgbClr val="991B1B"/>
+                </a:solidFill>
+              </a:defRPr>
+            </a:pPr>
+            <a:r>
+              <a:t>Đối Thủ Thể Chế (NSA / Five Eyes) &amp; Kênh Kề</a:t>
+            </a:r>
+          </a:p>
+          <a:p>
+            <a:pPr algn="ctr">
+              <a:defRPr sz="900" b="0">
+                <a:solidFill>
+                  <a:srgbClr val="991B1B"/>
+                </a:solidFill>
+              </a:defRPr>
+            </a:pPr>
+            <a:r>
+              <a:t>Tấn công chuỗi cung ứng, suy yếu chuẩn &amp; Giám sát siêu dữ liệu</a:t>
+            </a:r>
           </a:p>
         </p:txBody>
       </p:sp>
@@ -9395,8 +9347,8 @@
         </p:nvSpPr>
         <p:spPr>
           <a:xfrm>
-            <a:off x="5541264" y="4187952"/>
-            <a:ext cx="1207008" cy="1545336"/>
+            <a:off x="6400800" y="3657600"/>
+            <a:ext cx="4846320" cy="2194560"/>
           </a:xfrm>
           <a:prstGeom prst="rect">
             <a:avLst/>
@@ -9408,506 +9360,81 @@
             <a:spAutoFit/>
           </a:bodyPr>
           <a:lstStyle/>
-          <a:p>
-            <a:pPr>
-              <a:defRPr sz="1300" b="1">
-                <a:solidFill>
-                  <a:srgbClr val="1E40AF"/>
-                </a:solidFill>
-              </a:defRPr>
-            </a:pPr>
-            <a:r>
-              <a:t>1983</a:t>
-            </a:r>
-          </a:p>
-          <a:p>
-            <a:pPr>
-              <a:defRPr sz="1000" b="1">
-                <a:solidFill>
-                  <a:srgbClr val="0F172A"/>
-                </a:solidFill>
-              </a:defRPr>
-            </a:pPr>
-            <a:r>
-              <a:t>Dolev-Yao</a:t>
-            </a:r>
-          </a:p>
+          <a:p/>
           <a:p>
             <a:pPr>
               <a:spcBef>
-                <a:spcPts val="300"/>
+                <a:spcPts val="400"/>
               </a:spcBef>
-              <a:defRPr sz="850">
+            </a:pPr>
+            <a:r>
+              <a:rPr b="1" sz="1000">
+                <a:solidFill>
+                  <a:srgbClr val="1E293B"/>
+                </a:solidFill>
+              </a:rPr>
+              <a:t>• Vượt qua kênh đơn: </a:t>
+            </a:r>
+            <a:r>
+              <a:rPr sz="950">
                 <a:solidFill>
                   <a:srgbClr val="475569"/>
                 </a:solidFill>
-              </a:defRPr>
-            </a:pPr>
-            <a:r>
-              <a:t>Đối thủ mạng kiểm soát kênh, Hộp đen mật mã</a:t>
-            </a:r>
-          </a:p>
-        </p:txBody>
-      </p:sp>
-      <p:sp>
-        <p:nvSpPr>
-          <p:cNvPr id="19" name="Oval 18"/>
-          <p:cNvSpPr/>
-          <p:nvPr/>
-        </p:nvSpPr>
-        <p:spPr>
-          <a:xfrm>
-            <a:off x="7525512" y="3648456"/>
-            <a:ext cx="274320" cy="274320"/>
-          </a:xfrm>
-          <a:prstGeom prst="ellipse">
-            <a:avLst/>
-          </a:prstGeom>
-          <a:solidFill>
-            <a:srgbClr val="1E40AF"/>
-          </a:solidFill>
-          <a:ln w="25400">
-            <a:solidFill>
-              <a:srgbClr val="FFFFFF"/>
-            </a:solidFill>
-          </a:ln>
-        </p:spPr>
-        <p:style>
-          <a:lnRef idx="1">
-            <a:schemeClr val="accent1"/>
-          </a:lnRef>
-          <a:fillRef idx="3">
-            <a:schemeClr val="accent1"/>
-          </a:fillRef>
-          <a:effectRef idx="2">
-            <a:schemeClr val="accent1"/>
-          </a:effectRef>
-          <a:fontRef idx="minor">
-            <a:schemeClr val="lt1"/>
-          </a:fontRef>
-        </p:style>
-        <p:txBody>
-          <a:bodyPr rtlCol="0" anchor="ctr"/>
-          <a:lstStyle/>
-          <a:p>
-            <a:pPr algn="ctr"/>
-          </a:p>
-        </p:txBody>
-      </p:sp>
-      <p:sp>
-        <p:nvSpPr>
-          <p:cNvPr id="20" name="Rounded Rectangle 19"/>
-          <p:cNvSpPr/>
-          <p:nvPr/>
-        </p:nvSpPr>
-        <p:spPr>
-          <a:xfrm>
-            <a:off x="6986016" y="1737360"/>
-            <a:ext cx="1353312" cy="1691640"/>
-          </a:xfrm>
-          <a:prstGeom prst="roundRect">
-            <a:avLst/>
-          </a:prstGeom>
-          <a:solidFill>
-            <a:srgbClr val="F8FAFC"/>
-          </a:solidFill>
-          <a:ln w="12700">
-            <a:solidFill>
-              <a:srgbClr val="E2E8F0"/>
-            </a:solidFill>
-          </a:ln>
-        </p:spPr>
-        <p:style>
-          <a:lnRef idx="1">
-            <a:schemeClr val="accent1"/>
-          </a:lnRef>
-          <a:fillRef idx="3">
-            <a:schemeClr val="accent1"/>
-          </a:fillRef>
-          <a:effectRef idx="2">
-            <a:schemeClr val="accent1"/>
-          </a:effectRef>
-          <a:fontRef idx="minor">
-            <a:schemeClr val="lt1"/>
-          </a:fontRef>
-        </p:style>
-        <p:txBody>
-          <a:bodyPr rtlCol="0" anchor="ctr"/>
-          <a:lstStyle/>
-          <a:p>
-            <a:pPr algn="ctr"/>
-          </a:p>
-        </p:txBody>
-      </p:sp>
-      <p:sp>
-        <p:nvSpPr>
-          <p:cNvPr id="21" name="TextBox 20"/>
-          <p:cNvSpPr txBox="1"/>
-          <p:nvPr/>
-        </p:nvSpPr>
-        <p:spPr>
-          <a:xfrm>
-            <a:off x="7059168" y="1810512"/>
-            <a:ext cx="1207008" cy="1545336"/>
-          </a:xfrm>
-          <a:prstGeom prst="rect">
-            <a:avLst/>
-          </a:prstGeom>
-          <a:noFill/>
-        </p:spPr>
-        <p:txBody>
-          <a:bodyPr wrap="square">
-            <a:spAutoFit/>
-          </a:bodyPr>
-          <a:lstStyle/>
-          <a:p>
-            <a:pPr>
-              <a:defRPr sz="1300" b="1">
-                <a:solidFill>
-                  <a:srgbClr val="1E40AF"/>
-                </a:solidFill>
-              </a:defRPr>
-            </a:pPr>
-            <a:r>
-              <a:t>1993</a:t>
-            </a:r>
-          </a:p>
-          <a:p>
-            <a:pPr>
-              <a:defRPr sz="1000" b="1">
-                <a:solidFill>
-                  <a:srgbClr val="0F172A"/>
-                </a:solidFill>
-              </a:defRPr>
-            </a:pPr>
-            <a:r>
-              <a:t>Bellare-Rogaway</a:t>
+              </a:rPr>
+              <a:t>Thông tin chảy qua mạng lưới phức tạp gồm người dùng, thiết bị, hệ điều hành và hạ tầng cáp quang toàn cầu.</a:t>
             </a:r>
           </a:p>
           <a:p>
             <a:pPr>
               <a:spcBef>
-                <a:spcPts val="300"/>
+                <a:spcPts val="400"/>
               </a:spcBef>
-              <a:defRPr sz="850">
+            </a:pPr>
+            <a:r>
+              <a:rPr b="1" sz="1000">
+                <a:solidFill>
+                  <a:srgbClr val="1E293B"/>
+                </a:solidFill>
+              </a:rPr>
+              <a:t>• Tổ chức thông tin: </a:t>
+            </a:r>
+            <a:r>
+              <a:rPr sz="950">
                 <a:solidFill>
                   <a:srgbClr val="475569"/>
                 </a:solidFill>
-              </a:defRPr>
-            </a:pPr>
-            <a:r>
-              <a:t>Random Oracle Model (ROM), Băm lý tưởng</a:t>
-            </a:r>
-          </a:p>
-        </p:txBody>
-      </p:sp>
-      <p:sp>
-        <p:nvSpPr>
-          <p:cNvPr id="22" name="Oval 21"/>
-          <p:cNvSpPr/>
-          <p:nvPr/>
-        </p:nvSpPr>
-        <p:spPr>
-          <a:xfrm>
-            <a:off x="9043416" y="3648456"/>
-            <a:ext cx="274320" cy="274320"/>
-          </a:xfrm>
-          <a:prstGeom prst="ellipse">
-            <a:avLst/>
-          </a:prstGeom>
-          <a:solidFill>
-            <a:srgbClr val="D97706"/>
-          </a:solidFill>
-          <a:ln w="25400">
-            <a:solidFill>
-              <a:srgbClr val="FFFFFF"/>
-            </a:solidFill>
-          </a:ln>
-        </p:spPr>
-        <p:style>
-          <a:lnRef idx="1">
-            <a:schemeClr val="accent1"/>
-          </a:lnRef>
-          <a:fillRef idx="3">
-            <a:schemeClr val="accent1"/>
-          </a:fillRef>
-          <a:effectRef idx="2">
-            <a:schemeClr val="accent1"/>
-          </a:effectRef>
-          <a:fontRef idx="minor">
-            <a:schemeClr val="lt1"/>
-          </a:fontRef>
-        </p:style>
-        <p:txBody>
-          <a:bodyPr rtlCol="0" anchor="ctr"/>
-          <a:lstStyle/>
-          <a:p>
-            <a:pPr algn="ctr"/>
-          </a:p>
-        </p:txBody>
-      </p:sp>
-      <p:sp>
-        <p:nvSpPr>
-          <p:cNvPr id="23" name="Rounded Rectangle 22"/>
-          <p:cNvSpPr/>
-          <p:nvPr/>
-        </p:nvSpPr>
-        <p:spPr>
-          <a:xfrm>
-            <a:off x="8503920" y="4114800"/>
-            <a:ext cx="1353312" cy="1691640"/>
-          </a:xfrm>
-          <a:prstGeom prst="roundRect">
-            <a:avLst/>
-          </a:prstGeom>
-          <a:solidFill>
-            <a:srgbClr val="FFFBEB"/>
-          </a:solidFill>
-          <a:ln w="12700">
-            <a:solidFill>
-              <a:srgbClr val="FDE68A"/>
-            </a:solidFill>
-          </a:ln>
-        </p:spPr>
-        <p:style>
-          <a:lnRef idx="1">
-            <a:schemeClr val="accent1"/>
-          </a:lnRef>
-          <a:fillRef idx="3">
-            <a:schemeClr val="accent1"/>
-          </a:fillRef>
-          <a:effectRef idx="2">
-            <a:schemeClr val="accent1"/>
-          </a:effectRef>
-          <a:fontRef idx="minor">
-            <a:schemeClr val="lt1"/>
-          </a:fontRef>
-        </p:style>
-        <p:txBody>
-          <a:bodyPr rtlCol="0" anchor="ctr"/>
-          <a:lstStyle/>
-          <a:p>
-            <a:pPr algn="ctr"/>
-          </a:p>
-        </p:txBody>
-      </p:sp>
-      <p:sp>
-        <p:nvSpPr>
-          <p:cNvPr id="24" name="TextBox 23"/>
-          <p:cNvSpPr txBox="1"/>
-          <p:nvPr/>
-        </p:nvSpPr>
-        <p:spPr>
-          <a:xfrm>
-            <a:off x="8577072" y="4187952"/>
-            <a:ext cx="1207008" cy="1545336"/>
-          </a:xfrm>
-          <a:prstGeom prst="rect">
-            <a:avLst/>
-          </a:prstGeom>
-          <a:noFill/>
-        </p:spPr>
-        <p:txBody>
-          <a:bodyPr wrap="square">
-            <a:spAutoFit/>
-          </a:bodyPr>
-          <a:lstStyle/>
-          <a:p>
-            <a:pPr>
-              <a:defRPr sz="1300" b="1">
-                <a:solidFill>
-                  <a:srgbClr val="D97706"/>
-                </a:solidFill>
-              </a:defRPr>
-            </a:pPr>
-            <a:r>
-              <a:t>1996</a:t>
-            </a:r>
-          </a:p>
-          <a:p>
-            <a:pPr>
-              <a:defRPr sz="1000" b="1">
-                <a:solidFill>
-                  <a:srgbClr val="0F172A"/>
-                </a:solidFill>
-              </a:defRPr>
-            </a:pPr>
-            <a:r>
-              <a:t>Paul Kocher</a:t>
+              </a:rPr>
+              <a:t>Bảo toàn bí mật là duy trì bất biến chính sách trước các lỗi Byzantine và hành vi làm rò rỉ của người bên trong (insider / Snowden).</a:t>
             </a:r>
           </a:p>
           <a:p>
             <a:pPr>
               <a:spcBef>
-                <a:spcPts val="300"/>
+                <a:spcPts val="400"/>
               </a:spcBef>
-              <a:defRPr sz="850">
+            </a:pPr>
+            <a:r>
+              <a:rPr b="1" sz="1000">
+                <a:solidFill>
+                  <a:srgbClr val="1E293B"/>
+                </a:solidFill>
+              </a:rPr>
+              <a:t>• Điểm mù của Shannon: </a:t>
+            </a:r>
+            <a:r>
+              <a:rPr sz="950">
                 <a:solidFill>
                   <a:srgbClr val="475569"/>
                 </a:solidFill>
-              </a:defRPr>
-            </a:pPr>
-            <a:r>
-              <a:t>Phê phán: Tấn công kênh kề (Side-Channels)</a:t>
-            </a:r>
-          </a:p>
-        </p:txBody>
-      </p:sp>
-      <p:sp>
-        <p:nvSpPr>
-          <p:cNvPr id="25" name="Oval 24"/>
-          <p:cNvSpPr/>
-          <p:nvPr/>
-        </p:nvSpPr>
-        <p:spPr>
-          <a:xfrm>
-            <a:off x="10561320" y="3648456"/>
-            <a:ext cx="274320" cy="274320"/>
-          </a:xfrm>
-          <a:prstGeom prst="ellipse">
-            <a:avLst/>
-          </a:prstGeom>
-          <a:solidFill>
-            <a:srgbClr val="DC2626"/>
-          </a:solidFill>
-          <a:ln w="25400">
-            <a:solidFill>
-              <a:srgbClr val="FFFFFF"/>
-            </a:solidFill>
-          </a:ln>
-        </p:spPr>
-        <p:style>
-          <a:lnRef idx="1">
-            <a:schemeClr val="accent1"/>
-          </a:lnRef>
-          <a:fillRef idx="3">
-            <a:schemeClr val="accent1"/>
-          </a:fillRef>
-          <a:effectRef idx="2">
-            <a:schemeClr val="accent1"/>
-          </a:effectRef>
-          <a:fontRef idx="minor">
-            <a:schemeClr val="lt1"/>
-          </a:fontRef>
-        </p:style>
-        <p:txBody>
-          <a:bodyPr rtlCol="0" anchor="ctr"/>
-          <a:lstStyle/>
-          <a:p>
-            <a:pPr algn="ctr"/>
-          </a:p>
-        </p:txBody>
-      </p:sp>
-      <p:sp>
-        <p:nvSpPr>
-          <p:cNvPr id="26" name="Rounded Rectangle 25"/>
-          <p:cNvSpPr/>
-          <p:nvPr/>
-        </p:nvSpPr>
-        <p:spPr>
-          <a:xfrm>
-            <a:off x="10021824" y="1737360"/>
-            <a:ext cx="1353312" cy="1691640"/>
-          </a:xfrm>
-          <a:prstGeom prst="roundRect">
-            <a:avLst/>
-          </a:prstGeom>
-          <a:solidFill>
-            <a:srgbClr val="FEF2F2"/>
-          </a:solidFill>
-          <a:ln w="12700">
-            <a:solidFill>
-              <a:srgbClr val="FECACA"/>
-            </a:solidFill>
-          </a:ln>
-        </p:spPr>
-        <p:style>
-          <a:lnRef idx="1">
-            <a:schemeClr val="accent1"/>
-          </a:lnRef>
-          <a:fillRef idx="3">
-            <a:schemeClr val="accent1"/>
-          </a:fillRef>
-          <a:effectRef idx="2">
-            <a:schemeClr val="accent1"/>
-          </a:effectRef>
-          <a:fontRef idx="minor">
-            <a:schemeClr val="lt1"/>
-          </a:fontRef>
-        </p:style>
-        <p:txBody>
-          <a:bodyPr rtlCol="0" anchor="ctr"/>
-          <a:lstStyle/>
-          <a:p>
-            <a:pPr algn="ctr"/>
-          </a:p>
-        </p:txBody>
-      </p:sp>
-      <p:sp>
-        <p:nvSpPr>
-          <p:cNvPr id="27" name="TextBox 26"/>
-          <p:cNvSpPr txBox="1"/>
-          <p:nvPr/>
-        </p:nvSpPr>
-        <p:spPr>
-          <a:xfrm>
-            <a:off x="10094976" y="1810512"/>
-            <a:ext cx="1207008" cy="1545336"/>
-          </a:xfrm>
-          <a:prstGeom prst="rect">
-            <a:avLst/>
-          </a:prstGeom>
-          <a:noFill/>
-        </p:spPr>
-        <p:txBody>
-          <a:bodyPr wrap="square">
-            <a:spAutoFit/>
-          </a:bodyPr>
-          <a:lstStyle/>
-          <a:p>
-            <a:pPr>
-              <a:defRPr sz="1300" b="1">
-                <a:solidFill>
-                  <a:srgbClr val="DC2626"/>
-                </a:solidFill>
-              </a:defRPr>
-            </a:pPr>
-            <a:r>
-              <a:t>2013</a:t>
-            </a:r>
-          </a:p>
-          <a:p>
-            <a:pPr>
-              <a:defRPr sz="1000" b="1">
-                <a:solidFill>
-                  <a:srgbClr val="0F172A"/>
-                </a:solidFill>
-              </a:defRPr>
-            </a:pPr>
-            <a:r>
-              <a:t>Snowden / NSA</a:t>
-            </a:r>
-          </a:p>
-          <a:p>
-            <a:pPr>
-              <a:spcBef>
-                <a:spcPts val="300"/>
-              </a:spcBef>
-              <a:defRPr sz="850">
-                <a:solidFill>
-                  <a:srgbClr val="475569"/>
-                </a:solidFill>
-              </a:defRPr>
-            </a:pPr>
-            <a:r>
-              <a:t>Đối thủ thể chế, Giám sát siêu dữ liệu</a:t>
-            </a:r>
-          </a:p>
-        </p:txBody>
-      </p:sp>
-      <p:sp>
-        <p:nvSpPr>
-          <p:cNvPr id="28" name="TextBox 27"/>
+              </a:rPr>
+              <a:t>Bỏ qua hoàn toàn chi phí lưu trữ khóa, phân phối khóa, lỗi phần mềm và sự can thiệp vào hành vi của người giữ bí mật.</a:t>
+            </a:r>
+          </a:p>
+        </p:txBody>
+      </p:sp>
+      <p:sp>
+        <p:nvSpPr>
+          <p:cNvPr id="19" name="TextBox 18"/>
           <p:cNvSpPr txBox="1"/>
           <p:nvPr/>
         </p:nvSpPr>
@@ -9935,7 +9462,7 @@
               </a:defRPr>
             </a:pPr>
             <a:r>
-              <a:t>Sơ đồ tổng hợp của người trình bày dựa trên bài báo Harry Halpin (2025), Sections 3–6, tr. 3–12.</a:t>
+              <a:t>Sơ đồ tổng hợp dựa trên Shannon (1949) và Halpin (2025). [Mã nguồn sơ đồ draw.io lưu tại docs/diagram_slide_06_shannon.drawio]</a:t>
             </a:r>
           </a:p>
         </p:txBody>
@@ -10050,7 +9577,7 @@
               </a:defRPr>
             </a:pPr>
             <a:r>
-              <a:t>SECTION 2 &amp; 3 (TRANG 3–5)</a:t>
+              <a:t>SECTION 4 — HÌNH THỨC HÓA ĐỐI THỦ (TRANG 5–8)</a:t>
             </a:r>
           </a:p>
         </p:txBody>
@@ -10085,7 +9612,7 @@
               </a:defRPr>
             </a:pPr>
             <a:r>
-              <a:t>SHANNON VÀ GIỚI HẠN CỦA MÔ HÌNH NHIỄU</a:t>
+              <a:t>BA MÔ HÌNH ĐỐI THỦ HÌNH THỨC TRONG MẬT MÃ HIỆN ĐẠI</a:t>
             </a:r>
           </a:p>
         </p:txBody>
@@ -10120,7 +9647,7 @@
               </a:defRPr>
             </a:pPr>
             <a:r>
-              <a:t>Đối sánh mô hình truyền thông điểm-điểm của Shannon và mạng xã hội-kỹ thuật phức hợp</a:t>
+              <a:t>Tiến trình toán học hóa kẻ thù: Độ phức tạp tính toán đa thức, Logic kênh truyền và Tiên tri ngẫu nhiên</a:t>
             </a:r>
           </a:p>
         </p:txBody>
@@ -10134,7 +9661,7 @@
         <p:spPr>
           <a:xfrm>
             <a:off x="731520" y="1691640"/>
-            <a:ext cx="5212080" cy="4389120"/>
+            <a:ext cx="3383280" cy="4389120"/>
           </a:xfrm>
           <a:prstGeom prst="roundRect">
             <a:avLst/>
@@ -10142,7 +9669,7 @@
           <a:solidFill>
             <a:srgbClr val="F8FAFC"/>
           </a:solidFill>
-          <a:ln w="12700">
+          <a:ln>
             <a:solidFill>
               <a:srgbClr val="BFDBFE"/>
             </a:solidFill>
@@ -10179,7 +9706,7 @@
         <p:spPr>
           <a:xfrm>
             <a:off x="914400" y="1828800"/>
-            <a:ext cx="4846320" cy="4114800"/>
+            <a:ext cx="3017520" cy="4114800"/>
           </a:xfrm>
           <a:prstGeom prst="rect">
             <a:avLst/>
@@ -10200,35 +9727,22 @@
               </a:defRPr>
             </a:pPr>
             <a:r>
-              <a:t>Mô hình Điểm - Điểm Cổ Điển của Shannon</a:t>
-            </a:r>
-          </a:p>
-          <a:p>
-            <a:pPr>
-              <a:spcBef>
+              <a:t>1. Mô Hình PPT Adversary</a:t>
+            </a:r>
+          </a:p>
+          <a:p>
+            <a:pPr>
+              <a:spcAft>
                 <a:spcPts val="800"/>
-              </a:spcBef>
-              <a:defRPr sz="950">
-                <a:solidFill>
-                  <a:srgbClr val="1E293B"/>
-                </a:solidFill>
-                <a:latin typeface="Consolas"/>
-              </a:defRPr>
-            </a:pPr>
-            <a:r>
-              <a:t>[Sender Alice]  ──────&gt;  [Channel: Key + Ciphertext]  ──────&gt;  [Receiver Bob]</a:t>
-            </a:r>
-            <a:br/>
-            <a:r>
-              <a:t>                                    ▲</a:t>
-            </a:r>
-            <a:br/>
-            <a:r>
-              <a:t>                                    │</a:t>
-            </a:r>
-            <a:br/>
-            <a:r>
-              <a:t>                         [Adversary Eve (Passive)]</a:t>
+              </a:spcAft>
+              <a:defRPr sz="950" b="1">
+                <a:solidFill>
+                  <a:srgbClr val="64748B"/>
+                </a:solidFill>
+              </a:defRPr>
+            </a:pPr>
+            <a:r>
+              <a:t>GOLDWASSER-MICALI (1984)</a:t>
             </a:r>
           </a:p>
           <a:p>
@@ -10238,12 +9752,12 @@
               </a:spcBef>
             </a:pPr>
             <a:r>
-              <a:rPr b="1" sz="1050">
+              <a:rPr b="1" sz="1100">
                 <a:solidFill>
                   <a:srgbClr val="1E293B"/>
                 </a:solidFill>
               </a:rPr>
-              <a:t>• Nguồn gốc mật mã: </a:t>
+              <a:t>• Khái niệm: </a:t>
             </a:r>
             <a:r>
               <a:rPr sz="1000">
@@ -10251,7 +9765,7 @@
                   <a:srgbClr val="475569"/>
                 </a:solidFill>
               </a:rPr>
-              <a:t>Lý thuyết thông tin Shannon (1948) thực chất bắt nguồn từ báo cáo mật mã tối mật năm 1945 ('A Mathematical Theory of Cryptography').</a:t>
+              <a:t>Đối thủ là thuật toán Turing xác suất chạy trong thời gian đa thức (Probabilistic Polynomial-Time).</a:t>
             </a:r>
           </a:p>
           <a:p>
@@ -10261,12 +9775,12 @@
               </a:spcBef>
             </a:pPr>
             <a:r>
-              <a:rPr b="1" sz="1050">
+              <a:rPr b="1" sz="1100">
                 <a:solidFill>
                   <a:srgbClr val="1E293B"/>
                 </a:solidFill>
               </a:rPr>
-              <a:t>• Bí mật hoàn hảo: </a:t>
+              <a:t>• Security Games: </a:t>
             </a:r>
             <a:r>
               <a:rPr sz="1000">
@@ -10274,7 +9788,7 @@
                   <a:srgbClr val="475569"/>
                 </a:solidFill>
               </a:rPr>
-              <a:t>Shannon chứng minh hệ mật hoàn hảo duy nhất là One-Time Pad, nhưng đòi hỏi khóa ngẫu nhiên dài bằng thông điệp ($H(K) &gt;= H(M)$).</a:t>
+              <a:t>Định nghĩa an toàn thông qua các trò chơi thách đấu. Lợi thế Adv(A) phải là hàm không đáng kể (negligible).</a:t>
             </a:r>
           </a:p>
           <a:p>
@@ -10284,12 +9798,12 @@
               </a:spcBef>
             </a:pPr>
             <a:r>
-              <a:rPr b="1" sz="1050">
+              <a:rPr b="1" sz="1100">
                 <a:solidFill>
                   <a:srgbClr val="1E293B"/>
                 </a:solidFill>
               </a:rPr>
-              <a:t>• Giả định giới hạn: </a:t>
+              <a:t>• Quy dẫn toán học: </a:t>
             </a:r>
             <a:r>
               <a:rPr sz="1000">
@@ -10297,7 +9811,7 @@
                   <a:srgbClr val="475569"/>
                 </a:solidFill>
               </a:rPr>
-              <a:t>Shannon xem sự sai lệch thông tin là 'nhiễu ngẫu nhiên' (random noise). Tuy nhiên, kẻ thù mật mã là tác nhân có chủ đích (intentional agent), không phải nhiễu ngẫu nhiên!</a:t>
+              <a:t>Chứng minh an toàn bằng cách quy dẫn: bẻ gãy hệ mật tương đương giải bài toán khó (phân tích thừa số nguyên, logarit rời rạc).</a:t>
             </a:r>
           </a:p>
         </p:txBody>
@@ -10310,18 +9824,18 @@
         </p:nvSpPr>
         <p:spPr>
           <a:xfrm>
-            <a:off x="6217920" y="1691640"/>
-            <a:ext cx="5212080" cy="4389120"/>
+            <a:off x="4389120" y="1691640"/>
+            <a:ext cx="3383280" cy="4389120"/>
           </a:xfrm>
           <a:prstGeom prst="roundRect">
             <a:avLst/>
           </a:prstGeom>
           <a:solidFill>
-            <a:srgbClr val="ECFDF5"/>
+            <a:srgbClr val="F8FAFC"/>
           </a:solidFill>
-          <a:ln w="12700">
+          <a:ln>
             <a:solidFill>
-              <a:srgbClr val="A7F3D0"/>
+              <a:srgbClr val="E2E8F0"/>
             </a:solidFill>
           </a:ln>
         </p:spPr>
@@ -10355,8 +9869,8 @@
         </p:nvSpPr>
         <p:spPr>
           <a:xfrm>
-            <a:off x="6400800" y="1828800"/>
-            <a:ext cx="4846320" cy="4114800"/>
+            <a:off x="4572000" y="1828800"/>
+            <a:ext cx="3017520" cy="4114800"/>
           </a:xfrm>
           <a:prstGeom prst="rect">
             <a:avLst/>
@@ -10372,40 +9886,27 @@
             <a:pPr>
               <a:defRPr sz="1300" b="1">
                 <a:solidFill>
-                  <a:srgbClr val="059669"/>
-                </a:solidFill>
-              </a:defRPr>
-            </a:pPr>
-            <a:r>
-              <a:t>Thực Tế: Mạng Xã Hội - Kỹ Thuật Không Đồng Nhất</a:t>
-            </a:r>
-          </a:p>
-          <a:p>
-            <a:pPr>
-              <a:spcBef>
+                  <a:srgbClr val="0F172A"/>
+                </a:solidFill>
+              </a:defRPr>
+            </a:pPr>
+            <a:r>
+              <a:t>2. Mô Hình Đối Thủ Mạng Logic</a:t>
+            </a:r>
+          </a:p>
+          <a:p>
+            <a:pPr>
+              <a:spcAft>
                 <a:spcPts val="800"/>
-              </a:spcBef>
-              <a:defRPr sz="950">
-                <a:solidFill>
-                  <a:srgbClr val="1E293B"/>
-                </a:solidFill>
-                <a:latin typeface="Consolas"/>
-              </a:defRPr>
-            </a:pPr>
-            <a:r>
-              <a:t>[Nhiều Bên Giữ Bí Mật]  ◄──►  [Hạ Tầng Viễn Thông / Đám Mây]</a:t>
-            </a:r>
-            <a:br/>
-            <a:r>
-              <a:t>           ▲                                     ▲</a:t>
-            </a:r>
-            <a:br/>
-            <a:r>
-              <a:t>           │                                     │</a:t>
-            </a:r>
-            <a:br/>
-            <a:r>
-              <a:t>[Kẻ Tấn Công Thể Chế]   ◄──►  [Lỗ Hổng Triển Khai / Kênh Kề]</a:t>
+              </a:spcAft>
+              <a:defRPr sz="950" b="1">
+                <a:solidFill>
+                  <a:srgbClr val="64748B"/>
+                </a:solidFill>
+              </a:defRPr>
+            </a:pPr>
+            <a:r>
+              <a:t>DOLEV-YAO (1983)</a:t>
             </a:r>
           </a:p>
           <a:p>
@@ -10415,12 +9916,12 @@
               </a:spcBef>
             </a:pPr>
             <a:r>
-              <a:rPr b="1" sz="1050">
+              <a:rPr b="1" sz="1100">
                 <a:solidFill>
                   <a:srgbClr val="1E293B"/>
                 </a:solidFill>
               </a:rPr>
-              <a:t>• Vượt qua kênh đơn: </a:t>
+              <a:t>• Khái niệm: </a:t>
             </a:r>
             <a:r>
               <a:rPr sz="1000">
@@ -10428,7 +9929,7 @@
                   <a:srgbClr val="475569"/>
                 </a:solidFill>
               </a:rPr>
-              <a:t>Trong thực tế, thông tin không đi qua 1 kênh duy nhất mà chảy qua mạng lưới phức tạp gồm con người, thiết bị, hệ điều hành và nhà mạng.</a:t>
+              <a:t>Đối thủ kiểm soát toàn bộ kênh truyền mạng: có quyền đọc, chặn, sửa đổi, xóa, tráo đổi và phát lại gói tin.</a:t>
             </a:r>
           </a:p>
           <a:p>
@@ -10438,12 +9939,12 @@
               </a:spcBef>
             </a:pPr>
             <a:r>
-              <a:rPr b="1" sz="1050">
+              <a:rPr b="1" sz="1100">
                 <a:solidFill>
                   <a:srgbClr val="1E293B"/>
                 </a:solidFill>
               </a:rPr>
-              <a:t>• Tổ chức thông tin: </a:t>
+              <a:t>• Hộp đen mật mã: </a:t>
             </a:r>
             <a:r>
               <a:rPr sz="1000">
@@ -10451,7 +9952,7 @@
                   <a:srgbClr val="475569"/>
                 </a:solidFill>
               </a:rPr>
-              <a:t>Bảo toàn bí mật là duy trì bất biến chính sách (policy invariant) giữa nhóm người giữ bí mật trước các lỗi Byzantine và hành vi phản bội.</a:t>
+              <a:t>Mô hình Dolev-Yao xem mật mã như các hàm đại số hoàn hảo (Perfect Black-box). Kẻ thù không thể giải mã nếu không có khóa.</a:t>
             </a:r>
           </a:p>
           <a:p>
@@ -10461,12 +9962,12 @@
               </a:spcBef>
             </a:pPr>
             <a:r>
-              <a:rPr b="1" sz="1050">
+              <a:rPr b="1" sz="1100">
                 <a:solidFill>
                   <a:srgbClr val="1E293B"/>
                 </a:solidFill>
               </a:rPr>
-              <a:t>• Điểm mù của Shannon: </a:t>
+              <a:t>• Ứng dụng: </a:t>
             </a:r>
             <a:r>
               <a:rPr sz="1000">
@@ -10474,14 +9975,178 @@
                   <a:srgbClr val="475569"/>
                 </a:solidFill>
               </a:rPr>
-              <a:t>Mô hình Shannon bỏ qua hoàn toàn chi phí phân phối khóa, lưu trữ khóa và sự can thiệp trực tiếp vào hành vi của bên giữ bí mật.</a:t>
-            </a:r>
-          </a:p>
-        </p:txBody>
-      </p:sp>
-      <p:sp>
-        <p:nvSpPr>
-          <p:cNvPr id="10" name="TextBox 9"/>
+              <a:t>Kiểm chứng hình thức các giao thức mạng phức tạp thông qua các công cụ logic tự động.</a:t>
+            </a:r>
+          </a:p>
+        </p:txBody>
+      </p:sp>
+      <p:sp>
+        <p:nvSpPr>
+          <p:cNvPr id="10" name="Rounded Rectangle 9"/>
+          <p:cNvSpPr/>
+          <p:nvPr/>
+        </p:nvSpPr>
+        <p:spPr>
+          <a:xfrm>
+            <a:off x="8046720" y="1691640"/>
+            <a:ext cx="3383280" cy="4389120"/>
+          </a:xfrm>
+          <a:prstGeom prst="roundRect">
+            <a:avLst/>
+          </a:prstGeom>
+          <a:solidFill>
+            <a:srgbClr val="FFFBEB"/>
+          </a:solidFill>
+          <a:ln>
+            <a:solidFill>
+              <a:srgbClr val="FDE68A"/>
+            </a:solidFill>
+          </a:ln>
+        </p:spPr>
+        <p:style>
+          <a:lnRef idx="1">
+            <a:schemeClr val="accent1"/>
+          </a:lnRef>
+          <a:fillRef idx="3">
+            <a:schemeClr val="accent1"/>
+          </a:fillRef>
+          <a:effectRef idx="2">
+            <a:schemeClr val="accent1"/>
+          </a:effectRef>
+          <a:fontRef idx="minor">
+            <a:schemeClr val="lt1"/>
+          </a:fontRef>
+        </p:style>
+        <p:txBody>
+          <a:bodyPr rtlCol="0" anchor="ctr"/>
+          <a:lstStyle/>
+          <a:p>
+            <a:pPr algn="ctr"/>
+          </a:p>
+        </p:txBody>
+      </p:sp>
+      <p:sp>
+        <p:nvSpPr>
+          <p:cNvPr id="11" name="TextBox 10"/>
+          <p:cNvSpPr txBox="1"/>
+          <p:nvPr/>
+        </p:nvSpPr>
+        <p:spPr>
+          <a:xfrm>
+            <a:off x="8229600" y="1828800"/>
+            <a:ext cx="3017520" cy="4114800"/>
+          </a:xfrm>
+          <a:prstGeom prst="rect">
+            <a:avLst/>
+          </a:prstGeom>
+          <a:noFill/>
+        </p:spPr>
+        <p:txBody>
+          <a:bodyPr wrap="square">
+            <a:spAutoFit/>
+          </a:bodyPr>
+          <a:lstStyle/>
+          <a:p>
+            <a:pPr>
+              <a:defRPr sz="1300" b="1">
+                <a:solidFill>
+                  <a:srgbClr val="D97706"/>
+                </a:solidFill>
+              </a:defRPr>
+            </a:pPr>
+            <a:r>
+              <a:t>3. Mô Hình Tiên Tri Ngẫu Nhiên</a:t>
+            </a:r>
+          </a:p>
+          <a:p>
+            <a:pPr>
+              <a:spcAft>
+                <a:spcPts val="800"/>
+              </a:spcAft>
+              <a:defRPr sz="950" b="1">
+                <a:solidFill>
+                  <a:srgbClr val="64748B"/>
+                </a:solidFill>
+              </a:defRPr>
+            </a:pPr>
+            <a:r>
+              <a:t>BELLARE-ROGAWAY (1993)</a:t>
+            </a:r>
+          </a:p>
+          <a:p>
+            <a:pPr>
+              <a:spcBef>
+                <a:spcPts val="600"/>
+              </a:spcBef>
+            </a:pPr>
+            <a:r>
+              <a:rPr b="1" sz="1100">
+                <a:solidFill>
+                  <a:srgbClr val="1E293B"/>
+                </a:solidFill>
+              </a:rPr>
+              <a:t>• Khái niệm: </a:t>
+            </a:r>
+            <a:r>
+              <a:rPr sz="1000">
+                <a:solidFill>
+                  <a:srgbClr val="475569"/>
+                </a:solidFill>
+              </a:rPr>
+              <a:t>Giả định hàm băm thực tế hoạt động như một hàm ngẫu nhiên lý tưởng (Random Oracle Model - ROM) trả về chuỗi ngẫu nhiên đồng đều.</a:t>
+            </a:r>
+          </a:p>
+          <a:p>
+            <a:pPr>
+              <a:spcBef>
+                <a:spcPts val="600"/>
+              </a:spcBef>
+            </a:pPr>
+            <a:r>
+              <a:rPr b="1" sz="1100">
+                <a:solidFill>
+                  <a:srgbClr val="1E293B"/>
+                </a:solidFill>
+              </a:rPr>
+              <a:t>• Vai trò thực tế: </a:t>
+            </a:r>
+            <a:r>
+              <a:rPr sz="1000">
+                <a:solidFill>
+                  <a:srgbClr val="475569"/>
+                </a:solidFill>
+              </a:rPr>
+              <a:t>Cho phép xây dựng các hệ mật khóa công khai và chữ ký số hiệu năng cao có chứng minh an toàn.</a:t>
+            </a:r>
+          </a:p>
+          <a:p>
+            <a:pPr>
+              <a:spcBef>
+                <a:spcPts val="600"/>
+              </a:spcBef>
+            </a:pPr>
+            <a:r>
+              <a:rPr b="1" sz="1100">
+                <a:solidFill>
+                  <a:srgbClr val="1E293B"/>
+                </a:solidFill>
+              </a:rPr>
+              <a:t>• Giới hạn triết học: </a:t>
+            </a:r>
+            <a:r>
+              <a:rPr sz="1000">
+                <a:solidFill>
+                  <a:srgbClr val="475569"/>
+                </a:solidFill>
+              </a:rPr>
+              <a:t>Trong thế giới thực, không có hàm băm cụ thể nào (kể cả SHA-256) có thể tương đương toán học với một Random Oracle thực sự.</a:t>
+            </a:r>
+          </a:p>
+        </p:txBody>
+      </p:sp>
+      <p:sp>
+        <p:nvSpPr>
+          <p:cNvPr id="12" name="TextBox 11"/>
           <p:cNvSpPr txBox="1"/>
           <p:nvPr/>
         </p:nvSpPr>
@@ -10509,7 +10174,7 @@
               </a:defRPr>
             </a:pPr>
             <a:r>
-              <a:t>Sơ đồ tổng hợp dựa trên Shannon (1948, Ref [3]) và Halpin (2025), Section 2–3, tr. 3–5.</a:t>
+              <a:t>Trích dẫn: Goldwasser-Micali (1984); Dolev-Yao (1983); Bellare-Rogaway (1993); Halpin (2025), tr. 5–8.</a:t>
             </a:r>
           </a:p>
         </p:txBody>
@@ -10624,7 +10289,7 @@
               </a:defRPr>
             </a:pPr>
             <a:r>
-              <a:t>SECTION 4 — HÌNH THỨC HÓA ĐỐI THỦ (TRANG 5–8)</a:t>
+              <a:t>SECTION 5 — GIỚI HẠN TRỪU TƯỢNG HÓA (TRANG 8–10)</a:t>
             </a:r>
           </a:p>
         </p:txBody>
@@ -10659,7 +10324,7 @@
               </a:defRPr>
             </a:pPr>
             <a:r>
-              <a:t>BA MÔ HÌNH ĐỐI THỦ HÌNH THỨC TRONG MẬT MÃ HIỆN ĐẠI</a:t>
+              <a:t>GIỚI HẠN CỦA SỰ HÌNH THỨC HÓA TRONG MẬT MÃ HỌC</a:t>
             </a:r>
           </a:p>
         </p:txBody>
@@ -10694,7 +10359,7 @@
               </a:defRPr>
             </a:pPr>
             <a:r>
-              <a:t>Tiến trình toán học hóa kẻ thù: Độ phức tạp tính toán đa thức, Logic kênh truyền và Tiên tri ngẫu nhiên</a:t>
+              <a:t>Khoảng cách giữa các giả định toán học lý tưởng và thế giới vật lý thực tế</a:t>
             </a:r>
           </a:p>
         </p:txBody>
@@ -10708,7 +10373,7 @@
         <p:spPr>
           <a:xfrm>
             <a:off x="731520" y="1691640"/>
-            <a:ext cx="3383280" cy="4389120"/>
+            <a:ext cx="10728655" cy="960120"/>
           </a:xfrm>
           <a:prstGeom prst="roundRect">
             <a:avLst/>
@@ -10716,7 +10381,7 @@
           <a:solidFill>
             <a:srgbClr val="F8FAFC"/>
           </a:solidFill>
-          <a:ln w="12700">
+          <a:ln>
             <a:solidFill>
               <a:srgbClr val="BFDBFE"/>
             </a:solidFill>
@@ -10752,8 +10417,8 @@
         </p:nvSpPr>
         <p:spPr>
           <a:xfrm>
-            <a:off x="914400" y="1828800"/>
-            <a:ext cx="3017520" cy="4114800"/>
+            <a:off x="914400" y="1764792"/>
+            <a:ext cx="10362895" cy="822960"/>
           </a:xfrm>
           <a:prstGeom prst="rect">
             <a:avLst/>
@@ -10767,98 +10432,29 @@
           <a:lstStyle/>
           <a:p>
             <a:pPr>
-              <a:defRPr sz="1300" b="1">
+              <a:defRPr sz="1200" b="1">
                 <a:solidFill>
                   <a:srgbClr val="1E40AF"/>
                 </a:solidFill>
               </a:defRPr>
             </a:pPr>
             <a:r>
-              <a:t>1. Mô Hình PPT Adversary</a:t>
-            </a:r>
-          </a:p>
-          <a:p>
-            <a:pPr>
-              <a:spcAft>
-                <a:spcPts val="800"/>
-              </a:spcAft>
-              <a:defRPr sz="950" b="1">
-                <a:solidFill>
-                  <a:srgbClr val="64748B"/>
-                </a:solidFill>
-              </a:defRPr>
-            </a:pPr>
-            <a:r>
-              <a:t>GOLDWASSER-MICALI (1984)</a:t>
+              <a:t>BƯỚC 1: GIẢ ĐỊNH TOÁN HỌC HÌNH THỨC</a:t>
             </a:r>
           </a:p>
           <a:p>
             <a:pPr>
               <a:spcBef>
-                <a:spcPts val="600"/>
+                <a:spcPts val="300"/>
               </a:spcBef>
-            </a:pPr>
-            <a:r>
-              <a:rPr b="1" sz="1100">
+              <a:defRPr sz="1050">
                 <a:solidFill>
                   <a:srgbClr val="1E293B"/>
                 </a:solidFill>
-              </a:rPr>
-              <a:t>• Khái niệm: </a:t>
-            </a:r>
-            <a:r>
-              <a:rPr sz="1000">
-                <a:solidFill>
-                  <a:srgbClr val="475569"/>
-                </a:solidFill>
-              </a:rPr>
-              <a:t>Đối thủ là thuật toán Turing xác suất chạy trong thời gian đa thức (Probabilistic Polynomial-Time).</a:t>
-            </a:r>
-          </a:p>
-          <a:p>
-            <a:pPr>
-              <a:spcBef>
-                <a:spcPts val="600"/>
-              </a:spcBef>
-            </a:pPr>
-            <a:r>
-              <a:rPr b="1" sz="1100">
-                <a:solidFill>
-                  <a:srgbClr val="1E293B"/>
-                </a:solidFill>
-              </a:rPr>
-              <a:t>• Security Games: </a:t>
-            </a:r>
-            <a:r>
-              <a:rPr sz="1000">
-                <a:solidFill>
-                  <a:srgbClr val="475569"/>
-                </a:solidFill>
-              </a:rPr>
-              <a:t>Định nghĩa an toàn thông qua các trò chơi thách đấu (Challenger vs Adversary). Lợi thế Adv(A) phải là hàm không đáng kể (negligible).</a:t>
-            </a:r>
-          </a:p>
-          <a:p>
-            <a:pPr>
-              <a:spcBef>
-                <a:spcPts val="600"/>
-              </a:spcBef>
-            </a:pPr>
-            <a:r>
-              <a:rPr b="1" sz="1100">
-                <a:solidFill>
-                  <a:srgbClr val="1E293B"/>
-                </a:solidFill>
-              </a:rPr>
-              <a:t>• Quy dẫn toán học: </a:t>
-            </a:r>
-            <a:r>
-              <a:rPr sz="1000">
-                <a:solidFill>
-                  <a:srgbClr val="475569"/>
-                </a:solidFill>
-              </a:rPr>
-              <a:t>Chứng minh an toàn bằng cách quy dẫn rằng việc phá vỡ hệ mật tương đương với giải các bài toán toán học khó (phân tích thừa số nguyên, logarit rời rạc).</a:t>
+              </a:defRPr>
+            </a:pPr>
+            <a:r>
+              <a:t>Hộp đen mật mã lý tưởng, thời gian thực thi là vô hình, độ dài bản mã công khai không rò rỉ nội dung, kênh truyền điểm-điểm độc lập.</a:t>
             </a:r>
           </a:p>
         </p:txBody>
@@ -10871,18 +10467,18 @@
         </p:nvSpPr>
         <p:spPr>
           <a:xfrm>
-            <a:off x="4389120" y="1691640"/>
-            <a:ext cx="3383280" cy="4389120"/>
+            <a:off x="731520" y="2770632"/>
+            <a:ext cx="10728655" cy="960120"/>
           </a:xfrm>
           <a:prstGeom prst="roundRect">
             <a:avLst/>
           </a:prstGeom>
           <a:solidFill>
-            <a:srgbClr val="F8FAFC"/>
+            <a:srgbClr val="FFFBEB"/>
           </a:solidFill>
-          <a:ln w="12700">
+          <a:ln>
             <a:solidFill>
-              <a:srgbClr val="E2E8F0"/>
+              <a:srgbClr val="FDE68A"/>
             </a:solidFill>
           </a:ln>
         </p:spPr>
@@ -10916,8 +10512,8 @@
         </p:nvSpPr>
         <p:spPr>
           <a:xfrm>
-            <a:off x="4572000" y="1828800"/>
-            <a:ext cx="3017520" cy="4114800"/>
+            <a:off x="914400" y="2843784"/>
+            <a:ext cx="10362895" cy="822960"/>
           </a:xfrm>
           <a:prstGeom prst="rect">
             <a:avLst/>
@@ -10931,98 +10527,29 @@
           <a:lstStyle/>
           <a:p>
             <a:pPr>
-              <a:defRPr sz="1300" b="1">
-                <a:solidFill>
-                  <a:srgbClr val="0F172A"/>
-                </a:solidFill>
-              </a:defRPr>
-            </a:pPr>
-            <a:r>
-              <a:t>2. Mô Hình Đối Thủ Mạng Logic</a:t>
-            </a:r>
-          </a:p>
-          <a:p>
-            <a:pPr>
-              <a:spcAft>
-                <a:spcPts val="800"/>
-              </a:spcAft>
-              <a:defRPr sz="950" b="1">
-                <a:solidFill>
-                  <a:srgbClr val="64748B"/>
-                </a:solidFill>
-              </a:defRPr>
-            </a:pPr>
-            <a:r>
-              <a:t>DOLEV-YAO (1983)</a:t>
+              <a:defRPr sz="1200" b="1">
+                <a:solidFill>
+                  <a:srgbClr val="D97706"/>
+                </a:solidFill>
+              </a:defRPr>
+            </a:pPr>
+            <a:r>
+              <a:t>BƯỚC 2: CÁC YẾU TỐ VẬT LÝ BỊ TRỪU TƯỢNG HÓA LƯỢC BỎ</a:t>
             </a:r>
           </a:p>
           <a:p>
             <a:pPr>
               <a:spcBef>
-                <a:spcPts val="600"/>
+                <a:spcPts val="300"/>
               </a:spcBef>
-            </a:pPr>
-            <a:r>
-              <a:rPr b="1" sz="1100">
+              <a:defRPr sz="1050">
                 <a:solidFill>
                   <a:srgbClr val="1E293B"/>
                 </a:solidFill>
-              </a:rPr>
-              <a:t>• Khái niệm: </a:t>
-            </a:r>
-            <a:r>
-              <a:rPr sz="1000">
-                <a:solidFill>
-                  <a:srgbClr val="475569"/>
-                </a:solidFill>
-              </a:rPr>
-              <a:t>Đối thủ là thực thể kiểm soát toàn bộ kênh truyền mạng: có quyền đọc, chặn, sửa đổi, xóa, tráo đổi và phát lại gói tin.</a:t>
-            </a:r>
-          </a:p>
-          <a:p>
-            <a:pPr>
-              <a:spcBef>
-                <a:spcPts val="600"/>
-              </a:spcBef>
-            </a:pPr>
-            <a:r>
-              <a:rPr b="1" sz="1100">
-                <a:solidFill>
-                  <a:srgbClr val="1E293B"/>
-                </a:solidFill>
-              </a:rPr>
-              <a:t>• Hộp đen mật mã: </a:t>
-            </a:r>
-            <a:r>
-              <a:rPr sz="1000">
-                <a:solidFill>
-                  <a:srgbClr val="475569"/>
-                </a:solidFill>
-              </a:rPr>
-              <a:t>Mô hình Dolev-Yao xem các thuật toán mật mã như các hàm đại số hoàn hảo (Perfect Black-box). Kẻ thù không thể giải mã nếu không có khóa.</a:t>
-            </a:r>
-          </a:p>
-          <a:p>
-            <a:pPr>
-              <a:spcBef>
-                <a:spcPts val="600"/>
-              </a:spcBef>
-            </a:pPr>
-            <a:r>
-              <a:rPr b="1" sz="1100">
-                <a:solidFill>
-                  <a:srgbClr val="1E293B"/>
-                </a:solidFill>
-              </a:rPr>
-              <a:t>• Ứng dụng: </a:t>
-            </a:r>
-            <a:r>
-              <a:rPr sz="1000">
-                <a:solidFill>
-                  <a:srgbClr val="475569"/>
-                </a:solidFill>
-              </a:rPr>
-              <a:t>Kiểm chứng hình thức các giao thức mạng phức tạp thông qua các công cụ logic tự động.</a:t>
+              </a:defRPr>
+            </a:pPr>
+            <a:r>
+              <a:t>Thời gian vi xử lý CPU, dao động điện năng tiêu thụ, phát xạ điện từ, kiến trúc bộ nhớ đệm (Cache), lỗi lập trình phần mềm.</a:t>
             </a:r>
           </a:p>
         </p:txBody>
@@ -11035,18 +10562,18 @@
         </p:nvSpPr>
         <p:spPr>
           <a:xfrm>
-            <a:off x="8046720" y="1691640"/>
-            <a:ext cx="3383280" cy="4389120"/>
+            <a:off x="731520" y="3849624"/>
+            <a:ext cx="10728655" cy="960120"/>
           </a:xfrm>
           <a:prstGeom prst="roundRect">
             <a:avLst/>
           </a:prstGeom>
           <a:solidFill>
-            <a:srgbClr val="FFFBEB"/>
+            <a:srgbClr val="FEF2F2"/>
           </a:solidFill>
-          <a:ln w="12700">
+          <a:ln>
             <a:solidFill>
-              <a:srgbClr val="FDE68A"/>
+              <a:srgbClr val="FECACA"/>
             </a:solidFill>
           </a:ln>
         </p:spPr>
@@ -11080,8 +10607,8 @@
         </p:nvSpPr>
         <p:spPr>
           <a:xfrm>
-            <a:off x="8229600" y="1828800"/>
-            <a:ext cx="3017520" cy="4114800"/>
+            <a:off x="914400" y="3922776"/>
+            <a:ext cx="10362895" cy="822960"/>
           </a:xfrm>
           <a:prstGeom prst="rect">
             <a:avLst/>
@@ -11095,105 +10622,131 @@
           <a:lstStyle/>
           <a:p>
             <a:pPr>
-              <a:defRPr sz="1300" b="1">
-                <a:solidFill>
-                  <a:srgbClr val="D97706"/>
-                </a:solidFill>
-              </a:defRPr>
-            </a:pPr>
-            <a:r>
-              <a:t>3. Mô Hình Tiên Tri Ngẫu Nhiên</a:t>
-            </a:r>
-          </a:p>
-          <a:p>
-            <a:pPr>
-              <a:spcAft>
-                <a:spcPts val="800"/>
-              </a:spcAft>
-              <a:defRPr sz="950" b="1">
-                <a:solidFill>
-                  <a:srgbClr val="64748B"/>
-                </a:solidFill>
-              </a:defRPr>
-            </a:pPr>
-            <a:r>
-              <a:t>BELLARE-ROGAWAY (1993)</a:t>
+              <a:defRPr sz="1200" b="1">
+                <a:solidFill>
+                  <a:srgbClr val="DC2626"/>
+                </a:solidFill>
+              </a:defRPr>
+            </a:pPr>
+            <a:r>
+              <a:t>BƯỚC 3: CON ĐƯỜNG KHAI THÁC CỦA ĐỐI THỦ THẾ GIỚI THỰC</a:t>
             </a:r>
           </a:p>
           <a:p>
             <a:pPr>
               <a:spcBef>
-                <a:spcPts val="600"/>
+                <a:spcPts val="300"/>
               </a:spcBef>
-            </a:pPr>
-            <a:r>
-              <a:rPr b="1" sz="1100">
+              <a:defRPr sz="1050">
                 <a:solidFill>
                   <a:srgbClr val="1E293B"/>
                 </a:solidFill>
-              </a:rPr>
-              <a:t>• Khái niệm: </a:t>
-            </a:r>
-            <a:r>
-              <a:rPr sz="1000">
-                <a:solidFill>
-                  <a:srgbClr val="475569"/>
-                </a:solidFill>
-              </a:rPr>
-              <a:t>Giả định hàm băm thực tế hoạt động như một hàm ngẫu nhiên lý tưởng (Random Oracle Model - ROM) trả về chuỗi ngẫu nhiên đồng đều.</a:t>
+              </a:defRPr>
+            </a:pPr>
+            <a:r>
+              <a:t>Tấn công kênh kề (Timing Attack - Kocher 1996), phân tích lưu lượng siêu dữ liệu, tấn công tiền ảnh cấp hai cấu trúc (Node-Leaf Confusion).</a:t>
+            </a:r>
+          </a:p>
+        </p:txBody>
+      </p:sp>
+      <p:sp>
+        <p:nvSpPr>
+          <p:cNvPr id="12" name="Rounded Rectangle 11"/>
+          <p:cNvSpPr/>
+          <p:nvPr/>
+        </p:nvSpPr>
+        <p:spPr>
+          <a:xfrm>
+            <a:off x="731520" y="4928616"/>
+            <a:ext cx="10728655" cy="960120"/>
+          </a:xfrm>
+          <a:prstGeom prst="roundRect">
+            <a:avLst/>
+          </a:prstGeom>
+          <a:solidFill>
+            <a:srgbClr val="ECFDF5"/>
+          </a:solidFill>
+          <a:ln>
+            <a:solidFill>
+              <a:srgbClr val="A7F3D0"/>
+            </a:solidFill>
+          </a:ln>
+        </p:spPr>
+        <p:style>
+          <a:lnRef idx="1">
+            <a:schemeClr val="accent1"/>
+          </a:lnRef>
+          <a:fillRef idx="3">
+            <a:schemeClr val="accent1"/>
+          </a:fillRef>
+          <a:effectRef idx="2">
+            <a:schemeClr val="accent1"/>
+          </a:effectRef>
+          <a:fontRef idx="minor">
+            <a:schemeClr val="lt1"/>
+          </a:fontRef>
+        </p:style>
+        <p:txBody>
+          <a:bodyPr rtlCol="0" anchor="ctr"/>
+          <a:lstStyle/>
+          <a:p>
+            <a:pPr algn="ctr"/>
+          </a:p>
+        </p:txBody>
+      </p:sp>
+      <p:sp>
+        <p:nvSpPr>
+          <p:cNvPr id="13" name="TextBox 12"/>
+          <p:cNvSpPr txBox="1"/>
+          <p:nvPr/>
+        </p:nvSpPr>
+        <p:spPr>
+          <a:xfrm>
+            <a:off x="914400" y="5001768"/>
+            <a:ext cx="10362895" cy="822960"/>
+          </a:xfrm>
+          <a:prstGeom prst="rect">
+            <a:avLst/>
+          </a:prstGeom>
+          <a:noFill/>
+        </p:spPr>
+        <p:txBody>
+          <a:bodyPr wrap="square">
+            <a:spAutoFit/>
+          </a:bodyPr>
+          <a:lstStyle/>
+          <a:p>
+            <a:pPr>
+              <a:defRPr sz="1200" b="1">
+                <a:solidFill>
+                  <a:srgbClr val="059669"/>
+                </a:solidFill>
+              </a:defRPr>
+            </a:pPr>
+            <a:r>
+              <a:t>BƯỚC 4: KẾT LUẬN NHẬN THỨC LUẬN CỦA HARRY HALPIN</a:t>
             </a:r>
           </a:p>
           <a:p>
             <a:pPr>
               <a:spcBef>
-                <a:spcPts val="600"/>
+                <a:spcPts val="300"/>
               </a:spcBef>
-            </a:pPr>
-            <a:r>
-              <a:rPr b="1" sz="1100">
+              <a:defRPr sz="1050">
                 <a:solidFill>
                   <a:srgbClr val="1E293B"/>
                 </a:solidFill>
-              </a:rPr>
-              <a:t>• Vai trò thực tế: </a:t>
-            </a:r>
-            <a:r>
-              <a:rPr sz="1000">
-                <a:solidFill>
-                  <a:srgbClr val="475569"/>
-                </a:solidFill>
-              </a:rPr>
-              <a:t>Cho phép xây dựng các hệ mật khóa công khai và chữ ký số hiệu năng cao có chứng minh an toàn.</a:t>
-            </a:r>
-          </a:p>
-          <a:p>
-            <a:pPr>
-              <a:spcBef>
-                <a:spcPts val="600"/>
-              </a:spcBef>
-            </a:pPr>
-            <a:r>
-              <a:rPr b="1" sz="1100">
-                <a:solidFill>
-                  <a:srgbClr val="1E293B"/>
-                </a:solidFill>
-              </a:rPr>
-              <a:t>• Giới hạn triết học: </a:t>
-            </a:r>
-            <a:r>
-              <a:rPr sz="1000">
-                <a:solidFill>
-                  <a:srgbClr val="475569"/>
-                </a:solidFill>
-              </a:rPr>
-              <a:t>Trong thế giới thực, không có hàm băm cụ thể nào (kể cả SHA-256) có thể tương đương toán học với một Random Oracle thực sự.</a:t>
-            </a:r>
-          </a:p>
-        </p:txBody>
-      </p:sp>
-      <p:sp>
-        <p:nvSpPr>
-          <p:cNvPr id="12" name="TextBox 11"/>
+              </a:defRPr>
+            </a:pPr>
+            <a:r>
+              <a:t>Cái giá của sự trừu tượng hóa là làm cho mật mã học mù quáng trước chính những năng lực thực tế của đối thủ nằm ngoài mô hình lý thuyết.</a:t>
+            </a:r>
+          </a:p>
+        </p:txBody>
+      </p:sp>
+      <p:sp>
+        <p:nvSpPr>
+          <p:cNvPr id="14" name="TextBox 13"/>
           <p:cNvSpPr txBox="1"/>
           <p:nvPr/>
         </p:nvSpPr>
@@ -11221,7 +10774,7 @@
               </a:defRPr>
             </a:pPr>
             <a:r>
-              <a:t>Trích dẫn: Goldwasser-Micali (1984, Ref [34]); Dolev-Yao (1983, Ref [52]); Bellare-Rogaway (1993, Ref [40]); Halpin (2025), tr. 5–8.</a:t>
+              <a:t>Sơ đồ tổng hợp dựa trên Kocher (1996) và Halpin (2025), Section 5, tr. 8–10.</a:t>
             </a:r>
           </a:p>
         </p:txBody>
@@ -11336,7 +10889,7 @@
               </a:defRPr>
             </a:pPr>
             <a:r>
-              <a:t>SECTION 5 — GIỚI HẠN TRỪU TƯỢNG HÓA (TRANG 8–10)</a:t>
+              <a:t>SECTION 6 — TIẾT LỘ CỦA SNOWDEN (TRANG 10–12)</a:t>
             </a:r>
           </a:p>
         </p:txBody>
@@ -11371,7 +10924,7 @@
               </a:defRPr>
             </a:pPr>
             <a:r>
-              <a:t>GIỚI HẠN CỦA SỰ HÌNH THỨC HÓA TRONG MẬT MÃ HỌC</a:t>
+              <a:t>SNOWDEN VÀ ĐỐI THỦ THỂ CHẾ (THE REAL ADVERSARY)</a:t>
             </a:r>
           </a:p>
         </p:txBody>
@@ -11406,7 +10959,7 @@
               </a:defRPr>
             </a:pPr>
             <a:r>
-              <a:t>Khoảng cách giữa các giả định toán học lý tưởng và thế giới vật lý thực tế</a:t>
+              <a:t>Khủng hoảng mô hình an ninh trước đối thủ giám sát hàng loạt quy mô quốc gia</a:t>
             </a:r>
           </a:p>
         </p:txBody>
@@ -11420,7 +10973,7 @@
         <p:spPr>
           <a:xfrm>
             <a:off x="731520" y="1691640"/>
-            <a:ext cx="10728655" cy="960120"/>
+            <a:ext cx="3383280" cy="4389120"/>
           </a:xfrm>
           <a:prstGeom prst="roundRect">
             <a:avLst/>
@@ -11428,7 +10981,7 @@
           <a:solidFill>
             <a:srgbClr val="F8FAFC"/>
           </a:solidFill>
-          <a:ln w="12700">
+          <a:ln>
             <a:solidFill>
               <a:srgbClr val="BFDBFE"/>
             </a:solidFill>
@@ -11464,8 +11017,8 @@
         </p:nvSpPr>
         <p:spPr>
           <a:xfrm>
-            <a:off x="914400" y="1764792"/>
-            <a:ext cx="10362895" cy="822960"/>
+            <a:off x="914400" y="1828800"/>
+            <a:ext cx="3017520" cy="4114800"/>
           </a:xfrm>
           <a:prstGeom prst="rect">
             <a:avLst/>
@@ -11479,29 +11032,98 @@
           <a:lstStyle/>
           <a:p>
             <a:pPr>
-              <a:defRPr sz="1200" b="1">
+              <a:defRPr sz="1300" b="1">
                 <a:solidFill>
                   <a:srgbClr val="1E40AF"/>
                 </a:solidFill>
               </a:defRPr>
             </a:pPr>
             <a:r>
-              <a:t>BƯỚC 1: GIẢ ĐỊNH TOÁN HỌC HÌNH THỨC</a:t>
+              <a:t>1. Khủng Hoảng Thực Tiễn</a:t>
+            </a:r>
+          </a:p>
+          <a:p>
+            <a:pPr>
+              <a:spcAft>
+                <a:spcPts val="800"/>
+              </a:spcAft>
+              <a:defRPr sz="950" b="1">
+                <a:solidFill>
+                  <a:srgbClr val="64748B"/>
+                </a:solidFill>
+              </a:defRPr>
+            </a:pPr>
+            <a:r>
+              <a:t>TIẾT LỘ SNOWDEN (2013)</a:t>
             </a:r>
           </a:p>
           <a:p>
             <a:pPr>
               <a:spcBef>
-                <a:spcPts val="300"/>
+                <a:spcPts val="600"/>
               </a:spcBef>
-              <a:defRPr sz="1050">
+            </a:pPr>
+            <a:r>
+              <a:rPr b="1" sz="1100">
                 <a:solidFill>
                   <a:srgbClr val="1E293B"/>
                 </a:solidFill>
-              </a:defRPr>
-            </a:pPr>
-            <a:r>
-              <a:t>Hộp đen mật mã lý tưởng, thời gian thực thi là vô hình, độ dài bản mã công khai không rò rỉ nội dung, kênh truyền điểm-điểm độc lập.</a:t>
+              </a:rPr>
+              <a:t>• Sự kiện bước ngoặt: </a:t>
+            </a:r>
+            <a:r>
+              <a:rPr sz="1000">
+                <a:solidFill>
+                  <a:srgbClr val="475569"/>
+                </a:solidFill>
+              </a:rPr>
+              <a:t>Các tài liệu Edward Snowden tiết lộ về NSA đã kéo mật mã học vào một cuộc khủng hoảng thực tiễn sâu sắc.</a:t>
+            </a:r>
+          </a:p>
+          <a:p>
+            <a:pPr>
+              <a:spcBef>
+                <a:spcPts val="600"/>
+              </a:spcBef>
+            </a:pPr>
+            <a:r>
+              <a:rPr b="1" sz="1100">
+                <a:solidFill>
+                  <a:srgbClr val="1E293B"/>
+                </a:solidFill>
+              </a:rPr>
+              <a:t>• Không phá toán học: </a:t>
+            </a:r>
+            <a:r>
+              <a:rPr sz="1000">
+                <a:solidFill>
+                  <a:srgbClr val="475569"/>
+                </a:solidFill>
+              </a:rPr>
+              <a:t>NSA không cần giải các bài toán toán học khó của RSA hay AES mà tấn công trực tiếp vào toàn bộ hệ sinh thái xung quanh.</a:t>
+            </a:r>
+          </a:p>
+          <a:p>
+            <a:pPr>
+              <a:spcBef>
+                <a:spcPts val="600"/>
+              </a:spcBef>
+            </a:pPr>
+            <a:r>
+              <a:rPr b="1" sz="1100">
+                <a:solidFill>
+                  <a:srgbClr val="1E293B"/>
+                </a:solidFill>
+              </a:rPr>
+              <a:t>• Mô hình thực tế: </a:t>
+            </a:r>
+            <a:r>
+              <a:rPr sz="1000">
+                <a:solidFill>
+                  <a:srgbClr val="475569"/>
+                </a:solidFill>
+              </a:rPr>
+              <a:t>Đối thủ bị động toàn cầu (Global Passive Adversary) và tấn công can thiệp vào đường truyền là mối đe dọa hoàn toàn có thật.</a:t>
             </a:r>
           </a:p>
         </p:txBody>
@@ -11514,8 +11136,8 @@
         </p:nvSpPr>
         <p:spPr>
           <a:xfrm>
-            <a:off x="731520" y="2770632"/>
-            <a:ext cx="10728655" cy="960120"/>
+            <a:off x="4389120" y="1691640"/>
+            <a:ext cx="3383280" cy="4389120"/>
           </a:xfrm>
           <a:prstGeom prst="roundRect">
             <a:avLst/>
@@ -11523,7 +11145,7 @@
           <a:solidFill>
             <a:srgbClr val="FFFBEB"/>
           </a:solidFill>
-          <a:ln w="12700">
+          <a:ln>
             <a:solidFill>
               <a:srgbClr val="FDE68A"/>
             </a:solidFill>
@@ -11559,8 +11181,8 @@
         </p:nvSpPr>
         <p:spPr>
           <a:xfrm>
-            <a:off x="914400" y="2843784"/>
-            <a:ext cx="10362895" cy="822960"/>
+            <a:off x="4572000" y="1828800"/>
+            <a:ext cx="3017520" cy="4114800"/>
           </a:xfrm>
           <a:prstGeom prst="rect">
             <a:avLst/>
@@ -11574,29 +11196,98 @@
           <a:lstStyle/>
           <a:p>
             <a:pPr>
-              <a:defRPr sz="1200" b="1">
+              <a:defRPr sz="1300" b="1">
                 <a:solidFill>
                   <a:srgbClr val="D97706"/>
                 </a:solidFill>
               </a:defRPr>
             </a:pPr>
             <a:r>
-              <a:t>BƯỚC 2: CÁC YẾU TỐ VẬT LÝ BỊ TRỪU TƯỢNG HÓA LƯỢC BỎ</a:t>
+              <a:t>2. Năng Lực Đối Thủ Thể Chế</a:t>
+            </a:r>
+          </a:p>
+          <a:p>
+            <a:pPr>
+              <a:spcAft>
+                <a:spcPts val="800"/>
+              </a:spcAft>
+              <a:defRPr sz="950" b="1">
+                <a:solidFill>
+                  <a:srgbClr val="64748B"/>
+                </a:solidFill>
+              </a:defRPr>
+            </a:pPr>
+            <a:r>
+              <a:t>VƯỢT NGOÀI HÌNH THỨC</a:t>
             </a:r>
           </a:p>
           <a:p>
             <a:pPr>
               <a:spcBef>
-                <a:spcPts val="300"/>
+                <a:spcPts val="600"/>
               </a:spcBef>
-              <a:defRPr sz="1050">
+            </a:pPr>
+            <a:r>
+              <a:rPr b="1" sz="1100">
                 <a:solidFill>
                   <a:srgbClr val="1E293B"/>
                 </a:solidFill>
-              </a:defRPr>
-            </a:pPr>
-            <a:r>
-              <a:t>Thời gian vi xử lý CPU, dao động điện năng tiêu thụ, phát xạ điện từ, kiến trúc bộ nhớ đệm (Cache), lỗi lập trình phần mềm.</a:t>
+              </a:rPr>
+              <a:t>• Giám sát Siêu dữ liệu: </a:t>
+            </a:r>
+            <a:r>
+              <a:rPr sz="1000">
+                <a:solidFill>
+                  <a:srgbClr val="475569"/>
+                </a:solidFill>
+              </a:rPr>
+              <a:t>NSA tập trung khai thác Metadata (ai liên lạc với ai, thời gian, kích thước) để dựng lại mạng xã hội mà không cần bẻ khóa bản mã.</a:t>
+            </a:r>
+          </a:p>
+          <a:p>
+            <a:pPr>
+              <a:spcBef>
+                <a:spcPts val="600"/>
+              </a:spcBef>
+            </a:pPr>
+            <a:r>
+              <a:rPr b="1" sz="1100">
+                <a:solidFill>
+                  <a:srgbClr val="1E293B"/>
+                </a:solidFill>
+              </a:rPr>
+              <a:t>• Tấn công Chuỗi cung ứng: </a:t>
+            </a:r>
+            <a:r>
+              <a:rPr sz="1000">
+                <a:solidFill>
+                  <a:srgbClr val="475569"/>
+                </a:solidFill>
+              </a:rPr>
+              <a:t>Chèn cửa sau vào phần cứng, làm suy yếu chuẩn mật mã quốc tế (tiêu chuẩn NIST Dual_EC_DRBG bị cài cửa sau ngầm).</a:t>
+            </a:r>
+          </a:p>
+          <a:p>
+            <a:pPr>
+              <a:spcBef>
+                <a:spcPts val="600"/>
+              </a:spcBef>
+            </a:pPr>
+            <a:r>
+              <a:rPr b="1" sz="1100">
+                <a:solidFill>
+                  <a:srgbClr val="1E293B"/>
+                </a:solidFill>
+              </a:rPr>
+              <a:t>• Áp lực Thể chế: </a:t>
+            </a:r>
+            <a:r>
+              <a:rPr sz="1000">
+                <a:solidFill>
+                  <a:srgbClr val="475569"/>
+                </a:solidFill>
+              </a:rPr>
+              <a:t>Cưỡng chế pháp lý các tập đoàn công nghệ lớn bàn giao khóa bí mật và quyền truy cập dữ liệu máy chủ.</a:t>
             </a:r>
           </a:p>
         </p:txBody>
@@ -11609,18 +11300,18 @@
         </p:nvSpPr>
         <p:spPr>
           <a:xfrm>
-            <a:off x="731520" y="3849624"/>
-            <a:ext cx="10728655" cy="960120"/>
+            <a:off x="8046720" y="1691640"/>
+            <a:ext cx="3383280" cy="4389120"/>
           </a:xfrm>
           <a:prstGeom prst="roundRect">
             <a:avLst/>
           </a:prstGeom>
           <a:solidFill>
-            <a:srgbClr val="FEF2F2"/>
+            <a:srgbClr val="ECFDF5"/>
           </a:solidFill>
-          <a:ln w="12700">
+          <a:ln>
             <a:solidFill>
-              <a:srgbClr val="FECACA"/>
+              <a:srgbClr val="A7F3D0"/>
             </a:solidFill>
           </a:ln>
         </p:spPr>
@@ -11654,8 +11345,8 @@
         </p:nvSpPr>
         <p:spPr>
           <a:xfrm>
-            <a:off x="914400" y="3922776"/>
-            <a:ext cx="10362895" cy="822960"/>
+            <a:off x="8229600" y="1828800"/>
+            <a:ext cx="3017520" cy="4114800"/>
           </a:xfrm>
           <a:prstGeom prst="rect">
             <a:avLst/>
@@ -11669,131 +11360,105 @@
           <a:lstStyle/>
           <a:p>
             <a:pPr>
-              <a:defRPr sz="1200" b="1">
-                <a:solidFill>
-                  <a:srgbClr val="DC2626"/>
-                </a:solidFill>
-              </a:defRPr>
-            </a:pPr>
-            <a:r>
-              <a:t>BƯỚC 3: CON ĐƯỜNG KHAI THÁC CỦA ĐỐI THỦ THẾ GIỚI THỰC</a:t>
+              <a:defRPr sz="1300" b="1">
+                <a:solidFill>
+                  <a:srgbClr val="059669"/>
+                </a:solidFill>
+              </a:defRPr>
+            </a:pPr>
+            <a:r>
+              <a:t>3. Tính Tương Đối Của Kẻ Thù</a:t>
+            </a:r>
+          </a:p>
+          <a:p>
+            <a:pPr>
+              <a:spcAft>
+                <a:spcPts val="800"/>
+              </a:spcAft>
+              <a:defRPr sz="950" b="1">
+                <a:solidFill>
+                  <a:srgbClr val="64748B"/>
+                </a:solidFill>
+              </a:defRPr>
+            </a:pPr>
+            <a:r>
+              <a:t>BẢN CHẤT NHẬN THỨC LUẬN</a:t>
             </a:r>
           </a:p>
           <a:p>
             <a:pPr>
               <a:spcBef>
-                <a:spcPts val="300"/>
+                <a:spcPts val="600"/>
               </a:spcBef>
-              <a:defRPr sz="1050">
+            </a:pPr>
+            <a:r>
+              <a:rPr b="1" sz="1100">
                 <a:solidFill>
                   <a:srgbClr val="1E293B"/>
                 </a:solidFill>
-              </a:defRPr>
-            </a:pPr>
-            <a:r>
-              <a:t>Tấn công kênh kề (Timing Attack - Kocher 1996), phân tích lưu lượng siêu dữ liệu, tấn công tiền ảnh cấp hai cấu trúc (Node-Leaf Confusion).</a:t>
-            </a:r>
-          </a:p>
-        </p:txBody>
-      </p:sp>
-      <p:sp>
-        <p:nvSpPr>
-          <p:cNvPr id="12" name="Rounded Rectangle 11"/>
-          <p:cNvSpPr/>
-          <p:nvPr/>
-        </p:nvSpPr>
-        <p:spPr>
-          <a:xfrm>
-            <a:off x="731520" y="4928616"/>
-            <a:ext cx="10728655" cy="960120"/>
-          </a:xfrm>
-          <a:prstGeom prst="roundRect">
-            <a:avLst/>
-          </a:prstGeom>
-          <a:solidFill>
-            <a:srgbClr val="ECFDF5"/>
-          </a:solidFill>
-          <a:ln w="12700">
-            <a:solidFill>
-              <a:srgbClr val="A7F3D0"/>
-            </a:solidFill>
-          </a:ln>
-        </p:spPr>
-        <p:style>
-          <a:lnRef idx="1">
-            <a:schemeClr val="accent1"/>
-          </a:lnRef>
-          <a:fillRef idx="3">
-            <a:schemeClr val="accent1"/>
-          </a:fillRef>
-          <a:effectRef idx="2">
-            <a:schemeClr val="accent1"/>
-          </a:effectRef>
-          <a:fontRef idx="minor">
-            <a:schemeClr val="lt1"/>
-          </a:fontRef>
-        </p:style>
-        <p:txBody>
-          <a:bodyPr rtlCol="0" anchor="ctr"/>
-          <a:lstStyle/>
-          <a:p>
-            <a:pPr algn="ctr"/>
-          </a:p>
-        </p:txBody>
-      </p:sp>
-      <p:sp>
-        <p:nvSpPr>
-          <p:cNvPr id="13" name="TextBox 12"/>
-          <p:cNvSpPr txBox="1"/>
-          <p:nvPr/>
-        </p:nvSpPr>
-        <p:spPr>
-          <a:xfrm>
-            <a:off x="914400" y="5001768"/>
-            <a:ext cx="10362895" cy="822960"/>
-          </a:xfrm>
-          <a:prstGeom prst="rect">
-            <a:avLst/>
-          </a:prstGeom>
-          <a:noFill/>
-        </p:spPr>
-        <p:txBody>
-          <a:bodyPr wrap="square">
-            <a:spAutoFit/>
-          </a:bodyPr>
-          <a:lstStyle/>
-          <a:p>
-            <a:pPr>
-              <a:defRPr sz="1200" b="1">
-                <a:solidFill>
-                  <a:srgbClr val="059669"/>
-                </a:solidFill>
-              </a:defRPr>
-            </a:pPr>
-            <a:r>
-              <a:t>BƯỚC 4: KẾT LUẬN NHẬN THỨC LUẬN CỦA HARRY HALPIN</a:t>
+              </a:rPr>
+              <a:t>• Khái niệm tương đối: </a:t>
+            </a:r>
+            <a:r>
+              <a:rPr sz="1000">
+                <a:solidFill>
+                  <a:srgbClr val="475569"/>
+                </a:solidFill>
+              </a:rPr>
+              <a:t>Khái niệm 'Kẻ thù' mang tính vị thế: Đối với người dân, NSA là đối thủ giám sát; nhưng đối với NSA, Snowden lại là đối thủ làm rò rỉ bí mật.</a:t>
             </a:r>
           </a:p>
           <a:p>
             <a:pPr>
               <a:spcBef>
-                <a:spcPts val="300"/>
+                <a:spcPts val="600"/>
               </a:spcBef>
-              <a:defRPr sz="1050">
+            </a:pPr>
+            <a:r>
+              <a:rPr b="1" sz="1100">
                 <a:solidFill>
                   <a:srgbClr val="1E293B"/>
                 </a:solidFill>
-              </a:defRPr>
-            </a:pPr>
-            <a:r>
-              <a:t>Cái giá của sự trừu tượng hóa là làm cho mật mã học mù quáng trước chính những năng lực thực tế của đối thủ nằm ngoài mô hình lý thuyết.</a:t>
-            </a:r>
-          </a:p>
-        </p:txBody>
-      </p:sp>
-      <p:sp>
-        <p:nvSpPr>
-          <p:cNvPr id="14" name="TextBox 13"/>
+              </a:rPr>
+              <a:t>• Dân chủ hóa mật mã: </a:t>
+            </a:r>
+            <a:r>
+              <a:rPr sz="1000">
+                <a:solidFill>
+                  <a:srgbClr val="475569"/>
+                </a:solidFill>
+              </a:rPr>
+              <a:t>Mật mã khóa công khai từng giúp cá nhân tự vệ, nhưng công cụ gián điệp của NSA nay đã lan rộng sang tội phạm mạng và các nhóm phi nhà nước.</a:t>
+            </a:r>
+          </a:p>
+          <a:p>
+            <a:pPr>
+              <a:spcBef>
+                <a:spcPts val="600"/>
+              </a:spcBef>
+            </a:pPr>
+            <a:r>
+              <a:rPr b="1" sz="1100">
+                <a:solidFill>
+                  <a:srgbClr val="1E293B"/>
+                </a:solidFill>
+              </a:rPr>
+              <a:t>• Hệ quả khoa học: </a:t>
+            </a:r>
+            <a:r>
+              <a:rPr sz="1000">
+                <a:solidFill>
+                  <a:srgbClr val="475569"/>
+                </a:solidFill>
+              </a:rPr>
+              <a:t>Mật mã học buộc phải từ bỏ giả định kênh truyền sạch để nghiên cứu phòng chống cửa sau (Cliptography).</a:t>
+            </a:r>
+          </a:p>
+        </p:txBody>
+      </p:sp>
+      <p:sp>
+        <p:nvSpPr>
+          <p:cNvPr id="12" name="TextBox 11"/>
           <p:cNvSpPr txBox="1"/>
           <p:nvPr/>
         </p:nvSpPr>
@@ -11821,7 +11486,7 @@
               </a:defRPr>
             </a:pPr>
             <a:r>
-              <a:t>Sơ đồ tổng hợp dựa trên Kocher (1996, Ref [36]) và Halpin (2025), Section 5, tr. 8–10.</a:t>
+              <a:t>Trích dẫn: Harry Halpin (2025), Section 6: Snowden and the real adversary, tr. 10–12.</a:t>
             </a:r>
           </a:p>
         </p:txBody>
@@ -11936,7 +11601,7 @@
               </a:defRPr>
             </a:pPr>
             <a:r>
-              <a:t>SECTION 6 — TIẾT LỘ CỦA SNOWDEN (TRANG 10–12)</a:t>
+              <a:t>SECTION 7 — KẾT LUẬN &amp; CHƯƠNG TRÌNH NGHIÊN CỨU (TRANG 12–14)</a:t>
             </a:r>
           </a:p>
         </p:txBody>
@@ -11971,7 +11636,7 @@
               </a:defRPr>
             </a:pPr>
             <a:r>
-              <a:t>SNOWDEN VÀ ĐỐI THỦ THỂ CHẾ (THE REAL ADVERSARY)</a:t>
+              <a:t>CHƯƠNG TRÌNH NGHIÊN CỨU TƯƠNG LAI: BỐN CÂU HỎI MỞ</a:t>
             </a:r>
           </a:p>
         </p:txBody>
@@ -12006,7 +11671,7 @@
               </a:defRPr>
             </a:pPr>
             <a:r>
-              <a:t>Khủng hoảng mô hình an ninh trước đối thủ giám sát hàng loạt quy mô quốc gia</a:t>
+              <a:t>Đề xuất hòa giải giữa trừu tượng hóa toán học và dữ liệu thực nghiệm thế giới thực</a:t>
             </a:r>
           </a:p>
         </p:txBody>
@@ -12020,7 +11685,7 @@
         <p:spPr>
           <a:xfrm>
             <a:off x="731520" y="1691640"/>
-            <a:ext cx="3383280" cy="4389120"/>
+            <a:ext cx="10728655" cy="960120"/>
           </a:xfrm>
           <a:prstGeom prst="roundRect">
             <a:avLst/>
@@ -12028,7 +11693,7 @@
           <a:solidFill>
             <a:srgbClr val="F8FAFC"/>
           </a:solidFill>
-          <a:ln w="12700">
+          <a:ln>
             <a:solidFill>
               <a:srgbClr val="BFDBFE"/>
             </a:solidFill>
@@ -12064,8 +11729,8 @@
         </p:nvSpPr>
         <p:spPr>
           <a:xfrm>
-            <a:off x="914400" y="1828800"/>
-            <a:ext cx="3017520" cy="4114800"/>
+            <a:off x="914400" y="1746504"/>
+            <a:ext cx="10362895" cy="841248"/>
           </a:xfrm>
           <a:prstGeom prst="rect">
             <a:avLst/>
@@ -12079,98 +11744,41 @@
           <a:lstStyle/>
           <a:p>
             <a:pPr>
-              <a:defRPr sz="1300" b="1">
+              <a:defRPr sz="1150" b="1">
                 <a:solidFill>
                   <a:srgbClr val="1E40AF"/>
                 </a:solidFill>
               </a:defRPr>
             </a:pPr>
             <a:r>
-              <a:t>1. Khủng Hoảng Thực Tiễn</a:t>
-            </a:r>
-          </a:p>
-          <a:p>
-            <a:pPr>
-              <a:spcAft>
-                <a:spcPts val="800"/>
-              </a:spcAft>
-              <a:defRPr sz="950" b="1">
+              <a:t>Câu hỏi 1: Mạng Xã Hội Động của Truyền Thông Bí Mật</a:t>
+            </a:r>
+          </a:p>
+          <a:p>
+            <a:pPr>
+              <a:defRPr sz="950" i="1">
                 <a:solidFill>
                   <a:srgbClr val="64748B"/>
                 </a:solidFill>
               </a:defRPr>
             </a:pPr>
             <a:r>
-              <a:t>TIẾT LỘ SNOWDEN (2013)</a:t>
+              <a:t>"Can we study dynamic social networks of secret communication modeled on the empirical behavior of secret keepers?"</a:t>
             </a:r>
           </a:p>
           <a:p>
             <a:pPr>
               <a:spcBef>
-                <a:spcPts val="600"/>
+                <a:spcPts val="200"/>
               </a:spcBef>
-            </a:pPr>
-            <a:r>
-              <a:rPr b="1" sz="1100">
+              <a:defRPr sz="1000">
                 <a:solidFill>
                   <a:srgbClr val="1E293B"/>
                 </a:solidFill>
-              </a:rPr>
-              <a:t>• Sự kiện bước ngoặt: </a:t>
-            </a:r>
-            <a:r>
-              <a:rPr sz="1000">
-                <a:solidFill>
-                  <a:srgbClr val="475569"/>
-                </a:solidFill>
-              </a:rPr>
-              <a:t>Các tài liệu Edward Snowden tiết lộ về NSA đã lột bỏ tấm mặt nạ, kéo mật mã học vào một cuộc khủng hoảng thực tiễn sâu sắc.</a:t>
-            </a:r>
-          </a:p>
-          <a:p>
-            <a:pPr>
-              <a:spcBef>
-                <a:spcPts val="600"/>
-              </a:spcBef>
-            </a:pPr>
-            <a:r>
-              <a:rPr b="1" sz="1100">
-                <a:solidFill>
-                  <a:srgbClr val="1E293B"/>
-                </a:solidFill>
-              </a:rPr>
-              <a:t>• Không phá toán học: </a:t>
-            </a:r>
-            <a:r>
-              <a:rPr sz="1000">
-                <a:solidFill>
-                  <a:srgbClr val="475569"/>
-                </a:solidFill>
-              </a:rPr>
-              <a:t>NSA không cần giải các bài toán toán học khó của RSA hay AES mà tấn công trực tiếp vào toàn bộ hệ sinh thái xung quanh.</a:t>
-            </a:r>
-          </a:p>
-          <a:p>
-            <a:pPr>
-              <a:spcBef>
-                <a:spcPts val="600"/>
-              </a:spcBef>
-            </a:pPr>
-            <a:r>
-              <a:rPr b="1" sz="1100">
-                <a:solidFill>
-                  <a:srgbClr val="1E293B"/>
-                </a:solidFill>
-              </a:rPr>
-              <a:t>• Mô hình thực tế: </a:t>
-            </a:r>
-            <a:r>
-              <a:rPr sz="1000">
-                <a:solidFill>
-                  <a:srgbClr val="475569"/>
-                </a:solidFill>
-              </a:rPr>
-              <a:t>Đối thủ bị động toàn cầu (Global Passive Adversary) và tấn công chủ động vào kênh truyền là mối đe dọa hoàn toàn có thật.</a:t>
+              </a:defRPr>
+            </a:pPr>
+            <a:r>
+              <a:t>Nghiên cứu tổ chức thông tin dưới dạng mạng xã hội động giữa những người giữ bí mật. Kiểm tra xem các bất biến chính sách bảo vệ bí mật có được duy trì qua các biến động cấu trúc mạng và các sự cố Byzantine hay không.</a:t>
             </a:r>
           </a:p>
         </p:txBody>
@@ -12183,18 +11791,18 @@
         </p:nvSpPr>
         <p:spPr>
           <a:xfrm>
-            <a:off x="4389120" y="1691640"/>
-            <a:ext cx="3383280" cy="4389120"/>
+            <a:off x="731520" y="2770632"/>
+            <a:ext cx="10728655" cy="960120"/>
           </a:xfrm>
           <a:prstGeom prst="roundRect">
             <a:avLst/>
           </a:prstGeom>
           <a:solidFill>
-            <a:srgbClr val="FFFBEB"/>
+            <a:srgbClr val="F8FAFC"/>
           </a:solidFill>
-          <a:ln w="12700">
+          <a:ln>
             <a:solidFill>
-              <a:srgbClr val="FDE68A"/>
+              <a:srgbClr val="BFDBFE"/>
             </a:solidFill>
           </a:ln>
         </p:spPr>
@@ -12228,8 +11836,8 @@
         </p:nvSpPr>
         <p:spPr>
           <a:xfrm>
-            <a:off x="4572000" y="1828800"/>
-            <a:ext cx="3017520" cy="4114800"/>
+            <a:off x="914400" y="2825496"/>
+            <a:ext cx="10362895" cy="841248"/>
           </a:xfrm>
           <a:prstGeom prst="rect">
             <a:avLst/>
@@ -12243,98 +11851,41 @@
           <a:lstStyle/>
           <a:p>
             <a:pPr>
-              <a:defRPr sz="1300" b="1">
-                <a:solidFill>
-                  <a:srgbClr val="D97706"/>
-                </a:solidFill>
-              </a:defRPr>
-            </a:pPr>
-            <a:r>
-              <a:t>2. Năng Lực Đối Thủ Thể Chế</a:t>
-            </a:r>
-          </a:p>
-          <a:p>
-            <a:pPr>
-              <a:spcAft>
-                <a:spcPts val="800"/>
-              </a:spcAft>
-              <a:defRPr sz="950" b="1">
+              <a:defRPr sz="1150" b="1">
+                <a:solidFill>
+                  <a:srgbClr val="1E40AF"/>
+                </a:solidFill>
+              </a:defRPr>
+            </a:pPr>
+            <a:r>
+              <a:t>Câu hỏi 2: Mô Hình Hóa Năng Lực và Liên Minh Đối Thủ Bằng Thống Kê</a:t>
+            </a:r>
+          </a:p>
+          <a:p>
+            <a:pPr>
+              <a:defRPr sz="950" i="1">
                 <a:solidFill>
                   <a:srgbClr val="64748B"/>
                 </a:solidFill>
               </a:defRPr>
             </a:pPr>
             <a:r>
-              <a:t>VƯỢT NGOÀI HÌNH THỨC</a:t>
+              <a:t>"By incorporating statistics, can new models of the adversary take into account more accurate data about their capabilities?"</a:t>
             </a:r>
           </a:p>
           <a:p>
             <a:pPr>
               <a:spcBef>
-                <a:spcPts val="600"/>
+                <a:spcPts val="200"/>
               </a:spcBef>
-            </a:pPr>
-            <a:r>
-              <a:rPr b="1" sz="1100">
+              <a:defRPr sz="1000">
                 <a:solidFill>
                   <a:srgbClr val="1E293B"/>
                 </a:solidFill>
-              </a:rPr>
-              <a:t>• Giám sát Siêu dữ liệu: </a:t>
-            </a:r>
-            <a:r>
-              <a:rPr sz="1000">
-                <a:solidFill>
-                  <a:srgbClr val="475569"/>
-                </a:solidFill>
-              </a:rPr>
-              <a:t>NSA tập trung khai thác Metadata (ai liên lạc với ai, thời gian, kích thước) để dựng lại mạng xã hội mà không cần bẻ khóa bản mã.</a:t>
-            </a:r>
-          </a:p>
-          <a:p>
-            <a:pPr>
-              <a:spcBef>
-                <a:spcPts val="600"/>
-              </a:spcBef>
-            </a:pPr>
-            <a:r>
-              <a:rPr b="1" sz="1100">
-                <a:solidFill>
-                  <a:srgbClr val="1E293B"/>
-                </a:solidFill>
-              </a:rPr>
-              <a:t>• Tấn công Chuỗi cung ứng: </a:t>
-            </a:r>
-            <a:r>
-              <a:rPr sz="1000">
-                <a:solidFill>
-                  <a:srgbClr val="475569"/>
-                </a:solidFill>
-              </a:rPr>
-              <a:t>Chèn cửa sau vào phần cứng, làm suy yếu chuẩn mật mã quốc tế (tiêu chuẩn NIST Dual_EC_DRBG bị cài cửa sau ngầm).</a:t>
-            </a:r>
-          </a:p>
-          <a:p>
-            <a:pPr>
-              <a:spcBef>
-                <a:spcPts val="600"/>
-              </a:spcBef>
-            </a:pPr>
-            <a:r>
-              <a:rPr b="1" sz="1100">
-                <a:solidFill>
-                  <a:srgbClr val="1E293B"/>
-                </a:solidFill>
-              </a:rPr>
-              <a:t>• Áp lực Thể chế: </a:t>
-            </a:r>
-            <a:r>
-              <a:rPr sz="1000">
-                <a:solidFill>
-                  <a:srgbClr val="475569"/>
-                </a:solidFill>
-              </a:rPr>
-              <a:t>Cưỡng chế pháp lý các tập đoàn công nghệ lớn bàn giao khóa bí mật và quyền truy cập dữ liệu máy chủ.</a:t>
+              </a:defRPr>
+            </a:pPr>
+            <a:r>
+              <a:t>Sử dụng thống kê thực nghiệm và mô phỏng Monte Carlo để mô hình hóa chính xác hơn năng lực đối thủ; phân tích kinh tế chính trị của các liên minh giám sát (liên minh Five Eyes, Anonymous, quan hệ nhà nước - cá nhân).</a:t>
             </a:r>
           </a:p>
         </p:txBody>
@@ -12347,18 +11898,18 @@
         </p:nvSpPr>
         <p:spPr>
           <a:xfrm>
-            <a:off x="8046720" y="1691640"/>
-            <a:ext cx="3383280" cy="4389120"/>
+            <a:off x="731520" y="3849624"/>
+            <a:ext cx="10728655" cy="960120"/>
           </a:xfrm>
           <a:prstGeom prst="roundRect">
             <a:avLst/>
           </a:prstGeom>
           <a:solidFill>
-            <a:srgbClr val="ECFDF5"/>
+            <a:srgbClr val="F8FAFC"/>
           </a:solidFill>
-          <a:ln w="12700">
+          <a:ln>
             <a:solidFill>
-              <a:srgbClr val="A7F3D0"/>
+              <a:srgbClr val="BFDBFE"/>
             </a:solidFill>
           </a:ln>
         </p:spPr>
@@ -12392,8 +11943,8 @@
         </p:nvSpPr>
         <p:spPr>
           <a:xfrm>
-            <a:off x="8229600" y="1828800"/>
-            <a:ext cx="3017520" cy="4114800"/>
+            <a:off x="914400" y="3904488"/>
+            <a:ext cx="10362895" cy="841248"/>
           </a:xfrm>
           <a:prstGeom prst="rect">
             <a:avLst/>
@@ -12407,105 +11958,155 @@
           <a:lstStyle/>
           <a:p>
             <a:pPr>
-              <a:defRPr sz="1300" b="1">
-                <a:solidFill>
-                  <a:srgbClr val="059669"/>
-                </a:solidFill>
-              </a:defRPr>
-            </a:pPr>
-            <a:r>
-              <a:t>3. Tính Tương Đối Của Kẻ Thù</a:t>
-            </a:r>
-          </a:p>
-          <a:p>
-            <a:pPr>
-              <a:spcAft>
-                <a:spcPts val="800"/>
-              </a:spcAft>
-              <a:defRPr sz="950" b="1">
+              <a:defRPr sz="1150" b="1">
+                <a:solidFill>
+                  <a:srgbClr val="1E40AF"/>
+                </a:solidFill>
+              </a:defRPr>
+            </a:pPr>
+            <a:r>
+              <a:t>Câu hỏi 3: Ứng Dụng Phương Pháp Liên Ngành &amp; Hệ Thống Phức Hợp</a:t>
+            </a:r>
+          </a:p>
+          <a:p>
+            <a:pPr>
+              <a:defRPr sz="950" i="1">
                 <a:solidFill>
                   <a:srgbClr val="64748B"/>
                 </a:solidFill>
               </a:defRPr>
             </a:pPr>
             <a:r>
-              <a:t>BẢN CHẤT NHẬN THỨC LUẬN</a:t>
+              <a:t>"Can cryptography incorporate interdisciplinary methods and insights that can capture the complexity of secure communication?"</a:t>
             </a:r>
           </a:p>
           <a:p>
             <a:pPr>
               <a:spcBef>
-                <a:spcPts val="600"/>
+                <a:spcPts val="200"/>
               </a:spcBef>
-            </a:pPr>
-            <a:r>
-              <a:rPr b="1" sz="1100">
+              <a:defRPr sz="1000">
                 <a:solidFill>
                   <a:srgbClr val="1E293B"/>
                 </a:solidFill>
-              </a:rPr>
-              <a:t>• Khái niệm tương đối: </a:t>
-            </a:r>
-            <a:r>
-              <a:rPr sz="1000">
-                <a:solidFill>
-                  <a:srgbClr val="475569"/>
-                </a:solidFill>
-              </a:rPr>
-              <a:t>Khái niệm 'Kẻ thù' mang tính vị thế: Đối với người dân, NSA là đối thủ giám sát; nhưng đối với NSA, Snowden lại là đối thủ (insider) làm rò rỉ bí mật.</a:t>
+              </a:defRPr>
+            </a:pPr>
+            <a:r>
+              <a:t>Áp dụng các công cụ từ lý thuyết hệ thống phức hợp, động lực học mạng và dịch tễ học để mô hình hóa sự lan truyền thông tin, nhận diện các điểm chuyển pha khi bị tấn công.</a:t>
+            </a:r>
+          </a:p>
+        </p:txBody>
+      </p:sp>
+      <p:sp>
+        <p:nvSpPr>
+          <p:cNvPr id="12" name="Rounded Rectangle 11"/>
+          <p:cNvSpPr/>
+          <p:nvPr/>
+        </p:nvSpPr>
+        <p:spPr>
+          <a:xfrm>
+            <a:off x="731520" y="4928616"/>
+            <a:ext cx="10728655" cy="960120"/>
+          </a:xfrm>
+          <a:prstGeom prst="roundRect">
+            <a:avLst/>
+          </a:prstGeom>
+          <a:solidFill>
+            <a:srgbClr val="F8FAFC"/>
+          </a:solidFill>
+          <a:ln>
+            <a:solidFill>
+              <a:srgbClr val="BFDBFE"/>
+            </a:solidFill>
+          </a:ln>
+        </p:spPr>
+        <p:style>
+          <a:lnRef idx="1">
+            <a:schemeClr val="accent1"/>
+          </a:lnRef>
+          <a:fillRef idx="3">
+            <a:schemeClr val="accent1"/>
+          </a:fillRef>
+          <a:effectRef idx="2">
+            <a:schemeClr val="accent1"/>
+          </a:effectRef>
+          <a:fontRef idx="minor">
+            <a:schemeClr val="lt1"/>
+          </a:fontRef>
+        </p:style>
+        <p:txBody>
+          <a:bodyPr rtlCol="0" anchor="ctr"/>
+          <a:lstStyle/>
+          <a:p>
+            <a:pPr algn="ctr"/>
+          </a:p>
+        </p:txBody>
+      </p:sp>
+      <p:sp>
+        <p:nvSpPr>
+          <p:cNvPr id="13" name="TextBox 12"/>
+          <p:cNvSpPr txBox="1"/>
+          <p:nvPr/>
+        </p:nvSpPr>
+        <p:spPr>
+          <a:xfrm>
+            <a:off x="914400" y="4983480"/>
+            <a:ext cx="10362895" cy="841248"/>
+          </a:xfrm>
+          <a:prstGeom prst="rect">
+            <a:avLst/>
+          </a:prstGeom>
+          <a:noFill/>
+        </p:spPr>
+        <p:txBody>
+          <a:bodyPr wrap="square">
+            <a:spAutoFit/>
+          </a:bodyPr>
+          <a:lstStyle/>
+          <a:p>
+            <a:pPr>
+              <a:defRPr sz="1150" b="1">
+                <a:solidFill>
+                  <a:srgbClr val="1E40AF"/>
+                </a:solidFill>
+              </a:defRPr>
+            </a:pPr>
+            <a:r>
+              <a:t>Câu hỏi 4: Triết Học Giúp Tái Cấu Trúc Các Giả Định Ngầm Định</a:t>
+            </a:r>
+          </a:p>
+          <a:p>
+            <a:pPr>
+              <a:defRPr sz="950" i="1">
+                <a:solidFill>
+                  <a:srgbClr val="64748B"/>
+                </a:solidFill>
+              </a:defRPr>
+            </a:pPr>
+            <a:r>
+              <a:t>"Will philosophy let us make explicit and then reformulate the hidden assumptions of cryptographic communication, and vice versa?"</a:t>
             </a:r>
           </a:p>
           <a:p>
             <a:pPr>
               <a:spcBef>
-                <a:spcPts val="600"/>
+                <a:spcPts val="200"/>
               </a:spcBef>
-            </a:pPr>
-            <a:r>
-              <a:rPr b="1" sz="1100">
+              <a:defRPr sz="1000">
                 <a:solidFill>
                   <a:srgbClr val="1E293B"/>
                 </a:solidFill>
-              </a:rPr>
-              <a:t>• Dân chủ hóa mật mã: </a:t>
-            </a:r>
-            <a:r>
-              <a:rPr sz="1000">
-                <a:solidFill>
-                  <a:srgbClr val="475569"/>
-                </a:solidFill>
-              </a:rPr>
-              <a:t>Mật mã khóa công khai từng giúp cá nhân tự vệ, nhưng công cụ gián điệp của NSA nay đã lan rộng sang tội phạm mạng và các nhóm phi nhà nước.</a:t>
-            </a:r>
-          </a:p>
-          <a:p>
-            <a:pPr>
-              <a:spcBef>
-                <a:spcPts val="600"/>
-              </a:spcBef>
-            </a:pPr>
-            <a:r>
-              <a:rPr b="1" sz="1100">
-                <a:solidFill>
-                  <a:srgbClr val="1E293B"/>
-                </a:solidFill>
-              </a:rPr>
-              <a:t>• Hệ quả khoa học: </a:t>
-            </a:r>
-            <a:r>
-              <a:rPr sz="1000">
-                <a:solidFill>
-                  <a:srgbClr val="475569"/>
-                </a:solidFill>
-              </a:rPr>
-              <a:t>Mật mã học buộc phải từ bỏ giả định kênh truyền sạch để nghiên cứu phòng chống cửa sau (Cliptography).</a:t>
-            </a:r>
-          </a:p>
-        </p:txBody>
-      </p:sp>
-      <p:sp>
-        <p:nvSpPr>
-          <p:cNvPr id="12" name="TextBox 11"/>
+              </a:defRPr>
+            </a:pPr>
+            <a:r>
+              <a:t>Vận dụng triết học để chất vấn các giả định nền tảng của Shannon; xem xét ranh giới động giữa con người và môi trường kỹ thuật số theo Giả thuyết Tâm trí Mở rộng (Extended Mind Hypothesis).</a:t>
+            </a:r>
+          </a:p>
+        </p:txBody>
+      </p:sp>
+      <p:sp>
+        <p:nvSpPr>
+          <p:cNvPr id="14" name="TextBox 13"/>
           <p:cNvSpPr txBox="1"/>
           <p:nvPr/>
         </p:nvSpPr>
@@ -12533,7 +12134,7 @@
               </a:defRPr>
             </a:pPr>
             <a:r>
-              <a:t>Trích dẫn khoa học: Harry Halpin (2025), Section 6: Snowden and the real adversary, tr. 10–12.</a:t>
+              <a:t>Trích dẫn nguyên văn 4 câu hỏi nghiên cứu mở: Harry Halpin (2025), Section 7, tr. 12–14.</a:t>
             </a:r>
           </a:p>
         </p:txBody>

--- a/docs/Bao_Cao_Giua_Ky_DT05_Final.pptx
+++ b/docs/Bao_Cao_Giua_Ky_DT05_Final.pptx
@@ -5236,7 +5236,7 @@
                   <a:srgbClr val="1E293B"/>
                 </a:solidFill>
               </a:rPr>
-              <a:t>• Kịch bản 1 (CRC32 Forge): </a:t>
+              <a:t>• Kịch bản 1 (CRC32): </a:t>
             </a:r>
             <a:r>
               <a:rPr sz="950">
@@ -5244,7 +5244,7 @@
                   <a:srgbClr val="475569"/>
                 </a:solidFill>
               </a:rPr>
-              <a:t>Red Team bù 4 byte GF(2) qua mặt CRC32; Blue Team dùng SHA-256 bắt quả tang tức thì.</a:t>
+              <a:t>Red Team bù 4 byte GF(2); Blue Team dùng SHA-256 bắt quả tang tức thì.</a:t>
             </a:r>
           </a:p>
           <a:p>
@@ -5267,7 +5267,7 @@
                   <a:srgbClr val="475569"/>
                 </a:solidFill>
               </a:rPr>
-              <a:t>Sửa nội dung tệp; Blue Team phát hiện FILE_MODIFIED và vẽ Dirty Path O(log N).</a:t>
+              <a:t>Sửa nội dung tệp; Blue Team phát hiện và vẽ Dirty Path O(log N).</a:t>
             </a:r>
           </a:p>
           <a:p>
@@ -5290,7 +5290,7 @@
                   <a:srgbClr val="475569"/>
                 </a:solidFill>
               </a:rPr>
-              <a:t>Đánh tráo Merkle Proof trên đường truyền mạng; bộ xác thực từ chối 100% chữ ký bằng chứng.</a:t>
+              <a:t>Đánh tráo Merkle Proof trên mạng; bộ xác thực từ chối 100% chữ ký.</a:t>
             </a:r>
           </a:p>
         </p:txBody>
@@ -5607,7 +5607,7 @@
                   <a:srgbClr val="1E293B"/>
                 </a:solidFill>
               </a:rPr>
-              <a:t>• Mục đích minh họa: </a:t>
+              <a:t>• Bản chất minh họa: </a:t>
             </a:r>
             <a:r>
               <a:rPr sz="950">
@@ -5615,7 +5615,7 @@
                   <a:srgbClr val="475569"/>
                 </a:solidFill>
               </a:rPr>
-              <a:t>Thực nghiệm được thiết kế độc lập nhằm kiểm chứng tính đúng đắn logic của các khái niệm; không phải là chạy lại số liệu của tác giả.</a:t>
+              <a:t>Thực nghiệm độc lập kiểm chứng logic các khái niệm; không phải chạy lại số liệu bài báo.</a:t>
             </a:r>
           </a:p>
           <a:p>
@@ -5630,7 +5630,7 @@
                   <a:srgbClr val="1E293B"/>
                 </a:solidFill>
               </a:rPr>
-              <a:t>• Môi trường kiểm thử: </a:t>
+              <a:t>• Môi trường đo đạc: </a:t>
             </a:r>
             <a:r>
               <a:rPr sz="950">
@@ -5638,7 +5638,7 @@
                   <a:srgbClr val="475569"/>
                 </a:solidFill>
               </a:rPr>
-              <a:t>Đo đạc trên máy tính cá nhân (Intel Core i7, Windows 11). Các phép đo thời gian vi mô chịu ảnh hưởng của jitter hệ điều hành.</a:t>
+              <a:t>CPU Intel i7, Windows 11; tốc độ duyệt đạt 2.325 tệp/giây trên kaggle_dataset.</a:t>
             </a:r>
           </a:p>
           <a:p>
@@ -5653,7 +5653,7 @@
                   <a:srgbClr val="1E293B"/>
                 </a:solidFill>
               </a:rPr>
-              <a:t>• Kịch bản tương tác: </a:t>
+              <a:t>• Kịch bản thao tác: </a:t>
             </a:r>
             <a:r>
               <a:rPr sz="950">
@@ -5661,7 +5661,7 @@
                   <a:srgbClr val="475569"/>
                 </a:solidFill>
               </a:rPr>
-              <a:t>Toàn bộ mã nguồn và kịch bản demo 2 màn hình được hướng dẫn chi tiết tại file MIDTERM_DEMO.md.</a:t>
+              <a:t>Hướng dẫn lệnh chạy và quy trình demo 2 màn hình xem tại MIDTERM_DEMO.md.</a:t>
             </a:r>
           </a:p>
         </p:txBody>
@@ -9002,7 +9002,7 @@
                   <a:srgbClr val="1E293B"/>
                 </a:solidFill>
               </a:rPr>
-              <a:t>• Nguồn gốc tối mật: </a:t>
+              <a:t>• Bí mật hoàn hảo: </a:t>
             </a:r>
             <a:r>
               <a:rPr sz="950">
@@ -9010,7 +9010,7 @@
                   <a:srgbClr val="475569"/>
                 </a:solidFill>
               </a:rPr>
-              <a:t>Lý thuyết thông tin Shannon (1948) bắt nguồn từ báo cáo mật mã tối mật năm 1945 ('A Mathematical Theory of Cryptography').</a:t>
+              <a:t>OTP an toàn tuyệt đối khi H(K) &gt;= H(M), nhưng bất khả thi khi triển khai diện rộng.</a:t>
             </a:r>
           </a:p>
           <a:p>
@@ -9025,7 +9025,7 @@
                   <a:srgbClr val="1E293B"/>
                 </a:solidFill>
               </a:rPr>
-              <a:t>• Bí mật hoàn hảo: </a:t>
+              <a:t>• Giả định Shannon: </a:t>
             </a:r>
             <a:r>
               <a:rPr sz="950">
@@ -9033,7 +9033,7 @@
                   <a:srgbClr val="475569"/>
                 </a:solidFill>
               </a:rPr>
-              <a:t>Shannon chứng minh OTP là hệ mật hoàn hảo duy nhất, nhưng đòi hỏi khóa ngẫu nhiên dài bằng thông điệp ($H(K) &gt;= H(M)$).</a:t>
+              <a:t>Xem sai lệch dữ liệu là 'nhiễu ngẫu nhiên'. Đối thủ thực tế là tác nhân có chủ đích!</a:t>
             </a:r>
           </a:p>
           <a:p>
@@ -9048,7 +9048,7 @@
                   <a:srgbClr val="1E293B"/>
                 </a:solidFill>
               </a:rPr>
-              <a:t>• Giả định giới hạn: </a:t>
+              <a:t>• Hạn chế: </a:t>
             </a:r>
             <a:r>
               <a:rPr sz="950">
@@ -9056,7 +9056,7 @@
                   <a:srgbClr val="475569"/>
                 </a:solidFill>
               </a:rPr>
-              <a:t>Shannon xem sự sai lệch là 'nhiễu ngẫu nhiên' (noise). Tuy nhiên, kẻ thù là tác nhân có chủ đích (intentional agent), không phải nhiễu!</a:t>
+              <a:t>Bỏ qua chi phí lưu trữ/phân phối khóa, rò rỉ kênh kề và ranh giới hệ thống vật lý.</a:t>
             </a:r>
           </a:p>
         </p:txBody>
@@ -9347,7 +9347,7 @@
         </p:nvSpPr>
         <p:spPr>
           <a:xfrm>
-            <a:off x="6400800" y="3657600"/>
+            <a:off x="6400800" y="3611880"/>
             <a:ext cx="4846320" cy="2194560"/>
           </a:xfrm>
           <a:prstGeom prst="rect">
@@ -9373,7 +9373,7 @@
                   <a:srgbClr val="1E293B"/>
                 </a:solidFill>
               </a:rPr>
-              <a:t>• Vượt qua kênh đơn: </a:t>
+              <a:t>• Mạng phức hợp: </a:t>
             </a:r>
             <a:r>
               <a:rPr sz="950">
@@ -9381,7 +9381,7 @@
                   <a:srgbClr val="475569"/>
                 </a:solidFill>
               </a:rPr>
-              <a:t>Thông tin chảy qua mạng lưới phức tạp gồm người dùng, thiết bị, hệ điều hành và hạ tầng cáp quang toàn cầu.</a:t>
+              <a:t>Thông tin chảy qua nhiều thực thể: người dùng, ISP, cáp quang biển, đám mây.</a:t>
             </a:r>
           </a:p>
           <a:p>
@@ -9396,7 +9396,7 @@
                   <a:srgbClr val="1E293B"/>
                 </a:solidFill>
               </a:rPr>
-              <a:t>• Tổ chức thông tin: </a:t>
+              <a:t>• Đối thủ thể chế: </a:t>
             </a:r>
             <a:r>
               <a:rPr sz="950">
@@ -9404,7 +9404,7 @@
                   <a:srgbClr val="475569"/>
                 </a:solidFill>
               </a:rPr>
-              <a:t>Bảo toàn bí mật là duy trì bất biến chính sách trước các lỗi Byzantine và hành vi làm rò rỉ của người bên trong (insider / Snowden).</a:t>
+              <a:t>NSA/Five Eyes tấn công chuỗi cung ứng, suy yếu chuẩn &amp; giám sát siêu dữ liệu.</a:t>
             </a:r>
           </a:p>
           <a:p>
@@ -9419,7 +9419,7 @@
                   <a:srgbClr val="1E293B"/>
                 </a:solidFill>
               </a:rPr>
-              <a:t>• Điểm mù của Shannon: </a:t>
+              <a:t>• Mục tiêu hiện đại: </a:t>
             </a:r>
             <a:r>
               <a:rPr sz="950">
@@ -9427,7 +9427,7 @@
                   <a:srgbClr val="475569"/>
                 </a:solidFill>
               </a:rPr>
-              <a:t>Bỏ qua hoàn toàn chi phí lưu trữ khóa, phân phối khóa, lỗi phần mềm và sự can thiệp vào hành vi của người giữ bí mật.</a:t>
+              <a:t>Bảo vệ siêu dữ liệu (Mixnet), kháng kênh kề thời gian và kiểm soát lỗi nội bộ.</a:t>
             </a:r>
           </a:p>
         </p:txBody>

--- a/docs/Bao_Cao_Giua_Ky_DT05_Final.pptx
+++ b/docs/Bao_Cao_Giua_Ky_DT05_Final.pptx
@@ -4146,191 +4146,7 @@
         <p:spPr>
           <a:xfrm>
             <a:off x="731520" y="1691640"/>
-            <a:ext cx="5212080" cy="777240"/>
-          </a:xfrm>
-          <a:prstGeom prst="roundRect">
-            <a:avLst/>
-          </a:prstGeom>
-          <a:solidFill>
-            <a:srgbClr val="F8FAFC"/>
-          </a:solidFill>
-          <a:ln>
-            <a:solidFill>
-              <a:srgbClr val="BFDBFE"/>
-            </a:solidFill>
-          </a:ln>
-        </p:spPr>
-        <p:style>
-          <a:lnRef idx="1">
-            <a:schemeClr val="accent1"/>
-          </a:lnRef>
-          <a:fillRef idx="3">
-            <a:schemeClr val="accent1"/>
-          </a:fillRef>
-          <a:effectRef idx="2">
-            <a:schemeClr val="accent1"/>
-          </a:effectRef>
-          <a:fontRef idx="minor">
-            <a:schemeClr val="lt1"/>
-          </a:fontRef>
-        </p:style>
-        <p:txBody>
-          <a:bodyPr rtlCol="0" anchor="ctr"/>
-          <a:lstStyle/>
-          <a:p>
-            <a:pPr algn="ctr"/>
-          </a:p>
-        </p:txBody>
-      </p:sp>
-      <p:sp>
-        <p:nvSpPr>
-          <p:cNvPr id="7" name="TextBox 6"/>
-          <p:cNvSpPr txBox="1"/>
-          <p:nvPr/>
-        </p:nvSpPr>
-        <p:spPr>
-          <a:xfrm>
-            <a:off x="822960" y="1737360"/>
-            <a:ext cx="5029200" cy="685800"/>
-          </a:xfrm>
-          <a:prstGeom prst="rect">
-            <a:avLst/>
-          </a:prstGeom>
-          <a:noFill/>
-        </p:spPr>
-        <p:txBody>
-          <a:bodyPr wrap="none">
-            <a:spAutoFit/>
-          </a:bodyPr>
-          <a:lstStyle/>
-          <a:p>
-            <a:pPr>
-              <a:defRPr sz="1100" b="1">
-                <a:solidFill>
-                  <a:srgbClr val="1E40AF"/>
-                </a:solidFill>
-              </a:defRPr>
-            </a:pPr>
-            <a:r>
-              <a:t>LUỒNG LÝ THUYẾT BÀI BÁO (HARRY HALPIN 2025)</a:t>
-            </a:r>
-          </a:p>
-          <a:p>
-            <a:pPr>
-              <a:defRPr sz="950">
-                <a:solidFill>
-                  <a:srgbClr val="64748B"/>
-                </a:solidFill>
-              </a:defRPr>
-            </a:pPr>
-            <a:r>
-              <a:t>Khảo sát triết học, phê phán trừu tượng hóa, phân tích Dolev-Yao &amp; NSA</a:t>
-            </a:r>
-          </a:p>
-        </p:txBody>
-      </p:sp>
-      <p:sp>
-        <p:nvSpPr>
-          <p:cNvPr id="8" name="Rounded Rectangle 7"/>
-          <p:cNvSpPr/>
-          <p:nvPr/>
-        </p:nvSpPr>
-        <p:spPr>
-          <a:xfrm>
-            <a:off x="6217920" y="1691640"/>
-            <a:ext cx="5212080" cy="777240"/>
-          </a:xfrm>
-          <a:prstGeom prst="roundRect">
-            <a:avLst/>
-          </a:prstGeom>
-          <a:solidFill>
-            <a:srgbClr val="ECFDF5"/>
-          </a:solidFill>
-          <a:ln>
-            <a:solidFill>
-              <a:srgbClr val="A7F3D0"/>
-            </a:solidFill>
-          </a:ln>
-        </p:spPr>
-        <p:style>
-          <a:lnRef idx="1">
-            <a:schemeClr val="accent1"/>
-          </a:lnRef>
-          <a:fillRef idx="3">
-            <a:schemeClr val="accent1"/>
-          </a:fillRef>
-          <a:effectRef idx="2">
-            <a:schemeClr val="accent1"/>
-          </a:effectRef>
-          <a:fontRef idx="minor">
-            <a:schemeClr val="lt1"/>
-          </a:fontRef>
-        </p:style>
-        <p:txBody>
-          <a:bodyPr rtlCol="0" anchor="ctr"/>
-          <a:lstStyle/>
-          <a:p>
-            <a:pPr algn="ctr"/>
-          </a:p>
-        </p:txBody>
-      </p:sp>
-      <p:sp>
-        <p:nvSpPr>
-          <p:cNvPr id="9" name="TextBox 8"/>
-          <p:cNvSpPr txBox="1"/>
-          <p:nvPr/>
-        </p:nvSpPr>
-        <p:spPr>
-          <a:xfrm>
-            <a:off x="6309360" y="1737360"/>
-            <a:ext cx="5029200" cy="685800"/>
-          </a:xfrm>
-          <a:prstGeom prst="rect">
-            <a:avLst/>
-          </a:prstGeom>
-          <a:noFill/>
-        </p:spPr>
-        <p:txBody>
-          <a:bodyPr wrap="none">
-            <a:spAutoFit/>
-          </a:bodyPr>
-          <a:lstStyle/>
-          <a:p>
-            <a:pPr>
-              <a:defRPr sz="1100" b="1">
-                <a:solidFill>
-                  <a:srgbClr val="059669"/>
-                </a:solidFill>
-              </a:defRPr>
-            </a:pPr>
-            <a:r>
-              <a:t>LUỒNG THỰC NGHIỆM ĐỘC LẬP (SINH VIÊN DT005)</a:t>
-            </a:r>
-          </a:p>
-          <a:p>
-            <a:pPr>
-              <a:defRPr sz="950">
-                <a:solidFill>
-                  <a:srgbClr val="64748B"/>
-                </a:solidFill>
-              </a:defRPr>
-            </a:pPr>
-            <a:r>
-              <a:t>Hệ thống kiểm tra toàn vẹn tệp, 7 thí nghiệm minh họa, đối kháng Red/Blue</a:t>
-            </a:r>
-          </a:p>
-        </p:txBody>
-      </p:sp>
-      <p:sp>
-        <p:nvSpPr>
-          <p:cNvPr id="10" name="Rounded Rectangle 9"/>
-          <p:cNvSpPr/>
-          <p:nvPr/>
-        </p:nvSpPr>
-        <p:spPr>
-          <a:xfrm>
-            <a:off x="731520" y="2606040"/>
-            <a:ext cx="10728655" cy="3520440"/>
+            <a:ext cx="3383280" cy="4389120"/>
           </a:xfrm>
           <a:prstGeom prst="roundRect">
             <a:avLst/>
@@ -4368,14 +4184,14 @@
       </p:sp>
       <p:sp>
         <p:nvSpPr>
-          <p:cNvPr id="11" name="TextBox 10"/>
+          <p:cNvPr id="7" name="TextBox 6"/>
           <p:cNvSpPr txBox="1"/>
           <p:nvPr/>
         </p:nvSpPr>
         <p:spPr>
           <a:xfrm>
-            <a:off x="914400" y="2697480"/>
-            <a:ext cx="10362895" cy="3337560"/>
+            <a:off x="914400" y="1828800"/>
+            <a:ext cx="3017520" cy="4114800"/>
           </a:xfrm>
           <a:prstGeom prst="rect">
             <a:avLst/>
@@ -4389,6 +4205,9 @@
           <a:lstStyle/>
           <a:p>
             <a:pPr>
+              <a:spcAft>
+                <a:spcPts val="1000"/>
+              </a:spcAft>
               <a:defRPr sz="1200" b="1">
                 <a:solidFill>
                   <a:srgbClr val="0F172A"/>
@@ -4396,169 +4215,407 @@
               </a:defRPr>
             </a:pPr>
             <a:r>
-              <a:t>BẢNG ĐỐI CHIẾU BA MINH HỌA THỰC NGHIỆM TIÊU BIỂU VÀ GIỚI HẠN DIỄN GIẢI</a:t>
-            </a:r>
-          </a:p>
-          <a:p>
-            <a:pPr>
-              <a:spcBef>
-                <a:spcPts val="600"/>
-              </a:spcBef>
-            </a:pPr>
-            <a:r>
-              <a:rPr b="1" sz="1050">
-                <a:solidFill>
-                  <a:srgbClr val="1E40AF"/>
-                </a:solidFill>
-              </a:rPr>
-              <a:t>1. Noise vs Adversary (Sec. 1 &amp; 2) — </a:t>
-            </a:r>
-            <a:r>
-              <a:rPr sz="1000">
+              <a:t>1. NHIỄU vs KẺ THÙ CHỦ ĐÍCH</a:t>
+            </a:r>
+          </a:p>
+          <a:p>
+            <a:pPr>
+              <a:defRPr sz="1050" b="1">
                 <a:solidFill>
                   <a:srgbClr val="1E293B"/>
                 </a:solidFill>
-              </a:rPr>
-              <a:t>Luận điểm Halpin: Kẻ thù có chủ đích khác với nhiễu ngẫu nhiên; mã tuyến tính CRC32 bất lực. | </a:t>
-            </a:r>
-            <a:r>
-              <a:rPr sz="1000">
+              </a:defRPr>
+            </a:pPr>
+            <a:r>
+              <a:t>Luận điểm bài báo Halpin:</a:t>
+            </a:r>
+          </a:p>
+          <a:p>
+            <a:pPr>
+              <a:spcAft>
+                <a:spcPts val="800"/>
+              </a:spcAft>
+              <a:defRPr sz="950">
                 <a:solidFill>
                   <a:srgbClr val="475569"/>
                 </a:solidFill>
-              </a:rPr>
-              <a:t>Code DT005: Code giải mã bù đại số trên trường nhị phân GF(2), tìm 4 byte bù qua mặt CRC32 100%; SHA-256 phát hiện tức thì. </a:t>
-            </a:r>
-          </a:p>
-          <a:p>
-            <a:pPr>
-              <a:spcBef>
-                <a:spcPts val="200"/>
-              </a:spcBef>
-            </a:pPr>
-            <a:r>
-              <a:rPr b="1" sz="950">
-                <a:solidFill>
-                  <a:srgbClr val="059669"/>
-                </a:solidFill>
-              </a:rPr>
-              <a:t>   ► Bằng chứng đã chạy: orig_crc == forged_crc (Trùng 100%), SHA-256 lệch hoàn toàn.  |  </a:t>
-            </a:r>
-            <a:r>
-              <a:rPr sz="950">
-                <a:solidFill>
-                  <a:srgbClr val="D97706"/>
-                </a:solidFill>
-              </a:rPr>
-              <a:t>▲ Giới hạn diễn giải: Minh họa tính phi tuyến của hàm băm; không chứng minh an toàn toàn diện cho toàn hệ thống.</a:t>
-            </a:r>
-          </a:p>
-          <a:p>
-            <a:pPr>
-              <a:spcBef>
-                <a:spcPts val="600"/>
-              </a:spcBef>
-            </a:pPr>
-            <a:r>
-              <a:rPr b="1" sz="1050">
-                <a:solidFill>
-                  <a:srgbClr val="1E40AF"/>
-                </a:solidFill>
-              </a:rPr>
-              <a:t>2. Node-Leaf Confusion (Sec. 5) — </a:t>
-            </a:r>
-            <a:r>
-              <a:rPr sz="1000">
+              </a:defRPr>
+            </a:pPr>
+            <a:r>
+              <a:t>Mật mã học khác lý thuyết Shannon: đối thủ có chủ đích, không phải nhiễu ngẫu nhiên. Mã toàn vẹn tuyến tính CRC32 hoàn toàn bất lực.</a:t>
+            </a:r>
+          </a:p>
+          <a:p>
+            <a:pPr>
+              <a:defRPr sz="1050" b="1">
                 <a:solidFill>
                   <a:srgbClr val="1E293B"/>
                 </a:solidFill>
-              </a:rPr>
-              <a:t>Luận điểm Halpin: Ghép chuỗi thô H(L||R) gây va chạm tiền ảnh cấp hai cấu trúc (nút cha bị nhầm với nút lá). | </a:t>
-            </a:r>
-            <a:r>
-              <a:rPr sz="1000">
+              </a:defRPr>
+            </a:pPr>
+            <a:r>
+              <a:t>Minh họa thực nghiệm DT005:</a:t>
+            </a:r>
+          </a:p>
+          <a:p>
+            <a:pPr>
+              <a:spcAft>
+                <a:spcPts val="800"/>
+              </a:spcAft>
+              <a:defRPr sz="950">
                 <a:solidFill>
                   <a:srgbClr val="475569"/>
                 </a:solidFill>
-              </a:rPr>
-              <a:t>Code DT005: Triển khai phân tách miền chuẩn RFC 6962: Tiền tố 0x00 cho lá, 0x01 cho nhánh nội bộ. </a:t>
-            </a:r>
-          </a:p>
-          <a:p>
-            <a:pPr>
-              <a:spcBef>
-                <a:spcPts val="200"/>
-              </a:spcBef>
-            </a:pPr>
-            <a:r>
-              <a:rPr b="1" sz="950">
-                <a:solidFill>
-                  <a:srgbClr val="059669"/>
-                </a:solidFill>
-              </a:rPr>
-              <a:t>   ► Bằng chứng đã chạy: Standard Merkle Tree ghép thô bị va chạm; HD-Merkle phân tách miền chặn đứng hoàn toàn.  |  </a:t>
-            </a:r>
-            <a:r>
-              <a:rPr sz="950">
-                <a:solidFill>
-                  <a:srgbClr val="D97706"/>
-                </a:solidFill>
-              </a:rPr>
-              <a:t>▲ Giới hạn diễn giải: Chỉ giải quyết va chạm cấu trúc tầng cây; không loại trừ va chạm ngẫu nhiên 2^256 của SHA-256.</a:t>
-            </a:r>
-          </a:p>
-          <a:p>
-            <a:pPr>
-              <a:spcBef>
-                <a:spcPts val="600"/>
-              </a:spcBef>
-            </a:pPr>
-            <a:r>
-              <a:rPr b="1" sz="1050">
-                <a:solidFill>
-                  <a:srgbClr val="1E40AF"/>
-                </a:solidFill>
-              </a:rPr>
-              <a:t>3. Timing Side-Channel (Sec. 5) — </a:t>
-            </a:r>
-            <a:r>
-              <a:rPr sz="1000">
+              </a:defRPr>
+            </a:pPr>
+            <a:r>
+              <a:t>Giải hệ phương trình bù đại số GF(2), tìm 4 byte giả mạo qua mặt CRC32 100%. Hàm băm SHA-256 phát hiện thay đổi ngay lập tức.</a:t>
+            </a:r>
+          </a:p>
+          <a:p>
+            <a:pPr>
+              <a:defRPr sz="1050" b="1">
                 <a:solidFill>
                   <a:srgbClr val="1E293B"/>
                 </a:solidFill>
-              </a:rPr>
-              <a:t>Luận điểm Halpin: Rò rỉ thông tin qua thời gian so sánh chuỗi (Early-return comparison leak - Kocher 1996). | </a:t>
-            </a:r>
-            <a:r>
-              <a:rPr sz="1000">
+              </a:defRPr>
+            </a:pPr>
+            <a:r>
+              <a:t>Giới hạn diễn giải:</a:t>
+            </a:r>
+          </a:p>
+          <a:p>
+            <a:pPr>
+              <a:defRPr sz="950">
+                <a:solidFill>
+                  <a:srgbClr val="64748B"/>
+                </a:solidFill>
+              </a:defRPr>
+            </a:pPr>
+            <a:r>
+              <a:t>Chỉ minh họa tính phi tuyến của hàm băm; không chứng minh an toàn toàn diện cho toàn bộ hệ thống.</a:t>
+            </a:r>
+          </a:p>
+        </p:txBody>
+      </p:sp>
+      <p:sp>
+        <p:nvSpPr>
+          <p:cNvPr id="8" name="Rounded Rectangle 7"/>
+          <p:cNvSpPr/>
+          <p:nvPr/>
+        </p:nvSpPr>
+        <p:spPr>
+          <a:xfrm>
+            <a:off x="4389120" y="1691640"/>
+            <a:ext cx="3383280" cy="4389120"/>
+          </a:xfrm>
+          <a:prstGeom prst="roundRect">
+            <a:avLst/>
+          </a:prstGeom>
+          <a:solidFill>
+            <a:srgbClr val="F8FAFC"/>
+          </a:solidFill>
+          <a:ln>
+            <a:solidFill>
+              <a:srgbClr val="E2E8F0"/>
+            </a:solidFill>
+          </a:ln>
+        </p:spPr>
+        <p:style>
+          <a:lnRef idx="1">
+            <a:schemeClr val="accent1"/>
+          </a:lnRef>
+          <a:fillRef idx="3">
+            <a:schemeClr val="accent1"/>
+          </a:fillRef>
+          <a:effectRef idx="2">
+            <a:schemeClr val="accent1"/>
+          </a:effectRef>
+          <a:fontRef idx="minor">
+            <a:schemeClr val="lt1"/>
+          </a:fontRef>
+        </p:style>
+        <p:txBody>
+          <a:bodyPr rtlCol="0" anchor="ctr"/>
+          <a:lstStyle/>
+          <a:p>
+            <a:pPr algn="ctr"/>
+          </a:p>
+        </p:txBody>
+      </p:sp>
+      <p:sp>
+        <p:nvSpPr>
+          <p:cNvPr id="9" name="TextBox 8"/>
+          <p:cNvSpPr txBox="1"/>
+          <p:nvPr/>
+        </p:nvSpPr>
+        <p:spPr>
+          <a:xfrm>
+            <a:off x="4572000" y="1828800"/>
+            <a:ext cx="3017520" cy="4114800"/>
+          </a:xfrm>
+          <a:prstGeom prst="rect">
+            <a:avLst/>
+          </a:prstGeom>
+          <a:noFill/>
+        </p:spPr>
+        <p:txBody>
+          <a:bodyPr wrap="square">
+            <a:spAutoFit/>
+          </a:bodyPr>
+          <a:lstStyle/>
+          <a:p>
+            <a:pPr>
+              <a:spcAft>
+                <a:spcPts val="1000"/>
+              </a:spcAft>
+              <a:defRPr sz="1200" b="1">
+                <a:solidFill>
+                  <a:srgbClr val="0F172A"/>
+                </a:solidFill>
+              </a:defRPr>
+            </a:pPr>
+            <a:r>
+              <a:t>2. NHẬP NHẰNG NÚT LÁ MERKLE</a:t>
+            </a:r>
+          </a:p>
+          <a:p>
+            <a:pPr>
+              <a:defRPr sz="1050" b="1">
+                <a:solidFill>
+                  <a:srgbClr val="1E293B"/>
+                </a:solidFill>
+              </a:defRPr>
+            </a:pPr>
+            <a:r>
+              <a:t>Luận điểm bài báo Halpin:</a:t>
+            </a:r>
+          </a:p>
+          <a:p>
+            <a:pPr>
+              <a:spcAft>
+                <a:spcPts val="800"/>
+              </a:spcAft>
+              <a:defRPr sz="950">
                 <a:solidFill>
                   <a:srgbClr val="475569"/>
                 </a:solidFill>
-              </a:rPr>
-              <a:t>Code DT005: Khảo sát đo lường 5 vòng so sánh chuỗi naive vs hàm thời gian hằng số hmac.compare_digest. </a:t>
-            </a:r>
-          </a:p>
-          <a:p>
-            <a:pPr>
-              <a:spcBef>
-                <a:spcPts val="200"/>
-              </a:spcBef>
-            </a:pPr>
-            <a:r>
-              <a:rPr b="1" sz="950">
-                <a:solidFill>
-                  <a:srgbClr val="059669"/>
-                </a:solidFill>
-              </a:rPr>
-              <a:t>   ► Bằng chứng đã chạy: Naive so sánh tuần tự lộ độ lệch trung vị ~0.08 µs; hmac.compare_digest triệt tiêu độ lệch.  |  </a:t>
-            </a:r>
-            <a:r>
-              <a:rPr sz="950">
-                <a:solidFill>
-                  <a:srgbClr val="D97706"/>
-                </a:solidFill>
-              </a:rPr>
-              <a:t>▲ Giới hạn diễn giải: Phép đo trên Python máy đơn có jitter; chỉ minh họa mức thư viện C, không chứng minh miễn nhiễm kênh kề phần cứng.</a:t>
+              </a:defRPr>
+            </a:pPr>
+            <a:r>
+              <a:t>Ghép chuỗi thô H(L || R) khiến kẻ thù có thể đánh tráo nút nhánh nội bộ thành nút lá, gây va chạm cấu trúc tầng cây.</a:t>
+            </a:r>
+          </a:p>
+          <a:p>
+            <a:pPr>
+              <a:defRPr sz="1050" b="1">
+                <a:solidFill>
+                  <a:srgbClr val="1E293B"/>
+                </a:solidFill>
+              </a:defRPr>
+            </a:pPr>
+            <a:r>
+              <a:t>Minh họa thực nghiệm DT005:</a:t>
+            </a:r>
+          </a:p>
+          <a:p>
+            <a:pPr>
+              <a:spcAft>
+                <a:spcPts val="800"/>
+              </a:spcAft>
+              <a:defRPr sz="950">
+                <a:solidFill>
+                  <a:srgbClr val="475569"/>
+                </a:solidFill>
+              </a:defRPr>
+            </a:pPr>
+            <a:r>
+              <a:t>Cài đặt phân tách miền chuẩn RFC 6962: gắn tiền tố 0x00 cho nút lá và 0x01 cho nút nhánh để triệt tiêu hoàn toàn nhập nhằng.</a:t>
+            </a:r>
+          </a:p>
+          <a:p>
+            <a:pPr>
+              <a:defRPr sz="1050" b="1">
+                <a:solidFill>
+                  <a:srgbClr val="1E293B"/>
+                </a:solidFill>
+              </a:defRPr>
+            </a:pPr>
+            <a:r>
+              <a:t>Giới hạn diễn giải:</a:t>
+            </a:r>
+          </a:p>
+          <a:p>
+            <a:pPr>
+              <a:defRPr sz="950">
+                <a:solidFill>
+                  <a:srgbClr val="64748B"/>
+                </a:solidFill>
+              </a:defRPr>
+            </a:pPr>
+            <a:r>
+              <a:t>Chỉ giải quyết va chạm cấu trúc tầng cây Merkle; không loại trừ va chạm ngẫu nhiên 2^256 của SHA-256.</a:t>
+            </a:r>
+          </a:p>
+        </p:txBody>
+      </p:sp>
+      <p:sp>
+        <p:nvSpPr>
+          <p:cNvPr id="10" name="Rounded Rectangle 9"/>
+          <p:cNvSpPr/>
+          <p:nvPr/>
+        </p:nvSpPr>
+        <p:spPr>
+          <a:xfrm>
+            <a:off x="8046720" y="1691640"/>
+            <a:ext cx="3383280" cy="4389120"/>
+          </a:xfrm>
+          <a:prstGeom prst="roundRect">
+            <a:avLst/>
+          </a:prstGeom>
+          <a:solidFill>
+            <a:srgbClr val="F8FAFC"/>
+          </a:solidFill>
+          <a:ln>
+            <a:solidFill>
+              <a:srgbClr val="E2E8F0"/>
+            </a:solidFill>
+          </a:ln>
+        </p:spPr>
+        <p:style>
+          <a:lnRef idx="1">
+            <a:schemeClr val="accent1"/>
+          </a:lnRef>
+          <a:fillRef idx="3">
+            <a:schemeClr val="accent1"/>
+          </a:fillRef>
+          <a:effectRef idx="2">
+            <a:schemeClr val="accent1"/>
+          </a:effectRef>
+          <a:fontRef idx="minor">
+            <a:schemeClr val="lt1"/>
+          </a:fontRef>
+        </p:style>
+        <p:txBody>
+          <a:bodyPr rtlCol="0" anchor="ctr"/>
+          <a:lstStyle/>
+          <a:p>
+            <a:pPr algn="ctr"/>
+          </a:p>
+        </p:txBody>
+      </p:sp>
+      <p:sp>
+        <p:nvSpPr>
+          <p:cNvPr id="11" name="TextBox 10"/>
+          <p:cNvSpPr txBox="1"/>
+          <p:nvPr/>
+        </p:nvSpPr>
+        <p:spPr>
+          <a:xfrm>
+            <a:off x="8229600" y="1828800"/>
+            <a:ext cx="3017520" cy="4114800"/>
+          </a:xfrm>
+          <a:prstGeom prst="rect">
+            <a:avLst/>
+          </a:prstGeom>
+          <a:noFill/>
+        </p:spPr>
+        <p:txBody>
+          <a:bodyPr wrap="square">
+            <a:spAutoFit/>
+          </a:bodyPr>
+          <a:lstStyle/>
+          <a:p>
+            <a:pPr>
+              <a:spcAft>
+                <a:spcPts val="1000"/>
+              </a:spcAft>
+              <a:defRPr sz="1200" b="1">
+                <a:solidFill>
+                  <a:srgbClr val="0F172A"/>
+                </a:solidFill>
+              </a:defRPr>
+            </a:pPr>
+            <a:r>
+              <a:t>3. KÊNH KỀ THỜI GIAN SO SÁNH</a:t>
+            </a:r>
+          </a:p>
+          <a:p>
+            <a:pPr>
+              <a:defRPr sz="1050" b="1">
+                <a:solidFill>
+                  <a:srgbClr val="1E293B"/>
+                </a:solidFill>
+              </a:defRPr>
+            </a:pPr>
+            <a:r>
+              <a:t>Luận điểm bài báo Halpin:</a:t>
+            </a:r>
+          </a:p>
+          <a:p>
+            <a:pPr>
+              <a:spcAft>
+                <a:spcPts val="800"/>
+              </a:spcAft>
+              <a:defRPr sz="950">
+                <a:solidFill>
+                  <a:srgbClr val="475569"/>
+                </a:solidFill>
+              </a:defRPr>
+            </a:pPr>
+            <a:r>
+              <a:t>Lý thuyết xem mật mã là hàm toán học lý tưởng, nhưng thực tế việc dừng sớm (early-return) làm rò rỉ dữ liệu qua thời gian thực thi.</a:t>
+            </a:r>
+          </a:p>
+          <a:p>
+            <a:pPr>
+              <a:defRPr sz="1050" b="1">
+                <a:solidFill>
+                  <a:srgbClr val="1E293B"/>
+                </a:solidFill>
+              </a:defRPr>
+            </a:pPr>
+            <a:r>
+              <a:t>Minh họa thực nghiệm DT005:</a:t>
+            </a:r>
+          </a:p>
+          <a:p>
+            <a:pPr>
+              <a:spcAft>
+                <a:spcPts val="800"/>
+              </a:spcAft>
+              <a:defRPr sz="950">
+                <a:solidFill>
+                  <a:srgbClr val="475569"/>
+                </a:solidFill>
+              </a:defRPr>
+            </a:pPr>
+            <a:r>
+              <a:t>Đo đạc 5 vòng so sánh chuỗi tuần tự (lộ chênh lệch thời gian) so với hàm thời gian hằng số hmac.compare_digest triệt tiêu độ lệch.</a:t>
+            </a:r>
+          </a:p>
+          <a:p>
+            <a:pPr>
+              <a:defRPr sz="1050" b="1">
+                <a:solidFill>
+                  <a:srgbClr val="1E293B"/>
+                </a:solidFill>
+              </a:defRPr>
+            </a:pPr>
+            <a:r>
+              <a:t>Giới hạn diễn giải:</a:t>
+            </a:r>
+          </a:p>
+          <a:p>
+            <a:pPr>
+              <a:defRPr sz="950">
+                <a:solidFill>
+                  <a:srgbClr val="64748B"/>
+                </a:solidFill>
+              </a:defRPr>
+            </a:pPr>
+            <a:r>
+              <a:t>Đo đạc trên máy tính đơn có nhiễu hệ điều hành; chỉ minh họa ở mức thư viện phần mềm, không phải phần cứng.</a:t>
             </a:r>
           </a:p>
         </p:txBody>
@@ -4593,7 +4650,7 @@
               </a:defRPr>
             </a:pPr>
             <a:r>
-              <a:t>Sơ đồ và bảng đối chiếu do sinh viên tự xây dựng; chi tiết mã nguồn lưu tại MIDTERM_CODE_AUDIT.md.</a:t>
+              <a:t>Bảng đối chiếu minh bạch do sinh viên tự xây dựng; chi tiết mã nguồn lưu tại MIDTERM_CODE_AUDIT.md.</a:t>
             </a:r>
           </a:p>
         </p:txBody>
@@ -4631,7 +4688,7 @@
             <a:avLst/>
           </a:prstGeom>
           <a:solidFill>
-            <a:srgbClr val="0F172A"/>
+            <a:srgbClr val="FFFFFF"/>
           </a:solidFill>
           <a:ln>
             <a:noFill/>
@@ -4661,14 +4718,59 @@
       </p:sp>
       <p:sp>
         <p:nvSpPr>
-          <p:cNvPr id="3" name="TextBox 2"/>
+          <p:cNvPr id="3" name="Rounded Rectangle 2"/>
+          <p:cNvSpPr/>
+          <p:nvPr/>
+        </p:nvSpPr>
+        <p:spPr>
+          <a:xfrm>
+            <a:off x="1371600" y="1371600"/>
+            <a:ext cx="9448495" cy="4114800"/>
+          </a:xfrm>
+          <a:prstGeom prst="roundRect">
+            <a:avLst/>
+          </a:prstGeom>
+          <a:solidFill>
+            <a:srgbClr val="F8FAFC"/>
+          </a:solidFill>
+          <a:ln>
+            <a:solidFill>
+              <a:srgbClr val="BFDBFE"/>
+            </a:solidFill>
+          </a:ln>
+        </p:spPr>
+        <p:style>
+          <a:lnRef idx="1">
+            <a:schemeClr val="accent1"/>
+          </a:lnRef>
+          <a:fillRef idx="3">
+            <a:schemeClr val="accent1"/>
+          </a:fillRef>
+          <a:effectRef idx="2">
+            <a:schemeClr val="accent1"/>
+          </a:effectRef>
+          <a:fontRef idx="minor">
+            <a:schemeClr val="lt1"/>
+          </a:fontRef>
+        </p:style>
+        <p:txBody>
+          <a:bodyPr rtlCol="0" anchor="ctr"/>
+          <a:lstStyle/>
+          <a:p>
+            <a:pPr algn="ctr"/>
+          </a:p>
+        </p:txBody>
+      </p:sp>
+      <p:sp>
+        <p:nvSpPr>
+          <p:cNvPr id="4" name="TextBox 3"/>
           <p:cNvSpPr txBox="1"/>
           <p:nvPr/>
         </p:nvSpPr>
         <p:spPr>
           <a:xfrm>
-            <a:off x="1371600" y="2011680"/>
-            <a:ext cx="9448495" cy="2743200"/>
+            <a:off x="1645920" y="1645920"/>
+            <a:ext cx="8899855" cy="3566160"/>
           </a:xfrm>
           <a:prstGeom prst="rect">
             <a:avLst/>
@@ -4682,9 +4784,9 @@
           <a:lstStyle/>
           <a:p>
             <a:pPr algn="ctr">
-              <a:defRPr sz="1300" b="1">
-                <a:solidFill>
-                  <a:srgbClr val="38BDF8"/>
+              <a:defRPr sz="1200" b="1">
+                <a:solidFill>
+                  <a:srgbClr val="1E40AF"/>
                 </a:solidFill>
               </a:defRPr>
             </a:pPr>
@@ -4695,11 +4797,11 @@
           <a:p>
             <a:pPr algn="ctr">
               <a:spcBef>
-                <a:spcPts val="1600"/>
+                <a:spcPts val="1400"/>
               </a:spcBef>
               <a:defRPr sz="6400" b="1">
                 <a:solidFill>
-                  <a:srgbClr val="FFFFFF"/>
+                  <a:srgbClr val="0F172A"/>
                 </a:solidFill>
               </a:defRPr>
             </a:pPr>
@@ -4710,11 +4812,11 @@
           <a:p>
             <a:pPr algn="ctr">
               <a:spcBef>
-                <a:spcPts val="1600"/>
+                <a:spcPts val="1400"/>
               </a:spcBef>
               <a:defRPr sz="1500" b="1">
                 <a:solidFill>
-                  <a:srgbClr val="E2E8F0"/>
+                  <a:srgbClr val="1E293B"/>
                 </a:solidFill>
               </a:defRPr>
             </a:pPr>
@@ -4725,16 +4827,31 @@
           <a:p>
             <a:pPr algn="ctr">
               <a:spcBef>
-                <a:spcPts val="800"/>
+                <a:spcPts val="1000"/>
               </a:spcBef>
               <a:defRPr sz="1100" i="1">
                 <a:solidFill>
-                  <a:srgbClr val="94A3B8"/>
+                  <a:srgbClr val="475569"/>
                 </a:solidFill>
               </a:defRPr>
             </a:pPr>
             <a:r>
               <a:t>Minh họa thực nghiệm các luận điểm lý thuyết: Can thiệp dữ liệu, Nhập nhằng nút lá RFC 6962, và So sánh chuỗi thời gian hằng số</a:t>
+            </a:r>
+          </a:p>
+          <a:p>
+            <a:pPr algn="ctr">
+              <a:spcBef>
+                <a:spcPts val="1200"/>
+              </a:spcBef>
+              <a:defRPr sz="1050" b="1">
+                <a:solidFill>
+                  <a:srgbClr val="1E40AF"/>
+                </a:solidFill>
+              </a:defRPr>
+            </a:pPr>
+            <a:r>
+              <a:t>Blue Team Dashboard: http://localhost:8080   |   Red Team Adversary Engine: http://localhost:8081</a:t>
             </a:r>
           </a:p>
         </p:txBody>
@@ -4924,51 +5041,30 @@
           </a:p>
         </p:txBody>
       </p:sp>
-      <p:sp>
-        <p:nvSpPr>
-          <p:cNvPr id="6" name="Rounded Rectangle 5"/>
-          <p:cNvSpPr/>
-          <p:nvPr/>
-        </p:nvSpPr>
-        <p:spPr>
-          <a:xfrm>
-            <a:off x="731520" y="1691640"/>
-            <a:ext cx="5212080" cy="4343400"/>
-          </a:xfrm>
-          <a:prstGeom prst="roundRect">
-            <a:avLst/>
-          </a:prstGeom>
-          <a:solidFill>
-            <a:srgbClr val="F8FAFC"/>
-          </a:solidFill>
-          <a:ln>
-            <a:solidFill>
-              <a:srgbClr val="BFDBFE"/>
-            </a:solidFill>
-          </a:ln>
-        </p:spPr>
-        <p:style>
-          <a:lnRef idx="1">
-            <a:schemeClr val="accent1"/>
-          </a:lnRef>
-          <a:fillRef idx="3">
-            <a:schemeClr val="accent1"/>
-          </a:fillRef>
-          <a:effectRef idx="2">
-            <a:schemeClr val="accent1"/>
-          </a:effectRef>
-          <a:fontRef idx="minor">
-            <a:schemeClr val="lt1"/>
-          </a:fontRef>
-        </p:style>
-        <p:txBody>
-          <a:bodyPr rtlCol="0" anchor="ctr"/>
-          <a:lstStyle/>
-          <a:p>
-            <a:pPr algn="ctr"/>
-          </a:p>
-        </p:txBody>
-      </p:sp>
+      <p:pic>
+        <p:nvPicPr>
+          <p:cNvPr id="6" name="Picture 5" descr="Slide14.drawio.png"/>
+          <p:cNvPicPr>
+            <a:picLocks noChangeAspect="1"/>
+          </p:cNvPicPr>
+          <p:nvPr/>
+        </p:nvPicPr>
+        <p:blipFill>
+          <a:blip r:embed="rId2"/>
+          <a:stretch>
+            <a:fillRect/>
+          </a:stretch>
+        </p:blipFill>
+        <p:spPr>
+          <a:xfrm>
+            <a:off x="1386687" y="1664208"/>
+            <a:ext cx="9418320" cy="4425696"/>
+          </a:xfrm>
+          <a:prstGeom prst="rect">
+            <a:avLst/>
+          </a:prstGeom>
+        </p:spPr>
+      </p:pic>
       <p:sp>
         <p:nvSpPr>
           <p:cNvPr id="7" name="TextBox 6"/>
@@ -4977,8 +5073,8 @@
         </p:nvSpPr>
         <p:spPr>
           <a:xfrm>
-            <a:off x="914400" y="1783080"/>
-            <a:ext cx="4846320" cy="365760"/>
+            <a:off x="731520" y="6217920"/>
+            <a:ext cx="10698480" cy="365760"/>
           </a:xfrm>
           <a:prstGeom prst="rect">
             <a:avLst/>
@@ -4992,703 +5088,6 @@
           <a:lstStyle/>
           <a:p>
             <a:pPr>
-              <a:defRPr sz="1200" b="1">
-                <a:solidFill>
-                  <a:srgbClr val="1E40AF"/>
-                </a:solidFill>
-              </a:defRPr>
-            </a:pPr>
-            <a:r>
-              <a:t>BLUE TEAM — HỆ THỐNG PHÒNG THỦ (PORT 8080)</a:t>
-            </a:r>
-          </a:p>
-        </p:txBody>
-      </p:sp>
-      <p:sp>
-        <p:nvSpPr>
-          <p:cNvPr id="8" name="Rounded Rectangle 7"/>
-          <p:cNvSpPr/>
-          <p:nvPr/>
-        </p:nvSpPr>
-        <p:spPr>
-          <a:xfrm>
-            <a:off x="1005840" y="2240280"/>
-            <a:ext cx="2194560" cy="594360"/>
-          </a:xfrm>
-          <a:prstGeom prst="roundRect">
-            <a:avLst/>
-          </a:prstGeom>
-          <a:solidFill>
-            <a:srgbClr val="FFFFFF"/>
-          </a:solidFill>
-          <a:ln>
-            <a:solidFill>
-              <a:srgbClr val="2563EB"/>
-            </a:solidFill>
-          </a:ln>
-        </p:spPr>
-        <p:style>
-          <a:lnRef idx="1">
-            <a:schemeClr val="accent1"/>
-          </a:lnRef>
-          <a:fillRef idx="3">
-            <a:schemeClr val="accent1"/>
-          </a:fillRef>
-          <a:effectRef idx="2">
-            <a:schemeClr val="accent1"/>
-          </a:effectRef>
-          <a:fontRef idx="minor">
-            <a:schemeClr val="lt1"/>
-          </a:fontRef>
-        </p:style>
-        <p:txBody>
-          <a:bodyPr rtlCol="0" anchor="ctr" wrap="square" lIns="36576" rIns="36576" tIns="36576" bIns="36576"/>
-          <a:lstStyle/>
-          <a:p>
-            <a:pPr algn="ctr">
-              <a:defRPr sz="950" b="1">
-                <a:solidFill>
-                  <a:srgbClr val="1E40AF"/>
-                </a:solidFill>
-              </a:defRPr>
-            </a:pPr>
-            <a:r>
-              <a:t>Tập Dữ Liệu Giám Sát</a:t>
-            </a:r>
-          </a:p>
-          <a:p>
-            <a:pPr algn="ctr">
-              <a:defRPr sz="950" b="0">
-                <a:solidFill>
-                  <a:srgbClr val="1E40AF"/>
-                </a:solidFill>
-              </a:defRPr>
-            </a:pPr>
-            <a:r>
-              <a:t>(2.483 tệp / 112.81 MB)</a:t>
-            </a:r>
-          </a:p>
-        </p:txBody>
-      </p:sp>
-      <p:sp>
-        <p:nvSpPr>
-          <p:cNvPr id="9" name="Rounded Rectangle 8"/>
-          <p:cNvSpPr/>
-          <p:nvPr/>
-        </p:nvSpPr>
-        <p:spPr>
-          <a:xfrm>
-            <a:off x="3474720" y="2240280"/>
-            <a:ext cx="2194560" cy="594360"/>
-          </a:xfrm>
-          <a:prstGeom prst="roundRect">
-            <a:avLst/>
-          </a:prstGeom>
-          <a:solidFill>
-            <a:srgbClr val="FFFFFF"/>
-          </a:solidFill>
-          <a:ln>
-            <a:solidFill>
-              <a:srgbClr val="1E40AF"/>
-            </a:solidFill>
-          </a:ln>
-        </p:spPr>
-        <p:style>
-          <a:lnRef idx="1">
-            <a:schemeClr val="accent1"/>
-          </a:lnRef>
-          <a:fillRef idx="3">
-            <a:schemeClr val="accent1"/>
-          </a:fillRef>
-          <a:effectRef idx="2">
-            <a:schemeClr val="accent1"/>
-          </a:effectRef>
-          <a:fontRef idx="minor">
-            <a:schemeClr val="lt1"/>
-          </a:fontRef>
-        </p:style>
-        <p:txBody>
-          <a:bodyPr rtlCol="0" anchor="ctr" wrap="square" lIns="36576" rIns="36576" tIns="36576" bIns="36576"/>
-          <a:lstStyle/>
-          <a:p>
-            <a:pPr algn="ctr">
-              <a:defRPr sz="950" b="1">
-                <a:solidFill>
-                  <a:srgbClr val="1E40AF"/>
-                </a:solidFill>
-              </a:defRPr>
-            </a:pPr>
-            <a:r>
-              <a:t>Động Cơ Xác Thực</a:t>
-            </a:r>
-          </a:p>
-          <a:p>
-            <a:pPr algn="ctr">
-              <a:defRPr sz="950" b="0">
-                <a:solidFill>
-                  <a:srgbClr val="1E40AF"/>
-                </a:solidFill>
-              </a:defRPr>
-            </a:pPr>
-            <a:r>
-              <a:t>(SHA-256 / HMAC / Merkle)</a:t>
-            </a:r>
-          </a:p>
-        </p:txBody>
-      </p:sp>
-      <p:sp>
-        <p:nvSpPr>
-          <p:cNvPr id="10" name="Rounded Rectangle 9"/>
-          <p:cNvSpPr/>
-          <p:nvPr/>
-        </p:nvSpPr>
-        <p:spPr>
-          <a:xfrm>
-            <a:off x="1005840" y="2971800"/>
-            <a:ext cx="4663440" cy="502920"/>
-          </a:xfrm>
-          <a:prstGeom prst="roundRect">
-            <a:avLst/>
-          </a:prstGeom>
-          <a:solidFill>
-            <a:srgbClr val="ECFDF5"/>
-          </a:solidFill>
-          <a:ln>
-            <a:solidFill>
-              <a:srgbClr val="059669"/>
-            </a:solidFill>
-          </a:ln>
-        </p:spPr>
-        <p:style>
-          <a:lnRef idx="1">
-            <a:schemeClr val="accent1"/>
-          </a:lnRef>
-          <a:fillRef idx="3">
-            <a:schemeClr val="accent1"/>
-          </a:fillRef>
-          <a:effectRef idx="2">
-            <a:schemeClr val="accent1"/>
-          </a:effectRef>
-          <a:fontRef idx="minor">
-            <a:schemeClr val="lt1"/>
-          </a:fontRef>
-        </p:style>
-        <p:txBody>
-          <a:bodyPr rtlCol="0" anchor="ctr" wrap="square" lIns="36576" rIns="36576" tIns="36576" bIns="36576"/>
-          <a:lstStyle/>
-          <a:p>
-            <a:pPr algn="ctr">
-              <a:defRPr sz="900" b="1">
-                <a:solidFill>
-                  <a:srgbClr val="047857"/>
-                </a:solidFill>
-              </a:defRPr>
-            </a:pPr>
-            <a:r>
-              <a:t>Mốc Tin Cậy Ban Đầu: Root Hash H_0 (Trạng thái: 100% NGUYÊN VẸN)</a:t>
-            </a:r>
-          </a:p>
-          <a:p>
-            <a:pPr algn="ctr">
-              <a:defRPr sz="900" b="0">
-                <a:solidFill>
-                  <a:srgbClr val="047857"/>
-                </a:solidFill>
-              </a:defRPr>
-            </a:pPr>
-            <a:r>
-              <a:t>Định vị sai lệch O(log N) qua Dirty Path trong ~1.06 ms (2.325 tệp/giây)</a:t>
-            </a:r>
-          </a:p>
-        </p:txBody>
-      </p:sp>
-      <p:sp>
-        <p:nvSpPr>
-          <p:cNvPr id="11" name="TextBox 10"/>
-          <p:cNvSpPr txBox="1"/>
-          <p:nvPr/>
-        </p:nvSpPr>
-        <p:spPr>
-          <a:xfrm>
-            <a:off x="914400" y="3611880"/>
-            <a:ext cx="4846320" cy="2286000"/>
-          </a:xfrm>
-          <a:prstGeom prst="rect">
-            <a:avLst/>
-          </a:prstGeom>
-          <a:noFill/>
-        </p:spPr>
-        <p:txBody>
-          <a:bodyPr wrap="square">
-            <a:spAutoFit/>
-          </a:bodyPr>
-          <a:lstStyle/>
-          <a:p/>
-          <a:p>
-            <a:pPr>
-              <a:spcBef>
-                <a:spcPts val="400"/>
-              </a:spcBef>
-            </a:pPr>
-            <a:r>
-              <a:rPr b="1" sz="1000">
-                <a:solidFill>
-                  <a:srgbClr val="1E293B"/>
-                </a:solidFill>
-              </a:rPr>
-              <a:t>• Kịch bản 1 (CRC32): </a:t>
-            </a:r>
-            <a:r>
-              <a:rPr sz="950">
-                <a:solidFill>
-                  <a:srgbClr val="475569"/>
-                </a:solidFill>
-              </a:rPr>
-              <a:t>Red Team bù 4 byte GF(2); Blue Team dùng SHA-256 bắt quả tang tức thì.</a:t>
-            </a:r>
-          </a:p>
-          <a:p>
-            <a:pPr>
-              <a:spcBef>
-                <a:spcPts val="400"/>
-              </a:spcBef>
-            </a:pPr>
-            <a:r>
-              <a:rPr b="1" sz="1000">
-                <a:solidFill>
-                  <a:srgbClr val="1E293B"/>
-                </a:solidFill>
-              </a:rPr>
-              <a:t>• Kịch bản 2 (In-place Tamper): </a:t>
-            </a:r>
-            <a:r>
-              <a:rPr sz="950">
-                <a:solidFill>
-                  <a:srgbClr val="475569"/>
-                </a:solidFill>
-              </a:rPr>
-              <a:t>Sửa nội dung tệp; Blue Team phát hiện và vẽ Dirty Path O(log N).</a:t>
-            </a:r>
-          </a:p>
-          <a:p>
-            <a:pPr>
-              <a:spcBef>
-                <a:spcPts val="400"/>
-              </a:spcBef>
-            </a:pPr>
-            <a:r>
-              <a:rPr b="1" sz="1000">
-                <a:solidFill>
-                  <a:srgbClr val="1E293B"/>
-                </a:solidFill>
-              </a:rPr>
-              <a:t>• Kịch bản 3 (Dolev-Yao MitM): </a:t>
-            </a:r>
-            <a:r>
-              <a:rPr sz="950">
-                <a:solidFill>
-                  <a:srgbClr val="475569"/>
-                </a:solidFill>
-              </a:rPr>
-              <a:t>Đánh tráo Merkle Proof trên mạng; bộ xác thực từ chối 100% chữ ký.</a:t>
-            </a:r>
-          </a:p>
-        </p:txBody>
-      </p:sp>
-      <p:sp>
-        <p:nvSpPr>
-          <p:cNvPr id="12" name="Rounded Rectangle 11"/>
-          <p:cNvSpPr/>
-          <p:nvPr/>
-        </p:nvSpPr>
-        <p:spPr>
-          <a:xfrm>
-            <a:off x="6217920" y="1691640"/>
-            <a:ext cx="5212080" cy="4343400"/>
-          </a:xfrm>
-          <a:prstGeom prst="roundRect">
-            <a:avLst/>
-          </a:prstGeom>
-          <a:solidFill>
-            <a:srgbClr val="ECFDF5"/>
-          </a:solidFill>
-          <a:ln>
-            <a:solidFill>
-              <a:srgbClr val="A7F3D0"/>
-            </a:solidFill>
-          </a:ln>
-        </p:spPr>
-        <p:style>
-          <a:lnRef idx="1">
-            <a:schemeClr val="accent1"/>
-          </a:lnRef>
-          <a:fillRef idx="3">
-            <a:schemeClr val="accent1"/>
-          </a:fillRef>
-          <a:effectRef idx="2">
-            <a:schemeClr val="accent1"/>
-          </a:effectRef>
-          <a:fontRef idx="minor">
-            <a:schemeClr val="lt1"/>
-          </a:fontRef>
-        </p:style>
-        <p:txBody>
-          <a:bodyPr rtlCol="0" anchor="ctr"/>
-          <a:lstStyle/>
-          <a:p>
-            <a:pPr algn="ctr"/>
-          </a:p>
-        </p:txBody>
-      </p:sp>
-      <p:sp>
-        <p:nvSpPr>
-          <p:cNvPr id="13" name="TextBox 12"/>
-          <p:cNvSpPr txBox="1"/>
-          <p:nvPr/>
-        </p:nvSpPr>
-        <p:spPr>
-          <a:xfrm>
-            <a:off x="6400800" y="1783080"/>
-            <a:ext cx="4846320" cy="365760"/>
-          </a:xfrm>
-          <a:prstGeom prst="rect">
-            <a:avLst/>
-          </a:prstGeom>
-          <a:noFill/>
-        </p:spPr>
-        <p:txBody>
-          <a:bodyPr wrap="none">
-            <a:spAutoFit/>
-          </a:bodyPr>
-          <a:lstStyle/>
-          <a:p>
-            <a:pPr>
-              <a:defRPr sz="1200" b="1">
-                <a:solidFill>
-                  <a:srgbClr val="059669"/>
-                </a:solidFill>
-              </a:defRPr>
-            </a:pPr>
-            <a:r>
-              <a:t>RED TEAM — ĐỘNG CƠ TẤN CÔNG ĐỐI KHÁNG (PORT 8081)</a:t>
-            </a:r>
-          </a:p>
-        </p:txBody>
-      </p:sp>
-      <p:sp>
-        <p:nvSpPr>
-          <p:cNvPr id="14" name="Rounded Rectangle 13"/>
-          <p:cNvSpPr/>
-          <p:nvPr/>
-        </p:nvSpPr>
-        <p:spPr>
-          <a:xfrm>
-            <a:off x="6492240" y="2240280"/>
-            <a:ext cx="2194560" cy="594360"/>
-          </a:xfrm>
-          <a:prstGeom prst="roundRect">
-            <a:avLst/>
-          </a:prstGeom>
-          <a:solidFill>
-            <a:srgbClr val="FEF2F2"/>
-          </a:solidFill>
-          <a:ln>
-            <a:solidFill>
-              <a:srgbClr val="DC2626"/>
-            </a:solidFill>
-          </a:ln>
-        </p:spPr>
-        <p:style>
-          <a:lnRef idx="1">
-            <a:schemeClr val="accent1"/>
-          </a:lnRef>
-          <a:fillRef idx="3">
-            <a:schemeClr val="accent1"/>
-          </a:fillRef>
-          <a:effectRef idx="2">
-            <a:schemeClr val="accent1"/>
-          </a:effectRef>
-          <a:fontRef idx="minor">
-            <a:schemeClr val="lt1"/>
-          </a:fontRef>
-        </p:style>
-        <p:txBody>
-          <a:bodyPr rtlCol="0" anchor="ctr" wrap="square" lIns="36576" rIns="36576" tIns="36576" bIns="36576"/>
-          <a:lstStyle/>
-          <a:p>
-            <a:pPr algn="ctr">
-              <a:defRPr sz="950" b="1">
-                <a:solidFill>
-                  <a:srgbClr val="B91C1C"/>
-                </a:solidFill>
-              </a:defRPr>
-            </a:pPr>
-            <a:r>
-              <a:t>Adversary Engine</a:t>
-            </a:r>
-          </a:p>
-          <a:p>
-            <a:pPr algn="ctr">
-              <a:defRPr sz="950" b="0">
-                <a:solidFill>
-                  <a:srgbClr val="B91C1C"/>
-                </a:solidFill>
-              </a:defRPr>
-            </a:pPr>
-            <a:r>
-              <a:t>(6 Vector tấn công đối kháng)</a:t>
-            </a:r>
-          </a:p>
-        </p:txBody>
-      </p:sp>
-      <p:sp>
-        <p:nvSpPr>
-          <p:cNvPr id="15" name="Rounded Rectangle 14"/>
-          <p:cNvSpPr/>
-          <p:nvPr/>
-        </p:nvSpPr>
-        <p:spPr>
-          <a:xfrm>
-            <a:off x="8961120" y="2240280"/>
-            <a:ext cx="2194560" cy="594360"/>
-          </a:xfrm>
-          <a:prstGeom prst="roundRect">
-            <a:avLst/>
-          </a:prstGeom>
-          <a:solidFill>
-            <a:srgbClr val="ECFDF5"/>
-          </a:solidFill>
-          <a:ln>
-            <a:solidFill>
-              <a:srgbClr val="059669"/>
-            </a:solidFill>
-          </a:ln>
-        </p:spPr>
-        <p:style>
-          <a:lnRef idx="1">
-            <a:schemeClr val="accent1"/>
-          </a:lnRef>
-          <a:fillRef idx="3">
-            <a:schemeClr val="accent1"/>
-          </a:fillRef>
-          <a:effectRef idx="2">
-            <a:schemeClr val="accent1"/>
-          </a:effectRef>
-          <a:fontRef idx="minor">
-            <a:schemeClr val="lt1"/>
-          </a:fontRef>
-        </p:style>
-        <p:txBody>
-          <a:bodyPr rtlCol="0" anchor="ctr" wrap="square" lIns="36576" rIns="36576" tIns="36576" bIns="36576"/>
-          <a:lstStyle/>
-          <a:p>
-            <a:pPr algn="ctr">
-              <a:defRPr sz="950" b="1">
-                <a:solidFill>
-                  <a:srgbClr val="047857"/>
-                </a:solidFill>
-              </a:defRPr>
-            </a:pPr>
-            <a:r>
-              <a:t>Cơ Chế Phục Hồi An Toàn</a:t>
-            </a:r>
-          </a:p>
-          <a:p>
-            <a:pPr algn="ctr">
-              <a:defRPr sz="950" b="0">
-                <a:solidFill>
-                  <a:srgbClr val="047857"/>
-                </a:solidFill>
-              </a:defRPr>
-            </a:pPr>
-            <a:r>
-              <a:t>(Nút ROLLBACK ALL 100%)</a:t>
-            </a:r>
-          </a:p>
-        </p:txBody>
-      </p:sp>
-      <p:sp>
-        <p:nvSpPr>
-          <p:cNvPr id="16" name="Rounded Rectangle 15"/>
-          <p:cNvSpPr/>
-          <p:nvPr/>
-        </p:nvSpPr>
-        <p:spPr>
-          <a:xfrm>
-            <a:off x="6492240" y="2971800"/>
-            <a:ext cx="4663440" cy="502920"/>
-          </a:xfrm>
-          <a:prstGeom prst="roundRect">
-            <a:avLst/>
-          </a:prstGeom>
-          <a:solidFill>
-            <a:srgbClr val="FFFFFF"/>
-          </a:solidFill>
-          <a:ln>
-            <a:solidFill>
-              <a:srgbClr val="E2E8F0"/>
-            </a:solidFill>
-          </a:ln>
-        </p:spPr>
-        <p:style>
-          <a:lnRef idx="1">
-            <a:schemeClr val="accent1"/>
-          </a:lnRef>
-          <a:fillRef idx="3">
-            <a:schemeClr val="accent1"/>
-          </a:fillRef>
-          <a:effectRef idx="2">
-            <a:schemeClr val="accent1"/>
-          </a:effectRef>
-          <a:fontRef idx="minor">
-            <a:schemeClr val="lt1"/>
-          </a:fontRef>
-        </p:style>
-        <p:txBody>
-          <a:bodyPr rtlCol="0" anchor="ctr" wrap="square" lIns="36576" rIns="36576" tIns="36576" bIns="36576"/>
-          <a:lstStyle/>
-          <a:p>
-            <a:pPr algn="ctr">
-              <a:defRPr sz="900" b="1">
-                <a:solidFill>
-                  <a:srgbClr val="0F172A"/>
-                </a:solidFill>
-              </a:defRPr>
-            </a:pPr>
-            <a:r>
-              <a:t>[LOG KIỂM ĐỊNH TOÁN HỌC: 7/7 THÍ NGHIỆM ĐẠT CHUẨN]</a:t>
-            </a:r>
-          </a:p>
-          <a:p>
-            <a:pPr algn="ctr">
-              <a:defRPr sz="900" b="0">
-                <a:solidFill>
-                  <a:srgbClr val="0F172A"/>
-                </a:solidFill>
-              </a:defRPr>
-            </a:pPr>
-            <a:r>
-              <a:t>PPT Integrity: 100% phát hiện | RFC 6962: Chặn Node-Leaf | SAC: 50.00% | Time: 2,885 ms</a:t>
-            </a:r>
-          </a:p>
-        </p:txBody>
-      </p:sp>
-      <p:sp>
-        <p:nvSpPr>
-          <p:cNvPr id="17" name="TextBox 16"/>
-          <p:cNvSpPr txBox="1"/>
-          <p:nvPr/>
-        </p:nvSpPr>
-        <p:spPr>
-          <a:xfrm>
-            <a:off x="6400800" y="3611880"/>
-            <a:ext cx="4846320" cy="2286000"/>
-          </a:xfrm>
-          <a:prstGeom prst="rect">
-            <a:avLst/>
-          </a:prstGeom>
-          <a:noFill/>
-        </p:spPr>
-        <p:txBody>
-          <a:bodyPr wrap="square">
-            <a:spAutoFit/>
-          </a:bodyPr>
-          <a:lstStyle/>
-          <a:p/>
-          <a:p>
-            <a:pPr>
-              <a:spcBef>
-                <a:spcPts val="400"/>
-              </a:spcBef>
-            </a:pPr>
-            <a:r>
-              <a:rPr b="1" sz="1000">
-                <a:solidFill>
-                  <a:srgbClr val="1E293B"/>
-                </a:solidFill>
-              </a:rPr>
-              <a:t>• Bản chất minh họa: </a:t>
-            </a:r>
-            <a:r>
-              <a:rPr sz="950">
-                <a:solidFill>
-                  <a:srgbClr val="475569"/>
-                </a:solidFill>
-              </a:rPr>
-              <a:t>Thực nghiệm độc lập kiểm chứng logic các khái niệm; không phải chạy lại số liệu bài báo.</a:t>
-            </a:r>
-          </a:p>
-          <a:p>
-            <a:pPr>
-              <a:spcBef>
-                <a:spcPts val="400"/>
-              </a:spcBef>
-            </a:pPr>
-            <a:r>
-              <a:rPr b="1" sz="1000">
-                <a:solidFill>
-                  <a:srgbClr val="1E293B"/>
-                </a:solidFill>
-              </a:rPr>
-              <a:t>• Môi trường đo đạc: </a:t>
-            </a:r>
-            <a:r>
-              <a:rPr sz="950">
-                <a:solidFill>
-                  <a:srgbClr val="475569"/>
-                </a:solidFill>
-              </a:rPr>
-              <a:t>CPU Intel i7, Windows 11; tốc độ duyệt đạt 2.325 tệp/giây trên kaggle_dataset.</a:t>
-            </a:r>
-          </a:p>
-          <a:p>
-            <a:pPr>
-              <a:spcBef>
-                <a:spcPts val="400"/>
-              </a:spcBef>
-            </a:pPr>
-            <a:r>
-              <a:rPr b="1" sz="1000">
-                <a:solidFill>
-                  <a:srgbClr val="1E293B"/>
-                </a:solidFill>
-              </a:rPr>
-              <a:t>• Kịch bản thao tác: </a:t>
-            </a:r>
-            <a:r>
-              <a:rPr sz="950">
-                <a:solidFill>
-                  <a:srgbClr val="475569"/>
-                </a:solidFill>
-              </a:rPr>
-              <a:t>Hướng dẫn lệnh chạy và quy trình demo 2 màn hình xem tại MIDTERM_DEMO.md.</a:t>
-            </a:r>
-          </a:p>
-        </p:txBody>
-      </p:sp>
-      <p:sp>
-        <p:nvSpPr>
-          <p:cNvPr id="18" name="TextBox 17"/>
-          <p:cNvSpPr txBox="1"/>
-          <p:nvPr/>
-        </p:nvSpPr>
-        <p:spPr>
-          <a:xfrm>
-            <a:off x="731520" y="6217920"/>
-            <a:ext cx="10698480" cy="365760"/>
-          </a:xfrm>
-          <a:prstGeom prst="rect">
-            <a:avLst/>
-          </a:prstGeom>
-          <a:noFill/>
-        </p:spPr>
-        <p:txBody>
-          <a:bodyPr wrap="none">
-            <a:spAutoFit/>
-          </a:bodyPr>
-          <a:lstStyle/>
-          <a:p>
-            <a:pPr>
               <a:defRPr sz="1000" i="1">
                 <a:solidFill>
                   <a:srgbClr val="64748B"/>
@@ -5696,7 +5095,7 @@
               </a:defRPr>
             </a:pPr>
             <a:r>
-              <a:t>Số liệu thực tế đo đạc trực tiếp từ mã nguồn DT005. [Mã nguồn sơ đồ draw.io lưu tại docs/diagram_slide_14_adversary_architecture.drawio]</a:t>
+              <a:t>Sơ đồ kiến trúc kiểm thử đối kháng do sinh viên tự thiết kế minh họa các luận điểm của Halpin (2025).</a:t>
             </a:r>
           </a:p>
         </p:txBody>
@@ -8624,51 +8023,30 @@
           </a:p>
         </p:txBody>
       </p:sp>
-      <p:sp>
-        <p:nvSpPr>
-          <p:cNvPr id="6" name="Rounded Rectangle 5"/>
-          <p:cNvSpPr/>
-          <p:nvPr/>
-        </p:nvSpPr>
-        <p:spPr>
-          <a:xfrm>
-            <a:off x="731520" y="1691640"/>
-            <a:ext cx="5212080" cy="4343400"/>
-          </a:xfrm>
-          <a:prstGeom prst="roundRect">
-            <a:avLst/>
-          </a:prstGeom>
-          <a:solidFill>
-            <a:srgbClr val="F8FAFC"/>
-          </a:solidFill>
-          <a:ln>
-            <a:solidFill>
-              <a:srgbClr val="BFDBFE"/>
-            </a:solidFill>
-          </a:ln>
-        </p:spPr>
-        <p:style>
-          <a:lnRef idx="1">
-            <a:schemeClr val="accent1"/>
-          </a:lnRef>
-          <a:fillRef idx="3">
-            <a:schemeClr val="accent1"/>
-          </a:fillRef>
-          <a:effectRef idx="2">
-            <a:schemeClr val="accent1"/>
-          </a:effectRef>
-          <a:fontRef idx="minor">
-            <a:schemeClr val="lt1"/>
-          </a:fontRef>
-        </p:style>
-        <p:txBody>
-          <a:bodyPr rtlCol="0" anchor="ctr"/>
-          <a:lstStyle/>
-          <a:p>
-            <a:pPr algn="ctr"/>
-          </a:p>
-        </p:txBody>
-      </p:sp>
+      <p:pic>
+        <p:nvPicPr>
+          <p:cNvPr id="6" name="Picture 5" descr="Slide6.drawio.png"/>
+          <p:cNvPicPr>
+            <a:picLocks noChangeAspect="1"/>
+          </p:cNvPicPr>
+          <p:nvPr/>
+        </p:nvPicPr>
+        <p:blipFill>
+          <a:blip r:embed="rId2"/>
+          <a:stretch>
+            <a:fillRect/>
+          </a:stretch>
+        </p:blipFill>
+        <p:spPr>
+          <a:xfrm>
+            <a:off x="1386687" y="1664208"/>
+            <a:ext cx="9418320" cy="4425696"/>
+          </a:xfrm>
+          <a:prstGeom prst="rect">
+            <a:avLst/>
+          </a:prstGeom>
+        </p:spPr>
+      </p:pic>
       <p:sp>
         <p:nvSpPr>
           <p:cNvPr id="7" name="TextBox 6"/>
@@ -8677,8 +8055,8 @@
         </p:nvSpPr>
         <p:spPr>
           <a:xfrm>
-            <a:off x="914400" y="1783080"/>
-            <a:ext cx="4846320" cy="365760"/>
+            <a:off x="731520" y="6217920"/>
+            <a:ext cx="10698480" cy="365760"/>
           </a:xfrm>
           <a:prstGeom prst="rect">
             <a:avLst/>
@@ -8692,769 +8070,6 @@
           <a:lstStyle/>
           <a:p>
             <a:pPr>
-              <a:defRPr sz="1200" b="1">
-                <a:solidFill>
-                  <a:srgbClr val="1E40AF"/>
-                </a:solidFill>
-              </a:defRPr>
-            </a:pPr>
-            <a:r>
-              <a:t>1. Mô Hình Điểm - Điểm Cổ Điển Shannon (1949)</a:t>
-            </a:r>
-          </a:p>
-        </p:txBody>
-      </p:sp>
-      <p:sp>
-        <p:nvSpPr>
-          <p:cNvPr id="8" name="Rounded Rectangle 7"/>
-          <p:cNvSpPr/>
-          <p:nvPr/>
-        </p:nvSpPr>
-        <p:spPr>
-          <a:xfrm>
-            <a:off x="1005840" y="2240280"/>
-            <a:ext cx="1280160" cy="594360"/>
-          </a:xfrm>
-          <a:prstGeom prst="roundRect">
-            <a:avLst/>
-          </a:prstGeom>
-          <a:solidFill>
-            <a:srgbClr val="EFF6FF"/>
-          </a:solidFill>
-          <a:ln>
-            <a:solidFill>
-              <a:srgbClr val="2563EB"/>
-            </a:solidFill>
-          </a:ln>
-        </p:spPr>
-        <p:style>
-          <a:lnRef idx="1">
-            <a:schemeClr val="accent1"/>
-          </a:lnRef>
-          <a:fillRef idx="3">
-            <a:schemeClr val="accent1"/>
-          </a:fillRef>
-          <a:effectRef idx="2">
-            <a:schemeClr val="accent1"/>
-          </a:effectRef>
-          <a:fontRef idx="minor">
-            <a:schemeClr val="lt1"/>
-          </a:fontRef>
-        </p:style>
-        <p:txBody>
-          <a:bodyPr rtlCol="0" anchor="ctr" wrap="square" lIns="36576" rIns="36576" tIns="36576" bIns="36576"/>
-          <a:lstStyle/>
-          <a:p>
-            <a:pPr algn="ctr">
-              <a:defRPr sz="950" b="1">
-                <a:solidFill>
-                  <a:srgbClr val="1E40AF"/>
-                </a:solidFill>
-              </a:defRPr>
-            </a:pPr>
-            <a:r>
-              <a:t>Người gửi Alice</a:t>
-            </a:r>
-          </a:p>
-          <a:p>
-            <a:pPr algn="ctr">
-              <a:defRPr sz="950" b="0">
-                <a:solidFill>
-                  <a:srgbClr val="1E40AF"/>
-                </a:solidFill>
-              </a:defRPr>
-            </a:pPr>
-            <a:r>
-              <a:t>(Bản rõ M)</a:t>
-            </a:r>
-          </a:p>
-        </p:txBody>
-      </p:sp>
-      <p:sp>
-        <p:nvSpPr>
-          <p:cNvPr id="9" name="Rounded Rectangle 8"/>
-          <p:cNvSpPr/>
-          <p:nvPr/>
-        </p:nvSpPr>
-        <p:spPr>
-          <a:xfrm>
-            <a:off x="2651760" y="2240280"/>
-            <a:ext cx="1463040" cy="594360"/>
-          </a:xfrm>
-          <a:prstGeom prst="roundRect">
-            <a:avLst/>
-          </a:prstGeom>
-          <a:solidFill>
-            <a:srgbClr val="FEF2F2"/>
-          </a:solidFill>
-          <a:ln>
-            <a:solidFill>
-              <a:srgbClr val="DC2626"/>
-            </a:solidFill>
-          </a:ln>
-        </p:spPr>
-        <p:style>
-          <a:lnRef idx="1">
-            <a:schemeClr val="accent1"/>
-          </a:lnRef>
-          <a:fillRef idx="3">
-            <a:schemeClr val="accent1"/>
-          </a:fillRef>
-          <a:effectRef idx="2">
-            <a:schemeClr val="accent1"/>
-          </a:effectRef>
-          <a:fontRef idx="minor">
-            <a:schemeClr val="lt1"/>
-          </a:fontRef>
-        </p:style>
-        <p:txBody>
-          <a:bodyPr rtlCol="0" anchor="ctr" wrap="square" lIns="36576" rIns="36576" tIns="36576" bIns="36576"/>
-          <a:lstStyle/>
-          <a:p>
-            <a:pPr algn="ctr">
-              <a:defRPr sz="950" b="1">
-                <a:solidFill>
-                  <a:srgbClr val="B91C1C"/>
-                </a:solidFill>
-              </a:defRPr>
-            </a:pPr>
-            <a:r>
-              <a:t>Kênh truyền</a:t>
-            </a:r>
-          </a:p>
-          <a:p>
-            <a:pPr algn="ctr">
-              <a:defRPr sz="950" b="0">
-                <a:solidFill>
-                  <a:srgbClr val="B91C1C"/>
-                </a:solidFill>
-              </a:defRPr>
-            </a:pPr>
-            <a:r>
-              <a:t>C = Enc(K, M)</a:t>
-            </a:r>
-          </a:p>
-        </p:txBody>
-      </p:sp>
-      <p:sp>
-        <p:nvSpPr>
-          <p:cNvPr id="10" name="Rounded Rectangle 9"/>
-          <p:cNvSpPr/>
-          <p:nvPr/>
-        </p:nvSpPr>
-        <p:spPr>
-          <a:xfrm>
-            <a:off x="4480560" y="2240280"/>
-            <a:ext cx="1188720" cy="594360"/>
-          </a:xfrm>
-          <a:prstGeom prst="roundRect">
-            <a:avLst/>
-          </a:prstGeom>
-          <a:solidFill>
-            <a:srgbClr val="ECFDF5"/>
-          </a:solidFill>
-          <a:ln>
-            <a:solidFill>
-              <a:srgbClr val="059669"/>
-            </a:solidFill>
-          </a:ln>
-        </p:spPr>
-        <p:style>
-          <a:lnRef idx="1">
-            <a:schemeClr val="accent1"/>
-          </a:lnRef>
-          <a:fillRef idx="3">
-            <a:schemeClr val="accent1"/>
-          </a:fillRef>
-          <a:effectRef idx="2">
-            <a:schemeClr val="accent1"/>
-          </a:effectRef>
-          <a:fontRef idx="minor">
-            <a:schemeClr val="lt1"/>
-          </a:fontRef>
-        </p:style>
-        <p:txBody>
-          <a:bodyPr rtlCol="0" anchor="ctr" wrap="square" lIns="36576" rIns="36576" tIns="36576" bIns="36576"/>
-          <a:lstStyle/>
-          <a:p>
-            <a:pPr algn="ctr">
-              <a:defRPr sz="950" b="1">
-                <a:solidFill>
-                  <a:srgbClr val="059669"/>
-                </a:solidFill>
-              </a:defRPr>
-            </a:pPr>
-            <a:r>
-              <a:t>Người nhận Bob</a:t>
-            </a:r>
-          </a:p>
-          <a:p>
-            <a:pPr algn="ctr">
-              <a:defRPr sz="950" b="0">
-                <a:solidFill>
-                  <a:srgbClr val="059669"/>
-                </a:solidFill>
-              </a:defRPr>
-            </a:pPr>
-            <a:r>
-              <a:t>(Dec(K, C))</a:t>
-            </a:r>
-          </a:p>
-        </p:txBody>
-      </p:sp>
-      <p:sp>
-        <p:nvSpPr>
-          <p:cNvPr id="11" name="Rounded Rectangle 10"/>
-          <p:cNvSpPr/>
-          <p:nvPr/>
-        </p:nvSpPr>
-        <p:spPr>
-          <a:xfrm>
-            <a:off x="2468880" y="2971800"/>
-            <a:ext cx="1828800" cy="502920"/>
-          </a:xfrm>
-          <a:prstGeom prst="roundRect">
-            <a:avLst/>
-          </a:prstGeom>
-          <a:solidFill>
-            <a:srgbClr val="FEE2E2"/>
-          </a:solidFill>
-          <a:ln>
-            <a:solidFill>
-              <a:srgbClr val="B91C1C"/>
-            </a:solidFill>
-          </a:ln>
-        </p:spPr>
-        <p:style>
-          <a:lnRef idx="1">
-            <a:schemeClr val="accent1"/>
-          </a:lnRef>
-          <a:fillRef idx="3">
-            <a:schemeClr val="accent1"/>
-          </a:fillRef>
-          <a:effectRef idx="2">
-            <a:schemeClr val="accent1"/>
-          </a:effectRef>
-          <a:fontRef idx="minor">
-            <a:schemeClr val="lt1"/>
-          </a:fontRef>
-        </p:style>
-        <p:txBody>
-          <a:bodyPr rtlCol="0" anchor="ctr" wrap="square" lIns="36576" rIns="36576" tIns="36576" bIns="36576"/>
-          <a:lstStyle/>
-          <a:p>
-            <a:pPr algn="ctr">
-              <a:defRPr sz="900" b="1">
-                <a:solidFill>
-                  <a:srgbClr val="991B1B"/>
-                </a:solidFill>
-              </a:defRPr>
-            </a:pPr>
-            <a:r>
-              <a:t>Đối thủ Eve (Passive)</a:t>
-            </a:r>
-          </a:p>
-          <a:p>
-            <a:pPr algn="ctr">
-              <a:defRPr sz="900" b="0">
-                <a:solidFill>
-                  <a:srgbClr val="991B1B"/>
-                </a:solidFill>
-              </a:defRPr>
-            </a:pPr>
-            <a:r>
-              <a:t>Chỉ nghe lén đường truyền</a:t>
-            </a:r>
-          </a:p>
-        </p:txBody>
-      </p:sp>
-      <p:sp>
-        <p:nvSpPr>
-          <p:cNvPr id="12" name="TextBox 11"/>
-          <p:cNvSpPr txBox="1"/>
-          <p:nvPr/>
-        </p:nvSpPr>
-        <p:spPr>
-          <a:xfrm>
-            <a:off x="914400" y="3611880"/>
-            <a:ext cx="4846320" cy="2194560"/>
-          </a:xfrm>
-          <a:prstGeom prst="rect">
-            <a:avLst/>
-          </a:prstGeom>
-          <a:noFill/>
-        </p:spPr>
-        <p:txBody>
-          <a:bodyPr wrap="square">
-            <a:spAutoFit/>
-          </a:bodyPr>
-          <a:lstStyle/>
-          <a:p/>
-          <a:p>
-            <a:pPr>
-              <a:spcBef>
-                <a:spcPts val="400"/>
-              </a:spcBef>
-            </a:pPr>
-            <a:r>
-              <a:rPr b="1" sz="1000">
-                <a:solidFill>
-                  <a:srgbClr val="1E293B"/>
-                </a:solidFill>
-              </a:rPr>
-              <a:t>• Bí mật hoàn hảo: </a:t>
-            </a:r>
-            <a:r>
-              <a:rPr sz="950">
-                <a:solidFill>
-                  <a:srgbClr val="475569"/>
-                </a:solidFill>
-              </a:rPr>
-              <a:t>OTP an toàn tuyệt đối khi H(K) &gt;= H(M), nhưng bất khả thi khi triển khai diện rộng.</a:t>
-            </a:r>
-          </a:p>
-          <a:p>
-            <a:pPr>
-              <a:spcBef>
-                <a:spcPts val="400"/>
-              </a:spcBef>
-            </a:pPr>
-            <a:r>
-              <a:rPr b="1" sz="1000">
-                <a:solidFill>
-                  <a:srgbClr val="1E293B"/>
-                </a:solidFill>
-              </a:rPr>
-              <a:t>• Giả định Shannon: </a:t>
-            </a:r>
-            <a:r>
-              <a:rPr sz="950">
-                <a:solidFill>
-                  <a:srgbClr val="475569"/>
-                </a:solidFill>
-              </a:rPr>
-              <a:t>Xem sai lệch dữ liệu là 'nhiễu ngẫu nhiên'. Đối thủ thực tế là tác nhân có chủ đích!</a:t>
-            </a:r>
-          </a:p>
-          <a:p>
-            <a:pPr>
-              <a:spcBef>
-                <a:spcPts val="400"/>
-              </a:spcBef>
-            </a:pPr>
-            <a:r>
-              <a:rPr b="1" sz="1000">
-                <a:solidFill>
-                  <a:srgbClr val="1E293B"/>
-                </a:solidFill>
-              </a:rPr>
-              <a:t>• Hạn chế: </a:t>
-            </a:r>
-            <a:r>
-              <a:rPr sz="950">
-                <a:solidFill>
-                  <a:srgbClr val="475569"/>
-                </a:solidFill>
-              </a:rPr>
-              <a:t>Bỏ qua chi phí lưu trữ/phân phối khóa, rò rỉ kênh kề và ranh giới hệ thống vật lý.</a:t>
-            </a:r>
-          </a:p>
-        </p:txBody>
-      </p:sp>
-      <p:sp>
-        <p:nvSpPr>
-          <p:cNvPr id="13" name="Rounded Rectangle 12"/>
-          <p:cNvSpPr/>
-          <p:nvPr/>
-        </p:nvSpPr>
-        <p:spPr>
-          <a:xfrm>
-            <a:off x="6217920" y="1691640"/>
-            <a:ext cx="5212080" cy="4343400"/>
-          </a:xfrm>
-          <a:prstGeom prst="roundRect">
-            <a:avLst/>
-          </a:prstGeom>
-          <a:solidFill>
-            <a:srgbClr val="ECFDF5"/>
-          </a:solidFill>
-          <a:ln>
-            <a:solidFill>
-              <a:srgbClr val="A7F3D0"/>
-            </a:solidFill>
-          </a:ln>
-        </p:spPr>
-        <p:style>
-          <a:lnRef idx="1">
-            <a:schemeClr val="accent1"/>
-          </a:lnRef>
-          <a:fillRef idx="3">
-            <a:schemeClr val="accent1"/>
-          </a:fillRef>
-          <a:effectRef idx="2">
-            <a:schemeClr val="accent1"/>
-          </a:effectRef>
-          <a:fontRef idx="minor">
-            <a:schemeClr val="lt1"/>
-          </a:fontRef>
-        </p:style>
-        <p:txBody>
-          <a:bodyPr rtlCol="0" anchor="ctr"/>
-          <a:lstStyle/>
-          <a:p>
-            <a:pPr algn="ctr"/>
-          </a:p>
-        </p:txBody>
-      </p:sp>
-      <p:sp>
-        <p:nvSpPr>
-          <p:cNvPr id="14" name="TextBox 13"/>
-          <p:cNvSpPr txBox="1"/>
-          <p:nvPr/>
-        </p:nvSpPr>
-        <p:spPr>
-          <a:xfrm>
-            <a:off x="6400800" y="1783080"/>
-            <a:ext cx="4846320" cy="365760"/>
-          </a:xfrm>
-          <a:prstGeom prst="rect">
-            <a:avLst/>
-          </a:prstGeom>
-          <a:noFill/>
-        </p:spPr>
-        <p:txBody>
-          <a:bodyPr wrap="none">
-            <a:spAutoFit/>
-          </a:bodyPr>
-          <a:lstStyle/>
-          <a:p>
-            <a:pPr>
-              <a:defRPr sz="1200" b="1">
-                <a:solidFill>
-                  <a:srgbClr val="059669"/>
-                </a:solidFill>
-              </a:defRPr>
-            </a:pPr>
-            <a:r>
-              <a:t>2. Thực Tế: Mạng Xã Hội - Kỹ Thuật Không Đồng Nhất</a:t>
-            </a:r>
-          </a:p>
-        </p:txBody>
-      </p:sp>
-      <p:sp>
-        <p:nvSpPr>
-          <p:cNvPr id="15" name="Rounded Rectangle 14"/>
-          <p:cNvSpPr/>
-          <p:nvPr/>
-        </p:nvSpPr>
-        <p:spPr>
-          <a:xfrm>
-            <a:off x="6492240" y="2240280"/>
-            <a:ext cx="2194560" cy="594360"/>
-          </a:xfrm>
-          <a:prstGeom prst="roundRect">
-            <a:avLst/>
-          </a:prstGeom>
-          <a:solidFill>
-            <a:srgbClr val="FFFFFF"/>
-          </a:solidFill>
-          <a:ln>
-            <a:solidFill>
-              <a:srgbClr val="059669"/>
-            </a:solidFill>
-          </a:ln>
-        </p:spPr>
-        <p:style>
-          <a:lnRef idx="1">
-            <a:schemeClr val="accent1"/>
-          </a:lnRef>
-          <a:fillRef idx="3">
-            <a:schemeClr val="accent1"/>
-          </a:fillRef>
-          <a:effectRef idx="2">
-            <a:schemeClr val="accent1"/>
-          </a:effectRef>
-          <a:fontRef idx="minor">
-            <a:schemeClr val="lt1"/>
-          </a:fontRef>
-        </p:style>
-        <p:txBody>
-          <a:bodyPr rtlCol="0" anchor="ctr" wrap="square" lIns="36576" rIns="36576" tIns="36576" bIns="36576"/>
-          <a:lstStyle/>
-          <a:p>
-            <a:pPr algn="ctr">
-              <a:defRPr sz="950" b="1">
-                <a:solidFill>
-                  <a:srgbClr val="059669"/>
-                </a:solidFill>
-              </a:defRPr>
-            </a:pPr>
-            <a:r>
-              <a:t>Nhóm Người Giữ Bí Mật</a:t>
-            </a:r>
-          </a:p>
-          <a:p>
-            <a:pPr algn="ctr">
-              <a:defRPr sz="950" b="0">
-                <a:solidFill>
-                  <a:srgbClr val="059669"/>
-                </a:solidFill>
-              </a:defRPr>
-            </a:pPr>
-            <a:r>
-              <a:t>(Duy trì chính sách Policy)</a:t>
-            </a:r>
-          </a:p>
-        </p:txBody>
-      </p:sp>
-      <p:sp>
-        <p:nvSpPr>
-          <p:cNvPr id="16" name="Rounded Rectangle 15"/>
-          <p:cNvSpPr/>
-          <p:nvPr/>
-        </p:nvSpPr>
-        <p:spPr>
-          <a:xfrm>
-            <a:off x="8961120" y="2240280"/>
-            <a:ext cx="2194560" cy="594360"/>
-          </a:xfrm>
-          <a:prstGeom prst="roundRect">
-            <a:avLst/>
-          </a:prstGeom>
-          <a:solidFill>
-            <a:srgbClr val="FFFFFF"/>
-          </a:solidFill>
-          <a:ln>
-            <a:solidFill>
-              <a:srgbClr val="2563EB"/>
-            </a:solidFill>
-          </a:ln>
-        </p:spPr>
-        <p:style>
-          <a:lnRef idx="1">
-            <a:schemeClr val="accent1"/>
-          </a:lnRef>
-          <a:fillRef idx="3">
-            <a:schemeClr val="accent1"/>
-          </a:fillRef>
-          <a:effectRef idx="2">
-            <a:schemeClr val="accent1"/>
-          </a:effectRef>
-          <a:fontRef idx="minor">
-            <a:schemeClr val="lt1"/>
-          </a:fontRef>
-        </p:style>
-        <p:txBody>
-          <a:bodyPr rtlCol="0" anchor="ctr" wrap="square" lIns="36576" rIns="36576" tIns="36576" bIns="36576"/>
-          <a:lstStyle/>
-          <a:p>
-            <a:pPr algn="ctr">
-              <a:defRPr sz="950" b="1">
-                <a:solidFill>
-                  <a:srgbClr val="1E40AF"/>
-                </a:solidFill>
-              </a:defRPr>
-            </a:pPr>
-            <a:r>
-              <a:t>Hạ Tầng / ISP / Đám Mây</a:t>
-            </a:r>
-          </a:p>
-          <a:p>
-            <a:pPr algn="ctr">
-              <a:defRPr sz="950" b="0">
-                <a:solidFill>
-                  <a:srgbClr val="1E40AF"/>
-                </a:solidFill>
-              </a:defRPr>
-            </a:pPr>
-            <a:r>
-              <a:t>(Môi trường mở không tin cậy)</a:t>
-            </a:r>
-          </a:p>
-        </p:txBody>
-      </p:sp>
-      <p:sp>
-        <p:nvSpPr>
-          <p:cNvPr id="17" name="Rounded Rectangle 16"/>
-          <p:cNvSpPr/>
-          <p:nvPr/>
-        </p:nvSpPr>
-        <p:spPr>
-          <a:xfrm>
-            <a:off x="6492240" y="2971800"/>
-            <a:ext cx="4663440" cy="502920"/>
-          </a:xfrm>
-          <a:prstGeom prst="roundRect">
-            <a:avLst/>
-          </a:prstGeom>
-          <a:solidFill>
-            <a:srgbClr val="FEE2E2"/>
-          </a:solidFill>
-          <a:ln>
-            <a:solidFill>
-              <a:srgbClr val="DC2626"/>
-            </a:solidFill>
-          </a:ln>
-        </p:spPr>
-        <p:style>
-          <a:lnRef idx="1">
-            <a:schemeClr val="accent1"/>
-          </a:lnRef>
-          <a:fillRef idx="3">
-            <a:schemeClr val="accent1"/>
-          </a:fillRef>
-          <a:effectRef idx="2">
-            <a:schemeClr val="accent1"/>
-          </a:effectRef>
-          <a:fontRef idx="minor">
-            <a:schemeClr val="lt1"/>
-          </a:fontRef>
-        </p:style>
-        <p:txBody>
-          <a:bodyPr rtlCol="0" anchor="ctr" wrap="square" lIns="36576" rIns="36576" tIns="36576" bIns="36576"/>
-          <a:lstStyle/>
-          <a:p>
-            <a:pPr algn="ctr">
-              <a:defRPr sz="900" b="1">
-                <a:solidFill>
-                  <a:srgbClr val="991B1B"/>
-                </a:solidFill>
-              </a:defRPr>
-            </a:pPr>
-            <a:r>
-              <a:t>Đối Thủ Thể Chế (NSA / Five Eyes) &amp; Kênh Kề</a:t>
-            </a:r>
-          </a:p>
-          <a:p>
-            <a:pPr algn="ctr">
-              <a:defRPr sz="900" b="0">
-                <a:solidFill>
-                  <a:srgbClr val="991B1B"/>
-                </a:solidFill>
-              </a:defRPr>
-            </a:pPr>
-            <a:r>
-              <a:t>Tấn công chuỗi cung ứng, suy yếu chuẩn &amp; Giám sát siêu dữ liệu</a:t>
-            </a:r>
-          </a:p>
-        </p:txBody>
-      </p:sp>
-      <p:sp>
-        <p:nvSpPr>
-          <p:cNvPr id="18" name="TextBox 17"/>
-          <p:cNvSpPr txBox="1"/>
-          <p:nvPr/>
-        </p:nvSpPr>
-        <p:spPr>
-          <a:xfrm>
-            <a:off x="6400800" y="3611880"/>
-            <a:ext cx="4846320" cy="2194560"/>
-          </a:xfrm>
-          <a:prstGeom prst="rect">
-            <a:avLst/>
-          </a:prstGeom>
-          <a:noFill/>
-        </p:spPr>
-        <p:txBody>
-          <a:bodyPr wrap="square">
-            <a:spAutoFit/>
-          </a:bodyPr>
-          <a:lstStyle/>
-          <a:p/>
-          <a:p>
-            <a:pPr>
-              <a:spcBef>
-                <a:spcPts val="400"/>
-              </a:spcBef>
-            </a:pPr>
-            <a:r>
-              <a:rPr b="1" sz="1000">
-                <a:solidFill>
-                  <a:srgbClr val="1E293B"/>
-                </a:solidFill>
-              </a:rPr>
-              <a:t>• Mạng phức hợp: </a:t>
-            </a:r>
-            <a:r>
-              <a:rPr sz="950">
-                <a:solidFill>
-                  <a:srgbClr val="475569"/>
-                </a:solidFill>
-              </a:rPr>
-              <a:t>Thông tin chảy qua nhiều thực thể: người dùng, ISP, cáp quang biển, đám mây.</a:t>
-            </a:r>
-          </a:p>
-          <a:p>
-            <a:pPr>
-              <a:spcBef>
-                <a:spcPts val="400"/>
-              </a:spcBef>
-            </a:pPr>
-            <a:r>
-              <a:rPr b="1" sz="1000">
-                <a:solidFill>
-                  <a:srgbClr val="1E293B"/>
-                </a:solidFill>
-              </a:rPr>
-              <a:t>• Đối thủ thể chế: </a:t>
-            </a:r>
-            <a:r>
-              <a:rPr sz="950">
-                <a:solidFill>
-                  <a:srgbClr val="475569"/>
-                </a:solidFill>
-              </a:rPr>
-              <a:t>NSA/Five Eyes tấn công chuỗi cung ứng, suy yếu chuẩn &amp; giám sát siêu dữ liệu.</a:t>
-            </a:r>
-          </a:p>
-          <a:p>
-            <a:pPr>
-              <a:spcBef>
-                <a:spcPts val="400"/>
-              </a:spcBef>
-            </a:pPr>
-            <a:r>
-              <a:rPr b="1" sz="1000">
-                <a:solidFill>
-                  <a:srgbClr val="1E293B"/>
-                </a:solidFill>
-              </a:rPr>
-              <a:t>• Mục tiêu hiện đại: </a:t>
-            </a:r>
-            <a:r>
-              <a:rPr sz="950">
-                <a:solidFill>
-                  <a:srgbClr val="475569"/>
-                </a:solidFill>
-              </a:rPr>
-              <a:t>Bảo vệ siêu dữ liệu (Mixnet), kháng kênh kề thời gian và kiểm soát lỗi nội bộ.</a:t>
-            </a:r>
-          </a:p>
-        </p:txBody>
-      </p:sp>
-      <p:sp>
-        <p:nvSpPr>
-          <p:cNvPr id="19" name="TextBox 18"/>
-          <p:cNvSpPr txBox="1"/>
-          <p:nvPr/>
-        </p:nvSpPr>
-        <p:spPr>
-          <a:xfrm>
-            <a:off x="731520" y="6217920"/>
-            <a:ext cx="10698480" cy="365760"/>
-          </a:xfrm>
-          <a:prstGeom prst="rect">
-            <a:avLst/>
-          </a:prstGeom>
-          <a:noFill/>
-        </p:spPr>
-        <p:txBody>
-          <a:bodyPr wrap="none">
-            <a:spAutoFit/>
-          </a:bodyPr>
-          <a:lstStyle/>
-          <a:p>
-            <a:pPr>
               <a:defRPr sz="1000" i="1">
                 <a:solidFill>
                   <a:srgbClr val="64748B"/>
@@ -9462,7 +8077,7 @@
               </a:defRPr>
             </a:pPr>
             <a:r>
-              <a:t>Sơ đồ tổng hợp dựa trên Shannon (1949) và Halpin (2025). [Mã nguồn sơ đồ draw.io lưu tại docs/diagram_slide_06_shannon.drawio]</a:t>
+              <a:t>Sơ đồ tổng hợp dựa trên Shannon (1949) và Harry Halpin (2025), Journal of Cybersecurity, tr. 3–5.</a:t>
             </a:r>
           </a:p>
         </p:txBody>

--- a/docs/Bao_Cao_Giua_Ky_DT05_Final.pptx
+++ b/docs/Bao_Cao_Giua_Ky_DT05_Final.pptx
@@ -3866,7 +3866,7 @@
                   <a:srgbClr val="475569"/>
                 </a:solidFill>
               </a:rPr>
-              <a:t>Thiết kế các thí nghiệm minh họa: sự bất lực của mã tuyến tính CRC32 trước kẻ thù toán học; can thiệp đường truyền Dolev-Yao; rò rỉ siêu dữ liệu kênh truyền.</a:t>
+              <a:t>Thiết kế các kịch bản kiểm thử: đối đầu toán học trên mã tuyến tính CRC32; can thiệp đường truyền Dolev-Yao; rò rỉ kênh kề thời gian so sánh chuỗi.</a:t>
             </a:r>
           </a:p>
           <a:p>
@@ -3904,7 +3904,7 @@
                   <a:srgbClr val="1E293B"/>
                 </a:solidFill>
               </a:rPr>
-              <a:t>• Báo cáo khoa học nghiêm túc: </a:t>
+              <a:t>• Kiểm toán khoa học: </a:t>
             </a:r>
             <a:r>
               <a:rPr sz="1050">
@@ -3912,7 +3912,7 @@
                   <a:srgbClr val="475569"/>
                 </a:solidFill>
               </a:rPr>
-              <a:t>Tất cả kết quả đo đạc được lưu vết kiểm toán tại file MIDTERM_CODE_AUDIT.md.</a:t>
+              <a:t>Tất cả quy trình kiểm toán mã nguồn và đối chiếu thực nghiệm được lưu vết kỹ thuật tại MIDTERM_CODE_AUDIT.md.</a:t>
             </a:r>
           </a:p>
         </p:txBody>
@@ -3947,7 +3947,7 @@
               </a:defRPr>
             </a:pPr>
             <a:r>
-              <a:t>Báo cáo phân định phương pháp luận của nhóm nghiên cứu đề tài DT005.</a:t>
+              <a:t>Báo cáo phân định phương pháp luận độc lập của nhóm nghiên cứu đề tài DT005.</a:t>
             </a:r>
           </a:p>
         </p:txBody>
@@ -4206,75 +4206,75 @@
           <a:p>
             <a:pPr>
               <a:spcAft>
-                <a:spcPts val="1000"/>
-              </a:spcAft>
-              <a:defRPr sz="1200" b="1">
-                <a:solidFill>
-                  <a:srgbClr val="0F172A"/>
-                </a:solidFill>
-              </a:defRPr>
-            </a:pPr>
-            <a:r>
-              <a:t>1. NHIỄU vs KẺ THÙ CHỦ ĐÍCH</a:t>
-            </a:r>
-          </a:p>
-          <a:p>
-            <a:pPr>
-              <a:defRPr sz="1050" b="1">
-                <a:solidFill>
-                  <a:srgbClr val="1E293B"/>
-                </a:solidFill>
-              </a:defRPr>
-            </a:pPr>
-            <a:r>
-              <a:t>Luận điểm bài báo Halpin:</a:t>
-            </a:r>
-          </a:p>
-          <a:p>
-            <a:pPr>
-              <a:spcAft>
                 <a:spcPts val="800"/>
               </a:spcAft>
-              <a:defRPr sz="950">
+              <a:defRPr sz="1150" b="1">
+                <a:solidFill>
+                  <a:srgbClr val="0F172A"/>
+                </a:solidFill>
+              </a:defRPr>
+            </a:pPr>
+            <a:r>
+              <a:t>1. NHIỄU vs ĐỐI THỦ CHỦ ĐÍCH</a:t>
+            </a:r>
+          </a:p>
+          <a:p>
+            <a:pPr>
+              <a:defRPr sz="1000" b="1">
+                <a:solidFill>
+                  <a:srgbClr val="1E293B"/>
+                </a:solidFill>
+              </a:defRPr>
+            </a:pPr>
+            <a:r>
+              <a:t>Luận điểm Halpin (Sec. 1–2):</a:t>
+            </a:r>
+          </a:p>
+          <a:p>
+            <a:pPr>
+              <a:spcAft>
+                <a:spcPts val="600"/>
+              </a:spcAft>
+              <a:defRPr sz="919">
                 <a:solidFill>
                   <a:srgbClr val="475569"/>
                 </a:solidFill>
               </a:defRPr>
             </a:pPr>
             <a:r>
-              <a:t>Mật mã học khác lý thuyết Shannon: đối thủ có chủ đích, không phải nhiễu ngẫu nhiên. Mã toàn vẹn tuyến tính CRC32 hoàn toàn bất lực.</a:t>
-            </a:r>
-          </a:p>
-          <a:p>
-            <a:pPr>
-              <a:defRPr sz="1050" b="1">
+              <a:t>Đối thủ là tác nhân có chủ đích, không phải nhiễu ngẫu nhiên. Mã kiểm tra lỗi tuyến tính được thiết kế cho nhiễu ngẫu nhiên, không phòng vệ được trước đối thủ chủ đích.</a:t>
+            </a:r>
+          </a:p>
+          <a:p>
+            <a:pPr>
+              <a:defRPr sz="1000" b="1">
                 <a:solidFill>
                   <a:srgbClr val="1E293B"/>
                 </a:solidFill>
               </a:defRPr>
             </a:pPr>
             <a:r>
-              <a:t>Minh họa thực nghiệm DT005:</a:t>
+              <a:t>Minh họa độc lập (DT005):</a:t>
             </a:r>
           </a:p>
           <a:p>
             <a:pPr>
               <a:spcAft>
-                <a:spcPts val="800"/>
+                <a:spcPts val="600"/>
               </a:spcAft>
-              <a:defRPr sz="950">
+              <a:defRPr sz="919">
                 <a:solidFill>
                   <a:srgbClr val="475569"/>
                 </a:solidFill>
               </a:defRPr>
             </a:pPr>
             <a:r>
-              <a:t>Giải hệ phương trình bù đại số GF(2), tìm 4 byte giả mạo qua mặt CRC32 100%. Hàm băm SHA-256 phát hiện thay đổi ngay lập tức.</a:t>
-            </a:r>
-          </a:p>
-          <a:p>
-            <a:pPr>
-              <a:defRPr sz="1050" b="1">
+              <a:t>Thử nghiệm kịch bản bù 4 byte GF(2): Kẻ tấn công giải hệ phương trình tuyến tính để qua mặt CRC32 trong tệp bị can thiệp; hàm băm phi tuyến SHA-256 phát hiện tức thì.</a:t>
+            </a:r>
+          </a:p>
+          <a:p>
+            <a:pPr>
+              <a:defRPr sz="1000" b="1">
                 <a:solidFill>
                   <a:srgbClr val="1E293B"/>
                 </a:solidFill>
@@ -4286,14 +4286,14 @@
           </a:p>
           <a:p>
             <a:pPr>
-              <a:defRPr sz="950">
+              <a:defRPr sz="919">
                 <a:solidFill>
                   <a:srgbClr val="64748B"/>
                 </a:solidFill>
               </a:defRPr>
             </a:pPr>
             <a:r>
-              <a:t>Chỉ minh họa tính phi tuyến của hàm băm; không chứng minh an toàn toàn diện cho toàn bộ hệ thống.</a:t>
+              <a:t>Chỉ minh họa tính phi tuyến của hàm băm trong kịch bản giả mạo đã kiểm thử; không kết luận CRC32 bất lực trong vai trò phát hiện lỗi ngẫu nhiên vật lý.</a:t>
             </a:r>
           </a:p>
         </p:txBody>
@@ -4367,75 +4367,75 @@
           <a:p>
             <a:pPr>
               <a:spcAft>
-                <a:spcPts val="1000"/>
-              </a:spcAft>
-              <a:defRPr sz="1200" b="1">
-                <a:solidFill>
-                  <a:srgbClr val="0F172A"/>
-                </a:solidFill>
-              </a:defRPr>
-            </a:pPr>
-            <a:r>
-              <a:t>2. NHẬP NHẰNG NÚT LÁ MERKLE</a:t>
-            </a:r>
-          </a:p>
-          <a:p>
-            <a:pPr>
-              <a:defRPr sz="1050" b="1">
-                <a:solidFill>
-                  <a:srgbClr val="1E293B"/>
-                </a:solidFill>
-              </a:defRPr>
-            </a:pPr>
-            <a:r>
-              <a:t>Luận điểm bài báo Halpin:</a:t>
-            </a:r>
-          </a:p>
-          <a:p>
-            <a:pPr>
-              <a:spcAft>
                 <a:spcPts val="800"/>
               </a:spcAft>
-              <a:defRPr sz="950">
+              <a:defRPr sz="1150" b="1">
+                <a:solidFill>
+                  <a:srgbClr val="0F172A"/>
+                </a:solidFill>
+              </a:defRPr>
+            </a:pPr>
+            <a:r>
+              <a:t>2. PHÂN TÁCH MIỀN NÚT LÁ (RFC 6962)</a:t>
+            </a:r>
+          </a:p>
+          <a:p>
+            <a:pPr>
+              <a:defRPr sz="1000" b="1">
+                <a:solidFill>
+                  <a:srgbClr val="1E293B"/>
+                </a:solidFill>
+              </a:defRPr>
+            </a:pPr>
+            <a:r>
+              <a:t>Gốc lý thuyết bài báo:</a:t>
+            </a:r>
+          </a:p>
+          <a:p>
+            <a:pPr>
+              <a:spcAft>
+                <a:spcPts val="600"/>
+              </a:spcAft>
+              <a:defRPr sz="919">
                 <a:solidFill>
                   <a:srgbClr val="475569"/>
                 </a:solidFill>
               </a:defRPr>
             </a:pPr>
             <a:r>
-              <a:t>Ghép chuỗi thô H(L || R) khiến kẻ thù có thể đánh tráo nút nhánh nội bộ thành nút lá, gây va chạm cấu trúc tầng cây.</a:t>
-            </a:r>
-          </a:p>
-          <a:p>
-            <a:pPr>
-              <a:defRPr sz="1050" b="1">
+              <a:t>Halpin nhấn mạnh điểm mù khi triển khai cấu trúc dữ liệu trong thực tế, nhưng KHÔNG trực tiếp đề cập cấu trúc cây Merkle hay kỹ thuật phân tách miền.</a:t>
+            </a:r>
+          </a:p>
+          <a:p>
+            <a:pPr>
+              <a:defRPr sz="1000" b="1">
                 <a:solidFill>
                   <a:srgbClr val="1E293B"/>
                 </a:solidFill>
               </a:defRPr>
             </a:pPr>
             <a:r>
-              <a:t>Minh họa thực nghiệm DT005:</a:t>
+              <a:t>Minh họa độc lập (DT005):</a:t>
             </a:r>
           </a:p>
           <a:p>
             <a:pPr>
               <a:spcAft>
-                <a:spcPts val="800"/>
+                <a:spcPts val="600"/>
               </a:spcAft>
-              <a:defRPr sz="950">
+              <a:defRPr sz="919">
                 <a:solidFill>
                   <a:srgbClr val="475569"/>
                 </a:solidFill>
               </a:defRPr>
             </a:pPr>
             <a:r>
-              <a:t>Cài đặt phân tách miền chuẩn RFC 6962: gắn tiền tố 0x00 cho nút lá và 0x01 cho nút nhánh để triệt tiêu hoàn toàn nhập nhằng.</a:t>
-            </a:r>
-          </a:p>
-          <a:p>
-            <a:pPr>
-              <a:defRPr sz="1050" b="1">
+              <a:t>Sinh viên chủ động mở rộng bài toán toàn vẹn: Cài đặt phân tách miền theo chuẩn IETF RFC 6962 (tiền tố byte 0x00 cho lá, 0x01 cho nhánh) để phòng ngừa va chạm cấu trúc tầng cây.</a:t>
+            </a:r>
+          </a:p>
+          <a:p>
+            <a:pPr>
+              <a:defRPr sz="1000" b="1">
                 <a:solidFill>
                   <a:srgbClr val="1E293B"/>
                 </a:solidFill>
@@ -4447,14 +4447,14 @@
           </a:p>
           <a:p>
             <a:pPr>
-              <a:defRPr sz="950">
+              <a:defRPr sz="919">
                 <a:solidFill>
                   <a:srgbClr val="64748B"/>
                 </a:solidFill>
               </a:defRPr>
             </a:pPr>
             <a:r>
-              <a:t>Chỉ giải quyết va chạm cấu trúc tầng cây Merkle; không loại trừ va chạm ngẫu nhiên 2^256 của SHA-256.</a:t>
+              <a:t>Kỹ thuật RFC 6962 do sinh viên tự nghiên cứu tích hợp, không phải đề xuất của Halpin; chỉ phòng ngừa va chạm cấu trúc, không thay đổi độ phức tạp 2^256 của SHA-256.</a:t>
             </a:r>
           </a:p>
         </p:txBody>
@@ -4528,75 +4528,75 @@
           <a:p>
             <a:pPr>
               <a:spcAft>
-                <a:spcPts val="1000"/>
-              </a:spcAft>
-              <a:defRPr sz="1200" b="1">
-                <a:solidFill>
-                  <a:srgbClr val="0F172A"/>
-                </a:solidFill>
-              </a:defRPr>
-            </a:pPr>
-            <a:r>
-              <a:t>3. KÊNH KỀ THỜI GIAN SO SÁNH</a:t>
-            </a:r>
-          </a:p>
-          <a:p>
-            <a:pPr>
-              <a:defRPr sz="1050" b="1">
-                <a:solidFill>
-                  <a:srgbClr val="1E293B"/>
-                </a:solidFill>
-              </a:defRPr>
-            </a:pPr>
-            <a:r>
-              <a:t>Luận điểm bài báo Halpin:</a:t>
-            </a:r>
-          </a:p>
-          <a:p>
-            <a:pPr>
-              <a:spcAft>
                 <a:spcPts val="800"/>
               </a:spcAft>
-              <a:defRPr sz="950">
+              <a:defRPr sz="1150" b="1">
+                <a:solidFill>
+                  <a:srgbClr val="0F172A"/>
+                </a:solidFill>
+              </a:defRPr>
+            </a:pPr>
+            <a:r>
+              <a:t>3. RÒ RỈ KÊNH KỀ THỜI GIAN</a:t>
+            </a:r>
+          </a:p>
+          <a:p>
+            <a:pPr>
+              <a:defRPr sz="1000" b="1">
+                <a:solidFill>
+                  <a:srgbClr val="1E293B"/>
+                </a:solidFill>
+              </a:defRPr>
+            </a:pPr>
+            <a:r>
+              <a:t>Luận điểm Halpin (Sec. 5):</a:t>
+            </a:r>
+          </a:p>
+          <a:p>
+            <a:pPr>
+              <a:spcAft>
+                <a:spcPts val="600"/>
+              </a:spcAft>
+              <a:defRPr sz="919">
                 <a:solidFill>
                   <a:srgbClr val="475569"/>
                 </a:solidFill>
               </a:defRPr>
             </a:pPr>
             <a:r>
-              <a:t>Lý thuyết xem mật mã là hàm toán học lý tưởng, nhưng thực tế việc dừng sớm (early-return) làm rò rỉ dữ liệu qua thời gian thực thi.</a:t>
-            </a:r>
-          </a:p>
-          <a:p>
-            <a:pPr>
-              <a:defRPr sz="1050" b="1">
+              <a:t>Mô hình toán học trừu tượng xem mật mã là hàm lý tưởng, nhưng thời gian thực thi thực tế làm rò rỉ dữ liệu bí mật (dẫn theo Paul Kocher 1996).</a:t>
+            </a:r>
+          </a:p>
+          <a:p>
+            <a:pPr>
+              <a:defRPr sz="1000" b="1">
                 <a:solidFill>
                   <a:srgbClr val="1E293B"/>
                 </a:solidFill>
               </a:defRPr>
             </a:pPr>
             <a:r>
-              <a:t>Minh họa thực nghiệm DT005:</a:t>
+              <a:t>Minh họa độc lập (DT005):</a:t>
             </a:r>
           </a:p>
           <a:p>
             <a:pPr>
               <a:spcAft>
-                <a:spcPts val="800"/>
+                <a:spcPts val="600"/>
               </a:spcAft>
-              <a:defRPr sz="950">
+              <a:defRPr sz="919">
                 <a:solidFill>
                   <a:srgbClr val="475569"/>
                 </a:solidFill>
               </a:defRPr>
             </a:pPr>
             <a:r>
-              <a:t>Đo đạc 5 vòng so sánh chuỗi tuần tự (lộ chênh lệch thời gian) so với hàm thời gian hằng số hmac.compare_digest triệt tiêu độ lệch.</a:t>
-            </a:r>
-          </a:p>
-          <a:p>
-            <a:pPr>
-              <a:defRPr sz="1050" b="1">
+              <a:t>Sinh viên xây dựng kịch bản kiểm thử đo đạc thời gian so sánh chuỗi tuần tự (dừng sớm khi gặp byte lệch) so với việc sử dụng hàm thời gian hằng số hmac.compare_digest.</a:t>
+            </a:r>
+          </a:p>
+          <a:p>
+            <a:pPr>
+              <a:defRPr sz="1000" b="1">
                 <a:solidFill>
                   <a:srgbClr val="1E293B"/>
                 </a:solidFill>
@@ -4608,14 +4608,14 @@
           </a:p>
           <a:p>
             <a:pPr>
-              <a:defRPr sz="950">
+              <a:defRPr sz="919">
                 <a:solidFill>
                   <a:srgbClr val="64748B"/>
                 </a:solidFill>
               </a:defRPr>
             </a:pPr>
             <a:r>
-              <a:t>Đo đạc trên máy tính đơn có nhiễu hệ điều hành; chỉ minh họa ở mức thư viện phần mềm, không phải phần cứng.</a:t>
+              <a:t>Đo đạc trên môi trường máy tính đơn có jitter hệ điều hành; chỉ minh họa rò rỉ logic ở mức phần mềm ứng dụng, không đại diện cho kênh kề phần cứng chuyên sâu.</a:t>
             </a:r>
           </a:p>
         </p:txBody>
@@ -4724,16 +4724,16 @@
         </p:nvSpPr>
         <p:spPr>
           <a:xfrm>
-            <a:off x="1371600" y="1371600"/>
-            <a:ext cx="9448495" cy="4114800"/>
+            <a:off x="731520" y="365760"/>
+            <a:ext cx="4114800" cy="320040"/>
           </a:xfrm>
           <a:prstGeom prst="roundRect">
             <a:avLst/>
           </a:prstGeom>
           <a:solidFill>
-            <a:srgbClr val="F8FAFC"/>
+            <a:srgbClr val="EFF6FF"/>
           </a:solidFill>
-          <a:ln>
+          <a:ln w="12700">
             <a:solidFill>
               <a:srgbClr val="BFDBFE"/>
             </a:solidFill>
@@ -4754,10 +4754,19 @@
           </a:fontRef>
         </p:style>
         <p:txBody>
-          <a:bodyPr rtlCol="0" anchor="ctr"/>
-          <a:lstStyle/>
-          <a:p>
-            <a:pPr algn="ctr"/>
+          <a:bodyPr rtlCol="0" anchor="ctr" wrap="square"/>
+          <a:lstStyle/>
+          <a:p>
+            <a:pPr algn="ctr">
+              <a:defRPr sz="1000" b="1">
+                <a:solidFill>
+                  <a:srgbClr val="1D4ED8"/>
+                </a:solidFill>
+              </a:defRPr>
+            </a:pPr>
+            <a:r>
+              <a:t>MINH HỌA THỰC NGHIỆM ĐỘC LẬP (LIVE DEMO)</a:t>
+            </a:r>
           </a:p>
         </p:txBody>
       </p:sp>
@@ -4769,8 +4778,8 @@
         </p:nvSpPr>
         <p:spPr>
           <a:xfrm>
-            <a:off x="1645920" y="1645920"/>
-            <a:ext cx="8899855" cy="3566160"/>
+            <a:off x="731520" y="749808"/>
+            <a:ext cx="10698480" cy="502920"/>
           </a:xfrm>
           <a:prstGeom prst="rect">
             <a:avLst/>
@@ -4778,80 +4787,114 @@
           <a:noFill/>
         </p:spPr>
         <p:txBody>
-          <a:bodyPr wrap="square">
+          <a:bodyPr wrap="square" lIns="0" rIns="0" tIns="0" bIns="0">
             <a:spAutoFit/>
           </a:bodyPr>
           <a:lstStyle/>
           <a:p>
-            <a:pPr algn="ctr">
-              <a:defRPr sz="1200" b="1">
-                <a:solidFill>
-                  <a:srgbClr val="1E40AF"/>
-                </a:solidFill>
-              </a:defRPr>
-            </a:pPr>
-            <a:r>
-              <a:t>DIỄN TẬP AN NINH MẠNG TRỰC TIẾP</a:t>
-            </a:r>
-          </a:p>
-          <a:p>
-            <a:pPr algn="ctr">
-              <a:spcBef>
-                <a:spcPts val="1400"/>
-              </a:spcBef>
-              <a:defRPr sz="6400" b="1">
+            <a:pPr>
+              <a:defRPr sz="2100" b="1">
                 <a:solidFill>
                   <a:srgbClr val="0F172A"/>
                 </a:solidFill>
               </a:defRPr>
             </a:pPr>
             <a:r>
-              <a:t>DEMO</a:t>
-            </a:r>
-          </a:p>
-          <a:p>
-            <a:pPr algn="ctr">
-              <a:spcBef>
-                <a:spcPts val="1400"/>
-              </a:spcBef>
-              <a:defRPr sz="1500" b="1">
-                <a:solidFill>
-                  <a:srgbClr val="1E293B"/>
-                </a:solidFill>
-              </a:defRPr>
-            </a:pPr>
-            <a:r>
-              <a:t>HỆ THỐNG GIÁM SÁT TOÀN VẸN TỆP &amp; MÔ HÌNH ĐỐI KHÁNG RED TEAM VS BLUE TEAM</a:t>
-            </a:r>
-          </a:p>
-          <a:p>
-            <a:pPr algn="ctr">
-              <a:spcBef>
-                <a:spcPts val="1000"/>
-              </a:spcBef>
-              <a:defRPr sz="1100" i="1">
+              <a:t>GIAO DIỆN BẢNG ĐIỀU KHIỂN GIÁM SÁT TOÀN VẸN (BLUE TEAM)</a:t>
+            </a:r>
+          </a:p>
+        </p:txBody>
+      </p:sp>
+      <p:sp>
+        <p:nvSpPr>
+          <p:cNvPr id="5" name="TextBox 4"/>
+          <p:cNvSpPr txBox="1"/>
+          <p:nvPr/>
+        </p:nvSpPr>
+        <p:spPr>
+          <a:xfrm>
+            <a:off x="731520" y="1261872"/>
+            <a:ext cx="10698480" cy="320040"/>
+          </a:xfrm>
+          <a:prstGeom prst="rect">
+            <a:avLst/>
+          </a:prstGeom>
+          <a:noFill/>
+        </p:spPr>
+        <p:txBody>
+          <a:bodyPr wrap="square" lIns="0" rIns="0" tIns="0" bIns="0">
+            <a:spAutoFit/>
+          </a:bodyPr>
+          <a:lstStyle/>
+          <a:p>
+            <a:pPr>
+              <a:defRPr sz="1200">
                 <a:solidFill>
                   <a:srgbClr val="475569"/>
                 </a:solidFill>
               </a:defRPr>
             </a:pPr>
             <a:r>
-              <a:t>Minh họa thực nghiệm các luận điểm lý thuyết: Can thiệp dữ liệu, Nhập nhằng nút lá RFC 6962, và So sánh chuỗi thời gian hằng số</a:t>
-            </a:r>
-          </a:p>
-          <a:p>
-            <a:pPr algn="ctr">
-              <a:spcBef>
-                <a:spcPts val="1200"/>
-              </a:spcBef>
-              <a:defRPr sz="1050" b="1">
-                <a:solidFill>
-                  <a:srgbClr val="1E40AF"/>
-                </a:solidFill>
-              </a:defRPr>
-            </a:pPr>
-            <a:r>
-              <a:t>Blue Team Dashboard: http://localhost:8080   |   Red Team Adversary Engine: http://localhost:8081</a:t>
+              <a:t>Ảnh chụp thực tế từ hệ thống: Bắt quả tang tệp tin Resume/Resume.csv bị sửa đổi tại Port 8080</a:t>
+            </a:r>
+          </a:p>
+        </p:txBody>
+      </p:sp>
+      <p:pic>
+        <p:nvPicPr>
+          <p:cNvPr id="6" name="Picture 5" descr="dashboard_real_results.png"/>
+          <p:cNvPicPr>
+            <a:picLocks noChangeAspect="1"/>
+          </p:cNvPicPr>
+          <p:nvPr/>
+        </p:nvPicPr>
+        <p:blipFill>
+          <a:blip r:embed="rId2"/>
+          <a:stretch>
+            <a:fillRect/>
+          </a:stretch>
+        </p:blipFill>
+        <p:spPr>
+          <a:xfrm>
+            <a:off x="1432407" y="1691640"/>
+            <a:ext cx="9326880" cy="4361688"/>
+          </a:xfrm>
+          <a:prstGeom prst="rect">
+            <a:avLst/>
+          </a:prstGeom>
+        </p:spPr>
+      </p:pic>
+      <p:sp>
+        <p:nvSpPr>
+          <p:cNvPr id="7" name="TextBox 6"/>
+          <p:cNvSpPr txBox="1"/>
+          <p:nvPr/>
+        </p:nvSpPr>
+        <p:spPr>
+          <a:xfrm>
+            <a:off x="731520" y="6217920"/>
+            <a:ext cx="10698480" cy="365760"/>
+          </a:xfrm>
+          <a:prstGeom prst="rect">
+            <a:avLst/>
+          </a:prstGeom>
+          <a:noFill/>
+        </p:spPr>
+        <p:txBody>
+          <a:bodyPr wrap="none">
+            <a:spAutoFit/>
+          </a:bodyPr>
+          <a:lstStyle/>
+          <a:p>
+            <a:pPr>
+              <a:defRPr sz="1000" i="1">
+                <a:solidFill>
+                  <a:srgbClr val="64748B"/>
+                </a:solidFill>
+              </a:defRPr>
+            </a:pPr>
+            <a:r>
+              <a:t>Ảnh chụp màn hình thực tế từ phiên chạy thử nghiệm của đề tài; không dùng hình ảnh giả lập.</a:t>
             </a:r>
           </a:p>
         </p:txBody>
@@ -4966,7 +5009,7 @@
               </a:defRPr>
             </a:pPr>
             <a:r>
-              <a:t>SƠ ĐỒ 5: KIẾN TRÚC ĐỐI KHÁNG THỰC TẾ &amp; BẰNG CHỨNG KIỂM ĐỊNH</a:t>
+              <a:t>SƠ ĐỒ 5: KIẾN TRÚC DIỄN TẬP ĐỐI KHÁNG (DEMO ARCHITECTURE)</a:t>
             </a:r>
           </a:p>
         </p:txBody>
@@ -5036,7 +5079,7 @@
               </a:defRPr>
             </a:pPr>
             <a:r>
-              <a:t>Mô hình đối kháng thực tế 2 màn hình trên tập dữ liệu kaggle_dataset (2.483 tệp tin)</a:t>
+              <a:t>Mô hình đối kháng thực tế 2 màn hình trên tập dữ liệu kaggle_dataset (2.485 tệp tin / ~112,81 MiB theo benchmark)</a:t>
             </a:r>
           </a:p>
         </p:txBody>
@@ -5095,7 +5138,7 @@
               </a:defRPr>
             </a:pPr>
             <a:r>
-              <a:t>Sơ đồ kiến trúc kiểm thử đối kháng do sinh viên tự thiết kế minh họa các luận điểm của Halpin (2025).</a:t>
+              <a:t>Sơ đồ kiến trúc diễn tập đối kháng độc lập do sinh viên thiết kế minh họa các khái niệm an ninh.</a:t>
             </a:r>
           </a:p>
         </p:txBody>
@@ -5280,7 +5323,7 @@
               </a:defRPr>
             </a:pPr>
             <a:r>
-              <a:t>Tổng kết các đóng góp lý thuyết của Halpin và lộ trình kỹ thuật cho giai đoạn cuối kỳ</a:t>
+              <a:t>Tổng kết các đóng góp lý thuyết của Halpin và định hướng nghiên cứu tiếp theo</a:t>
             </a:r>
           </a:p>
         </p:txBody>
@@ -5532,7 +5575,7 @@
                   <a:srgbClr val="475569"/>
                 </a:solidFill>
               </a:rPr>
-              <a:t>Hoàn thành thẩm định học thuật sâu sắc toàn văn bài báo gốc (17 trang PDF), phân tích đầy đủ 7 mục nội dung và xây dựng bộ diễn tập minh họa thực nghiệm sống động phục vụ báo cáo.</a:t>
+              <a:t>Hoàn thành thẩm định học thuật sâu sắc toàn văn bài báo gốc (17 trang PDF), phân tích đầy đủ 7 mục nội dung và làm rõ khoảng cách giữa lý thuyết trừu tượng với an ninh thực tế.</a:t>
             </a:r>
           </a:p>
           <a:p>
@@ -5555,7 +5598,7 @@
                   <a:srgbClr val="475569"/>
                 </a:solidFill>
               </a:rPr>
-              <a:t>Không ngụy tạo số liệu tác giả; phân định rạch ròi giữa công trình triết học của Halpin và các thử nghiệm độc lập của sinh viên.</a:t>
+              <a:t>Không ngụy tạo số liệu tác giả; phân định rõ ràng giữa công trình khảo cứu triết học của Halpin và các kịch bản thực nghiệm minh họa độc lập do sinh viên tự xây dựng.</a:t>
             </a:r>
           </a:p>
           <a:p>
@@ -5570,7 +5613,7 @@
                   <a:srgbClr val="1E293B"/>
                 </a:solidFill>
               </a:rPr>
-              <a:t>• Lộ trình nghiên cứu cuối kỳ: </a:t>
+              <a:t>• Định hướng nghiên cứu cuối kỳ: </a:t>
             </a:r>
             <a:r>
               <a:rPr sz="1050">
@@ -5578,7 +5621,7 @@
                   <a:srgbClr val="475569"/>
                 </a:solidFill>
               </a:rPr>
-              <a:t>Đề xuất phát triển chuyên sâu giải pháp tối ưu hóa cấu trúc cây Merkle phân cấp (HD-Merkle Dirty-Path Caching, nén CompactProof O(1)) làm đóng góp kỹ thuật trọng tâm cho đồ án cuối kỳ.</a:t>
+              <a:t>Tiếp tục nghiên cứu và hoàn thiện mô hình cấu trúc cây phân cấp tối ưu cho bài toán kiểm tra toàn vẹn dữ liệu, tiến hành đo đạc và đánh giá thực nghiệm toàn diện.</a:t>
             </a:r>
           </a:p>
         </p:txBody>
@@ -5613,7 +5656,7 @@
               </a:defRPr>
             </a:pPr>
             <a:r>
-              <a:t>Tài liệu tham khảo chính: [1] H. Halpin, Oxford J. Cybersec., 2025 (DOI: 10.1093/cybsec/tyaf006); [2] Shannon (1949); [3] Goldwasser-Micali (1984); [4] Dolev-Yao (1983); [5] Kocher (1996); [6] RFC 6962 (2013).</a:t>
+              <a:t>Tài liệu tham khảo chính: Halpin (2025), Shannon (1949), Goldwasser-Micali (1984), Dolev-Yao (1983), Kocher (1996), RFC 6962.</a:t>
             </a:r>
           </a:p>
         </p:txBody>
@@ -7085,7 +7128,7 @@
                   <a:srgbClr val="475569"/>
                 </a:solidFill>
               </a:rPr>
-              <a:t>Bí mật không vĩnh cửu. Không có hệ thống nào tuyệt đối; bí mật phụ thuộc vào năng lực tính toán và thời gian của đối thủ.</a:t>
+              <a:t>Bí mật không tồn tại tự thân; nó là mối quan hệ giữa nhóm người giữ bí mật và thế giới bên ngoài trong một khoảng thời gian.</a:t>
             </a:r>
           </a:p>
           <a:p>
@@ -7108,7 +7151,7 @@
                   <a:srgbClr val="475569"/>
                 </a:solidFill>
               </a:rPr>
-              <a:t>Bản mã là tri thức công cộng (public); nhưng ý nghĩa bản rõ chỉ có thể thành tri thức phổ thông nếu có khóa.</a:t>
+              <a:t>Common Knowledge (Lewis): Mọi tác nhân đều biết và tin trạng thái sự việc. Public Knowledge: Thông tin mà bất kỳ ai cũng có tiềm năng tiếp cận (như khi bí mật bị rò rỉ - leak).</a:t>
             </a:r>
           </a:p>
         </p:txBody>
@@ -7422,7 +7465,7 @@
                   <a:srgbClr val="475569"/>
                 </a:solidFill>
               </a:rPr>
-              <a:t>Claude Shannon hình thức hóa mật mã học bằng xác suất; định nghĩa Bí mật hoàn hảo (OTP). Giả định sai lệch do 'Nhiễu ngẫu nhiên'.</a:t>
+              <a:t>Mô hình truyền thông bảo mật điểm - điểm; định nghĩa Bí mật hoàn hảo H(K) &gt;= H(M). Giới hạn: Giản lược đối thủ thành kẻ nghe lén trên kênh trừu tượng, bỏ qua chi phí phân phối khóa và thực tế xã hội - kỹ thuật.</a:t>
             </a:r>
           </a:p>
         </p:txBody>
@@ -9259,7 +9302,7 @@
               </a:defRPr>
             </a:pPr>
             <a:r>
-              <a:t>Tấn công kênh kề (Timing Attack - Kocher 1996), phân tích lưu lượng siêu dữ liệu, tấn công tiền ảnh cấp hai cấu trúc (Node-Leaf Confusion).</a:t>
+              <a:t>Tấn công kênh kề (Timing Attack - Kocher 1996), phân tích độ dài và lưu lượng siêu dữ liệu (Traffic Analysis), khai thác lỗi cài đặt phần mềm và quản lý (Anderson 2001).</a:t>
             </a:r>
           </a:p>
         </p:txBody>

--- a/docs/Bao_Cao_Giua_Ky_DT05_Final.pptx
+++ b/docs/Bao_Cao_Giua_Ky_DT05_Final.pptx
@@ -4688,7 +4688,7 @@
             <a:avLst/>
           </a:prstGeom>
           <a:solidFill>
-            <a:srgbClr val="FFFFFF"/>
+            <a:srgbClr val="F8FAFC"/>
           </a:solidFill>
           <a:ln>
             <a:noFill/>
@@ -4718,68 +4718,14 @@
       </p:sp>
       <p:sp>
         <p:nvSpPr>
-          <p:cNvPr id="3" name="Rounded Rectangle 2"/>
-          <p:cNvSpPr/>
-          <p:nvPr/>
-        </p:nvSpPr>
-        <p:spPr>
-          <a:xfrm>
-            <a:off x="731520" y="365760"/>
-            <a:ext cx="4114800" cy="320040"/>
-          </a:xfrm>
-          <a:prstGeom prst="roundRect">
-            <a:avLst/>
-          </a:prstGeom>
-          <a:solidFill>
-            <a:srgbClr val="EFF6FF"/>
-          </a:solidFill>
-          <a:ln w="12700">
-            <a:solidFill>
-              <a:srgbClr val="BFDBFE"/>
-            </a:solidFill>
-          </a:ln>
-        </p:spPr>
-        <p:style>
-          <a:lnRef idx="1">
-            <a:schemeClr val="accent1"/>
-          </a:lnRef>
-          <a:fillRef idx="3">
-            <a:schemeClr val="accent1"/>
-          </a:fillRef>
-          <a:effectRef idx="2">
-            <a:schemeClr val="accent1"/>
-          </a:effectRef>
-          <a:fontRef idx="minor">
-            <a:schemeClr val="lt1"/>
-          </a:fontRef>
-        </p:style>
-        <p:txBody>
-          <a:bodyPr rtlCol="0" anchor="ctr" wrap="square"/>
-          <a:lstStyle/>
-          <a:p>
-            <a:pPr algn="ctr">
-              <a:defRPr sz="1000" b="1">
-                <a:solidFill>
-                  <a:srgbClr val="1D4ED8"/>
-                </a:solidFill>
-              </a:defRPr>
-            </a:pPr>
-            <a:r>
-              <a:t>MINH HỌA THỰC NGHIỆM ĐỘC LẬP (LIVE DEMO)</a:t>
-            </a:r>
-          </a:p>
-        </p:txBody>
-      </p:sp>
-      <p:sp>
-        <p:nvSpPr>
-          <p:cNvPr id="4" name="TextBox 3"/>
+          <p:cNvPr id="3" name="TextBox 2"/>
           <p:cNvSpPr txBox="1"/>
           <p:nvPr/>
         </p:nvSpPr>
         <p:spPr>
           <a:xfrm>
-            <a:off x="731520" y="749808"/>
-            <a:ext cx="10698480" cy="502920"/>
+            <a:off x="1828800" y="2377440"/>
+            <a:ext cx="8534095" cy="2011680"/>
           </a:xfrm>
           <a:prstGeom prst="rect">
             <a:avLst/>
@@ -4787,114 +4733,21 @@
           <a:noFill/>
         </p:spPr>
         <p:txBody>
-          <a:bodyPr wrap="square" lIns="0" rIns="0" tIns="0" bIns="0">
+          <a:bodyPr wrap="square">
             <a:spAutoFit/>
           </a:bodyPr>
           <a:lstStyle/>
           <a:p>
-            <a:pPr>
-              <a:defRPr sz="2100" b="1">
-                <a:solidFill>
-                  <a:srgbClr val="0F172A"/>
-                </a:solidFill>
-              </a:defRPr>
-            </a:pPr>
-            <a:r>
-              <a:t>GIAO DIỆN BẢNG ĐIỀU KHIỂN GIÁM SÁT TOÀN VẸN (BLUE TEAM)</a:t>
-            </a:r>
-          </a:p>
-        </p:txBody>
-      </p:sp>
-      <p:sp>
-        <p:nvSpPr>
-          <p:cNvPr id="5" name="TextBox 4"/>
-          <p:cNvSpPr txBox="1"/>
-          <p:nvPr/>
-        </p:nvSpPr>
-        <p:spPr>
-          <a:xfrm>
-            <a:off x="731520" y="1261872"/>
-            <a:ext cx="10698480" cy="320040"/>
-          </a:xfrm>
-          <a:prstGeom prst="rect">
-            <a:avLst/>
-          </a:prstGeom>
-          <a:noFill/>
-        </p:spPr>
-        <p:txBody>
-          <a:bodyPr wrap="square" lIns="0" rIns="0" tIns="0" bIns="0">
-            <a:spAutoFit/>
-          </a:bodyPr>
-          <a:lstStyle/>
-          <a:p>
-            <a:pPr>
-              <a:defRPr sz="1200">
-                <a:solidFill>
-                  <a:srgbClr val="475569"/>
-                </a:solidFill>
-              </a:defRPr>
-            </a:pPr>
-            <a:r>
-              <a:t>Ảnh chụp thực tế từ hệ thống: Bắt quả tang tệp tin Resume/Resume.csv bị sửa đổi tại Port 8080</a:t>
-            </a:r>
-          </a:p>
-        </p:txBody>
-      </p:sp>
-      <p:pic>
-        <p:nvPicPr>
-          <p:cNvPr id="6" name="Picture 5" descr="dashboard_real_results.png"/>
-          <p:cNvPicPr>
-            <a:picLocks noChangeAspect="1"/>
-          </p:cNvPicPr>
-          <p:nvPr/>
-        </p:nvPicPr>
-        <p:blipFill>
-          <a:blip r:embed="rId2"/>
-          <a:stretch>
-            <a:fillRect/>
-          </a:stretch>
-        </p:blipFill>
-        <p:spPr>
-          <a:xfrm>
-            <a:off x="1432407" y="1691640"/>
-            <a:ext cx="9326880" cy="4361688"/>
-          </a:xfrm>
-          <a:prstGeom prst="rect">
-            <a:avLst/>
-          </a:prstGeom>
-        </p:spPr>
-      </p:pic>
-      <p:sp>
-        <p:nvSpPr>
-          <p:cNvPr id="7" name="TextBox 6"/>
-          <p:cNvSpPr txBox="1"/>
-          <p:nvPr/>
-        </p:nvSpPr>
-        <p:spPr>
-          <a:xfrm>
-            <a:off x="731520" y="6217920"/>
-            <a:ext cx="10698480" cy="365760"/>
-          </a:xfrm>
-          <a:prstGeom prst="rect">
-            <a:avLst/>
-          </a:prstGeom>
-          <a:noFill/>
-        </p:spPr>
-        <p:txBody>
-          <a:bodyPr wrap="none">
-            <a:spAutoFit/>
-          </a:bodyPr>
-          <a:lstStyle/>
-          <a:p>
-            <a:pPr>
-              <a:defRPr sz="1000" i="1">
-                <a:solidFill>
-                  <a:srgbClr val="64748B"/>
-                </a:solidFill>
-              </a:defRPr>
-            </a:pPr>
-            <a:r>
-              <a:t>Ảnh chụp màn hình thực tế từ phiên chạy thử nghiệm của đề tài; không dùng hình ảnh giả lập.</a:t>
+            <a:pPr algn="ctr">
+              <a:defRPr sz="8800" b="1">
+                <a:solidFill>
+                  <a:srgbClr val="1E40AF"/>
+                </a:solidFill>
+                <a:latin typeface="Calibri"/>
+              </a:defRPr>
+            </a:pPr>
+            <a:r>
+              <a:t>DEMO</a:t>
             </a:r>
           </a:p>
         </p:txBody>

--- a/docs/Bao_Cao_Giua_Ky_DT05_Final.pptx
+++ b/docs/Bao_Cao_Giua_Ky_DT05_Final.pptx
@@ -3568,7 +3568,7 @@
               </a:defRPr>
             </a:pPr>
             <a:r>
-              <a:t>Làm rõ tính khả thi tái lập đối với một công trình triết học và định hướng thí nghiệm độc lập</a:t>
+              <a:t>Làm rõ tính khả thi tái lập đối với công trình triết học và định hướng thí nghiệm độc lập</a:t>
             </a:r>
           </a:p>
         </p:txBody>
@@ -3648,13 +3648,13 @@
               </a:defRPr>
             </a:pPr>
             <a:r>
-              <a:t>1. Đánh Giá Khả Năng Tái Lập (Replication Feasibility)</a:t>
+              <a:t>1. Đặc Thù Bài Báo &amp; Tính Trung Thực Khoa Học</a:t>
             </a:r>
           </a:p>
           <a:p>
             <a:pPr>
               <a:spcBef>
-                <a:spcPts val="800"/>
+                <a:spcPts val="1200"/>
               </a:spcBef>
             </a:pPr>
             <a:r>
@@ -3663,7 +3663,7 @@
                   <a:srgbClr val="1E293B"/>
                 </a:solidFill>
               </a:rPr>
-              <a:t>• Bản chất công trình: </a:t>
+              <a:t>• Khảo luận triết học thuần túy: </a:t>
             </a:r>
             <a:r>
               <a:rPr sz="1050">
@@ -3671,13 +3671,13 @@
                   <a:srgbClr val="475569"/>
                 </a:solidFill>
               </a:rPr>
-              <a:t>Bài báo của TS. Harry Halpin là một luận văn tổng quan triết học và phân tích nhận thức luận, không phải là một công trình kỹ thuật phần mềm.</a:t>
+              <a:t>Bài báo của TS. Harry Halpin là nghiên cứu nhận thức luận, hoàn toàn không có mã nguồn, không có tập dữ liệu hay bảng đo benchmark.</a:t>
             </a:r>
           </a:p>
           <a:p>
             <a:pPr>
               <a:spcBef>
-                <a:spcPts val="800"/>
+                <a:spcPts val="1200"/>
               </a:spcBef>
             </a:pPr>
             <a:r>
@@ -3686,7 +3686,7 @@
                   <a:srgbClr val="1E293B"/>
                 </a:solidFill>
               </a:rPr>
-              <a:t>• Không có tài nguyên phần mềm: </a:t>
+              <a:t>• Không tuyên bố sai lệch: </a:t>
             </a:r>
             <a:r>
               <a:rPr sz="1050">
@@ -3694,53 +3694,7 @@
                   <a:srgbClr val="475569"/>
                 </a:solidFill>
               </a:rPr>
-              <a:t>Bài báo HOÀN TOÀN KHÔNG có mã nguồn triển khai, không có tập dữ liệu thực nghiệm, không có các bảng đo thời gian (ms) hay dung lượng benchmark.</a:t>
-            </a:r>
-          </a:p>
-          <a:p>
-            <a:pPr>
-              <a:spcBef>
-                <a:spcPts val="800"/>
-              </a:spcBef>
-            </a:pPr>
-            <a:r>
-              <a:rPr b="1" sz="1100">
-                <a:solidFill>
-                  <a:srgbClr val="1E293B"/>
-                </a:solidFill>
-              </a:rPr>
-              <a:t>• Phương pháp thẩm định: </a:t>
-            </a:r>
-            <a:r>
-              <a:rPr sz="1050">
-                <a:solidFill>
-                  <a:srgbClr val="475569"/>
-                </a:solidFill>
-              </a:rPr>
-              <a:t>Nhóm sinh viên thực hiện thẩm định học thuật (Scholarly Audit) đối chiếu toàn bộ 17 trang bản in PDF, 7 mục nội dung và 134 tài liệu tham khảo.</a:t>
-            </a:r>
-          </a:p>
-          <a:p>
-            <a:pPr>
-              <a:spcBef>
-                <a:spcPts val="800"/>
-              </a:spcBef>
-            </a:pPr>
-            <a:r>
-              <a:rPr b="1" sz="1100">
-                <a:solidFill>
-                  <a:srgbClr val="1E293B"/>
-                </a:solidFill>
-              </a:rPr>
-              <a:t>• Tính trung thực học thuật: </a:t>
-            </a:r>
-            <a:r>
-              <a:rPr sz="1050">
-                <a:solidFill>
-                  <a:srgbClr val="475569"/>
-                </a:solidFill>
-              </a:rPr>
-              <a:t>Không bịa đặt số liệu gốc của tác giả; không tuyên bố 'tái lập 100% benchmark bài báo' khi tác giả không công bố benchmark.</a:t>
+              <a:t>Nhóm thẩm định toàn văn 17 trang PDF và 134 tài liệu tham khảo; tuyệt đối không bịa đặt số liệu hay tuyên bố 'tái lập 100% benchmark' của tác giả.</a:t>
             </a:r>
           </a:p>
         </p:txBody>
@@ -3826,7 +3780,7 @@
           <a:p>
             <a:pPr>
               <a:spcBef>
-                <a:spcPts val="800"/>
+                <a:spcPts val="1200"/>
               </a:spcBef>
             </a:pPr>
             <a:r>
@@ -3835,7 +3789,7 @@
                   <a:srgbClr val="1E293B"/>
                 </a:solidFill>
               </a:rPr>
-              <a:t>• Mục tiêu thực nghiệm: </a:t>
+              <a:t>• Minh họa trực quan luận điểm: </a:t>
             </a:r>
             <a:r>
               <a:rPr sz="1050">
@@ -3843,13 +3797,13 @@
                   <a:srgbClr val="475569"/>
                 </a:solidFill>
               </a:rPr>
-              <a:t>Sinh viên tự xây dựng hệ thống kiểm tra toàn vẹn tệp nhằm chuyển hóa các luận điểm lý thuyết trừu tượng của Halpin thành các kịch bản quan sát được.</a:t>
+              <a:t>Sinh viên tự phát triển hệ thống kiểm tra toàn vẹn tệp để đưa các luận điểm đối kháng trừu tượng của Halpin vào kiểm chứng thực nghiệm.</a:t>
             </a:r>
           </a:p>
           <a:p>
             <a:pPr>
               <a:spcBef>
-                <a:spcPts val="800"/>
+                <a:spcPts val="1200"/>
               </a:spcBef>
             </a:pPr>
             <a:r>
@@ -3858,7 +3812,7 @@
                   <a:srgbClr val="1E293B"/>
                 </a:solidFill>
               </a:rPr>
-              <a:t>• Minh họa trực quan: </a:t>
+              <a:t>• Phân định ranh giới rạch ròi: </a:t>
             </a:r>
             <a:r>
               <a:rPr sz="1050">
@@ -3866,53 +3820,7 @@
                   <a:srgbClr val="475569"/>
                 </a:solidFill>
               </a:rPr>
-              <a:t>Thiết kế các kịch bản kiểm thử: đối đầu toán học trên mã tuyến tính CRC32; can thiệp đường truyền Dolev-Yao; rò rỉ kênh kề thời gian so sánh chuỗi.</a:t>
-            </a:r>
-          </a:p>
-          <a:p>
-            <a:pPr>
-              <a:spcBef>
-                <a:spcPts val="800"/>
-              </a:spcBef>
-            </a:pPr>
-            <a:r>
-              <a:rPr b="1" sz="1100">
-                <a:solidFill>
-                  <a:srgbClr val="1E293B"/>
-                </a:solidFill>
-              </a:rPr>
-              <a:t>• Phân định ranh giới rõ ràng: </a:t>
-            </a:r>
-            <a:r>
-              <a:rPr sz="1050">
-                <a:solidFill>
-                  <a:srgbClr val="475569"/>
-                </a:solidFill>
-              </a:rPr>
-              <a:t>Mã nguồn và hệ thống kiểm tra toàn vẹn là đóng góp kỹ thuật độc lập của sinh viên; không được nhầm lẫn là thuật toán do Halpin đề xuất.</a:t>
-            </a:r>
-          </a:p>
-          <a:p>
-            <a:pPr>
-              <a:spcBef>
-                <a:spcPts val="800"/>
-              </a:spcBef>
-            </a:pPr>
-            <a:r>
-              <a:rPr b="1" sz="1100">
-                <a:solidFill>
-                  <a:srgbClr val="1E293B"/>
-                </a:solidFill>
-              </a:rPr>
-              <a:t>• Kiểm toán khoa học: </a:t>
-            </a:r>
-            <a:r>
-              <a:rPr sz="1050">
-                <a:solidFill>
-                  <a:srgbClr val="475569"/>
-                </a:solidFill>
-              </a:rPr>
-              <a:t>Tất cả quy trình kiểm toán mã nguồn và đối chiếu thực nghiệm được lưu vết kỹ thuật tại MIDTERM_CODE_AUDIT.md.</a:t>
+              <a:t>Mã nguồn và kịch bản đối kháng là sản phẩm độc lập của sinh viên, không phải thuật toán của Halpin (lưu vết tại MIDTERM_CODE_AUDIT.md).</a:t>
             </a:r>
           </a:p>
         </p:txBody>
@@ -4235,14 +4143,14 @@
               <a:spcAft>
                 <a:spcPts val="600"/>
               </a:spcAft>
-              <a:defRPr sz="919">
+              <a:defRPr sz="950">
                 <a:solidFill>
                   <a:srgbClr val="475569"/>
                 </a:solidFill>
               </a:defRPr>
             </a:pPr>
             <a:r>
-              <a:t>Đối thủ là tác nhân có chủ đích, không phải nhiễu ngẫu nhiên. Mã kiểm tra lỗi tuyến tính được thiết kế cho nhiễu ngẫu nhiên, không phòng vệ được trước đối thủ chủ đích.</a:t>
+              <a:t>Mã kiểm tra tuyến tính chỉ bắt lỗi ngẫu nhiên, không cản được đối thủ có chủ đích.</a:t>
             </a:r>
           </a:p>
           <a:p>
@@ -4262,14 +4170,14 @@
               <a:spcAft>
                 <a:spcPts val="600"/>
               </a:spcAft>
-              <a:defRPr sz="919">
+              <a:defRPr sz="950">
                 <a:solidFill>
                   <a:srgbClr val="475569"/>
                 </a:solidFill>
               </a:defRPr>
             </a:pPr>
             <a:r>
-              <a:t>Thử nghiệm kịch bản bù 4 byte GF(2): Kẻ tấn công giải hệ phương trình tuyến tính để qua mặt CRC32 trong tệp bị can thiệp; hàm băm phi tuyến SHA-256 phát hiện tức thì.</a:t>
+              <a:t>Giải hệ phương trình GF(2) bù 4 byte qua mặt CRC32; SHA-256 phát hiện ngay nhờ tính phi tuyến.</a:t>
             </a:r>
           </a:p>
           <a:p>
@@ -4286,14 +4194,14 @@
           </a:p>
           <a:p>
             <a:pPr>
-              <a:defRPr sz="919">
+              <a:defRPr sz="950">
                 <a:solidFill>
                   <a:srgbClr val="64748B"/>
                 </a:solidFill>
               </a:defRPr>
             </a:pPr>
             <a:r>
-              <a:t>Chỉ minh họa tính phi tuyến của hàm băm trong kịch bản giả mạo đã kiểm thử; không kết luận CRC32 bất lực trong vai trò phát hiện lỗi ngẫu nhiên vật lý.</a:t>
+              <a:t>Chỉ minh họa kịch bản giả mạo cụ thể; không phủ nhận vai trò bắt lỗi phần cứng của CRC32.</a:t>
             </a:r>
           </a:p>
         </p:txBody>
@@ -4376,7 +4284,7 @@
               </a:defRPr>
             </a:pPr>
             <a:r>
-              <a:t>2. PHÂN TÁCH MIỀN NÚT LÁ (RFC 6962)</a:t>
+              <a:t>2. PHÂN TÁCH MIỀN NÚT LÁ</a:t>
             </a:r>
           </a:p>
           <a:p>
@@ -4396,14 +4304,14 @@
               <a:spcAft>
                 <a:spcPts val="600"/>
               </a:spcAft>
-              <a:defRPr sz="919">
+              <a:defRPr sz="950">
                 <a:solidFill>
                   <a:srgbClr val="475569"/>
                 </a:solidFill>
               </a:defRPr>
             </a:pPr>
             <a:r>
-              <a:t>Halpin nhấn mạnh điểm mù khi triển khai cấu trúc dữ liệu trong thực tế, nhưng KHÔNG trực tiếp đề cập cấu trúc cây Merkle hay kỹ thuật phân tách miền.</a:t>
+              <a:t>Halpin nhấn mạnh điểm mù cấu trúc dữ liệu, nhưng không đề cập cây Merkle.</a:t>
             </a:r>
           </a:p>
           <a:p>
@@ -4423,14 +4331,14 @@
               <a:spcAft>
                 <a:spcPts val="600"/>
               </a:spcAft>
-              <a:defRPr sz="919">
+              <a:defRPr sz="950">
                 <a:solidFill>
                   <a:srgbClr val="475569"/>
                 </a:solidFill>
               </a:defRPr>
             </a:pPr>
             <a:r>
-              <a:t>Sinh viên chủ động mở rộng bài toán toàn vẹn: Cài đặt phân tách miền theo chuẩn IETF RFC 6962 (tiền tố byte 0x00 cho lá, 0x01 cho nhánh) để phòng ngừa va chạm cấu trúc tầng cây.</a:t>
+              <a:t>Cài đặt chuẩn RFC 6962 (tiền tố 0x00 cho lá, 0x01 cho nhánh) để tránh nhầm lẫn cấu trúc cây.</a:t>
             </a:r>
           </a:p>
           <a:p>
@@ -4447,14 +4355,14 @@
           </a:p>
           <a:p>
             <a:pPr>
-              <a:defRPr sz="919">
+              <a:defRPr sz="950">
                 <a:solidFill>
                   <a:srgbClr val="64748B"/>
                 </a:solidFill>
               </a:defRPr>
             </a:pPr>
             <a:r>
-              <a:t>Kỹ thuật RFC 6962 do sinh viên tự nghiên cứu tích hợp, không phải đề xuất của Halpin; chỉ phòng ngừa va chạm cấu trúc, không thay đổi độ phức tạp 2^256 của SHA-256.</a:t>
+              <a:t>Đây là giải pháp kỹ thuật độc lập do sinh viên tích hợp, không phải đề xuất của Halpin.</a:t>
             </a:r>
           </a:p>
         </p:txBody>
@@ -4557,14 +4465,14 @@
               <a:spcAft>
                 <a:spcPts val="600"/>
               </a:spcAft>
-              <a:defRPr sz="919">
+              <a:defRPr sz="950">
                 <a:solidFill>
                   <a:srgbClr val="475569"/>
                 </a:solidFill>
               </a:defRPr>
             </a:pPr>
             <a:r>
-              <a:t>Mô hình toán học trừu tượng xem mật mã là hàm lý tưởng, nhưng thời gian thực thi thực tế làm rò rỉ dữ liệu bí mật (dẫn theo Paul Kocher 1996).</a:t>
+              <a:t>Thời gian xử lý thực tế làm rò rỉ dữ liệu ngoài mô hình toán (dẫn Kocher 1996).</a:t>
             </a:r>
           </a:p>
           <a:p>
@@ -4584,14 +4492,14 @@
               <a:spcAft>
                 <a:spcPts val="600"/>
               </a:spcAft>
-              <a:defRPr sz="919">
+              <a:defRPr sz="950">
                 <a:solidFill>
                   <a:srgbClr val="475569"/>
                 </a:solidFill>
               </a:defRPr>
             </a:pPr>
             <a:r>
-              <a:t>Sinh viên xây dựng kịch bản kiểm thử đo đạc thời gian so sánh chuỗi tuần tự (dừng sớm khi gặp byte lệch) so với việc sử dụng hàm thời gian hằng số hmac.compare_digest.</a:t>
+              <a:t>Đo đạc so sánh chuỗi ngắt sớm làm rò rỉ ký tự; áp dụng hàm thời gian hằng số hmac.compare_digest.</a:t>
             </a:r>
           </a:p>
           <a:p>
@@ -4608,14 +4516,14 @@
           </a:p>
           <a:p>
             <a:pPr>
-              <a:defRPr sz="919">
+              <a:defRPr sz="950">
                 <a:solidFill>
                   <a:srgbClr val="64748B"/>
                 </a:solidFill>
               </a:defRPr>
             </a:pPr>
             <a:r>
-              <a:t>Đo đạc trên môi trường máy tính đơn có jitter hệ điều hành; chỉ minh họa rò rỉ logic ở mức phần mềm ứng dụng, không đại diện cho kênh kề phần cứng chuyên sâu.</a:t>
+              <a:t>Chỉ minh họa rò rỉ logic ở mức phần mềm ứng dụng; đo trên Python có độ trễ hệ điều hành.</a:t>
             </a:r>
           </a:p>
         </p:txBody>

--- a/docs/Bao_Cao_Giua_Ky_DT05_Final.pptx
+++ b/docs/Bao_Cao_Giua_Ky_DT05_Final.pptx
@@ -18,8 +18,6 @@
     <p:sldId id="266" r:id="rId17"/>
     <p:sldId id="267" r:id="rId18"/>
     <p:sldId id="268" r:id="rId19"/>
-    <p:sldId id="269" r:id="rId20"/>
-    <p:sldId id="270" r:id="rId21"/>
   </p:sldIdLst>
   <p:sldSz cx="12191695" cy="6858000" type="screen4x3"/>
   <p:notesSz cx="6858000" cy="9144000"/>
@@ -3498,7 +3496,7 @@
               </a:defRPr>
             </a:pPr>
             <a:r>
-              <a:t>ĐÁNH GIÁ PHƯƠNG PHÁP LUẬN &amp; HƯỚNG TIẾP CẬN THỰC NGHIỆM</a:t>
+              <a:t>SƠ ĐỒ 4: KIẾN TRÚC DIỄN TẬP ĐỐI KHÁNG (PRE-DEMO ARCHITECTURE)</a:t>
             </a:r>
           </a:p>
         </p:txBody>
@@ -3533,7 +3531,7 @@
               </a:defRPr>
             </a:pPr>
             <a:r>
-              <a:t>PHƯƠNG PHÁP LUẬN &amp; KHẢ NĂNG TÁI LẬP BÀI BÁO</a:t>
+              <a:t>KIẾN TRÚC DIỄN TẬP ĐỐI KHÁNG: RED TEAM VS BLUE TEAM</a:t>
             </a:r>
           </a:p>
         </p:txBody>
@@ -3568,31 +3566,55 @@
               </a:defRPr>
             </a:pPr>
             <a:r>
-              <a:t>Làm rõ tính khả thi tái lập đối với công trình triết học và định hướng thí nghiệm độc lập</a:t>
-            </a:r>
-          </a:p>
-        </p:txBody>
-      </p:sp>
-      <p:sp>
-        <p:nvSpPr>
-          <p:cNvPr id="6" name="Rounded Rectangle 5"/>
+              <a:t>Mô hình đối kháng 2 màn hình trên tập dữ liệu kaggle_dataset (2.485 tệp tin) kiểm chứng trực quan luận điểm bài báo</a:t>
+            </a:r>
+          </a:p>
+        </p:txBody>
+      </p:sp>
+      <p:pic>
+        <p:nvPicPr>
+          <p:cNvPr id="6" name="Picture 5" descr="Slide14.drawio.png"/>
+          <p:cNvPicPr>
+            <a:picLocks noChangeAspect="1"/>
+          </p:cNvPicPr>
+          <p:nvPr/>
+        </p:nvPicPr>
+        <p:blipFill>
+          <a:blip r:embed="rId2"/>
+          <a:stretch>
+            <a:fillRect/>
+          </a:stretch>
+        </p:blipFill>
+        <p:spPr>
+          <a:xfrm>
+            <a:off x="1706727" y="1572768"/>
+            <a:ext cx="8778240" cy="3794760"/>
+          </a:xfrm>
+          <a:prstGeom prst="rect">
+            <a:avLst/>
+          </a:prstGeom>
+        </p:spPr>
+      </p:pic>
+      <p:sp>
+        <p:nvSpPr>
+          <p:cNvPr id="7" name="Rounded Rectangle 6"/>
           <p:cNvSpPr/>
           <p:nvPr/>
         </p:nvSpPr>
         <p:spPr>
           <a:xfrm>
-            <a:off x="731520" y="1691640"/>
-            <a:ext cx="5212080" cy="4389120"/>
+            <a:off x="731520" y="5468112"/>
+            <a:ext cx="10728655" cy="749808"/>
           </a:xfrm>
           <a:prstGeom prst="roundRect">
             <a:avLst/>
           </a:prstGeom>
           <a:solidFill>
-            <a:srgbClr val="FFFBEB"/>
+            <a:srgbClr val="F8FAFC"/>
           </a:solidFill>
           <a:ln>
             <a:solidFill>
-              <a:srgbClr val="FDE68A"/>
+              <a:srgbClr val="BFDBFE"/>
             </a:solidFill>
           </a:ln>
         </p:spPr>
@@ -3620,14 +3642,14 @@
       </p:sp>
       <p:sp>
         <p:nvSpPr>
-          <p:cNvPr id="7" name="TextBox 6"/>
+          <p:cNvPr id="8" name="TextBox 7"/>
           <p:cNvSpPr txBox="1"/>
           <p:nvPr/>
         </p:nvSpPr>
         <p:spPr>
           <a:xfrm>
-            <a:off x="914400" y="1828800"/>
-            <a:ext cx="4846320" cy="4114800"/>
+            <a:off x="914400" y="5504688"/>
+            <a:ext cx="10362895" cy="676656"/>
           </a:xfrm>
           <a:prstGeom prst="rect">
             <a:avLst/>
@@ -3640,107 +3662,37 @@
           </a:bodyPr>
           <a:lstStyle/>
           <a:p>
-            <a:pPr>
-              <a:defRPr sz="1300" b="1">
-                <a:solidFill>
-                  <a:srgbClr val="D97706"/>
-                </a:solidFill>
-              </a:defRPr>
-            </a:pPr>
-            <a:r>
-              <a:t>1. Đặc Thù Bài Báo &amp; Tính Trung Thực Khoa Học</a:t>
+            <a:r>
+              <a:rPr b="1" sz="1050">
+                <a:solidFill>
+                  <a:srgbClr val="1E40AF"/>
+                </a:solidFill>
+              </a:rPr>
+              <a:t>Mô hình hóa thực nghiệm độc lập: </a:t>
+            </a:r>
+            <a:r>
+              <a:rPr sz="950">
+                <a:solidFill>
+                  <a:srgbClr val="1E293B"/>
+                </a:solidFill>
+              </a:rPr>
+              <a:t>Bài báo Halpin là khảo luận triết học thuần túy (không có mã nguồn). Nhóm tự phát triển hệ thống kiểm tra toàn vẹn trên tập dữ liệu kaggle_dataset để kiểm chứng trực quan 3 luận điểm cốt lõi:</a:t>
             </a:r>
           </a:p>
           <a:p>
             <a:pPr>
               <a:spcBef>
-                <a:spcPts val="1200"/>
+                <a:spcPts val="200"/>
               </a:spcBef>
             </a:pPr>
             <a:r>
-              <a:rPr b="1" sz="1100">
-                <a:solidFill>
-                  <a:srgbClr val="1E293B"/>
+              <a:rPr sz="950">
+                <a:solidFill>
+                  <a:srgbClr val="475569"/>
                 </a:solidFill>
               </a:rPr>
-              <a:t>• Khảo luận triết học thuần túy: </a:t>
-            </a:r>
-            <a:r>
-              <a:rPr sz="1050">
-                <a:solidFill>
-                  <a:srgbClr val="475569"/>
-                </a:solidFill>
-              </a:rPr>
-              <a:t>Bài báo của TS. Harry Halpin là nghiên cứu nhận thức luận, hoàn toàn không có mã nguồn, không có tập dữ liệu hay bảng đo benchmark.</a:t>
-            </a:r>
-          </a:p>
-          <a:p>
-            <a:pPr>
-              <a:spcBef>
-                <a:spcPts val="1200"/>
-              </a:spcBef>
-            </a:pPr>
-            <a:r>
-              <a:rPr b="1" sz="1100">
-                <a:solidFill>
-                  <a:srgbClr val="1E293B"/>
-                </a:solidFill>
-              </a:rPr>
-              <a:t>• Không tuyên bố sai lệch: </a:t>
-            </a:r>
-            <a:r>
-              <a:rPr sz="1050">
-                <a:solidFill>
-                  <a:srgbClr val="475569"/>
-                </a:solidFill>
-              </a:rPr>
-              <a:t>Nhóm thẩm định toàn văn 17 trang PDF và 134 tài liệu tham khảo; tuyệt đối không bịa đặt số liệu hay tuyên bố 'tái lập 100% benchmark' của tác giả.</a:t>
-            </a:r>
-          </a:p>
-        </p:txBody>
-      </p:sp>
-      <p:sp>
-        <p:nvSpPr>
-          <p:cNvPr id="8" name="Rounded Rectangle 7"/>
-          <p:cNvSpPr/>
-          <p:nvPr/>
-        </p:nvSpPr>
-        <p:spPr>
-          <a:xfrm>
-            <a:off x="6217920" y="1691640"/>
-            <a:ext cx="5212080" cy="4389120"/>
-          </a:xfrm>
-          <a:prstGeom prst="roundRect">
-            <a:avLst/>
-          </a:prstGeom>
-          <a:solidFill>
-            <a:srgbClr val="ECFDF5"/>
-          </a:solidFill>
-          <a:ln>
-            <a:solidFill>
-              <a:srgbClr val="A7F3D0"/>
-            </a:solidFill>
-          </a:ln>
-        </p:spPr>
-        <p:style>
-          <a:lnRef idx="1">
-            <a:schemeClr val="accent1"/>
-          </a:lnRef>
-          <a:fillRef idx="3">
-            <a:schemeClr val="accent1"/>
-          </a:fillRef>
-          <a:effectRef idx="2">
-            <a:schemeClr val="accent1"/>
-          </a:effectRef>
-          <a:fontRef idx="minor">
-            <a:schemeClr val="lt1"/>
-          </a:fontRef>
-        </p:style>
-        <p:txBody>
-          <a:bodyPr rtlCol="0" anchor="ctr"/>
-          <a:lstStyle/>
-          <a:p>
-            <a:pPr algn="ctr"/>
+              <a:t>• (1) Nhiễu vs Kẻ thù (Mã CRC32 bị qua mặt trên GF(2) vs SHA-256 phi tuyến) | • (2) Phân tách miền nút lá RFC 6962 | • (3) Rò rỉ kênh kề thời gian (Kocher 1996).</a:t>
+            </a:r>
           </a:p>
         </p:txBody>
       </p:sp>
@@ -3752,89 +3704,8 @@
         </p:nvSpPr>
         <p:spPr>
           <a:xfrm>
-            <a:off x="6400800" y="1828800"/>
-            <a:ext cx="4846320" cy="4114800"/>
-          </a:xfrm>
-          <a:prstGeom prst="rect">
-            <a:avLst/>
-          </a:prstGeom>
-          <a:noFill/>
-        </p:spPr>
-        <p:txBody>
-          <a:bodyPr wrap="square">
-            <a:spAutoFit/>
-          </a:bodyPr>
-          <a:lstStyle/>
-          <a:p>
-            <a:pPr>
-              <a:defRPr sz="1300" b="1">
-                <a:solidFill>
-                  <a:srgbClr val="059669"/>
-                </a:solidFill>
-              </a:defRPr>
-            </a:pPr>
-            <a:r>
-              <a:t>2. Định Hướng Thí Nghiệm Minh Họa Độc Lập</a:t>
-            </a:r>
-          </a:p>
-          <a:p>
-            <a:pPr>
-              <a:spcBef>
-                <a:spcPts val="1200"/>
-              </a:spcBef>
-            </a:pPr>
-            <a:r>
-              <a:rPr b="1" sz="1100">
-                <a:solidFill>
-                  <a:srgbClr val="1E293B"/>
-                </a:solidFill>
-              </a:rPr>
-              <a:t>• Minh họa trực quan luận điểm: </a:t>
-            </a:r>
-            <a:r>
-              <a:rPr sz="1050">
-                <a:solidFill>
-                  <a:srgbClr val="475569"/>
-                </a:solidFill>
-              </a:rPr>
-              <a:t>Sinh viên tự phát triển hệ thống kiểm tra toàn vẹn tệp để đưa các luận điểm đối kháng trừu tượng của Halpin vào kiểm chứng thực nghiệm.</a:t>
-            </a:r>
-          </a:p>
-          <a:p>
-            <a:pPr>
-              <a:spcBef>
-                <a:spcPts val="1200"/>
-              </a:spcBef>
-            </a:pPr>
-            <a:r>
-              <a:rPr b="1" sz="1100">
-                <a:solidFill>
-                  <a:srgbClr val="1E293B"/>
-                </a:solidFill>
-              </a:rPr>
-              <a:t>• Phân định ranh giới rạch ròi: </a:t>
-            </a:r>
-            <a:r>
-              <a:rPr sz="1050">
-                <a:solidFill>
-                  <a:srgbClr val="475569"/>
-                </a:solidFill>
-              </a:rPr>
-              <a:t>Mã nguồn và kịch bản đối kháng là sản phẩm độc lập của sinh viên, không phải thuật toán của Halpin (lưu vết tại MIDTERM_CODE_AUDIT.md).</a:t>
-            </a:r>
-          </a:p>
-        </p:txBody>
-      </p:sp>
-      <p:sp>
-        <p:nvSpPr>
-          <p:cNvPr id="10" name="TextBox 9"/>
-          <p:cNvSpPr txBox="1"/>
-          <p:nvPr/>
-        </p:nvSpPr>
-        <p:spPr>
-          <a:xfrm>
-            <a:off x="731520" y="6217920"/>
-            <a:ext cx="10698480" cy="365760"/>
+            <a:off x="731520" y="6291072"/>
+            <a:ext cx="10698480" cy="320040"/>
           </a:xfrm>
           <a:prstGeom prst="rect">
             <a:avLst/>
@@ -3848,14 +3719,14 @@
           <a:lstStyle/>
           <a:p>
             <a:pPr>
-              <a:defRPr sz="1000" i="1">
+              <a:defRPr sz="950" i="1">
                 <a:solidFill>
                   <a:srgbClr val="64748B"/>
                 </a:solidFill>
               </a:defRPr>
             </a:pPr>
             <a:r>
-              <a:t>Báo cáo phân định phương pháp luận độc lập của nhóm nghiên cứu đề tài DT005.</a:t>
+              <a:t>Sơ đồ kiến trúc diễn tập đối kháng độc lập do sinh viên thiết kế minh họa các khái niệm an ninh.</a:t>
             </a:r>
           </a:p>
         </p:txBody>
@@ -3893,7 +3764,7 @@
             <a:avLst/>
           </a:prstGeom>
           <a:solidFill>
-            <a:srgbClr val="FFFFFF"/>
+            <a:srgbClr val="F8FAFC"/>
           </a:solidFill>
           <a:ln>
             <a:noFill/>
@@ -3923,183 +3794,14 @@
       </p:sp>
       <p:sp>
         <p:nvSpPr>
-          <p:cNvPr id="3" name="Rounded Rectangle 2"/>
-          <p:cNvSpPr/>
-          <p:nvPr/>
-        </p:nvSpPr>
-        <p:spPr>
-          <a:xfrm>
-            <a:off x="731520" y="365760"/>
-            <a:ext cx="4114800" cy="320040"/>
-          </a:xfrm>
-          <a:prstGeom prst="roundRect">
-            <a:avLst/>
-          </a:prstGeom>
-          <a:solidFill>
-            <a:srgbClr val="EFF6FF"/>
-          </a:solidFill>
-          <a:ln w="12700">
-            <a:solidFill>
-              <a:srgbClr val="BFDBFE"/>
-            </a:solidFill>
-          </a:ln>
-        </p:spPr>
-        <p:style>
-          <a:lnRef idx="1">
-            <a:schemeClr val="accent1"/>
-          </a:lnRef>
-          <a:fillRef idx="3">
-            <a:schemeClr val="accent1"/>
-          </a:fillRef>
-          <a:effectRef idx="2">
-            <a:schemeClr val="accent1"/>
-          </a:effectRef>
-          <a:fontRef idx="minor">
-            <a:schemeClr val="lt1"/>
-          </a:fontRef>
-        </p:style>
-        <p:txBody>
-          <a:bodyPr rtlCol="0" anchor="ctr" wrap="square"/>
-          <a:lstStyle/>
-          <a:p>
-            <a:pPr algn="ctr">
-              <a:defRPr sz="1000" b="1">
-                <a:solidFill>
-                  <a:srgbClr val="1D4ED8"/>
-                </a:solidFill>
-              </a:defRPr>
-            </a:pPr>
-            <a:r>
-              <a:t>SƠ ĐỒ 4: PHÂN ĐỊNH LÝ THUYẾT &amp; THÍ NGHIỆM ĐỘC LẬP</a:t>
-            </a:r>
-          </a:p>
-        </p:txBody>
-      </p:sp>
-      <p:sp>
-        <p:nvSpPr>
-          <p:cNvPr id="4" name="TextBox 3"/>
+          <p:cNvPr id="3" name="TextBox 2"/>
           <p:cNvSpPr txBox="1"/>
           <p:nvPr/>
         </p:nvSpPr>
         <p:spPr>
           <a:xfrm>
-            <a:off x="731520" y="749808"/>
-            <a:ext cx="10698480" cy="502920"/>
-          </a:xfrm>
-          <a:prstGeom prst="rect">
-            <a:avLst/>
-          </a:prstGeom>
-          <a:noFill/>
-        </p:spPr>
-        <p:txBody>
-          <a:bodyPr wrap="square" lIns="0" rIns="0" tIns="0" bIns="0">
-            <a:spAutoFit/>
-          </a:bodyPr>
-          <a:lstStyle/>
-          <a:p>
-            <a:pPr>
-              <a:defRPr sz="2100" b="1">
-                <a:solidFill>
-                  <a:srgbClr val="0F172A"/>
-                </a:solidFill>
-              </a:defRPr>
-            </a:pPr>
-            <a:r>
-              <a:t>MINH HỌA PAPER-TO-CODE ĐỘC LẬP &amp; GIỚI HẠN DIỄN GIẢI</a:t>
-            </a:r>
-          </a:p>
-        </p:txBody>
-      </p:sp>
-      <p:sp>
-        <p:nvSpPr>
-          <p:cNvPr id="5" name="TextBox 4"/>
-          <p:cNvSpPr txBox="1"/>
-          <p:nvPr/>
-        </p:nvSpPr>
-        <p:spPr>
-          <a:xfrm>
-            <a:off x="731520" y="1261872"/>
-            <a:ext cx="10698480" cy="320040"/>
-          </a:xfrm>
-          <a:prstGeom prst="rect">
-            <a:avLst/>
-          </a:prstGeom>
-          <a:noFill/>
-        </p:spPr>
-        <p:txBody>
-          <a:bodyPr wrap="square" lIns="0" rIns="0" tIns="0" bIns="0">
-            <a:spAutoFit/>
-          </a:bodyPr>
-          <a:lstStyle/>
-          <a:p>
-            <a:pPr>
-              <a:defRPr sz="1200">
-                <a:solidFill>
-                  <a:srgbClr val="475569"/>
-                </a:solidFill>
-              </a:defRPr>
-            </a:pPr>
-            <a:r>
-              <a:t>Đối sánh minh bạch giữa các luận điểm bài báo và thí nghiệm minh họa do sinh viên xây dựng</a:t>
-            </a:r>
-          </a:p>
-        </p:txBody>
-      </p:sp>
-      <p:sp>
-        <p:nvSpPr>
-          <p:cNvPr id="6" name="Rounded Rectangle 5"/>
-          <p:cNvSpPr/>
-          <p:nvPr/>
-        </p:nvSpPr>
-        <p:spPr>
-          <a:xfrm>
-            <a:off x="731520" y="1691640"/>
-            <a:ext cx="3383280" cy="4389120"/>
-          </a:xfrm>
-          <a:prstGeom prst="roundRect">
-            <a:avLst/>
-          </a:prstGeom>
-          <a:solidFill>
-            <a:srgbClr val="F8FAFC"/>
-          </a:solidFill>
-          <a:ln>
-            <a:solidFill>
-              <a:srgbClr val="E2E8F0"/>
-            </a:solidFill>
-          </a:ln>
-        </p:spPr>
-        <p:style>
-          <a:lnRef idx="1">
-            <a:schemeClr val="accent1"/>
-          </a:lnRef>
-          <a:fillRef idx="3">
-            <a:schemeClr val="accent1"/>
-          </a:fillRef>
-          <a:effectRef idx="2">
-            <a:schemeClr val="accent1"/>
-          </a:effectRef>
-          <a:fontRef idx="minor">
-            <a:schemeClr val="lt1"/>
-          </a:fontRef>
-        </p:style>
-        <p:txBody>
-          <a:bodyPr rtlCol="0" anchor="ctr"/>
-          <a:lstStyle/>
-          <a:p>
-            <a:pPr algn="ctr"/>
-          </a:p>
-        </p:txBody>
-      </p:sp>
-      <p:sp>
-        <p:nvSpPr>
-          <p:cNvPr id="7" name="TextBox 6"/>
-          <p:cNvSpPr txBox="1"/>
-          <p:nvPr/>
-        </p:nvSpPr>
-        <p:spPr>
-          <a:xfrm>
-            <a:off x="914400" y="1828800"/>
-            <a:ext cx="3017520" cy="4114800"/>
+            <a:off x="1828800" y="2377440"/>
+            <a:ext cx="8534095" cy="2011680"/>
           </a:xfrm>
           <a:prstGeom prst="rect">
             <a:avLst/>
@@ -4112,453 +3814,16 @@
           </a:bodyPr>
           <a:lstStyle/>
           <a:p>
-            <a:pPr>
-              <a:spcAft>
-                <a:spcPts val="800"/>
-              </a:spcAft>
-              <a:defRPr sz="1150" b="1">
-                <a:solidFill>
-                  <a:srgbClr val="0F172A"/>
-                </a:solidFill>
-              </a:defRPr>
-            </a:pPr>
-            <a:r>
-              <a:t>1. NHIỄU vs ĐỐI THỦ CHỦ ĐÍCH</a:t>
-            </a:r>
-          </a:p>
-          <a:p>
-            <a:pPr>
-              <a:defRPr sz="1000" b="1">
-                <a:solidFill>
-                  <a:srgbClr val="1E293B"/>
-                </a:solidFill>
-              </a:defRPr>
-            </a:pPr>
-            <a:r>
-              <a:t>Luận điểm Halpin (Sec. 1–2):</a:t>
-            </a:r>
-          </a:p>
-          <a:p>
-            <a:pPr>
-              <a:spcAft>
-                <a:spcPts val="600"/>
-              </a:spcAft>
-              <a:defRPr sz="950">
-                <a:solidFill>
-                  <a:srgbClr val="475569"/>
-                </a:solidFill>
-              </a:defRPr>
-            </a:pPr>
-            <a:r>
-              <a:t>Mã kiểm tra tuyến tính chỉ bắt lỗi ngẫu nhiên, không cản được đối thủ có chủ đích.</a:t>
-            </a:r>
-          </a:p>
-          <a:p>
-            <a:pPr>
-              <a:defRPr sz="1000" b="1">
-                <a:solidFill>
-                  <a:srgbClr val="1E293B"/>
-                </a:solidFill>
-              </a:defRPr>
-            </a:pPr>
-            <a:r>
-              <a:t>Minh họa độc lập (DT005):</a:t>
-            </a:r>
-          </a:p>
-          <a:p>
-            <a:pPr>
-              <a:spcAft>
-                <a:spcPts val="600"/>
-              </a:spcAft>
-              <a:defRPr sz="950">
-                <a:solidFill>
-                  <a:srgbClr val="475569"/>
-                </a:solidFill>
-              </a:defRPr>
-            </a:pPr>
-            <a:r>
-              <a:t>Giải hệ phương trình GF(2) bù 4 byte qua mặt CRC32; SHA-256 phát hiện ngay nhờ tính phi tuyến.</a:t>
-            </a:r>
-          </a:p>
-          <a:p>
-            <a:pPr>
-              <a:defRPr sz="1000" b="1">
-                <a:solidFill>
-                  <a:srgbClr val="1E293B"/>
-                </a:solidFill>
-              </a:defRPr>
-            </a:pPr>
-            <a:r>
-              <a:t>Giới hạn diễn giải:</a:t>
-            </a:r>
-          </a:p>
-          <a:p>
-            <a:pPr>
-              <a:defRPr sz="950">
-                <a:solidFill>
-                  <a:srgbClr val="64748B"/>
-                </a:solidFill>
-              </a:defRPr>
-            </a:pPr>
-            <a:r>
-              <a:t>Chỉ minh họa kịch bản giả mạo cụ thể; không phủ nhận vai trò bắt lỗi phần cứng của CRC32.</a:t>
-            </a:r>
-          </a:p>
-        </p:txBody>
-      </p:sp>
-      <p:sp>
-        <p:nvSpPr>
-          <p:cNvPr id="8" name="Rounded Rectangle 7"/>
-          <p:cNvSpPr/>
-          <p:nvPr/>
-        </p:nvSpPr>
-        <p:spPr>
-          <a:xfrm>
-            <a:off x="4389120" y="1691640"/>
-            <a:ext cx="3383280" cy="4389120"/>
-          </a:xfrm>
-          <a:prstGeom prst="roundRect">
-            <a:avLst/>
-          </a:prstGeom>
-          <a:solidFill>
-            <a:srgbClr val="F8FAFC"/>
-          </a:solidFill>
-          <a:ln>
-            <a:solidFill>
-              <a:srgbClr val="E2E8F0"/>
-            </a:solidFill>
-          </a:ln>
-        </p:spPr>
-        <p:style>
-          <a:lnRef idx="1">
-            <a:schemeClr val="accent1"/>
-          </a:lnRef>
-          <a:fillRef idx="3">
-            <a:schemeClr val="accent1"/>
-          </a:fillRef>
-          <a:effectRef idx="2">
-            <a:schemeClr val="accent1"/>
-          </a:effectRef>
-          <a:fontRef idx="minor">
-            <a:schemeClr val="lt1"/>
-          </a:fontRef>
-        </p:style>
-        <p:txBody>
-          <a:bodyPr rtlCol="0" anchor="ctr"/>
-          <a:lstStyle/>
-          <a:p>
-            <a:pPr algn="ctr"/>
-          </a:p>
-        </p:txBody>
-      </p:sp>
-      <p:sp>
-        <p:nvSpPr>
-          <p:cNvPr id="9" name="TextBox 8"/>
-          <p:cNvSpPr txBox="1"/>
-          <p:nvPr/>
-        </p:nvSpPr>
-        <p:spPr>
-          <a:xfrm>
-            <a:off x="4572000" y="1828800"/>
-            <a:ext cx="3017520" cy="4114800"/>
-          </a:xfrm>
-          <a:prstGeom prst="rect">
-            <a:avLst/>
-          </a:prstGeom>
-          <a:noFill/>
-        </p:spPr>
-        <p:txBody>
-          <a:bodyPr wrap="square">
-            <a:spAutoFit/>
-          </a:bodyPr>
-          <a:lstStyle/>
-          <a:p>
-            <a:pPr>
-              <a:spcAft>
-                <a:spcPts val="800"/>
-              </a:spcAft>
-              <a:defRPr sz="1150" b="1">
-                <a:solidFill>
-                  <a:srgbClr val="0F172A"/>
-                </a:solidFill>
-              </a:defRPr>
-            </a:pPr>
-            <a:r>
-              <a:t>2. PHÂN TÁCH MIỀN NÚT LÁ</a:t>
-            </a:r>
-          </a:p>
-          <a:p>
-            <a:pPr>
-              <a:defRPr sz="1000" b="1">
-                <a:solidFill>
-                  <a:srgbClr val="1E293B"/>
-                </a:solidFill>
-              </a:defRPr>
-            </a:pPr>
-            <a:r>
-              <a:t>Gốc lý thuyết bài báo:</a:t>
-            </a:r>
-          </a:p>
-          <a:p>
-            <a:pPr>
-              <a:spcAft>
-                <a:spcPts val="600"/>
-              </a:spcAft>
-              <a:defRPr sz="950">
-                <a:solidFill>
-                  <a:srgbClr val="475569"/>
-                </a:solidFill>
-              </a:defRPr>
-            </a:pPr>
-            <a:r>
-              <a:t>Halpin nhấn mạnh điểm mù cấu trúc dữ liệu, nhưng không đề cập cây Merkle.</a:t>
-            </a:r>
-          </a:p>
-          <a:p>
-            <a:pPr>
-              <a:defRPr sz="1000" b="1">
-                <a:solidFill>
-                  <a:srgbClr val="1E293B"/>
-                </a:solidFill>
-              </a:defRPr>
-            </a:pPr>
-            <a:r>
-              <a:t>Minh họa độc lập (DT005):</a:t>
-            </a:r>
-          </a:p>
-          <a:p>
-            <a:pPr>
-              <a:spcAft>
-                <a:spcPts val="600"/>
-              </a:spcAft>
-              <a:defRPr sz="950">
-                <a:solidFill>
-                  <a:srgbClr val="475569"/>
-                </a:solidFill>
-              </a:defRPr>
-            </a:pPr>
-            <a:r>
-              <a:t>Cài đặt chuẩn RFC 6962 (tiền tố 0x00 cho lá, 0x01 cho nhánh) để tránh nhầm lẫn cấu trúc cây.</a:t>
-            </a:r>
-          </a:p>
-          <a:p>
-            <a:pPr>
-              <a:defRPr sz="1000" b="1">
-                <a:solidFill>
-                  <a:srgbClr val="1E293B"/>
-                </a:solidFill>
-              </a:defRPr>
-            </a:pPr>
-            <a:r>
-              <a:t>Giới hạn diễn giải:</a:t>
-            </a:r>
-          </a:p>
-          <a:p>
-            <a:pPr>
-              <a:defRPr sz="950">
-                <a:solidFill>
-                  <a:srgbClr val="64748B"/>
-                </a:solidFill>
-              </a:defRPr>
-            </a:pPr>
-            <a:r>
-              <a:t>Đây là giải pháp kỹ thuật độc lập do sinh viên tích hợp, không phải đề xuất của Halpin.</a:t>
-            </a:r>
-          </a:p>
-        </p:txBody>
-      </p:sp>
-      <p:sp>
-        <p:nvSpPr>
-          <p:cNvPr id="10" name="Rounded Rectangle 9"/>
-          <p:cNvSpPr/>
-          <p:nvPr/>
-        </p:nvSpPr>
-        <p:spPr>
-          <a:xfrm>
-            <a:off x="8046720" y="1691640"/>
-            <a:ext cx="3383280" cy="4389120"/>
-          </a:xfrm>
-          <a:prstGeom prst="roundRect">
-            <a:avLst/>
-          </a:prstGeom>
-          <a:solidFill>
-            <a:srgbClr val="F8FAFC"/>
-          </a:solidFill>
-          <a:ln>
-            <a:solidFill>
-              <a:srgbClr val="E2E8F0"/>
-            </a:solidFill>
-          </a:ln>
-        </p:spPr>
-        <p:style>
-          <a:lnRef idx="1">
-            <a:schemeClr val="accent1"/>
-          </a:lnRef>
-          <a:fillRef idx="3">
-            <a:schemeClr val="accent1"/>
-          </a:fillRef>
-          <a:effectRef idx="2">
-            <a:schemeClr val="accent1"/>
-          </a:effectRef>
-          <a:fontRef idx="minor">
-            <a:schemeClr val="lt1"/>
-          </a:fontRef>
-        </p:style>
-        <p:txBody>
-          <a:bodyPr rtlCol="0" anchor="ctr"/>
-          <a:lstStyle/>
-          <a:p>
-            <a:pPr algn="ctr"/>
-          </a:p>
-        </p:txBody>
-      </p:sp>
-      <p:sp>
-        <p:nvSpPr>
-          <p:cNvPr id="11" name="TextBox 10"/>
-          <p:cNvSpPr txBox="1"/>
-          <p:nvPr/>
-        </p:nvSpPr>
-        <p:spPr>
-          <a:xfrm>
-            <a:off x="8229600" y="1828800"/>
-            <a:ext cx="3017520" cy="4114800"/>
-          </a:xfrm>
-          <a:prstGeom prst="rect">
-            <a:avLst/>
-          </a:prstGeom>
-          <a:noFill/>
-        </p:spPr>
-        <p:txBody>
-          <a:bodyPr wrap="square">
-            <a:spAutoFit/>
-          </a:bodyPr>
-          <a:lstStyle/>
-          <a:p>
-            <a:pPr>
-              <a:spcAft>
-                <a:spcPts val="800"/>
-              </a:spcAft>
-              <a:defRPr sz="1150" b="1">
-                <a:solidFill>
-                  <a:srgbClr val="0F172A"/>
-                </a:solidFill>
-              </a:defRPr>
-            </a:pPr>
-            <a:r>
-              <a:t>3. RÒ RỈ KÊNH KỀ THỜI GIAN</a:t>
-            </a:r>
-          </a:p>
-          <a:p>
-            <a:pPr>
-              <a:defRPr sz="1000" b="1">
-                <a:solidFill>
-                  <a:srgbClr val="1E293B"/>
-                </a:solidFill>
-              </a:defRPr>
-            </a:pPr>
-            <a:r>
-              <a:t>Luận điểm Halpin (Sec. 5):</a:t>
-            </a:r>
-          </a:p>
-          <a:p>
-            <a:pPr>
-              <a:spcAft>
-                <a:spcPts val="600"/>
-              </a:spcAft>
-              <a:defRPr sz="950">
-                <a:solidFill>
-                  <a:srgbClr val="475569"/>
-                </a:solidFill>
-              </a:defRPr>
-            </a:pPr>
-            <a:r>
-              <a:t>Thời gian xử lý thực tế làm rò rỉ dữ liệu ngoài mô hình toán (dẫn Kocher 1996).</a:t>
-            </a:r>
-          </a:p>
-          <a:p>
-            <a:pPr>
-              <a:defRPr sz="1000" b="1">
-                <a:solidFill>
-                  <a:srgbClr val="1E293B"/>
-                </a:solidFill>
-              </a:defRPr>
-            </a:pPr>
-            <a:r>
-              <a:t>Minh họa độc lập (DT005):</a:t>
-            </a:r>
-          </a:p>
-          <a:p>
-            <a:pPr>
-              <a:spcAft>
-                <a:spcPts val="600"/>
-              </a:spcAft>
-              <a:defRPr sz="950">
-                <a:solidFill>
-                  <a:srgbClr val="475569"/>
-                </a:solidFill>
-              </a:defRPr>
-            </a:pPr>
-            <a:r>
-              <a:t>Đo đạc so sánh chuỗi ngắt sớm làm rò rỉ ký tự; áp dụng hàm thời gian hằng số hmac.compare_digest.</a:t>
-            </a:r>
-          </a:p>
-          <a:p>
-            <a:pPr>
-              <a:defRPr sz="1000" b="1">
-                <a:solidFill>
-                  <a:srgbClr val="1E293B"/>
-                </a:solidFill>
-              </a:defRPr>
-            </a:pPr>
-            <a:r>
-              <a:t>Giới hạn diễn giải:</a:t>
-            </a:r>
-          </a:p>
-          <a:p>
-            <a:pPr>
-              <a:defRPr sz="950">
-                <a:solidFill>
-                  <a:srgbClr val="64748B"/>
-                </a:solidFill>
-              </a:defRPr>
-            </a:pPr>
-            <a:r>
-              <a:t>Chỉ minh họa rò rỉ logic ở mức phần mềm ứng dụng; đo trên Python có độ trễ hệ điều hành.</a:t>
-            </a:r>
-          </a:p>
-        </p:txBody>
-      </p:sp>
-      <p:sp>
-        <p:nvSpPr>
-          <p:cNvPr id="12" name="TextBox 11"/>
-          <p:cNvSpPr txBox="1"/>
-          <p:nvPr/>
-        </p:nvSpPr>
-        <p:spPr>
-          <a:xfrm>
-            <a:off x="731520" y="6217920"/>
-            <a:ext cx="10698480" cy="365760"/>
-          </a:xfrm>
-          <a:prstGeom prst="rect">
-            <a:avLst/>
-          </a:prstGeom>
-          <a:noFill/>
-        </p:spPr>
-        <p:txBody>
-          <a:bodyPr wrap="none">
-            <a:spAutoFit/>
-          </a:bodyPr>
-          <a:lstStyle/>
-          <a:p>
-            <a:pPr>
-              <a:defRPr sz="1000" i="1">
-                <a:solidFill>
-                  <a:srgbClr val="64748B"/>
-                </a:solidFill>
-              </a:defRPr>
-            </a:pPr>
-            <a:r>
-              <a:t>Bảng đối chiếu minh bạch do sinh viên tự xây dựng; chi tiết mã nguồn lưu tại MIDTERM_CODE_AUDIT.md.</a:t>
+            <a:pPr algn="ctr">
+              <a:defRPr sz="8800" b="1">
+                <a:solidFill>
+                  <a:srgbClr val="1E40AF"/>
+                </a:solidFill>
+                <a:latin typeface="Calibri"/>
+              </a:defRPr>
+            </a:pPr>
+            <a:r>
+              <a:t>DEMO</a:t>
             </a:r>
           </a:p>
         </p:txBody>
@@ -4596,7 +3861,7 @@
             <a:avLst/>
           </a:prstGeom>
           <a:solidFill>
-            <a:srgbClr val="F8FAFC"/>
+            <a:srgbClr val="FFFFFF"/>
           </a:solidFill>
           <a:ln>
             <a:noFill/>
@@ -4626,14 +3891,68 @@
       </p:sp>
       <p:sp>
         <p:nvSpPr>
-          <p:cNvPr id="3" name="TextBox 2"/>
+          <p:cNvPr id="3" name="Rounded Rectangle 2"/>
+          <p:cNvSpPr/>
+          <p:nvPr/>
+        </p:nvSpPr>
+        <p:spPr>
+          <a:xfrm>
+            <a:off x="731520" y="365760"/>
+            <a:ext cx="4114800" cy="320040"/>
+          </a:xfrm>
+          <a:prstGeom prst="roundRect">
+            <a:avLst/>
+          </a:prstGeom>
+          <a:solidFill>
+            <a:srgbClr val="EFF6FF"/>
+          </a:solidFill>
+          <a:ln w="12700">
+            <a:solidFill>
+              <a:srgbClr val="BFDBFE"/>
+            </a:solidFill>
+          </a:ln>
+        </p:spPr>
+        <p:style>
+          <a:lnRef idx="1">
+            <a:schemeClr val="accent1"/>
+          </a:lnRef>
+          <a:fillRef idx="3">
+            <a:schemeClr val="accent1"/>
+          </a:fillRef>
+          <a:effectRef idx="2">
+            <a:schemeClr val="accent1"/>
+          </a:effectRef>
+          <a:fontRef idx="minor">
+            <a:schemeClr val="lt1"/>
+          </a:fontRef>
+        </p:style>
+        <p:txBody>
+          <a:bodyPr rtlCol="0" anchor="ctr" wrap="square"/>
+          <a:lstStyle/>
+          <a:p>
+            <a:pPr algn="ctr">
+              <a:defRPr sz="1000" b="1">
+                <a:solidFill>
+                  <a:srgbClr val="1D4ED8"/>
+                </a:solidFill>
+              </a:defRPr>
+            </a:pPr>
+            <a:r>
+              <a:t>SECTION 7 — TỔNG KẾT TOÀN VĂN BÀI BÁO (HARRY HALPIN 2025)</a:t>
+            </a:r>
+          </a:p>
+        </p:txBody>
+      </p:sp>
+      <p:sp>
+        <p:nvSpPr>
+          <p:cNvPr id="4" name="TextBox 3"/>
           <p:cNvSpPr txBox="1"/>
           <p:nvPr/>
         </p:nvSpPr>
         <p:spPr>
           <a:xfrm>
-            <a:off x="1828800" y="2377440"/>
-            <a:ext cx="8534095" cy="2011680"/>
+            <a:off x="731520" y="749808"/>
+            <a:ext cx="10698480" cy="502920"/>
           </a:xfrm>
           <a:prstGeom prst="rect">
             <a:avLst/>
@@ -4641,21 +3960,616 @@
           <a:noFill/>
         </p:spPr>
         <p:txBody>
-          <a:bodyPr wrap="square">
+          <a:bodyPr wrap="square" lIns="0" rIns="0" tIns="0" bIns="0">
             <a:spAutoFit/>
           </a:bodyPr>
           <a:lstStyle/>
           <a:p>
-            <a:pPr algn="ctr">
-              <a:defRPr sz="8800" b="1">
-                <a:solidFill>
-                  <a:srgbClr val="1E40AF"/>
-                </a:solidFill>
-                <a:latin typeface="Calibri"/>
-              </a:defRPr>
-            </a:pPr>
-            <a:r>
-              <a:t>DEMO</a:t>
+            <a:pPr>
+              <a:defRPr sz="2100" b="1">
+                <a:solidFill>
+                  <a:srgbClr val="0F172A"/>
+                </a:solidFill>
+              </a:defRPr>
+            </a:pPr>
+            <a:r>
+              <a:t>TỔNG KẾT BÁO CÁO: ĐÓNG GÓP HỌC THUẬT &amp; BÀI HỌC AN NINH</a:t>
+            </a:r>
+          </a:p>
+        </p:txBody>
+      </p:sp>
+      <p:sp>
+        <p:nvSpPr>
+          <p:cNvPr id="5" name="TextBox 4"/>
+          <p:cNvSpPr txBox="1"/>
+          <p:nvPr/>
+        </p:nvSpPr>
+        <p:spPr>
+          <a:xfrm>
+            <a:off x="731520" y="1261872"/>
+            <a:ext cx="10698480" cy="320040"/>
+          </a:xfrm>
+          <a:prstGeom prst="rect">
+            <a:avLst/>
+          </a:prstGeom>
+          <a:noFill/>
+        </p:spPr>
+        <p:txBody>
+          <a:bodyPr wrap="square" lIns="0" rIns="0" tIns="0" bIns="0">
+            <a:spAutoFit/>
+          </a:bodyPr>
+          <a:lstStyle/>
+          <a:p>
+            <a:pPr>
+              <a:defRPr sz="1200">
+                <a:solidFill>
+                  <a:srgbClr val="475569"/>
+                </a:solidFill>
+              </a:defRPr>
+            </a:pPr>
+            <a:r>
+              <a:t>Bảng đối sánh giữa các giả định hình thức truyền thống và nhận thức luận của Harry Halpin</a:t>
+            </a:r>
+          </a:p>
+        </p:txBody>
+      </p:sp>
+      <p:graphicFrame>
+        <p:nvGraphicFramePr>
+          <p:cNvPr id="6" name="Table 5"/>
+          <p:cNvGraphicFramePr>
+            <a:graphicFrameLocks noGrp="1"/>
+          </p:cNvGraphicFramePr>
+          <p:nvPr/>
+        </p:nvGraphicFramePr>
+        <p:xfrm>
+          <a:off x="731520" y="1691640"/>
+          <a:ext cx="10728655" cy="4297680"/>
+        </p:xfrm>
+        <a:graphic>
+          <a:graphicData uri="http://schemas.openxmlformats.org/drawingml/2006/table">
+            <a:tbl>
+              <a:tblPr firstRow="1" bandRow="1">
+                <a:tableStyleId>{5C22544A-7EE6-4342-B048-85BDC9FD1C3A}</a:tableStyleId>
+              </a:tblPr>
+              <a:tblGrid>
+                <a:gridCol w="1920240"/>
+                <a:gridCol w="2834640"/>
+                <a:gridCol w="3017520"/>
+                <a:gridCol w="2956255"/>
+              </a:tblGrid>
+              <a:tr h="859536">
+                <a:tc>
+                  <a:txBody>
+                    <a:bodyPr wrap="square" lIns="73152" rIns="73152"/>
+                    <a:lstStyle/>
+                    <a:p>
+                      <a:pPr algn="ctr">
+                        <a:defRPr b="1" sz="1050">
+                          <a:solidFill>
+                            <a:srgbClr val="FFFFFF"/>
+                          </a:solidFill>
+                        </a:defRPr>
+                      </a:pPr>
+                      <a:r>
+                        <a:t>Trụ Cột Khảo Cứu</a:t>
+                      </a:r>
+                    </a:p>
+                  </a:txBody>
+                  <a:tcPr anchor="ctr">
+                    <a:solidFill>
+                      <a:srgbClr val="1E40AF"/>
+                    </a:solidFill>
+                  </a:tcPr>
+                </a:tc>
+                <a:tc>
+                  <a:txBody>
+                    <a:bodyPr wrap="square" lIns="73152" rIns="73152"/>
+                    <a:lstStyle/>
+                    <a:p>
+                      <a:pPr algn="ctr">
+                        <a:defRPr b="1" sz="1050">
+                          <a:solidFill>
+                            <a:srgbClr val="FFFFFF"/>
+                          </a:solidFill>
+                        </a:defRPr>
+                      </a:pPr>
+                      <a:r>
+                        <a:t>Mô Hình Toán Hình Thức</a:t>
+                      </a:r>
+                      <a:br/>
+                      <a:r>
+                        <a:t>(Shannon &amp; Hộp Đen)</a:t>
+                      </a:r>
+                    </a:p>
+                  </a:txBody>
+                  <a:tcPr anchor="ctr">
+                    <a:solidFill>
+                      <a:srgbClr val="1E40AF"/>
+                    </a:solidFill>
+                  </a:tcPr>
+                </a:tc>
+                <a:tc>
+                  <a:txBody>
+                    <a:bodyPr wrap="square" lIns="73152" rIns="73152"/>
+                    <a:lstStyle/>
+                    <a:p>
+                      <a:pPr algn="ctr">
+                        <a:defRPr b="1" sz="1050">
+                          <a:solidFill>
+                            <a:srgbClr val="FFFFFF"/>
+                          </a:solidFill>
+                        </a:defRPr>
+                      </a:pPr>
+                      <a:r>
+                        <a:t>Phê Phán Nhận Thức Luận</a:t>
+                      </a:r>
+                      <a:br/>
+                      <a:r>
+                        <a:t>(Harry Halpin 2025)</a:t>
+                      </a:r>
+                    </a:p>
+                  </a:txBody>
+                  <a:tcPr anchor="ctr">
+                    <a:solidFill>
+                      <a:srgbClr val="1E40AF"/>
+                    </a:solidFill>
+                  </a:tcPr>
+                </a:tc>
+                <a:tc>
+                  <a:txBody>
+                    <a:bodyPr wrap="square" lIns="73152" rIns="73152"/>
+                    <a:lstStyle/>
+                    <a:p>
+                      <a:pPr algn="ctr">
+                        <a:defRPr b="1" sz="1050">
+                          <a:solidFill>
+                            <a:srgbClr val="FFFFFF"/>
+                          </a:solidFill>
+                        </a:defRPr>
+                      </a:pPr>
+                      <a:r>
+                        <a:t>Bài Học &amp; Định Hướng</a:t>
+                      </a:r>
+                      <a:br/>
+                      <a:r>
+                        <a:t>An Ninh Thực Tế</a:t>
+                      </a:r>
+                    </a:p>
+                  </a:txBody>
+                  <a:tcPr anchor="ctr">
+                    <a:solidFill>
+                      <a:srgbClr val="1E40AF"/>
+                    </a:solidFill>
+                  </a:tcPr>
+                </a:tc>
+              </a:tr>
+              <a:tr h="859536">
+                <a:tc>
+                  <a:txBody>
+                    <a:bodyPr wrap="square" lIns="73152" rIns="73152"/>
+                    <a:lstStyle/>
+                    <a:p>
+                      <a:pPr>
+                        <a:defRPr b="1" sz="1000">
+                          <a:solidFill>
+                            <a:srgbClr val="1E40AF"/>
+                          </a:solidFill>
+                        </a:defRPr>
+                      </a:pPr>
+                      <a:r>
+                        <a:t>1. Bản chất thông tin &amp;</a:t>
+                      </a:r>
+                      <a:br/>
+                      <a:r>
+                        <a:t>Bí mật an toàn (Sec 1–2)</a:t>
+                      </a:r>
+                    </a:p>
+                  </a:txBody>
+                  <a:tcPr anchor="ctr">
+                    <a:solidFill>
+                      <a:srgbClr val="F8FAFC"/>
+                    </a:solidFill>
+                  </a:tcPr>
+                </a:tc>
+                <a:tc>
+                  <a:txBody>
+                    <a:bodyPr wrap="square" lIns="73152" rIns="73152"/>
+                    <a:lstStyle/>
+                    <a:p>
+                      <a:pPr>
+                        <a:defRPr sz="950">
+                          <a:solidFill>
+                            <a:srgbClr val="1E293B"/>
+                          </a:solidFill>
+                        </a:defRPr>
+                      </a:pPr>
+                      <a:r>
+                        <a:t>Coi thông tin là xác suất thống kê; kênh truyền chỉ chịu nhiễu ngẫu nhiên; an toàn tuyệt đối là One-Time Pad.</a:t>
+                      </a:r>
+                    </a:p>
+                  </a:txBody>
+                  <a:tcPr anchor="ctr">
+                    <a:solidFill>
+                      <a:srgbClr val="F8FAFC"/>
+                    </a:solidFill>
+                  </a:tcPr>
+                </a:tc>
+                <a:tc>
+                  <a:txBody>
+                    <a:bodyPr wrap="square" lIns="73152" rIns="73152"/>
+                    <a:lstStyle/>
+                    <a:p>
+                      <a:pPr>
+                        <a:defRPr sz="950">
+                          <a:solidFill>
+                            <a:srgbClr val="1E293B"/>
+                          </a:solidFill>
+                        </a:defRPr>
+                      </a:pPr>
+                      <a:r>
+                        <a:t>Thông tin mang ngữ nghĩa khách quan (Dretske); đối thủ là tác nhân có chủ đích, liên tục tìm cách khai thác.</a:t>
+                      </a:r>
+                    </a:p>
+                  </a:txBody>
+                  <a:tcPr anchor="ctr">
+                    <a:solidFill>
+                      <a:srgbClr val="F8FAFC"/>
+                    </a:solidFill>
+                  </a:tcPr>
+                </a:tc>
+                <a:tc>
+                  <a:txBody>
+                    <a:bodyPr wrap="square" lIns="73152" rIns="73152"/>
+                    <a:lstStyle/>
+                    <a:p>
+                      <a:pPr>
+                        <a:defRPr sz="950">
+                          <a:solidFill>
+                            <a:srgbClr val="1E293B"/>
+                          </a:solidFill>
+                        </a:defRPr>
+                      </a:pPr>
+                      <a:r>
+                        <a:t>Phân định rạch ròi giữa bắt lỗi ngẫu nhiên và an ninh đối kháng; mã tuyến tính (CRC32) không thể thay thế hàm băm phi tuyến (SHA-256).</a:t>
+                      </a:r>
+                    </a:p>
+                  </a:txBody>
+                  <a:tcPr anchor="ctr">
+                    <a:solidFill>
+                      <a:srgbClr val="F8FAFC"/>
+                    </a:solidFill>
+                  </a:tcPr>
+                </a:tc>
+              </a:tr>
+              <a:tr h="859536">
+                <a:tc>
+                  <a:txBody>
+                    <a:bodyPr wrap="square" lIns="73152" rIns="73152"/>
+                    <a:lstStyle/>
+                    <a:p>
+                      <a:pPr>
+                        <a:defRPr b="1" sz="1000">
+                          <a:solidFill>
+                            <a:srgbClr val="1E40AF"/>
+                          </a:solidFill>
+                        </a:defRPr>
+                      </a:pPr>
+                      <a:r>
+                        <a:t>2. Giới hạn của sự</a:t>
+                      </a:r>
+                      <a:br/>
+                      <a:r>
+                        <a:t>hình thức hóa (Sec 5)</a:t>
+                      </a:r>
+                    </a:p>
+                  </a:txBody>
+                  <a:tcPr anchor="ctr">
+                    <a:solidFill>
+                      <a:srgbClr val="FFFFFF"/>
+                    </a:solidFill>
+                  </a:tcPr>
+                </a:tc>
+                <a:tc>
+                  <a:txBody>
+                    <a:bodyPr wrap="square" lIns="73152" rIns="73152"/>
+                    <a:lstStyle/>
+                    <a:p>
+                      <a:pPr>
+                        <a:defRPr sz="950">
+                          <a:solidFill>
+                            <a:srgbClr val="1E293B"/>
+                          </a:solidFill>
+                        </a:defRPr>
+                      </a:pPr>
+                      <a:r>
+                        <a:t>Coi thuật toán mật mã là hộp đen toán học lý tưởng; thời gian và phần cứng thực thi là vô hình.</a:t>
+                      </a:r>
+                    </a:p>
+                  </a:txBody>
+                  <a:tcPr anchor="ctr">
+                    <a:solidFill>
+                      <a:srgbClr val="FFFFFF"/>
+                    </a:solidFill>
+                  </a:tcPr>
+                </a:tc>
+                <a:tc>
+                  <a:txBody>
+                    <a:bodyPr wrap="square" lIns="73152" rIns="73152"/>
+                    <a:lstStyle/>
+                    <a:p>
+                      <a:pPr>
+                        <a:defRPr sz="950">
+                          <a:solidFill>
+                            <a:srgbClr val="1E293B"/>
+                          </a:solidFill>
+                        </a:defRPr>
+                      </a:pPr>
+                      <a:r>
+                        <a:t>Sự trừu tượng hóa làm mật mã học mù quáng trước thế giới vật lý: bỏ qua thời gian CPU, năng lượng, lỗi cài đặt.</a:t>
+                      </a:r>
+                    </a:p>
+                  </a:txBody>
+                  <a:tcPr anchor="ctr">
+                    <a:solidFill>
+                      <a:srgbClr val="FFFFFF"/>
+                    </a:solidFill>
+                  </a:tcPr>
+                </a:tc>
+                <a:tc>
+                  <a:txBody>
+                    <a:bodyPr wrap="square" lIns="73152" rIns="73152"/>
+                    <a:lstStyle/>
+                    <a:p>
+                      <a:pPr>
+                        <a:defRPr sz="950">
+                          <a:solidFill>
+                            <a:srgbClr val="1E293B"/>
+                          </a:solidFill>
+                        </a:defRPr>
+                      </a:pPr>
+                      <a:r>
+                        <a:t>Xây dựng hệ thống an toàn đa tầng; áp dụng hàm so sánh thời gian hằng số (hmac.compare_digest) triệt tiêu rò rỉ kênh kề.</a:t>
+                      </a:r>
+                    </a:p>
+                  </a:txBody>
+                  <a:tcPr anchor="ctr">
+                    <a:solidFill>
+                      <a:srgbClr val="FFFFFF"/>
+                    </a:solidFill>
+                  </a:tcPr>
+                </a:tc>
+              </a:tr>
+              <a:tr h="859536">
+                <a:tc>
+                  <a:txBody>
+                    <a:bodyPr wrap="square" lIns="73152" rIns="73152"/>
+                    <a:lstStyle/>
+                    <a:p>
+                      <a:pPr>
+                        <a:defRPr b="1" sz="1000">
+                          <a:solidFill>
+                            <a:srgbClr val="1E40AF"/>
+                          </a:solidFill>
+                        </a:defRPr>
+                      </a:pPr>
+                      <a:r>
+                        <a:t>3. Đối thủ trong</a:t>
+                      </a:r>
+                      <a:br/>
+                      <a:r>
+                        <a:t>thế giới thực (Sec 6)</a:t>
+                      </a:r>
+                    </a:p>
+                  </a:txBody>
+                  <a:tcPr anchor="ctr">
+                    <a:solidFill>
+                      <a:srgbClr val="F8FAFC"/>
+                    </a:solidFill>
+                  </a:tcPr>
+                </a:tc>
+                <a:tc>
+                  <a:txBody>
+                    <a:bodyPr wrap="square" lIns="73152" rIns="73152"/>
+                    <a:lstStyle/>
+                    <a:p>
+                      <a:pPr>
+                        <a:defRPr sz="950">
+                          <a:solidFill>
+                            <a:srgbClr val="1E293B"/>
+                          </a:solidFill>
+                        </a:defRPr>
+                      </a:pPr>
+                      <a:r>
+                        <a:t>Đối thủ bị giới hạn trong năng lực tính toán đa thức (PPT) hoặc tấn công vào đường truyền (Dolev-Yao).</a:t>
+                      </a:r>
+                    </a:p>
+                  </a:txBody>
+                  <a:tcPr anchor="ctr">
+                    <a:solidFill>
+                      <a:srgbClr val="F8FAFC"/>
+                    </a:solidFill>
+                  </a:tcPr>
+                </a:tc>
+                <a:tc>
+                  <a:txBody>
+                    <a:bodyPr wrap="square" lIns="73152" rIns="73152"/>
+                    <a:lstStyle/>
+                    <a:p>
+                      <a:pPr>
+                        <a:defRPr sz="950">
+                          <a:solidFill>
+                            <a:srgbClr val="1E293B"/>
+                          </a:solidFill>
+                        </a:defRPr>
+                      </a:pPr>
+                      <a:r>
+                        <a:t>Snowden tiết lộ đối thủ thể chế (NSA) có nguồn lực khổng lồ: khai thác siêu dữ liệu, cài cửa sau chuẩn NIST.</a:t>
+                      </a:r>
+                    </a:p>
+                  </a:txBody>
+                  <a:tcPr anchor="ctr">
+                    <a:solidFill>
+                      <a:srgbClr val="F8FAFC"/>
+                    </a:solidFill>
+                  </a:tcPr>
+                </a:tc>
+                <a:tc>
+                  <a:txBody>
+                    <a:bodyPr wrap="square" lIns="73152" rIns="73152"/>
+                    <a:lstStyle/>
+                    <a:p>
+                      <a:pPr>
+                        <a:defRPr sz="950">
+                          <a:solidFill>
+                            <a:srgbClr val="1E293B"/>
+                          </a:solidFill>
+                        </a:defRPr>
+                      </a:pPr>
+                      <a:r>
+                        <a:t>Mở rộng nghiên cứu mật mã chống cửa sau (Cliptography); bảo vệ siêu dữ liệu và cấu trúc dữ liệu minh bạch (RFC 6962).</a:t>
+                      </a:r>
+                    </a:p>
+                  </a:txBody>
+                  <a:tcPr anchor="ctr">
+                    <a:solidFill>
+                      <a:srgbClr val="F8FAFC"/>
+                    </a:solidFill>
+                  </a:tcPr>
+                </a:tc>
+              </a:tr>
+              <a:tr h="859536">
+                <a:tc>
+                  <a:txBody>
+                    <a:bodyPr wrap="square" lIns="73152" rIns="73152"/>
+                    <a:lstStyle/>
+                    <a:p>
+                      <a:pPr>
+                        <a:defRPr b="1" sz="1000">
+                          <a:solidFill>
+                            <a:srgbClr val="1E40AF"/>
+                          </a:solidFill>
+                        </a:defRPr>
+                      </a:pPr>
+                      <a:r>
+                        <a:t>4. Chương trình nghiên cứu</a:t>
+                      </a:r>
+                      <a:br/>
+                      <a:r>
+                        <a:t>tương lai (Sec 7)</a:t>
+                      </a:r>
+                    </a:p>
+                  </a:txBody>
+                  <a:tcPr anchor="ctr">
+                    <a:solidFill>
+                      <a:srgbClr val="FFFFFF"/>
+                    </a:solidFill>
+                  </a:tcPr>
+                </a:tc>
+                <a:tc>
+                  <a:txBody>
+                    <a:bodyPr wrap="square" lIns="73152" rIns="73152"/>
+                    <a:lstStyle/>
+                    <a:p>
+                      <a:pPr>
+                        <a:defRPr sz="950">
+                          <a:solidFill>
+                            <a:srgbClr val="1E293B"/>
+                          </a:solidFill>
+                        </a:defRPr>
+                      </a:pPr>
+                      <a:r>
+                        <a:t>Mật mã học là phân nhánh độc lập thuần túy của toán học rời rạc và khoa học máy tính lý thuyết.</a:t>
+                      </a:r>
+                    </a:p>
+                  </a:txBody>
+                  <a:tcPr anchor="ctr">
+                    <a:solidFill>
+                      <a:srgbClr val="FFFFFF"/>
+                    </a:solidFill>
+                  </a:tcPr>
+                </a:tc>
+                <a:tc>
+                  <a:txBody>
+                    <a:bodyPr wrap="square" lIns="73152" rIns="73152"/>
+                    <a:lstStyle/>
+                    <a:p>
+                      <a:pPr>
+                        <a:defRPr sz="950">
+                          <a:solidFill>
+                            <a:srgbClr val="1E293B"/>
+                          </a:solidFill>
+                        </a:defRPr>
+                      </a:pPr>
+                      <a:r>
+                        <a:t>Đặt ra 4 câu hỏi mở: tích hợp phương pháp liên ngành, dùng thống kê lượng hóa đối thủ, mô hình hóa hệ thống phức hợp.</a:t>
+                      </a:r>
+                    </a:p>
+                  </a:txBody>
+                  <a:tcPr anchor="ctr">
+                    <a:solidFill>
+                      <a:srgbClr val="FFFFFF"/>
+                    </a:solidFill>
+                  </a:tcPr>
+                </a:tc>
+                <a:tc>
+                  <a:txBody>
+                    <a:bodyPr wrap="square" lIns="73152" rIns="73152"/>
+                    <a:lstStyle/>
+                    <a:p>
+                      <a:pPr>
+                        <a:defRPr sz="950">
+                          <a:solidFill>
+                            <a:srgbClr val="1E293B"/>
+                          </a:solidFill>
+                        </a:defRPr>
+                      </a:pPr>
+                      <a:r>
+                        <a:t>Kết hợp toán học với triết học nhận thức và dữ liệu thực nghiệm để xây dựng một khoa học an ninh hoàn chỉnh.</a:t>
+                      </a:r>
+                    </a:p>
+                  </a:txBody>
+                  <a:tcPr anchor="ctr">
+                    <a:solidFill>
+                      <a:srgbClr val="FFFFFF"/>
+                    </a:solidFill>
+                  </a:tcPr>
+                </a:tc>
+              </a:tr>
+            </a:tbl>
+          </a:graphicData>
+        </a:graphic>
+      </p:graphicFrame>
+      <p:sp>
+        <p:nvSpPr>
+          <p:cNvPr id="7" name="TextBox 6"/>
+          <p:cNvSpPr txBox="1"/>
+          <p:nvPr/>
+        </p:nvSpPr>
+        <p:spPr>
+          <a:xfrm>
+            <a:off x="731520" y="6217920"/>
+            <a:ext cx="10698480" cy="365760"/>
+          </a:xfrm>
+          <a:prstGeom prst="rect">
+            <a:avLst/>
+          </a:prstGeom>
+          <a:noFill/>
+        </p:spPr>
+        <p:txBody>
+          <a:bodyPr wrap="none">
+            <a:spAutoFit/>
+          </a:bodyPr>
+          <a:lstStyle/>
+          <a:p>
+            <a:pPr>
+              <a:defRPr sz="950" i="1">
+                <a:solidFill>
+                  <a:srgbClr val="64748B"/>
+                </a:solidFill>
+              </a:defRPr>
+            </a:pPr>
+            <a:r>
+              <a:t>Tài liệu tham khảo chính: Halpin (2025), Shannon (1949), Goldwasser-Micali (1984), Dolev-Yao (1983), Kocher (1996), RFC 6962.</a:t>
             </a:r>
           </a:p>
         </p:txBody>
@@ -4669,768 +4583,6 @@
 </file>
 
 <file path=ppt/slides/slide13.xml><?xml version="1.0" encoding="utf-8"?>
-<p:sld xmlns:a="http://schemas.openxmlformats.org/drawingml/2006/main" xmlns:p="http://schemas.openxmlformats.org/presentationml/2006/main" xmlns:r="http://schemas.openxmlformats.org/officeDocument/2006/relationships">
-  <p:cSld>
-    <p:spTree>
-      <p:nvGrpSpPr>
-        <p:cNvPr id="1" name=""/>
-        <p:cNvGrpSpPr/>
-        <p:nvPr/>
-      </p:nvGrpSpPr>
-      <p:grpSpPr/>
-      <p:sp>
-        <p:nvSpPr>
-          <p:cNvPr id="2" name="Rectangle 1"/>
-          <p:cNvSpPr/>
-          <p:nvPr/>
-        </p:nvSpPr>
-        <p:spPr>
-          <a:xfrm>
-            <a:off x="0" y="0"/>
-            <a:ext cx="12191695" cy="6858000"/>
-          </a:xfrm>
-          <a:prstGeom prst="rect">
-            <a:avLst/>
-          </a:prstGeom>
-          <a:solidFill>
-            <a:srgbClr val="FFFFFF"/>
-          </a:solidFill>
-          <a:ln>
-            <a:noFill/>
-          </a:ln>
-        </p:spPr>
-        <p:style>
-          <a:lnRef idx="1">
-            <a:schemeClr val="accent1"/>
-          </a:lnRef>
-          <a:fillRef idx="3">
-            <a:schemeClr val="accent1"/>
-          </a:fillRef>
-          <a:effectRef idx="2">
-            <a:schemeClr val="accent1"/>
-          </a:effectRef>
-          <a:fontRef idx="minor">
-            <a:schemeClr val="lt1"/>
-          </a:fontRef>
-        </p:style>
-        <p:txBody>
-          <a:bodyPr rtlCol="0" anchor="ctr"/>
-          <a:lstStyle/>
-          <a:p>
-            <a:pPr algn="ctr"/>
-          </a:p>
-        </p:txBody>
-      </p:sp>
-      <p:sp>
-        <p:nvSpPr>
-          <p:cNvPr id="3" name="Rounded Rectangle 2"/>
-          <p:cNvSpPr/>
-          <p:nvPr/>
-        </p:nvSpPr>
-        <p:spPr>
-          <a:xfrm>
-            <a:off x="731520" y="365760"/>
-            <a:ext cx="4114800" cy="320040"/>
-          </a:xfrm>
-          <a:prstGeom prst="roundRect">
-            <a:avLst/>
-          </a:prstGeom>
-          <a:solidFill>
-            <a:srgbClr val="EFF6FF"/>
-          </a:solidFill>
-          <a:ln w="12700">
-            <a:solidFill>
-              <a:srgbClr val="BFDBFE"/>
-            </a:solidFill>
-          </a:ln>
-        </p:spPr>
-        <p:style>
-          <a:lnRef idx="1">
-            <a:schemeClr val="accent1"/>
-          </a:lnRef>
-          <a:fillRef idx="3">
-            <a:schemeClr val="accent1"/>
-          </a:fillRef>
-          <a:effectRef idx="2">
-            <a:schemeClr val="accent1"/>
-          </a:effectRef>
-          <a:fontRef idx="minor">
-            <a:schemeClr val="lt1"/>
-          </a:fontRef>
-        </p:style>
-        <p:txBody>
-          <a:bodyPr rtlCol="0" anchor="ctr" wrap="square"/>
-          <a:lstStyle/>
-          <a:p>
-            <a:pPr algn="ctr">
-              <a:defRPr sz="1000" b="1">
-                <a:solidFill>
-                  <a:srgbClr val="1D4ED8"/>
-                </a:solidFill>
-              </a:defRPr>
-            </a:pPr>
-            <a:r>
-              <a:t>SƠ ĐỒ 5: KIẾN TRÚC DIỄN TẬP ĐỐI KHÁNG (DEMO ARCHITECTURE)</a:t>
-            </a:r>
-          </a:p>
-        </p:txBody>
-      </p:sp>
-      <p:sp>
-        <p:nvSpPr>
-          <p:cNvPr id="4" name="TextBox 3"/>
-          <p:cNvSpPr txBox="1"/>
-          <p:nvPr/>
-        </p:nvSpPr>
-        <p:spPr>
-          <a:xfrm>
-            <a:off x="731520" y="749808"/>
-            <a:ext cx="10698480" cy="502920"/>
-          </a:xfrm>
-          <a:prstGeom prst="rect">
-            <a:avLst/>
-          </a:prstGeom>
-          <a:noFill/>
-        </p:spPr>
-        <p:txBody>
-          <a:bodyPr wrap="square" lIns="0" rIns="0" tIns="0" bIns="0">
-            <a:spAutoFit/>
-          </a:bodyPr>
-          <a:lstStyle/>
-          <a:p>
-            <a:pPr>
-              <a:defRPr sz="2100" b="1">
-                <a:solidFill>
-                  <a:srgbClr val="0F172A"/>
-                </a:solidFill>
-              </a:defRPr>
-            </a:pPr>
-            <a:r>
-              <a:t>KIẾN TRÚC DIỄN TẬP ĐỐI KHÁNG: RED TEAM VS BLUE TEAM</a:t>
-            </a:r>
-          </a:p>
-        </p:txBody>
-      </p:sp>
-      <p:sp>
-        <p:nvSpPr>
-          <p:cNvPr id="5" name="TextBox 4"/>
-          <p:cNvSpPr txBox="1"/>
-          <p:nvPr/>
-        </p:nvSpPr>
-        <p:spPr>
-          <a:xfrm>
-            <a:off x="731520" y="1261872"/>
-            <a:ext cx="10698480" cy="320040"/>
-          </a:xfrm>
-          <a:prstGeom prst="rect">
-            <a:avLst/>
-          </a:prstGeom>
-          <a:noFill/>
-        </p:spPr>
-        <p:txBody>
-          <a:bodyPr wrap="square" lIns="0" rIns="0" tIns="0" bIns="0">
-            <a:spAutoFit/>
-          </a:bodyPr>
-          <a:lstStyle/>
-          <a:p>
-            <a:pPr>
-              <a:defRPr sz="1200">
-                <a:solidFill>
-                  <a:srgbClr val="475569"/>
-                </a:solidFill>
-              </a:defRPr>
-            </a:pPr>
-            <a:r>
-              <a:t>Mô hình đối kháng thực tế 2 màn hình trên tập dữ liệu kaggle_dataset (2.485 tệp tin / ~112,81 MiB theo benchmark)</a:t>
-            </a:r>
-          </a:p>
-        </p:txBody>
-      </p:sp>
-      <p:pic>
-        <p:nvPicPr>
-          <p:cNvPr id="6" name="Picture 5" descr="Slide14.drawio.png"/>
-          <p:cNvPicPr>
-            <a:picLocks noChangeAspect="1"/>
-          </p:cNvPicPr>
-          <p:nvPr/>
-        </p:nvPicPr>
-        <p:blipFill>
-          <a:blip r:embed="rId2"/>
-          <a:stretch>
-            <a:fillRect/>
-          </a:stretch>
-        </p:blipFill>
-        <p:spPr>
-          <a:xfrm>
-            <a:off x="1386687" y="1664208"/>
-            <a:ext cx="9418320" cy="4425696"/>
-          </a:xfrm>
-          <a:prstGeom prst="rect">
-            <a:avLst/>
-          </a:prstGeom>
-        </p:spPr>
-      </p:pic>
-      <p:sp>
-        <p:nvSpPr>
-          <p:cNvPr id="7" name="TextBox 6"/>
-          <p:cNvSpPr txBox="1"/>
-          <p:nvPr/>
-        </p:nvSpPr>
-        <p:spPr>
-          <a:xfrm>
-            <a:off x="731520" y="6217920"/>
-            <a:ext cx="10698480" cy="365760"/>
-          </a:xfrm>
-          <a:prstGeom prst="rect">
-            <a:avLst/>
-          </a:prstGeom>
-          <a:noFill/>
-        </p:spPr>
-        <p:txBody>
-          <a:bodyPr wrap="none">
-            <a:spAutoFit/>
-          </a:bodyPr>
-          <a:lstStyle/>
-          <a:p>
-            <a:pPr>
-              <a:defRPr sz="1000" i="1">
-                <a:solidFill>
-                  <a:srgbClr val="64748B"/>
-                </a:solidFill>
-              </a:defRPr>
-            </a:pPr>
-            <a:r>
-              <a:t>Sơ đồ kiến trúc diễn tập đối kháng độc lập do sinh viên thiết kế minh họa các khái niệm an ninh.</a:t>
-            </a:r>
-          </a:p>
-        </p:txBody>
-      </p:sp>
-    </p:spTree>
-  </p:cSld>
-  <p:clrMapOvr>
-    <a:masterClrMapping/>
-  </p:clrMapOvr>
-</p:sld>
-</file>
-
-<file path=ppt/slides/slide14.xml><?xml version="1.0" encoding="utf-8"?>
-<p:sld xmlns:a="http://schemas.openxmlformats.org/drawingml/2006/main" xmlns:p="http://schemas.openxmlformats.org/presentationml/2006/main" xmlns:r="http://schemas.openxmlformats.org/officeDocument/2006/relationships">
-  <p:cSld>
-    <p:spTree>
-      <p:nvGrpSpPr>
-        <p:cNvPr id="1" name=""/>
-        <p:cNvGrpSpPr/>
-        <p:nvPr/>
-      </p:nvGrpSpPr>
-      <p:grpSpPr/>
-      <p:sp>
-        <p:nvSpPr>
-          <p:cNvPr id="2" name="Rectangle 1"/>
-          <p:cNvSpPr/>
-          <p:nvPr/>
-        </p:nvSpPr>
-        <p:spPr>
-          <a:xfrm>
-            <a:off x="0" y="0"/>
-            <a:ext cx="12191695" cy="6858000"/>
-          </a:xfrm>
-          <a:prstGeom prst="rect">
-            <a:avLst/>
-          </a:prstGeom>
-          <a:solidFill>
-            <a:srgbClr val="FFFFFF"/>
-          </a:solidFill>
-          <a:ln>
-            <a:noFill/>
-          </a:ln>
-        </p:spPr>
-        <p:style>
-          <a:lnRef idx="1">
-            <a:schemeClr val="accent1"/>
-          </a:lnRef>
-          <a:fillRef idx="3">
-            <a:schemeClr val="accent1"/>
-          </a:fillRef>
-          <a:effectRef idx="2">
-            <a:schemeClr val="accent1"/>
-          </a:effectRef>
-          <a:fontRef idx="minor">
-            <a:schemeClr val="lt1"/>
-          </a:fontRef>
-        </p:style>
-        <p:txBody>
-          <a:bodyPr rtlCol="0" anchor="ctr"/>
-          <a:lstStyle/>
-          <a:p>
-            <a:pPr algn="ctr"/>
-          </a:p>
-        </p:txBody>
-      </p:sp>
-      <p:sp>
-        <p:nvSpPr>
-          <p:cNvPr id="3" name="Rounded Rectangle 2"/>
-          <p:cNvSpPr/>
-          <p:nvPr/>
-        </p:nvSpPr>
-        <p:spPr>
-          <a:xfrm>
-            <a:off x="731520" y="365760"/>
-            <a:ext cx="4114800" cy="320040"/>
-          </a:xfrm>
-          <a:prstGeom prst="roundRect">
-            <a:avLst/>
-          </a:prstGeom>
-          <a:solidFill>
-            <a:srgbClr val="EFF6FF"/>
-          </a:solidFill>
-          <a:ln w="12700">
-            <a:solidFill>
-              <a:srgbClr val="BFDBFE"/>
-            </a:solidFill>
-          </a:ln>
-        </p:spPr>
-        <p:style>
-          <a:lnRef idx="1">
-            <a:schemeClr val="accent1"/>
-          </a:lnRef>
-          <a:fillRef idx="3">
-            <a:schemeClr val="accent1"/>
-          </a:fillRef>
-          <a:effectRef idx="2">
-            <a:schemeClr val="accent1"/>
-          </a:effectRef>
-          <a:fontRef idx="minor">
-            <a:schemeClr val="lt1"/>
-          </a:fontRef>
-        </p:style>
-        <p:txBody>
-          <a:bodyPr rtlCol="0" anchor="ctr" wrap="square"/>
-          <a:lstStyle/>
-          <a:p>
-            <a:pPr algn="ctr">
-              <a:defRPr sz="1000" b="1">
-                <a:solidFill>
-                  <a:srgbClr val="1D4ED8"/>
-                </a:solidFill>
-              </a:defRPr>
-            </a:pPr>
-            <a:r>
-              <a:t>SECTION 7 — KẾT LUẬN &amp; THÔNG ĐIỆP HỌC THUẬT</a:t>
-            </a:r>
-          </a:p>
-        </p:txBody>
-      </p:sp>
-      <p:sp>
-        <p:nvSpPr>
-          <p:cNvPr id="4" name="TextBox 3"/>
-          <p:cNvSpPr txBox="1"/>
-          <p:nvPr/>
-        </p:nvSpPr>
-        <p:spPr>
-          <a:xfrm>
-            <a:off x="731520" y="749808"/>
-            <a:ext cx="10698480" cy="502920"/>
-          </a:xfrm>
-          <a:prstGeom prst="rect">
-            <a:avLst/>
-          </a:prstGeom>
-          <a:noFill/>
-        </p:spPr>
-        <p:txBody>
-          <a:bodyPr wrap="square" lIns="0" rIns="0" tIns="0" bIns="0">
-            <a:spAutoFit/>
-          </a:bodyPr>
-          <a:lstStyle/>
-          <a:p>
-            <a:pPr>
-              <a:defRPr sz="2100" b="1">
-                <a:solidFill>
-                  <a:srgbClr val="0F172A"/>
-                </a:solidFill>
-              </a:defRPr>
-            </a:pPr>
-            <a:r>
-              <a:t>TỔNG KẾT BÁO CÁO GIỮA KỲ &amp; ĐỊNH HƯỚNG NGHIÊN CỨU</a:t>
-            </a:r>
-          </a:p>
-        </p:txBody>
-      </p:sp>
-      <p:sp>
-        <p:nvSpPr>
-          <p:cNvPr id="5" name="TextBox 4"/>
-          <p:cNvSpPr txBox="1"/>
-          <p:nvPr/>
-        </p:nvSpPr>
-        <p:spPr>
-          <a:xfrm>
-            <a:off x="731520" y="1261872"/>
-            <a:ext cx="10698480" cy="320040"/>
-          </a:xfrm>
-          <a:prstGeom prst="rect">
-            <a:avLst/>
-          </a:prstGeom>
-          <a:noFill/>
-        </p:spPr>
-        <p:txBody>
-          <a:bodyPr wrap="square" lIns="0" rIns="0" tIns="0" bIns="0">
-            <a:spAutoFit/>
-          </a:bodyPr>
-          <a:lstStyle/>
-          <a:p>
-            <a:pPr>
-              <a:defRPr sz="1200">
-                <a:solidFill>
-                  <a:srgbClr val="475569"/>
-                </a:solidFill>
-              </a:defRPr>
-            </a:pPr>
-            <a:r>
-              <a:t>Tổng kết các đóng góp lý thuyết của Halpin và định hướng nghiên cứu tiếp theo</a:t>
-            </a:r>
-          </a:p>
-        </p:txBody>
-      </p:sp>
-      <p:sp>
-        <p:nvSpPr>
-          <p:cNvPr id="6" name="Rounded Rectangle 5"/>
-          <p:cNvSpPr/>
-          <p:nvPr/>
-        </p:nvSpPr>
-        <p:spPr>
-          <a:xfrm>
-            <a:off x="731520" y="1691640"/>
-            <a:ext cx="5212080" cy="4206240"/>
-          </a:xfrm>
-          <a:prstGeom prst="roundRect">
-            <a:avLst/>
-          </a:prstGeom>
-          <a:solidFill>
-            <a:srgbClr val="F8FAFC"/>
-          </a:solidFill>
-          <a:ln>
-            <a:solidFill>
-              <a:srgbClr val="BFDBFE"/>
-            </a:solidFill>
-          </a:ln>
-        </p:spPr>
-        <p:style>
-          <a:lnRef idx="1">
-            <a:schemeClr val="accent1"/>
-          </a:lnRef>
-          <a:fillRef idx="3">
-            <a:schemeClr val="accent1"/>
-          </a:fillRef>
-          <a:effectRef idx="2">
-            <a:schemeClr val="accent1"/>
-          </a:effectRef>
-          <a:fontRef idx="minor">
-            <a:schemeClr val="lt1"/>
-          </a:fontRef>
-        </p:style>
-        <p:txBody>
-          <a:bodyPr rtlCol="0" anchor="ctr"/>
-          <a:lstStyle/>
-          <a:p>
-            <a:pPr algn="ctr"/>
-          </a:p>
-        </p:txBody>
-      </p:sp>
-      <p:sp>
-        <p:nvSpPr>
-          <p:cNvPr id="7" name="TextBox 6"/>
-          <p:cNvSpPr txBox="1"/>
-          <p:nvPr/>
-        </p:nvSpPr>
-        <p:spPr>
-          <a:xfrm>
-            <a:off x="914400" y="1828800"/>
-            <a:ext cx="4846320" cy="3931920"/>
-          </a:xfrm>
-          <a:prstGeom prst="rect">
-            <a:avLst/>
-          </a:prstGeom>
-          <a:noFill/>
-        </p:spPr>
-        <p:txBody>
-          <a:bodyPr wrap="square">
-            <a:spAutoFit/>
-          </a:bodyPr>
-          <a:lstStyle/>
-          <a:p>
-            <a:pPr>
-              <a:defRPr sz="1300" b="1">
-                <a:solidFill>
-                  <a:srgbClr val="1E40AF"/>
-                </a:solidFill>
-              </a:defRPr>
-            </a:pPr>
-            <a:r>
-              <a:t>1. Thông Điệp Học Thuật Cốt Lõi (Harry Halpin 2025)</a:t>
-            </a:r>
-          </a:p>
-          <a:p>
-            <a:pPr>
-              <a:spcBef>
-                <a:spcPts val="800"/>
-              </a:spcBef>
-            </a:pPr>
-            <a:r>
-              <a:rPr b="1" sz="1100">
-                <a:solidFill>
-                  <a:srgbClr val="1E293B"/>
-                </a:solidFill>
-              </a:rPr>
-              <a:t>• Vượt qua sự trừu tượng hóa: </a:t>
-            </a:r>
-            <a:r>
-              <a:rPr sz="1050">
-                <a:solidFill>
-                  <a:srgbClr val="475569"/>
-                </a:solidFill>
-              </a:rPr>
-              <a:t>Mật mã học không chỉ là toán học thuần túy trên giấy tờ. Các hệ thống an toàn trong thế giới thực phải nhận thức rõ khoảng cách giữa mô hình lý tưởng và thực tế vật lý (kênh kề, siêu dữ liệu, chuỗi cung ứng, áp lực thể chế).</a:t>
-            </a:r>
-          </a:p>
-          <a:p>
-            <a:pPr>
-              <a:spcBef>
-                <a:spcPts val="800"/>
-              </a:spcBef>
-            </a:pPr>
-            <a:r>
-              <a:rPr b="1" sz="1100">
-                <a:solidFill>
-                  <a:srgbClr val="1E293B"/>
-                </a:solidFill>
-              </a:rPr>
-              <a:t>• Bản chất của đối thủ: </a:t>
-            </a:r>
-            <a:r>
-              <a:rPr sz="1050">
-                <a:solidFill>
-                  <a:srgbClr val="475569"/>
-                </a:solidFill>
-              </a:rPr>
-              <a:t>Đối thủ không phải là 'nhiễu ngẫu nhiên' mà là tác nhân có chủ đích, liên tục tìm kiếm các kênh rò rỉ bị mô hình toán học bỏ qua.</a:t>
-            </a:r>
-          </a:p>
-          <a:p>
-            <a:pPr>
-              <a:spcBef>
-                <a:spcPts val="800"/>
-              </a:spcBef>
-            </a:pPr>
-            <a:r>
-              <a:rPr b="1" sz="1100">
-                <a:solidFill>
-                  <a:srgbClr val="1E293B"/>
-                </a:solidFill>
-              </a:rPr>
-              <a:t>• Chương trình nghiên cứu mở: </a:t>
-            </a:r>
-            <a:r>
-              <a:rPr sz="1050">
-                <a:solidFill>
-                  <a:srgbClr val="475569"/>
-                </a:solidFill>
-              </a:rPr>
-              <a:t>Halpin đặt nền móng triết học và vạch ra 4 câu hỏi nghiên cứu liên ngành nhằm mở rộng mật mã học thành một khoa học an ninh hoàn chỉnh.</a:t>
-            </a:r>
-          </a:p>
-        </p:txBody>
-      </p:sp>
-      <p:sp>
-        <p:nvSpPr>
-          <p:cNvPr id="8" name="Rounded Rectangle 7"/>
-          <p:cNvSpPr/>
-          <p:nvPr/>
-        </p:nvSpPr>
-        <p:spPr>
-          <a:xfrm>
-            <a:off x="6217920" y="1691640"/>
-            <a:ext cx="5212080" cy="4206240"/>
-          </a:xfrm>
-          <a:prstGeom prst="roundRect">
-            <a:avLst/>
-          </a:prstGeom>
-          <a:solidFill>
-            <a:srgbClr val="ECFDF5"/>
-          </a:solidFill>
-          <a:ln>
-            <a:solidFill>
-              <a:srgbClr val="A7F3D0"/>
-            </a:solidFill>
-          </a:ln>
-        </p:spPr>
-        <p:style>
-          <a:lnRef idx="1">
-            <a:schemeClr val="accent1"/>
-          </a:lnRef>
-          <a:fillRef idx="3">
-            <a:schemeClr val="accent1"/>
-          </a:fillRef>
-          <a:effectRef idx="2">
-            <a:schemeClr val="accent1"/>
-          </a:effectRef>
-          <a:fontRef idx="minor">
-            <a:schemeClr val="lt1"/>
-          </a:fontRef>
-        </p:style>
-        <p:txBody>
-          <a:bodyPr rtlCol="0" anchor="ctr"/>
-          <a:lstStyle/>
-          <a:p>
-            <a:pPr algn="ctr"/>
-          </a:p>
-        </p:txBody>
-      </p:sp>
-      <p:sp>
-        <p:nvSpPr>
-          <p:cNvPr id="9" name="TextBox 8"/>
-          <p:cNvSpPr txBox="1"/>
-          <p:nvPr/>
-        </p:nvSpPr>
-        <p:spPr>
-          <a:xfrm>
-            <a:off x="6400800" y="1828800"/>
-            <a:ext cx="4846320" cy="3931920"/>
-          </a:xfrm>
-          <a:prstGeom prst="rect">
-            <a:avLst/>
-          </a:prstGeom>
-          <a:noFill/>
-        </p:spPr>
-        <p:txBody>
-          <a:bodyPr wrap="square">
-            <a:spAutoFit/>
-          </a:bodyPr>
-          <a:lstStyle/>
-          <a:p>
-            <a:pPr>
-              <a:defRPr sz="1300" b="1">
-                <a:solidFill>
-                  <a:srgbClr val="059669"/>
-                </a:solidFill>
-              </a:defRPr>
-            </a:pPr>
-            <a:r>
-              <a:t>2. Hoàn Thành Giữa Kỳ &amp; Lộ Trình Cuối Kỳ (Nhóm DT005)</a:t>
-            </a:r>
-          </a:p>
-          <a:p>
-            <a:pPr>
-              <a:spcBef>
-                <a:spcPts val="800"/>
-              </a:spcBef>
-            </a:pPr>
-            <a:r>
-              <a:rPr b="1" sz="1100">
-                <a:solidFill>
-                  <a:srgbClr val="1E293B"/>
-                </a:solidFill>
-              </a:rPr>
-              <a:t>• Nghiệm thu tiến độ giữa kỳ: </a:t>
-            </a:r>
-            <a:r>
-              <a:rPr sz="1050">
-                <a:solidFill>
-                  <a:srgbClr val="475569"/>
-                </a:solidFill>
-              </a:rPr>
-              <a:t>Hoàn thành thẩm định học thuật sâu sắc toàn văn bài báo gốc (17 trang PDF), phân tích đầy đủ 7 mục nội dung và làm rõ khoảng cách giữa lý thuyết trừu tượng với an ninh thực tế.</a:t>
-            </a:r>
-          </a:p>
-          <a:p>
-            <a:pPr>
-              <a:spcBef>
-                <a:spcPts val="800"/>
-              </a:spcBef>
-            </a:pPr>
-            <a:r>
-              <a:rPr b="1" sz="1100">
-                <a:solidFill>
-                  <a:srgbClr val="1E293B"/>
-                </a:solidFill>
-              </a:rPr>
-              <a:t>• Minh bạch phương pháp luận: </a:t>
-            </a:r>
-            <a:r>
-              <a:rPr sz="1050">
-                <a:solidFill>
-                  <a:srgbClr val="475569"/>
-                </a:solidFill>
-              </a:rPr>
-              <a:t>Không ngụy tạo số liệu tác giả; phân định rõ ràng giữa công trình khảo cứu triết học của Halpin và các kịch bản thực nghiệm minh họa độc lập do sinh viên tự xây dựng.</a:t>
-            </a:r>
-          </a:p>
-          <a:p>
-            <a:pPr>
-              <a:spcBef>
-                <a:spcPts val="800"/>
-              </a:spcBef>
-            </a:pPr>
-            <a:r>
-              <a:rPr b="1" sz="1100">
-                <a:solidFill>
-                  <a:srgbClr val="1E293B"/>
-                </a:solidFill>
-              </a:rPr>
-              <a:t>• Định hướng nghiên cứu cuối kỳ: </a:t>
-            </a:r>
-            <a:r>
-              <a:rPr sz="1050">
-                <a:solidFill>
-                  <a:srgbClr val="475569"/>
-                </a:solidFill>
-              </a:rPr>
-              <a:t>Tiếp tục nghiên cứu và hoàn thiện mô hình cấu trúc cây phân cấp tối ưu cho bài toán kiểm tra toàn vẹn dữ liệu, tiến hành đo đạc và đánh giá thực nghiệm toàn diện.</a:t>
-            </a:r>
-          </a:p>
-        </p:txBody>
-      </p:sp>
-      <p:sp>
-        <p:nvSpPr>
-          <p:cNvPr id="10" name="TextBox 9"/>
-          <p:cNvSpPr txBox="1"/>
-          <p:nvPr/>
-        </p:nvSpPr>
-        <p:spPr>
-          <a:xfrm>
-            <a:off x="731520" y="6035040"/>
-            <a:ext cx="10698480" cy="502920"/>
-          </a:xfrm>
-          <a:prstGeom prst="rect">
-            <a:avLst/>
-          </a:prstGeom>
-          <a:noFill/>
-        </p:spPr>
-        <p:txBody>
-          <a:bodyPr wrap="none">
-            <a:spAutoFit/>
-          </a:bodyPr>
-          <a:lstStyle/>
-          <a:p>
-            <a:pPr>
-              <a:defRPr sz="950" i="1">
-                <a:solidFill>
-                  <a:srgbClr val="64748B"/>
-                </a:solidFill>
-              </a:defRPr>
-            </a:pPr>
-            <a:r>
-              <a:t>Tài liệu tham khảo chính: Halpin (2025), Shannon (1949), Goldwasser-Micali (1984), Dolev-Yao (1983), Kocher (1996), RFC 6962.</a:t>
-            </a:r>
-          </a:p>
-        </p:txBody>
-      </p:sp>
-    </p:spTree>
-  </p:cSld>
-  <p:clrMapOvr>
-    <a:masterClrMapping/>
-  </p:clrMapOvr>
-</p:sld>
-</file>
-
-<file path=ppt/slides/slide15.xml><?xml version="1.0" encoding="utf-8"?>
 <p:sld xmlns:a="http://schemas.openxmlformats.org/drawingml/2006/main" xmlns:p="http://schemas.openxmlformats.org/presentationml/2006/main" xmlns:r="http://schemas.openxmlformats.org/officeDocument/2006/relationships">
   <p:cSld>
     <p:spTree>

--- a/docs/Bao_Cao_Giua_Ky_DT05_Final.pptx
+++ b/docs/Bao_Cao_Giua_Ky_DT05_Final.pptx
@@ -4184,7 +4184,7 @@
                         </a:defRPr>
                       </a:pPr>
                       <a:r>
-                        <a:t>Coi thông tin là xác suất thống kê; kênh truyền chỉ chịu nhiễu ngẫu nhiên; an toàn tuyệt đối là One-Time Pad.</a:t>
+                        <a:t>Thông tin là xác suất thống kê; giả định kênh chỉ có nhiễu ngẫu nhiên.</a:t>
                       </a:r>
                     </a:p>
                   </a:txBody>
@@ -4207,7 +4207,7 @@
                         </a:defRPr>
                       </a:pPr>
                       <a:r>
-                        <a:t>Thông tin mang ngữ nghĩa khách quan (Dretske); đối thủ là tác nhân có chủ đích, liên tục tìm cách khai thác.</a:t>
+                        <a:t>Thông tin có ngữ nghĩa khách quan (Dretske); đối thủ là tác nhân có chủ đích.</a:t>
                       </a:r>
                     </a:p>
                   </a:txBody>
@@ -4230,7 +4230,7 @@
                         </a:defRPr>
                       </a:pPr>
                       <a:r>
-                        <a:t>Phân định rạch ròi giữa bắt lỗi ngẫu nhiên và an ninh đối kháng; mã tuyến tính (CRC32) không thể thay thế hàm băm phi tuyến (SHA-256).</a:t>
+                        <a:t>Mã tuyến tính (CRC32) chỉ bắt nhiễu; an ninh đối kháng cần hàm băm phi tuyến (SHA-256).</a:t>
                       </a:r>
                     </a:p>
                   </a:txBody>
@@ -4282,7 +4282,7 @@
                         </a:defRPr>
                       </a:pPr>
                       <a:r>
-                        <a:t>Coi thuật toán mật mã là hộp đen toán học lý tưởng; thời gian và phần cứng thực thi là vô hình.</a:t>
+                        <a:t>Coi mật mã là hộp đen toán học lý tưởng; coi thời gian thực thi là vô hình.</a:t>
                       </a:r>
                     </a:p>
                   </a:txBody>
@@ -4305,7 +4305,7 @@
                         </a:defRPr>
                       </a:pPr>
                       <a:r>
-                        <a:t>Sự trừu tượng hóa làm mật mã học mù quáng trước thế giới vật lý: bỏ qua thời gian CPU, năng lượng, lỗi cài đặt.</a:t>
+                        <a:t>Điểm mù vật lý: bỏ qua thời gian CPU, năng lượng, kiến trúc bộ nhớ cache.</a:t>
                       </a:r>
                     </a:p>
                   </a:txBody>
@@ -4328,7 +4328,7 @@
                         </a:defRPr>
                       </a:pPr>
                       <a:r>
-                        <a:t>Xây dựng hệ thống an toàn đa tầng; áp dụng hàm so sánh thời gian hằng số (hmac.compare_digest) triệt tiêu rò rỉ kênh kề.</a:t>
+                        <a:t>Phòng thủ đa tầng; dùng hàm thời gian hằng số (hmac.compare_digest) triệt tiêu kênh kề.</a:t>
                       </a:r>
                     </a:p>
                   </a:txBody>
@@ -4380,7 +4380,7 @@
                         </a:defRPr>
                       </a:pPr>
                       <a:r>
-                        <a:t>Đối thủ bị giới hạn trong năng lực tính toán đa thức (PPT) hoặc tấn công vào đường truyền (Dolev-Yao).</a:t>
+                        <a:t>Đối thủ bị giới hạn toán học (PPT) hoặc tấn công kênh truyền sạch (Dolev-Yao).</a:t>
                       </a:r>
                     </a:p>
                   </a:txBody>
@@ -4403,7 +4403,7 @@
                         </a:defRPr>
                       </a:pPr>
                       <a:r>
-                        <a:t>Snowden tiết lộ đối thủ thể chế (NSA) có nguồn lực khổng lồ: khai thác siêu dữ liệu, cài cửa sau chuẩn NIST.</a:t>
+                        <a:t>Đối thủ thể chế (NSA): khai thác siêu dữ liệu, cài cửa sau chuẩn NIST (Dual_EC).</a:t>
                       </a:r>
                     </a:p>
                   </a:txBody>
@@ -4426,7 +4426,7 @@
                         </a:defRPr>
                       </a:pPr>
                       <a:r>
-                        <a:t>Mở rộng nghiên cứu mật mã chống cửa sau (Cliptography); bảo vệ siêu dữ liệu và cấu trúc dữ liệu minh bạch (RFC 6962).</a:t>
+                        <a:t>Nghiên cứu mật mã chống cửa sau (Cliptography) và phân tách miền (RFC 6962).</a:t>
                       </a:r>
                     </a:p>
                   </a:txBody>
@@ -4478,7 +4478,7 @@
                         </a:defRPr>
                       </a:pPr>
                       <a:r>
-                        <a:t>Mật mã học là phân nhánh độc lập thuần túy của toán học rời rạc và khoa học máy tính lý thuyết.</a:t>
+                        <a:t>Mật mã học chỉ là phân nhánh của toán học rời rạc và lý thuyết tính toán.</a:t>
                       </a:r>
                     </a:p>
                   </a:txBody>
@@ -4501,7 +4501,7 @@
                         </a:defRPr>
                       </a:pPr>
                       <a:r>
-                        <a:t>Đặt ra 4 câu hỏi mở: tích hợp phương pháp liên ngành, dùng thống kê lượng hóa đối thủ, mô hình hóa hệ thống phức hợp.</a:t>
+                        <a:t>4 câu hỏi mở: dùng thống kê lượng hóa đối thủ, mô hình hóa mạng xã hội động.</a:t>
                       </a:r>
                     </a:p>
                   </a:txBody>
@@ -4524,7 +4524,7 @@
                         </a:defRPr>
                       </a:pPr>
                       <a:r>
-                        <a:t>Kết hợp toán học với triết học nhận thức và dữ liệu thực nghiệm để xây dựng một khoa học an ninh hoàn chỉnh.</a:t>
+                        <a:t>Kết hợp toán học, triết học nhận thức và dữ liệu thực nghiệm thành khoa học an ninh.</a:t>
                       </a:r>
                     </a:p>
                   </a:txBody>
